--- a/presentation/week1-review.pptx
+++ b/presentation/week1-review.pptx
@@ -15,14 +15,6 @@
     <p:sldId id="263" r:id="rId15"/>
     <p:sldId id="264" r:id="rId16"/>
     <p:sldId id="265" r:id="rId17"/>
-    <p:sldId id="266" r:id="rId18"/>
-    <p:sldId id="267" r:id="rId19"/>
-    <p:sldId id="268" r:id="rId20"/>
-    <p:sldId id="269" r:id="rId21"/>
-    <p:sldId id="270" r:id="rId22"/>
-    <p:sldId id="271" r:id="rId23"/>
-    <p:sldId id="272" r:id="rId24"/>
-    <p:sldId id="273" r:id="rId25"/>
   </p:sldIdLst>
   <p:sldSz cx="12191695" cy="6858000" type="screen4x3"/>
   <p:notesSz cx="6858000" cy="9144000"/>
@@ -519,39 +511,45 @@
           <a:lstStyle/>
           <a:p>
             <a:r>
-              <a:t>Keep this short. One sentence on what the project is, then move.</a:t>
+              <a:t>Opening line, roughly:</a:t>
             </a:r>
           </a:p>
           <a:p/>
           <a:p>
             <a:r>
-              <a:t>"Week 1 was about the two stages that come before anything clever happens:</a:t>
-            </a:r>
-          </a:p>
-          <a:p>
-            <a:r>
-              <a:t>turning text into numbers, and deciding how to cut documents up. I have working</a:t>
-            </a:r>
-          </a:p>
-          <a:p>
-            <a:r>
-              <a:t>code for both, and three results that changed how I plan to build weeks 2 and 3."</a:t>
+              <a:t>"Week 1 was the groundwork - turning text into numbers, and cutting documents</a:t>
+            </a:r>
+          </a:p>
+          <a:p>
+            <a:r>
+              <a:t>into pieces. Both are working. I also found three things that changed how I plan</a:t>
+            </a:r>
+          </a:p>
+          <a:p>
+            <a:r>
+              <a:t>to build weeks 2 and 3."</a:t>
             </a:r>
           </a:p>
           <a:p/>
           <a:p>
             <a:r>
-              <a:t>Then say what is NOT done, up front, so it doesn't look like you're hiding it:</a:t>
-            </a:r>
-          </a:p>
-          <a:p>
-            <a:r>
-              <a:t>the test dataset and three written explanations. Volunteering that early buys</a:t>
-            </a:r>
-          </a:p>
-          <a:p>
-            <a:r>
-              <a:t>credibility for everything after it.</a:t>
+              <a:t>Then be upfront: "Four things are still outstanding, all mine to finish, and</a:t>
+            </a:r>
+          </a:p>
+          <a:p>
+            <a:r>
+              <a:t>they're on the last slide."</a:t>
+            </a:r>
+          </a:p>
+          <a:p/>
+          <a:p>
+            <a:r>
+              <a:t>Saying that at the start rather than the end makes everything in between more</a:t>
+            </a:r>
+          </a:p>
+          <a:p>
+            <a:r>
+              <a:t>credible.</a:t>
             </a:r>
           </a:p>
         </p:txBody>
@@ -621,891 +619,55 @@
           <a:lstStyle/>
           <a:p>
             <a:r>
-              <a:t>Three things to point at, then move on. Don't read the table.</a:t>
+              <a:t>Present this plainly, no softening.</a:t>
             </a:r>
           </a:p>
           <a:p/>
           <a:p>
             <a:r>
-              <a:t>One: at zero overlap, characters in equals characters out exactly - 55,598 both</a:t>
-            </a:r>
-          </a:p>
-          <a:p>
-            <a:r>
-              <a:t>sides. That's a sanity check that the splitter neither loses nor invents text.</a:t>
+              <a:t>Be honest about the test set: all my measurements so far ran against this</a:t>
+            </a:r>
+          </a:p>
+          <a:p>
+            <a:r>
+              <a:t>project's own documentation, because my notes folder is still empty. The numbers</a:t>
+            </a:r>
+          </a:p>
+          <a:p>
+            <a:r>
+              <a:t>are real but they describe the wrong documents. I need to re-run everything on my</a:t>
+            </a:r>
+          </a:p>
+          <a:p>
+            <a:r>
+              <a:t>own notes, and the README has to describe the set I actually ship.</a:t>
             </a:r>
           </a:p>
           <a:p/>
           <a:p>
             <a:r>
-              <a:t>Two: 20% overlap consistently costs about 1.26x storage. A quarter of what I</a:t>
-            </a:r>
-          </a:p>
-          <a:p>
-            <a:r>
-              <a:t>embed is a duplicate of something already stored.</a:t>
+              <a:t>The three explanations are: what an embedding is, why splitting documents</a:t>
+            </a:r>
+          </a:p>
+          <a:p>
+            <a:r>
+              <a:t>matters, and what semantic search means in plain language.</a:t>
             </a:r>
           </a:p>
           <a:p/>
           <a:p>
             <a:r>
-              <a:t>Three: the min column at 500/0 is 23 characters. That's a leftover file tail</a:t>
-            </a:r>
-          </a:p>
-          <a:p>
-            <a:r>
-              <a:t>carrying almost no meaning. If my notes include lots of short files I'll get lots</a:t>
-            </a:r>
-          </a:p>
-          <a:p>
-            <a:r>
-              <a:t>of near-useless tail chunks - something to watch for when I swap in the real</a:t>
-            </a:r>
-          </a:p>
-          <a:p>
-            <a:r>
-              <a:t>dataset.</a:t>
-            </a:r>
-          </a:p>
-        </p:txBody>
-      </p:sp>
-      <p:sp>
-        <p:nvSpPr>
-          <p:cNvPr id="4" name="Slide Number Placeholder 3"/>
-          <p:cNvSpPr>
-            <a:spLocks noGrp="1"/>
-          </p:cNvSpPr>
-          <p:nvPr>
-            <p:ph type="sldNum" idx="5" sz="quarter"/>
-          </p:nvPr>
-        </p:nvSpPr>
-        <p:spPr/>
-      </p:sp>
-    </p:spTree>
-  </p:cSld>
-  <p:clrMapOvr>
-    <a:masterClrMapping/>
-  </p:clrMapOvr>
-</p:notes>
-</file>
-
-<file path=ppt/notesSlides/notesSlide11.xml><?xml version="1.0" encoding="utf-8"?>
-<p:notes xmlns:a="http://schemas.openxmlformats.org/drawingml/2006/main" xmlns:p="http://schemas.openxmlformats.org/presentationml/2006/main" xmlns:r="http://schemas.openxmlformats.org/officeDocument/2006/relationships">
-  <p:cSld>
-    <p:spTree>
-      <p:nvGrpSpPr>
-        <p:cNvPr id="1" name=""/>
-        <p:cNvGrpSpPr/>
-        <p:nvPr/>
-      </p:nvGrpSpPr>
-      <p:grpSpPr>
-        <a:xfrm>
-          <a:off x="0" y="0"/>
-          <a:ext cx="0" cy="0"/>
-          <a:chOff x="0" y="0"/>
-          <a:chExt cx="0" cy="0"/>
-        </a:xfrm>
-      </p:grpSpPr>
-      <p:sp>
-        <p:nvSpPr>
-          <p:cNvPr id="2" name="Slide Image Placeholder 1"/>
-          <p:cNvSpPr>
-            <a:spLocks noGrp="1"/>
-          </p:cNvSpPr>
-          <p:nvPr>
-            <p:ph type="sldImg" idx="2"/>
-          </p:nvPr>
-        </p:nvSpPr>
-        <p:spPr/>
-      </p:sp>
-      <p:sp>
-        <p:nvSpPr>
-          <p:cNvPr id="3" name="Notes Placeholder 2"/>
-          <p:cNvSpPr>
-            <a:spLocks noGrp="1"/>
-          </p:cNvSpPr>
-          <p:nvPr>
-            <p:ph type="body" idx="3" sz="quarter"/>
-          </p:nvPr>
-        </p:nvSpPr>
-        <p:spPr/>
-        <p:txBody>
-          <a:bodyPr/>
-          <a:lstStyle/>
-          <a:p>
-            <a:r>
-              <a:t>This is the answer to his self-check question "can I explain why chunk size</a:t>
-            </a:r>
-          </a:p>
-          <a:p>
-            <a:r>
-              <a:t>affects the quality of retrieved context". Say the tradeoff out loud: precision</a:t>
-            </a:r>
-          </a:p>
-          <a:p>
-            <a:r>
-              <a:t>versus context.</a:t>
-            </a:r>
-          </a:p>
-          <a:p/>
-          <a:p>
-            <a:r>
-              <a:t>Say "provisional" deliberately. 500/100 is defensible from the evidence I have -</a:t>
-            </a:r>
-          </a:p>
-          <a:p>
-            <a:r>
-              <a:t>it held a complete thought without swallowing an unrelated table, and 100 of</a:t>
-            </a:r>
-          </a:p>
-          <a:p>
-            <a:r>
-              <a:t>overlap rescued the planted fact. But retrieval quality against real questions is</a:t>
-            </a:r>
-          </a:p>
-          <a:p>
-            <a:r>
-              <a:t>the only test that matters, and that's next week. Every number I have so far is a</a:t>
-            </a:r>
-          </a:p>
-          <a:p>
-            <a:r>
-              <a:t>proxy.</a:t>
-            </a:r>
-          </a:p>
-        </p:txBody>
-      </p:sp>
-      <p:sp>
-        <p:nvSpPr>
-          <p:cNvPr id="4" name="Slide Number Placeholder 3"/>
-          <p:cNvSpPr>
-            <a:spLocks noGrp="1"/>
-          </p:cNvSpPr>
-          <p:nvPr>
-            <p:ph type="sldNum" idx="5" sz="quarter"/>
-          </p:nvPr>
-        </p:nvSpPr>
-        <p:spPr/>
-      </p:sp>
-    </p:spTree>
-  </p:cSld>
-  <p:clrMapOvr>
-    <a:masterClrMapping/>
-  </p:clrMapOvr>
-</p:notes>
-</file>
-
-<file path=ppt/notesSlides/notesSlide12.xml><?xml version="1.0" encoding="utf-8"?>
-<p:notes xmlns:a="http://schemas.openxmlformats.org/drawingml/2006/main" xmlns:p="http://schemas.openxmlformats.org/presentationml/2006/main" xmlns:r="http://schemas.openxmlformats.org/officeDocument/2006/relationships">
-  <p:cSld>
-    <p:spTree>
-      <p:nvGrpSpPr>
-        <p:cNvPr id="1" name=""/>
-        <p:cNvGrpSpPr/>
-        <p:nvPr/>
-      </p:nvGrpSpPr>
-      <p:grpSpPr>
-        <a:xfrm>
-          <a:off x="0" y="0"/>
-          <a:ext cx="0" cy="0"/>
-          <a:chOff x="0" y="0"/>
-          <a:chExt cx="0" cy="0"/>
-        </a:xfrm>
-      </p:grpSpPr>
-      <p:sp>
-        <p:nvSpPr>
-          <p:cNvPr id="2" name="Slide Image Placeholder 1"/>
-          <p:cNvSpPr>
-            <a:spLocks noGrp="1"/>
-          </p:cNvSpPr>
-          <p:nvPr>
-            <p:ph type="sldImg" idx="2"/>
-          </p:nvPr>
-        </p:nvSpPr>
-        <p:spPr/>
-      </p:sp>
-      <p:sp>
-        <p:nvSpPr>
-          <p:cNvPr id="3" name="Notes Placeholder 2"/>
-          <p:cNvSpPr>
-            <a:spLocks noGrp="1"/>
-          </p:cNvSpPr>
-          <p:nvPr>
-            <p:ph type="body" idx="3" sz="quarter"/>
-          </p:nvPr>
-        </p:nvSpPr>
-        <p:spPr/>
-        <p:txBody>
-          <a:bodyPr/>
-          <a:lstStyle/>
-          <a:p>
-            <a:r>
-              <a:t>The point of Friday is not the code, it's what the code taught you. Set that up</a:t>
-            </a:r>
-          </a:p>
-          <a:p>
-            <a:r>
-              <a:t>here and deliver it on the next slide.</a:t>
-            </a:r>
-          </a:p>
-          <a:p/>
-          <a:p>
-            <a:r>
-              <a:t>Worth mentioning: my first version timed question-embedding and store-scanning</a:t>
-            </a:r>
-          </a:p>
-          <a:p>
-            <a:r>
-              <a:t>together and divided by chunk count. Embedding is a fixed cost - 65% of the total</a:t>
-            </a:r>
-          </a:p>
-          <a:p>
-            <a:r>
-              <a:t>at this size - so that inflated the per-comparison figure about 3x and made my</a:t>
-            </a:r>
-          </a:p>
-          <a:p>
-            <a:r>
-              <a:t>scaling projection wrong. Mixing a fixed cost into a per-item measurement makes</a:t>
-            </a:r>
-          </a:p>
-          <a:p>
-            <a:r>
-              <a:t>small corpora look slow and large ones look fast.</a:t>
-            </a:r>
-          </a:p>
-        </p:txBody>
-      </p:sp>
-      <p:sp>
-        <p:nvSpPr>
-          <p:cNvPr id="4" name="Slide Number Placeholder 3"/>
-          <p:cNvSpPr>
-            <a:spLocks noGrp="1"/>
-          </p:cNvSpPr>
-          <p:nvPr>
-            <p:ph type="sldNum" idx="5" sz="quarter"/>
-          </p:nvPr>
-        </p:nvSpPr>
-        <p:spPr/>
-      </p:sp>
-    </p:spTree>
-  </p:cSld>
-  <p:clrMapOvr>
-    <a:masterClrMapping/>
-  </p:clrMapOvr>
-</p:notes>
-</file>
-
-<file path=ppt/notesSlides/notesSlide13.xml><?xml version="1.0" encoding="utf-8"?>
-<p:notes xmlns:a="http://schemas.openxmlformats.org/drawingml/2006/main" xmlns:p="http://schemas.openxmlformats.org/presentationml/2006/main" xmlns:r="http://schemas.openxmlformats.org/officeDocument/2006/relationships">
-  <p:cSld>
-    <p:spTree>
-      <p:nvGrpSpPr>
-        <p:cNvPr id="1" name=""/>
-        <p:cNvGrpSpPr/>
-        <p:nvPr/>
-      </p:nvGrpSpPr>
-      <p:grpSpPr>
-        <a:xfrm>
-          <a:off x="0" y="0"/>
-          <a:ext cx="0" cy="0"/>
-          <a:chOff x="0" y="0"/>
-          <a:chExt cx="0" cy="0"/>
-        </a:xfrm>
-      </p:grpSpPr>
-      <p:sp>
-        <p:nvSpPr>
-          <p:cNvPr id="2" name="Slide Image Placeholder 1"/>
-          <p:cNvSpPr>
-            <a:spLocks noGrp="1"/>
-          </p:cNvSpPr>
-          <p:nvPr>
-            <p:ph type="sldImg" idx="2"/>
-          </p:nvPr>
-        </p:nvSpPr>
-        <p:spPr/>
-      </p:sp>
-      <p:sp>
-        <p:nvSpPr>
-          <p:cNvPr id="3" name="Notes Placeholder 2"/>
-          <p:cNvSpPr>
-            <a:spLocks noGrp="1"/>
-          </p:cNvSpPr>
-          <p:nvPr>
-            <p:ph type="body" idx="3" sz="quarter"/>
-          </p:nvPr>
-        </p:nvSpPr>
-        <p:spPr/>
-        <p:txBody>
-          <a:bodyPr/>
-          <a:lstStyle/>
-          <a:p>
-            <a:r>
-              <a:t>This is your answer to "do I understand how a vector database finds similar</a:t>
-            </a:r>
-          </a:p>
-          <a:p>
-            <a:r>
-              <a:t>chunks". Most people answer that question by naming HNSW. Answering it by saying</a:t>
-            </a:r>
-          </a:p>
-          <a:p>
-            <a:r>
-              <a:t>the database is less accurate than a brute-force scan shows you actually</a:t>
-            </a:r>
-          </a:p>
-          <a:p>
-            <a:r>
-              <a:t>understand the mechanism.</a:t>
-            </a:r>
-          </a:p>
-          <a:p/>
-          <a:p>
-            <a:r>
-              <a:t>At 155 chunks the loop is instant and Chroma would be pure overhead. I'm adopting</a:t>
-            </a:r>
-          </a:p>
-          <a:p>
-            <a:r>
-              <a:t>it next week because the brief asks for it and because persistence across restarts</a:t>
-            </a:r>
-          </a:p>
-          <a:p>
-            <a:r>
-              <a:t>is genuinely useful - not because my search was too slow.</a:t>
-            </a:r>
-          </a:p>
-        </p:txBody>
-      </p:sp>
-      <p:sp>
-        <p:nvSpPr>
-          <p:cNvPr id="4" name="Slide Number Placeholder 3"/>
-          <p:cNvSpPr>
-            <a:spLocks noGrp="1"/>
-          </p:cNvSpPr>
-          <p:nvPr>
-            <p:ph type="sldNum" idx="5" sz="quarter"/>
-          </p:nvPr>
-        </p:nvSpPr>
-        <p:spPr/>
-      </p:sp>
-    </p:spTree>
-  </p:cSld>
-  <p:clrMapOvr>
-    <a:masterClrMapping/>
-  </p:clrMapOvr>
-</p:notes>
-</file>
-
-<file path=ppt/notesSlides/notesSlide14.xml><?xml version="1.0" encoding="utf-8"?>
-<p:notes xmlns:a="http://schemas.openxmlformats.org/drawingml/2006/main" xmlns:p="http://schemas.openxmlformats.org/presentationml/2006/main" xmlns:r="http://schemas.openxmlformats.org/officeDocument/2006/relationships">
-  <p:cSld>
-    <p:spTree>
-      <p:nvGrpSpPr>
-        <p:cNvPr id="1" name=""/>
-        <p:cNvGrpSpPr/>
-        <p:nvPr/>
-      </p:nvGrpSpPr>
-      <p:grpSpPr>
-        <a:xfrm>
-          <a:off x="0" y="0"/>
-          <a:ext cx="0" cy="0"/>
-          <a:chOff x="0" y="0"/>
-          <a:chExt cx="0" cy="0"/>
-        </a:xfrm>
-      </p:grpSpPr>
-      <p:sp>
-        <p:nvSpPr>
-          <p:cNvPr id="2" name="Slide Image Placeholder 1"/>
-          <p:cNvSpPr>
-            <a:spLocks noGrp="1"/>
-          </p:cNvSpPr>
-          <p:nvPr>
-            <p:ph type="sldImg" idx="2"/>
-          </p:nvPr>
-        </p:nvSpPr>
-        <p:spPr/>
-      </p:sp>
-      <p:sp>
-        <p:nvSpPr>
-          <p:cNvPr id="3" name="Notes Placeholder 2"/>
-          <p:cNvSpPr>
-            <a:spLocks noGrp="1"/>
-          </p:cNvSpPr>
-          <p:nvPr>
-            <p:ph type="body" idx="3" sz="quarter"/>
-          </p:nvPr>
-        </p:nvSpPr>
-        <p:spPr/>
-        <p:txBody>
-          <a:bodyPr/>
-          <a:lstStyle/>
-          <a:p>
-            <a:r>
-              <a:t>This is the most useful thing I found all week, and it directly answers his</a:t>
-            </a:r>
-          </a:p>
-          <a:p>
-            <a:r>
-              <a:t>self-check item about handling a question with no good answer.</a:t>
-            </a:r>
-          </a:p>
-          <a:p/>
-          <a:p>
-            <a:r>
-              <a:t>The scan still returned three chunks. A linear scan always returns its top-k -</a:t>
-            </a:r>
-          </a:p>
-          <a:p>
-            <a:r>
-              <a:t>there is no such thing as "no result".</a:t>
-            </a:r>
-          </a:p>
-          <a:p/>
-          <a:p>
-            <a:r>
-              <a:t>The top hit scored 0.34 because the question says Sundays and that chunk contains</a:t>
-            </a:r>
-          </a:p>
-          <a:p>
-            <a:r>
-              <a:t>Sun Oct 4. The model is doing its job: those really are related in meaning. It has</a:t>
-            </a:r>
-          </a:p>
-          <a:p>
-            <a:r>
-              <a:t>no concept of whether the relation answers the question.</a:t>
-            </a:r>
-          </a:p>
-          <a:p/>
-          <a:p>
-            <a:r>
-              <a:t>Then the conclusion: a score floor does separate good from bad here, but by only</a:t>
-            </a:r>
-          </a:p>
-          <a:p>
-            <a:r>
-              <a:t>0.027. With a few hundred chunks, something is always somewhat close to anything.</a:t>
-            </a:r>
-          </a:p>
-          <a:p>
-            <a:r>
-              <a:t>So a floor is necessary but not sufficient - the prompt in week 3 has to give the</a:t>
-            </a:r>
-          </a:p>
-          <a:p>
-            <a:r>
-              <a:t>model permission to refuse. Two independent defences, because neither is reliable</a:t>
-            </a:r>
-          </a:p>
-          <a:p>
-            <a:r>
-              <a:t>alone.</a:t>
-            </a:r>
-          </a:p>
-        </p:txBody>
-      </p:sp>
-      <p:sp>
-        <p:nvSpPr>
-          <p:cNvPr id="4" name="Slide Number Placeholder 3"/>
-          <p:cNvSpPr>
-            <a:spLocks noGrp="1"/>
-          </p:cNvSpPr>
-          <p:nvPr>
-            <p:ph type="sldNum" idx="5" sz="quarter"/>
-          </p:nvPr>
-        </p:nvSpPr>
-        <p:spPr/>
-      </p:sp>
-    </p:spTree>
-  </p:cSld>
-  <p:clrMapOvr>
-    <a:masterClrMapping/>
-  </p:clrMapOvr>
-</p:notes>
-</file>
-
-<file path=ppt/notesSlides/notesSlide15.xml><?xml version="1.0" encoding="utf-8"?>
-<p:notes xmlns:a="http://schemas.openxmlformats.org/drawingml/2006/main" xmlns:p="http://schemas.openxmlformats.org/presentationml/2006/main" xmlns:r="http://schemas.openxmlformats.org/officeDocument/2006/relationships">
-  <p:cSld>
-    <p:spTree>
-      <p:nvGrpSpPr>
-        <p:cNvPr id="1" name=""/>
-        <p:cNvGrpSpPr/>
-        <p:nvPr/>
-      </p:nvGrpSpPr>
-      <p:grpSpPr>
-        <a:xfrm>
-          <a:off x="0" y="0"/>
-          <a:ext cx="0" cy="0"/>
-          <a:chOff x="0" y="0"/>
-          <a:chExt cx="0" cy="0"/>
-        </a:xfrm>
-      </p:grpSpPr>
-      <p:sp>
-        <p:nvSpPr>
-          <p:cNvPr id="2" name="Slide Image Placeholder 1"/>
-          <p:cNvSpPr>
-            <a:spLocks noGrp="1"/>
-          </p:cNvSpPr>
-          <p:nvPr>
-            <p:ph type="sldImg" idx="2"/>
-          </p:nvPr>
-        </p:nvSpPr>
-        <p:spPr/>
-      </p:sp>
-      <p:sp>
-        <p:nvSpPr>
-          <p:cNvPr id="3" name="Notes Placeholder 2"/>
-          <p:cNvSpPr>
-            <a:spLocks noGrp="1"/>
-          </p:cNvSpPr>
-          <p:nvPr>
-            <p:ph type="body" idx="3" sz="quarter"/>
-          </p:nvPr>
-        </p:nvSpPr>
-        <p:spPr/>
-        <p:txBody>
-          <a:bodyPr/>
-          <a:lstStyle/>
-          <a:p>
-            <a:r>
-              <a:t>The tied scores are the detail worth pointing out. It's not that keyword search</a:t>
-            </a:r>
-          </a:p>
-          <a:p>
-            <a:r>
-              <a:t>ranked badly - it couldn't rank at all. Three chunks, identical score, arbitrary</a:t>
-            </a:r>
-          </a:p>
-          <a:p>
-            <a:r>
-              <a:t>order.</a:t>
-            </a:r>
-          </a:p>
-          <a:p/>
-          <a:p>
-            <a:r>
-              <a:t>Include the honest limit. If you claim semantic search "won" and he asks you to</a:t>
-            </a:r>
-          </a:p>
-          <a:p>
-            <a:r>
-              <a:t>justify it from these three results, you can't - the corpus is specification</a:t>
-            </a:r>
-          </a:p>
-          <a:p>
-            <a:r>
-              <a:t>boilerplate, not notes. Saying so first is stronger than being caught out.</a:t>
-            </a:r>
-          </a:p>
-        </p:txBody>
-      </p:sp>
-      <p:sp>
-        <p:nvSpPr>
-          <p:cNvPr id="4" name="Slide Number Placeholder 3"/>
-          <p:cNvSpPr>
-            <a:spLocks noGrp="1"/>
-          </p:cNvSpPr>
-          <p:nvPr>
-            <p:ph type="sldNum" idx="5" sz="quarter"/>
-          </p:nvPr>
-        </p:nvSpPr>
-        <p:spPr/>
-      </p:sp>
-    </p:spTree>
-  </p:cSld>
-  <p:clrMapOvr>
-    <a:masterClrMapping/>
-  </p:clrMapOvr>
-</p:notes>
-</file>
-
-<file path=ppt/notesSlides/notesSlide16.xml><?xml version="1.0" encoding="utf-8"?>
-<p:notes xmlns:a="http://schemas.openxmlformats.org/drawingml/2006/main" xmlns:p="http://schemas.openxmlformats.org/presentationml/2006/main" xmlns:r="http://schemas.openxmlformats.org/officeDocument/2006/relationships">
-  <p:cSld>
-    <p:spTree>
-      <p:nvGrpSpPr>
-        <p:cNvPr id="1" name=""/>
-        <p:cNvGrpSpPr/>
-        <p:nvPr/>
-      </p:nvGrpSpPr>
-      <p:grpSpPr>
-        <a:xfrm>
-          <a:off x="0" y="0"/>
-          <a:ext cx="0" cy="0"/>
-          <a:chOff x="0" y="0"/>
-          <a:chExt cx="0" cy="0"/>
-        </a:xfrm>
-      </p:grpSpPr>
-      <p:sp>
-        <p:nvSpPr>
-          <p:cNvPr id="2" name="Slide Image Placeholder 1"/>
-          <p:cNvSpPr>
-            <a:spLocks noGrp="1"/>
-          </p:cNvSpPr>
-          <p:nvPr>
-            <p:ph type="sldImg" idx="2"/>
-          </p:nvPr>
-        </p:nvSpPr>
-        <p:spPr/>
-      </p:sp>
-      <p:sp>
-        <p:nvSpPr>
-          <p:cNvPr id="3" name="Notes Placeholder 2"/>
-          <p:cNvSpPr>
-            <a:spLocks noGrp="1"/>
-          </p:cNvSpPr>
-          <p:nvPr>
-            <p:ph type="body" idx="3" sz="quarter"/>
-          </p:nvPr>
-        </p:nvSpPr>
-        <p:spPr/>
-        <p:txBody>
-          <a:bodyPr/>
-          <a:lstStyle/>
-          <a:p>
-            <a:r>
-              <a:t>Include this slide. It's evidence you ran the code against awkward input rather</a:t>
-            </a:r>
-          </a:p>
-          <a:p>
-            <a:r>
-              <a:t>than only the happy path, and mentors trust a presenter who volunteers their own</a:t>
-            </a:r>
-          </a:p>
-          <a:p>
-            <a:r>
-              <a:t>bugs.</a:t>
-            </a:r>
-          </a:p>
-          <a:p/>
-          <a:p>
-            <a:r>
-              <a:t>The UTF-8 one has a nice moral: the logic was right and the display was wrong,</a:t>
-            </a:r>
-          </a:p>
-          <a:p>
-            <a:r>
-              <a:t>which is a category of bug I'd not have found without real documents containing</a:t>
-            </a:r>
-          </a:p>
-          <a:p>
-            <a:r>
-              <a:t>real punctuation.</a:t>
-            </a:r>
-          </a:p>
-        </p:txBody>
-      </p:sp>
-      <p:sp>
-        <p:nvSpPr>
-          <p:cNvPr id="4" name="Slide Number Placeholder 3"/>
-          <p:cNvSpPr>
-            <a:spLocks noGrp="1"/>
-          </p:cNvSpPr>
-          <p:nvPr>
-            <p:ph type="sldNum" idx="5" sz="quarter"/>
-          </p:nvPr>
-        </p:nvSpPr>
-        <p:spPr/>
-      </p:sp>
-    </p:spTree>
-  </p:cSld>
-  <p:clrMapOvr>
-    <a:masterClrMapping/>
-  </p:clrMapOvr>
-</p:notes>
-</file>
-
-<file path=ppt/notesSlides/notesSlide17.xml><?xml version="1.0" encoding="utf-8"?>
-<p:notes xmlns:a="http://schemas.openxmlformats.org/drawingml/2006/main" xmlns:p="http://schemas.openxmlformats.org/presentationml/2006/main" xmlns:r="http://schemas.openxmlformats.org/officeDocument/2006/relationships">
-  <p:cSld>
-    <p:spTree>
-      <p:nvGrpSpPr>
-        <p:cNvPr id="1" name=""/>
-        <p:cNvGrpSpPr/>
-        <p:nvPr/>
-      </p:nvGrpSpPr>
-      <p:grpSpPr>
-        <a:xfrm>
-          <a:off x="0" y="0"/>
-          <a:ext cx="0" cy="0"/>
-          <a:chOff x="0" y="0"/>
-          <a:chExt cx="0" cy="0"/>
-        </a:xfrm>
-      </p:grpSpPr>
-      <p:sp>
-        <p:nvSpPr>
-          <p:cNvPr id="2" name="Slide Image Placeholder 1"/>
-          <p:cNvSpPr>
-            <a:spLocks noGrp="1"/>
-          </p:cNvSpPr>
-          <p:nvPr>
-            <p:ph type="sldImg" idx="2"/>
-          </p:nvPr>
-        </p:nvSpPr>
-        <p:spPr/>
-      </p:sp>
-      <p:sp>
-        <p:nvSpPr>
-          <p:cNvPr id="3" name="Notes Placeholder 2"/>
-          <p:cNvSpPr>
-            <a:spLocks noGrp="1"/>
-          </p:cNvSpPr>
-          <p:nvPr>
-            <p:ph type="body" idx="3" sz="quarter"/>
-          </p:nvPr>
-        </p:nvSpPr>
-        <p:spPr/>
-        <p:txBody>
-          <a:bodyPr/>
-          <a:lstStyle/>
-          <a:p>
-            <a:r>
-              <a:t>Do not soften this. Present it plainly.</a:t>
-            </a:r>
-          </a:p>
-          <a:p/>
-          <a:p>
-            <a:r>
-              <a:t>The dataset is the real blocker: every number in this deck describes an interim</a:t>
-            </a:r>
-          </a:p>
-          <a:p>
-            <a:r>
-              <a:t>corpus of the project's own documentation, used because sample-notes was still</a:t>
-            </a:r>
-          </a:p>
-          <a:p>
-            <a:r>
-              <a:t>empty. The sweep has to be re-run on the notes I actually ship, and the README has</a:t>
-            </a:r>
-          </a:p>
-          <a:p>
-            <a:r>
-              <a:t>to describe that dataset.</a:t>
-            </a:r>
-          </a:p>
-          <a:p/>
-          <a:p>
-            <a:r>
-              <a:t>One honest detail if he asks why I used that stand-in: it's a poor benchmark</a:t>
-            </a:r>
-          </a:p>
-          <a:p>
-            <a:r>
-              <a:t>beyond being the wrong data, because it's self-modifying - editing the project</a:t>
-            </a:r>
-          </a:p>
-          <a:p>
-            <a:r>
-              <a:t>docs changes the thing being measured. An earlier run reported 53,852 characters</a:t>
-            </a:r>
-          </a:p>
-          <a:p>
-            <a:r>
-              <a:t>and 149 chunks; after I edited three files the same command reported 55,598 and</a:t>
-            </a:r>
-          </a:p>
-          <a:p>
-            <a:r>
-              <a:t>155. Chunk counts are a property of the corpus, not the settings.</a:t>
-            </a:r>
-          </a:p>
-        </p:txBody>
-      </p:sp>
-      <p:sp>
-        <p:nvSpPr>
-          <p:cNvPr id="4" name="Slide Number Placeholder 3"/>
-          <p:cNvSpPr>
-            <a:spLocks noGrp="1"/>
-          </p:cNvSpPr>
-          <p:nvPr>
-            <p:ph type="sldNum" idx="5" sz="quarter"/>
-          </p:nvPr>
-        </p:nvSpPr>
-        <p:spPr/>
-      </p:sp>
-    </p:spTree>
-  </p:cSld>
-  <p:clrMapOvr>
-    <a:masterClrMapping/>
-  </p:clrMapOvr>
-</p:notes>
-</file>
-
-<file path=ppt/notesSlides/notesSlide18.xml><?xml version="1.0" encoding="utf-8"?>
-<p:notes xmlns:a="http://schemas.openxmlformats.org/drawingml/2006/main" xmlns:p="http://schemas.openxmlformats.org/presentationml/2006/main" xmlns:r="http://schemas.openxmlformats.org/officeDocument/2006/relationships">
-  <p:cSld>
-    <p:spTree>
-      <p:nvGrpSpPr>
-        <p:cNvPr id="1" name=""/>
-        <p:cNvGrpSpPr/>
-        <p:nvPr/>
-      </p:nvGrpSpPr>
-      <p:grpSpPr>
-        <a:xfrm>
-          <a:off x="0" y="0"/>
-          <a:ext cx="0" cy="0"/>
-          <a:chOff x="0" y="0"/>
-          <a:chExt cx="0" cy="0"/>
-        </a:xfrm>
-      </p:grpSpPr>
-      <p:sp>
-        <p:nvSpPr>
-          <p:cNvPr id="2" name="Slide Image Placeholder 1"/>
-          <p:cNvSpPr>
-            <a:spLocks noGrp="1"/>
-          </p:cNvSpPr>
-          <p:nvPr>
-            <p:ph type="sldImg" idx="2"/>
-          </p:nvPr>
-        </p:nvSpPr>
-        <p:spPr/>
-      </p:sp>
-      <p:sp>
-        <p:nvSpPr>
-          <p:cNvPr id="3" name="Notes Placeholder 2"/>
-          <p:cNvSpPr>
-            <a:spLocks noGrp="1"/>
-          </p:cNvSpPr>
-          <p:nvPr>
-            <p:ph type="body" idx="3" sz="quarter"/>
-          </p:nvPr>
-        </p:nvSpPr>
-        <p:spPr/>
-        <p:txBody>
-          <a:bodyPr/>
-          <a:lstStyle/>
-          <a:p>
-            <a:r>
-              <a:t>End by handing him the two decisions. It's a short, concrete ask and it makes the</a:t>
-            </a:r>
-          </a:p>
-          <a:p>
-            <a:r>
-              <a:t>meeting useful rather than just a status report.</a:t>
-            </a:r>
-          </a:p>
-          <a:p/>
-          <a:p>
-            <a:r>
-              <a:t>If he asks what you'd cut: top-k tuning beyond a single 3-vs-10 comparison, and</a:t>
-            </a:r>
-          </a:p>
-          <a:p>
-            <a:r>
-              <a:t>the Chroma-versus-Pinecone write-up. What I would not cut is citations, the</a:t>
-            </a:r>
-          </a:p>
-          <a:p>
-            <a:r>
-              <a:t>no-answer handling, or the demo video - those are the parts that show the pipeline</a:t>
-            </a:r>
-          </a:p>
-          <a:p>
-            <a:r>
-              <a:t>works end to end.</a:t>
+              <a:t>Close by handing him the decision from slide 3. "So the one thing I need from you</a:t>
+            </a:r>
+          </a:p>
+          <a:p>
+            <a:r>
+              <a:t>is the deadline - 4 October or 11 October?" That makes the meeting useful rather</a:t>
+            </a:r>
+          </a:p>
+          <a:p>
+            <a:r>
+              <a:t>than just a status report.</a:t>
             </a:r>
           </a:p>
         </p:txBody>
@@ -1575,28 +737,23 @@
           <a:lstStyle/>
           <a:p>
             <a:r>
-              <a:t>The "no framework" point matters to your mentor - it's in his brief. Say it</a:t>
-            </a:r>
-          </a:p>
-          <a:p>
-            <a:r>
-              <a:t>explicitly.</a:t>
+              <a:t>Keep this to about 30 seconds. It is orientation, not content.</a:t>
             </a:r>
           </a:p>
           <a:p/>
           <a:p>
             <a:r>
-              <a:t>If asked why no framework: a framework would have done all of week 1 in about</a:t>
-            </a:r>
-          </a:p>
-          <a:p>
-            <a:r>
-              <a:t>four lines, and I would not be able to explain any of them. The cost of the</a:t>
-            </a:r>
-          </a:p>
-          <a:p>
-            <a:r>
-              <a:t>manual version is a week; the benefit is that I now know what the four lines do.</a:t>
+              <a:t>If he asks why no framework: a framework would have done all of week 1 in about</a:t>
+            </a:r>
+          </a:p>
+          <a:p>
+            <a:r>
+              <a:t>four lines and I would not be able to explain any of them. A week is the cost;</a:t>
+            </a:r>
+          </a:p>
+          <a:p>
+            <a:r>
+              <a:t>understanding the four lines is the benefit.</a:t>
             </a:r>
           </a:p>
         </p:txBody>
@@ -1666,33 +823,28 @@
           <a:lstStyle/>
           <a:p>
             <a:r>
-              <a:t>Raise this first, not last. If he holds 4 October firm you lose a whole week and</a:t>
-            </a:r>
-          </a:p>
-          <a:p>
-            <a:r>
-              <a:t>week 3 has to be cut down, and you both need to know that today.</a:t>
+              <a:t>Raise this early. If he holds 4 October you lose a whole week, and you both need</a:t>
+            </a:r>
+          </a:p>
+          <a:p>
+            <a:r>
+              <a:t>to know that at the start of the meeting, not the end.</a:t>
             </a:r>
           </a:p>
           <a:p/>
           <a:p>
             <a:r>
-              <a:t>Have a fallback ready so you're not just presenting a problem: if 4 Oct is firm,</a:t>
-            </a:r>
-          </a:p>
-          <a:p>
-            <a:r>
-              <a:t>the cut is the optional extras - citations stay, the no-answer handling stays,</a:t>
-            </a:r>
-          </a:p>
-          <a:p>
-            <a:r>
-              <a:t>the polish and demo video stay. What goes is any top-k tuning beyond a single</a:t>
-            </a:r>
-          </a:p>
-          <a:p>
-            <a:r>
-              <a:t>comparison.</a:t>
+              <a:t>Have the answer ready for "what would you cut?": the optional extras go first -</a:t>
+            </a:r>
+          </a:p>
+          <a:p>
+            <a:r>
+              <a:t>tuning top-k beyond a single comparison, and the Chroma-versus-Pinecone write-up.</a:t>
+            </a:r>
+          </a:p>
+          <a:p>
+            <a:r>
+              <a:t>What I would not cut is citations, the no-answer handling, or the demo video.</a:t>
             </a:r>
           </a:p>
         </p:txBody>
@@ -1762,38 +914,65 @@
           <a:lstStyle/>
           <a:p>
             <a:r>
-              <a:t>The reasoning is the interesting part, not the choice. Anyone can pick a model;</a:t>
-            </a:r>
-          </a:p>
-          <a:p>
-            <a:r>
-              <a:t>explaining that you picked it to keep experiments free is the sign you thought</a:t>
-            </a:r>
-          </a:p>
-          <a:p>
-            <a:r>
-              <a:t>about the week ahead.</a:t>
+              <a:t>Spend your time on the highlighted row.</a:t>
             </a:r>
           </a:p>
           <a:p/>
           <a:p>
             <a:r>
-              <a:t>If he asks about quality: MiniLM is smaller and weaker than text-embedding-3-small.</a:t>
-            </a:r>
-          </a:p>
-          <a:p>
-            <a:r>
-              <a:t>For a few hundred chunks of my own notes that has not been the limiting factor -</a:t>
-            </a:r>
-          </a:p>
-          <a:p>
-            <a:r>
-              <a:t>chunk size and top-k matter far more. And I can switch in one line to test that</a:t>
-            </a:r>
-          </a:p>
-          <a:p>
-            <a:r>
-              <a:t>claim.</a:t>
+              <a:t>"Those two sentences share no useful words at all. One says sourdough and</a:t>
+            </a:r>
+          </a:p>
+          <a:p>
+            <a:r>
+              <a:t>weekend, the other says Saturdays and loaf from scratch. A keyword search scores</a:t>
+            </a:r>
+          </a:p>
+          <a:p>
+            <a:r>
+              <a:t>that pair near zero. The model scored it 0.618, purely from meaning. That is the</a:t>
+            </a:r>
+          </a:p>
+          <a:p>
+            <a:r>
+              <a:t>whole reason this project uses embeddings instead of search."</a:t>
+            </a:r>
+          </a:p>
+          <a:p/>
+          <a:p>
+            <a:r>
+              <a:t>Why a local model, if asked: Wednesday needed the whole corpus re-embedded</a:t>
+            </a:r>
+          </a:p>
+          <a:p>
+            <a:r>
+              <a:t>repeatedly to compare chunk sizes. If I were paying per call I would have</a:t>
+            </a:r>
+          </a:p>
+          <a:p>
+            <a:r>
+              <a:t>hesitated to re-run experiments, and that hesitation is the thing I most needed</a:t>
+            </a:r>
+          </a:p>
+          <a:p>
+            <a:r>
+              <a:t>to avoid. OpenAI is wired up behind one setting if I want to compare later.</a:t>
+            </a:r>
+          </a:p>
+          <a:p/>
+          <a:p>
+            <a:r>
+              <a:t>Why hand-write cosine similarity: your brief says build manually, and I wanted to</a:t>
+            </a:r>
+          </a:p>
+          <a:p>
+            <a:r>
+              <a:t>understand why you divide by the length of both - it cancels length out, so a</a:t>
+            </a:r>
+          </a:p>
+          <a:p>
+            <a:r>
+              <a:t>short sentence and a long paragraph that mean the same thing still match.</a:t>
             </a:r>
           </a:p>
         </p:txBody>
@@ -1863,44 +1042,50 @@
           <a:lstStyle/>
           <a:p>
             <a:r>
-              <a:t>Walk one row, not all eight. Best choice is A1 vs A2.</a:t>
+              <a:t>WRITE THIS YOURSELF BEFORE THE MEETING. Three or four sentences, in your voice,</a:t>
+            </a:r>
+          </a:p>
+          <a:p>
+            <a:r>
+              <a:t>replacing the placeholder line.</a:t>
             </a:r>
           </a:p>
           <a:p/>
           <a:p>
             <a:r>
-              <a:t>"I bake sourdough bread every weekend" against "Most Saturdays you will find me</a:t>
-            </a:r>
-          </a:p>
-          <a:p>
-            <a:r>
-              <a:t>making a loaf from scratch". Those two share no useful keywords at all. Keyword</a:t>
-            </a:r>
-          </a:p>
-          <a:p>
-            <a:r>
-              <a:t>search scores that pair near zero. The model gave it 0.62, purely from meaning.</a:t>
+              <a:t>The bullets are your raw material, not the answer.</a:t>
             </a:r>
           </a:p>
           <a:p/>
           <a:p>
             <a:r>
-              <a:t>If he asks why you hand-wrote cosine similarity: the brief says build manually,</a:t>
-            </a:r>
-          </a:p>
-          <a:p>
-            <a:r>
-              <a:t>and I wanted to understand why you divide by both magnitudes - it cancels length</a:t>
-            </a:r>
-          </a:p>
-          <a:p>
-            <a:r>
-              <a:t>out, so a short sentence and a long paragraph that mean the same thing still</a:t>
-            </a:r>
-          </a:p>
-          <a:p>
-            <a:r>
-              <a:t>score as similar.</a:t>
+              <a:t>A shape to react to and then discard: an embedding model reads text and hands</a:t>
+            </a:r>
+          </a:p>
+          <a:p>
+            <a:r>
+              <a:t>back coordinates on a map of meaning, where things that mean similar things sit</a:t>
+            </a:r>
+          </a:p>
+          <a:p>
+            <a:r>
+              <a:t>close together. Say it your own way. He will ask a follow-up question, and that</a:t>
+            </a:r>
+          </a:p>
+          <a:p>
+            <a:r>
+              <a:t>is exactly where borrowed wording collapses.</a:t>
+            </a:r>
+          </a:p>
+          <a:p/>
+          <a:p>
+            <a:r>
+              <a:t>If you genuinely run out of time, present the slide as unfinished and say so.</a:t>
+            </a:r>
+          </a:p>
+          <a:p>
+            <a:r>
+              <a:t>That is far better than reciting a sentence you cannot defend.</a:t>
             </a:r>
           </a:p>
         </p:txBody>
@@ -1970,23 +1155,56 @@
           <a:lstStyle/>
           <a:p>
             <a:r>
-              <a:t>This is your strongest week-1 slide. It shows you drew a design conclusion from</a:t>
-            </a:r>
-          </a:p>
-          <a:p>
-            <a:r>
-              <a:t>a measurement rather than just reporting the measurement.</a:t>
+              <a:t>This is the most important slide of the week. Go slowly.</a:t>
             </a:r>
           </a:p>
           <a:p/>
           <a:p>
             <a:r>
-              <a:t>It also sets up Friday, where this conclusion gets tested against a real corpus</a:t>
-            </a:r>
-          </a:p>
-          <a:p>
-            <a:r>
-              <a:t>and turns out to be even more important than it looks here.</a:t>
+              <a:t>Row 1: the sentence is in the document. It got split down the middle, so half is</a:t>
+            </a:r>
+          </a:p>
+          <a:p>
+            <a:r>
+              <a:t>in one chunk and half in the next. Neither half is complete enough to match a</a:t>
+            </a:r>
+          </a:p>
+          <a:p>
+            <a:r>
+              <a:t>question about it. So the fact is in my notes and my tool cannot find it - and</a:t>
+            </a:r>
+          </a:p>
+          <a:p>
+            <a:r>
+              <a:t>nothing anywhere reports an error. The answers just quietly get worse.</a:t>
+            </a:r>
+          </a:p>
+          <a:p/>
+          <a:p>
+            <a:r>
+              <a:t>Then the subtle bit, which is the part worth knowing:</a:t>
+            </a:r>
+          </a:p>
+          <a:p/>
+          <a:p>
+            <a:r>
+              <a:t>Row 2 fixes it by luck. My splitter looks backwards for a sentence ending, and</a:t>
+            </a:r>
+          </a:p>
+          <a:p>
+            <a:r>
+              <a:t>this time it found one before the fact. That only works when the text happens to</a:t>
+            </a:r>
+          </a:p>
+          <a:p>
+            <a:r>
+              <a:t>have punctuation in the right place.</a:t>
+            </a:r>
+          </a:p>
+          <a:p/>
+          <a:p>
+            <a:r>
+              <a:t>Row 3 fixes it deliberately. Overlap does not depend on the text cooperating.</a:t>
             </a:r>
           </a:p>
         </p:txBody>
@@ -2056,49 +1274,70 @@
           <a:lstStyle/>
           <a:p>
             <a:r>
-              <a:t>FILL THIS IN YOURSELF BEFORE PRESENTING. Do not present the slide as-is.</a:t>
+              <a:t>The tradeoff in one sentence: small chunks match precisely but may leave out</a:t>
+            </a:r>
+          </a:p>
+          <a:p>
+            <a:r>
+              <a:t>context the answer needs; big chunks carry their context along but dilute the</a:t>
+            </a:r>
+          </a:p>
+          <a:p>
+            <a:r>
+              <a:t>match, because one relevant sentence gets averaged in with paragraphs of</a:t>
+            </a:r>
+          </a:p>
+          <a:p>
+            <a:r>
+              <a:t>unrelated material.</a:t>
             </a:r>
           </a:p>
           <a:p/>
           <a:p>
             <a:r>
-              <a:t>The bullets underneath are the raw material, not the answer. Write three or four</a:t>
-            </a:r>
-          </a:p>
-          <a:p>
-            <a:r>
-              <a:t>sentences in your own voice and replace the placeholder line. If you present this</a:t>
-            </a:r>
-          </a:p>
-          <a:p>
-            <a:r>
-              <a:t>blank, say plainly that you are still working on the phrasing rather than</a:t>
-            </a:r>
-          </a:p>
-          <a:p>
-            <a:r>
-              <a:t>pretending the slide is finished.</a:t>
+              <a:t>That is the answer to your self-check question about why chunk size affects</a:t>
+            </a:r>
+          </a:p>
+          <a:p>
+            <a:r>
+              <a:t>quality.</a:t>
             </a:r>
           </a:p>
           <a:p/>
           <a:p>
             <a:r>
-              <a:t>A rough shape to react to, not to copy: an embedding model reads text and returns</a:t>
-            </a:r>
-          </a:p>
-          <a:p>
-            <a:r>
-              <a:t>coordinates on a map of meaning, where things that mean similar things sit near</a:t>
-            </a:r>
-          </a:p>
-          <a:p>
-            <a:r>
-              <a:t>each other. Find your own way to say it - he will ask a follow-up, and the</a:t>
-            </a:r>
-          </a:p>
-          <a:p>
-            <a:r>
-              <a:t>follow-up is where borrowed wording falls apart.</a:t>
+              <a:t>Say "provisional" out loud. 500 with 100 overlap is defensible from what I have -</a:t>
+            </a:r>
+          </a:p>
+          <a:p>
+            <a:r>
+              <a:t>it held a complete thought without swallowing a whole table, and the overlap</a:t>
+            </a:r>
+          </a:p>
+          <a:p>
+            <a:r>
+              <a:t>rescued the fact from the previous slide. But the only real test is whether</a:t>
+            </a:r>
+          </a:p>
+          <a:p>
+            <a:r>
+              <a:t>answers are good, and that is next week. Every number I have so far is a stand-in</a:t>
+            </a:r>
+          </a:p>
+          <a:p>
+            <a:r>
+              <a:t>for that.</a:t>
+            </a:r>
+          </a:p>
+          <a:p/>
+          <a:p>
+            <a:r>
+              <a:t>If asked about cost: the overlap means I store about 1.26 times my actual text,</a:t>
+            </a:r>
+          </a:p>
+          <a:p>
+            <a:r>
+              <a:t>because a quarter of what I save is a second copy. Irrelevant at this size.</a:t>
             </a:r>
           </a:p>
         </p:txBody>
@@ -2168,33 +1407,49 @@
           <a:lstStyle/>
           <a:p>
             <a:r>
-              <a:t>Keep this slide brief - it's the "yes, the code exists" slide. The next one is</a:t>
-            </a:r>
-          </a:p>
-          <a:p>
-            <a:r>
-              <a:t>the one worth spending time on.</a:t>
+              <a:t>This is your answer to "do I understand how a vector database finds similar</a:t>
+            </a:r>
+          </a:p>
+          <a:p>
+            <a:r>
+              <a:t>chunks". Most people answer by naming the algorithm. Answering by explaining that</a:t>
+            </a:r>
+          </a:p>
+          <a:p>
+            <a:r>
+              <a:t>the database is less accurate than brute force shows you actually understand what</a:t>
+            </a:r>
+          </a:p>
+          <a:p>
+            <a:r>
+              <a:t>it does.</a:t>
             </a:r>
           </a:p>
           <a:p/>
           <a:p>
             <a:r>
-              <a:t>If he asks why characters rather than tokens: characters are directly observable,</a:t>
-            </a:r>
-          </a:p>
-          <a:p>
-            <a:r>
-              <a:t>I can look at a 500-character chunk and see exactly what is in it. Token-based</a:t>
-            </a:r>
-          </a:p>
-          <a:p>
-            <a:r>
-              <a:t>chunking is the better production choice because context limits are counted in</a:t>
-            </a:r>
-          </a:p>
-          <a:p>
-            <a:r>
-              <a:t>tokens, and I note that in the README.</a:t>
+              <a:t>Add: at 155 chunks my loop takes 15 milliseconds, so the database buys me nothing</a:t>
+            </a:r>
+          </a:p>
+          <a:p>
+            <a:r>
+              <a:t>on speed today. What it does buy me is that the index survives restarting - right</a:t>
+            </a:r>
+          </a:p>
+          <a:p>
+            <a:r>
+              <a:t>now every run re-embeds everything first, which takes 30 seconds before I can ask</a:t>
+            </a:r>
+          </a:p>
+          <a:p>
+            <a:r>
+              <a:t>anything.</a:t>
+            </a:r>
+          </a:p>
+          <a:p/>
+          <a:p>
+            <a:r>
+              <a:t>That is a better reason to adopt it than speed, and it is the honest one.</a:t>
             </a:r>
           </a:p>
         </p:txBody>
@@ -2264,54 +1519,76 @@
           <a:lstStyle/>
           <a:p>
             <a:r>
-              <a:t>This is the centrepiece of Wednesday. Spend real time here.</a:t>
+              <a:t>This is your answer to the self-check item about handling a question with no good</a:t>
+            </a:r>
+          </a:p>
+          <a:p>
+            <a:r>
+              <a:t>answer, and it is the most useful thing I found all week.</a:t>
             </a:r>
           </a:p>
           <a:p/>
           <a:p>
             <a:r>
-              <a:t>Row 1: the fact is present in the document, split across two chunks, and</a:t>
-            </a:r>
-          </a:p>
-          <a:p>
-            <a:r>
-              <a:t>therefore whole in neither. No question can retrieve it. Each half is too</a:t>
-            </a:r>
-          </a:p>
-          <a:p>
-            <a:r>
-              <a:t>incomplete to score well. And nothing in the system reports a problem - the</a:t>
-            </a:r>
-          </a:p>
-          <a:p>
-            <a:r>
-              <a:t>answers just quietly get worse. That is the worst kind of bug.</a:t>
+              <a:t>Two points.</a:t>
             </a:r>
           </a:p>
           <a:p/>
           <a:p>
             <a:r>
-              <a:t>Row 2 versus row 3 is the subtle bit, and the part I'd lead with if he pushes:</a:t>
-            </a:r>
-          </a:p>
-          <a:p>
-            <a:r>
-              <a:t>row 2 fixes it by luck, because the splitter happened to find a sentence break</a:t>
-            </a:r>
-          </a:p>
-          <a:p>
-            <a:r>
-              <a:t>before the fact. That only works when your text has punctuation near the</a:t>
-            </a:r>
-          </a:p>
-          <a:p>
-            <a:r>
-              <a:t>boundary. Row 3 fixes it on purpose. Overlap does not depend on the text</a:t>
-            </a:r>
-          </a:p>
-          <a:p>
-            <a:r>
-              <a:t>cooperating.</a:t>
+              <a:t>First, the search always returns results. There is no such thing as "no match" -</a:t>
+            </a:r>
+          </a:p>
+          <a:p>
+            <a:r>
+              <a:t>it hands back the closest five whatever you ask.</a:t>
+            </a:r>
+          </a:p>
+          <a:p/>
+          <a:p>
+            <a:r>
+              <a:t>Second, the reason it scored 0.339: my question said Sundays, and the chunk it</a:t>
+            </a:r>
+          </a:p>
+          <a:p>
+            <a:r>
+              <a:t>found contains "Sun Oct 4" from a schedule. The model is right that those are</a:t>
+            </a:r>
+          </a:p>
+          <a:p>
+            <a:r>
+              <a:t>related in meaning. It has no idea whether being related actually answers the</a:t>
+            </a:r>
+          </a:p>
+          <a:p>
+            <a:r>
+              <a:t>question.</a:t>
+            </a:r>
+          </a:p>
+          <a:p/>
+          <a:p>
+            <a:r>
+              <a:t>Now the conclusion. On Monday, related sentences scored 0.617 and unrelated ones</a:t>
+            </a:r>
+          </a:p>
+          <a:p>
+            <a:r>
+              <a:t>0.031, so a cut-off looked easy. Against a real set of notes the usable gap is</a:t>
+            </a:r>
+          </a:p>
+          <a:p>
+            <a:r>
+              <a:t>0.027 - twenty times narrower. With a few hundred chunks, something is always</a:t>
+            </a:r>
+          </a:p>
+          <a:p>
+            <a:r>
+              <a:t>somewhat close to anything you ask. So I need two defences: a score cut-off, and</a:t>
+            </a:r>
+          </a:p>
+          <a:p>
+            <a:r>
+              <a:t>a prompt that lets the model say it cannot find the answer.</a:t>
             </a:r>
           </a:p>
         </p:txBody>
@@ -5370,7 +4647,7 @@
         <p:spPr>
           <a:xfrm>
             <a:off x="777240" y="2286000"/>
-            <a:ext cx="10637215" cy="914400"/>
+            <a:ext cx="10637215" cy="822960"/>
           </a:xfrm>
           <a:prstGeom prst="rect">
             <a:avLst/>
@@ -5406,7 +4683,7 @@
         <p:spPr>
           <a:xfrm>
             <a:off x="777240" y="3154680"/>
-            <a:ext cx="10637215" cy="548640"/>
+            <a:ext cx="10637215" cy="822960"/>
           </a:xfrm>
           <a:prstGeom prst="rect">
             <a:avLst/>
@@ -5420,7 +4697,7 @@
           <a:lstStyle/>
           <a:p>
             <a:pPr>
-              <a:defRPr sz="2000">
+              <a:defRPr sz="2000" b="0">
                 <a:solidFill>
                   <a:srgbClr val="1F4E79"/>
                 </a:solidFill>
@@ -5428,7 +4705,7 @@
               </a:defRPr>
             </a:pPr>
             <a:r>
-              <a:t>Project 2 · Week 1 review · Embeddings &amp; chunking foundations</a:t>
+              <a:t>Week 1 review — embeddings and chunking</a:t>
             </a:r>
           </a:p>
         </p:txBody>
@@ -5442,7 +4719,7 @@
         <p:spPr>
           <a:xfrm>
             <a:off x="777240" y="4343400"/>
-            <a:ext cx="10637215" cy="548640"/>
+            <a:ext cx="10637215" cy="822960"/>
           </a:xfrm>
           <a:prstGeom prst="rect">
             <a:avLst/>
@@ -5456,7 +4733,7 @@
           <a:lstStyle/>
           <a:p>
             <a:pPr>
-              <a:defRPr sz="1400">
+              <a:defRPr sz="1400" b="0">
                 <a:solidFill>
                   <a:srgbClr val="666666"/>
                 </a:solidFill>
@@ -5464,7 +4741,7 @@
               </a:defRPr>
             </a:pPr>
             <a:r>
-              <a:t>Week 1: Mon 21 – Sun 27 Sep 2026   |   Building the RAG pipeline manually, no framework</a:t>
+              <a:t>Mon 21 – Sun 27 Sep 2026   ·   A question-answering tool over my own notes, built without a framework</a:t>
             </a:r>
           </a:p>
         </p:txBody>
@@ -5518,7 +4795,7 @@
               </a:defRPr>
             </a:pPr>
             <a:r>
-              <a:t>WED–THU</a:t>
+              <a:t>STATUS</a:t>
             </a:r>
           </a:p>
         </p:txBody>
@@ -5554,7 +4831,7 @@
               </a:defRPr>
             </a:pPr>
             <a:r>
-              <a:t>Chunk size and overlap: what each setting costs</a:t>
+              <a:t>Where I stand, and what is left</a:t>
             </a:r>
           </a:p>
         </p:txBody>
@@ -5603,17 +4880,53 @@
           </a:p>
         </p:txBody>
       </p:sp>
+      <p:sp>
+        <p:nvSpPr>
+          <p:cNvPr id="5" name="TextBox 4"/>
+          <p:cNvSpPr txBox="1"/>
+          <p:nvPr/>
+        </p:nvSpPr>
+        <p:spPr>
+          <a:xfrm>
+            <a:off x="777240" y="1810512"/>
+            <a:ext cx="10637215" cy="365760"/>
+          </a:xfrm>
+          <a:prstGeom prst="rect">
+            <a:avLst/>
+          </a:prstGeom>
+          <a:noFill/>
+        </p:spPr>
+        <p:txBody>
+          <a:bodyPr wrap="square">
+            <a:spAutoFit/>
+          </a:bodyPr>
+          <a:lstStyle/>
+          <a:p>
+            <a:pPr>
+              <a:defRPr sz="1600">
+                <a:solidFill>
+                  <a:srgbClr val="666666"/>
+                </a:solidFill>
+                <a:latin typeface="Segoe UI"/>
+              </a:defRPr>
+            </a:pPr>
+            <a:r>
+              <a:t>Next week: Chroma, retrieval, and tuning how many chunks to fetch per question.</a:t>
+            </a:r>
+          </a:p>
+        </p:txBody>
+      </p:sp>
       <p:graphicFrame>
         <p:nvGraphicFramePr>
-          <p:cNvPr id="5" name="Table 4"/>
+          <p:cNvPr id="6" name="Table 5"/>
           <p:cNvGraphicFramePr>
             <a:graphicFrameLocks noGrp="1"/>
           </p:cNvGraphicFramePr>
           <p:nvPr/>
         </p:nvGraphicFramePr>
         <p:xfrm>
-          <a:off x="777240" y="1773936"/>
-          <a:ext cx="10637213" cy="2688336"/>
+          <a:off x="777240" y="2313432"/>
+          <a:ext cx="10637214" cy="2523744"/>
         </p:xfrm>
         <a:graphic>
           <a:graphicData uri="http://schemas.openxmlformats.org/drawingml/2006/table">
@@ -5622,22 +4935,17 @@
                 <a:tableStyleId>{5C22544A-7EE6-4342-B048-85BDC9FD1C3A}</a:tableStyleId>
               </a:tblPr>
               <a:tblGrid>
-                <a:gridCol w="1160423"/>
-                <a:gridCol w="1353827"/>
-                <a:gridCol w="1353827"/>
-                <a:gridCol w="1740635"/>
-                <a:gridCol w="1160423"/>
-                <a:gridCol w="1934039"/>
-                <a:gridCol w="1934039"/>
+                <a:gridCol w="7783328"/>
+                <a:gridCol w="2853886"/>
               </a:tblGrid>
-              <a:tr h="384048">
+              <a:tr h="420624">
                 <a:tc>
                   <a:txBody>
                     <a:bodyPr/>
                     <a:lstStyle/>
                     <a:p>
                       <a:pPr>
-                        <a:defRPr sz="1400" b="1">
+                        <a:defRPr sz="1500" b="1">
                           <a:solidFill>
                             <a:srgbClr val="FFFFFF"/>
                           </a:solidFill>
@@ -5645,7 +4953,7 @@
                         </a:defRPr>
                       </a:pPr>
                       <a:r>
-                        <a:t>size</a:t>
+                        <a:t>item</a:t>
                       </a:r>
                     </a:p>
                   </a:txBody>
@@ -5661,7 +4969,7 @@
                     <a:lstStyle/>
                     <a:p>
                       <a:pPr>
-                        <a:defRPr sz="1400" b="1">
+                        <a:defRPr sz="1500" b="1">
                           <a:solidFill>
                             <a:srgbClr val="FFFFFF"/>
                           </a:solidFill>
@@ -5669,127 +4977,7 @@
                         </a:defRPr>
                       </a:pPr>
                       <a:r>
-                        <a:t>overlap</a:t>
-                      </a:r>
-                    </a:p>
-                  </a:txBody>
-                  <a:tcPr>
-                    <a:solidFill>
-                      <a:srgbClr val="1F4E79"/>
-                    </a:solidFill>
-                  </a:tcPr>
-                </a:tc>
-                <a:tc>
-                  <a:txBody>
-                    <a:bodyPr/>
-                    <a:lstStyle/>
-                    <a:p>
-                      <a:pPr>
-                        <a:defRPr sz="1400" b="1">
-                          <a:solidFill>
-                            <a:srgbClr val="FFFFFF"/>
-                          </a:solidFill>
-                          <a:latin typeface="Segoe UI"/>
-                        </a:defRPr>
-                      </a:pPr>
-                      <a:r>
-                        <a:t>chunks</a:t>
-                      </a:r>
-                    </a:p>
-                  </a:txBody>
-                  <a:tcPr>
-                    <a:solidFill>
-                      <a:srgbClr val="1F4E79"/>
-                    </a:solidFill>
-                  </a:tcPr>
-                </a:tc>
-                <a:tc>
-                  <a:txBody>
-                    <a:bodyPr/>
-                    <a:lstStyle/>
-                    <a:p>
-                      <a:pPr>
-                        <a:defRPr sz="1400" b="1">
-                          <a:solidFill>
-                            <a:srgbClr val="FFFFFF"/>
-                          </a:solidFill>
-                          <a:latin typeface="Segoe UI"/>
-                        </a:defRPr>
-                      </a:pPr>
-                      <a:r>
-                        <a:t>mean len</a:t>
-                      </a:r>
-                    </a:p>
-                  </a:txBody>
-                  <a:tcPr>
-                    <a:solidFill>
-                      <a:srgbClr val="1F4E79"/>
-                    </a:solidFill>
-                  </a:tcPr>
-                </a:tc>
-                <a:tc>
-                  <a:txBody>
-                    <a:bodyPr/>
-                    <a:lstStyle/>
-                    <a:p>
-                      <a:pPr>
-                        <a:defRPr sz="1400" b="1">
-                          <a:solidFill>
-                            <a:srgbClr val="FFFFFF"/>
-                          </a:solidFill>
-                          <a:latin typeface="Segoe UI"/>
-                        </a:defRPr>
-                      </a:pPr>
-                      <a:r>
-                        <a:t>min</a:t>
-                      </a:r>
-                    </a:p>
-                  </a:txBody>
-                  <a:tcPr>
-                    <a:solidFill>
-                      <a:srgbClr val="1F4E79"/>
-                    </a:solidFill>
-                  </a:tcPr>
-                </a:tc>
-                <a:tc>
-                  <a:txBody>
-                    <a:bodyPr/>
-                    <a:lstStyle/>
-                    <a:p>
-                      <a:pPr>
-                        <a:defRPr sz="1400" b="1">
-                          <a:solidFill>
-                            <a:srgbClr val="FFFFFF"/>
-                          </a:solidFill>
-                          <a:latin typeface="Segoe UI"/>
-                        </a:defRPr>
-                      </a:pPr>
-                      <a:r>
-                        <a:t>stored chars</a:t>
-                      </a:r>
-                    </a:p>
-                  </a:txBody>
-                  <a:tcPr>
-                    <a:solidFill>
-                      <a:srgbClr val="1F4E79"/>
-                    </a:solidFill>
-                  </a:tcPr>
-                </a:tc>
-                <a:tc>
-                  <a:txBody>
-                    <a:bodyPr/>
-                    <a:lstStyle/>
-                    <a:p>
-                      <a:pPr>
-                        <a:defRPr sz="1400" b="1">
-                          <a:solidFill>
-                            <a:srgbClr val="FFFFFF"/>
-                          </a:solidFill>
-                          <a:latin typeface="Segoe UI"/>
-                        </a:defRPr>
-                      </a:pPr>
-                      <a:r>
-                        <a:t>duplication</a:t>
+                        <a:t>state</a:t>
                       </a:r>
                     </a:p>
                   </a:txBody>
@@ -5800,14 +4988,14 @@
                   </a:tcPr>
                 </a:tc>
               </a:tr>
-              <a:tr h="384048">
+              <a:tr h="420624">
                 <a:tc>
                   <a:txBody>
                     <a:bodyPr/>
                     <a:lstStyle/>
                     <a:p>
                       <a:pPr>
-                        <a:defRPr sz="1300" b="0">
+                        <a:defRPr sz="1500" b="0">
                           <a:solidFill>
                             <a:srgbClr val="1A1A1A"/>
                           </a:solidFill>
@@ -5815,7 +5003,7 @@
                         </a:defRPr>
                       </a:pPr>
                       <a:r>
-                        <a:t>300</a:t>
+                        <a:t>Embeddings working, similarity measured</a:t>
                       </a:r>
                     </a:p>
                   </a:txBody>
@@ -5831,7 +5019,7 @@
                     <a:lstStyle/>
                     <a:p>
                       <a:pPr>
-                        <a:defRPr sz="1300" b="0">
+                        <a:defRPr sz="1500" b="0">
                           <a:solidFill>
                             <a:srgbClr val="1A1A1A"/>
                           </a:solidFill>
@@ -5839,7 +5027,33 @@
                         </a:defRPr>
                       </a:pPr>
                       <a:r>
-                        <a:t>0</a:t>
+                        <a:t>done</a:t>
+                      </a:r>
+                    </a:p>
+                  </a:txBody>
+                  <a:tcPr>
+                    <a:solidFill>
+                      <a:srgbClr val="FFFFFF"/>
+                    </a:solidFill>
+                  </a:tcPr>
+                </a:tc>
+              </a:tr>
+              <a:tr h="420624">
+                <a:tc>
+                  <a:txBody>
+                    <a:bodyPr/>
+                    <a:lstStyle/>
+                    <a:p>
+                      <a:pPr>
+                        <a:defRPr sz="1500" b="0">
+                          <a:solidFill>
+                            <a:srgbClr val="1A1A1A"/>
+                          </a:solidFill>
+                          <a:latin typeface="Segoe UI"/>
+                        </a:defRPr>
+                      </a:pPr>
+                      <a:r>
+                        <a:t>Chunking with overlap, sizes compared</a:t>
                       </a:r>
                     </a:p>
                   </a:txBody>
@@ -5855,7 +5069,7 @@
                     <a:lstStyle/>
                     <a:p>
                       <a:pPr>
-                        <a:defRPr sz="1300" b="0">
+                        <a:defRPr sz="1500" b="0">
                           <a:solidFill>
                             <a:srgbClr val="1A1A1A"/>
                           </a:solidFill>
@@ -5863,7 +5077,33 @@
                         </a:defRPr>
                       </a:pPr>
                       <a:r>
-                        <a:t>199</a:t>
+                        <a:t>done</a:t>
+                      </a:r>
+                    </a:p>
+                  </a:txBody>
+                  <a:tcPr>
+                    <a:solidFill>
+                      <a:srgbClr val="FFFFFF"/>
+                    </a:solidFill>
+                  </a:tcPr>
+                </a:tc>
+              </a:tr>
+              <a:tr h="420624">
+                <a:tc>
+                  <a:txBody>
+                    <a:bodyPr/>
+                    <a:lstStyle/>
+                    <a:p>
+                      <a:pPr>
+                        <a:defRPr sz="1500" b="0">
+                          <a:solidFill>
+                            <a:srgbClr val="1A1A1A"/>
+                          </a:solidFill>
+                          <a:latin typeface="Segoe UI"/>
+                        </a:defRPr>
+                      </a:pPr>
+                      <a:r>
+                        <a:t>All chunks embedded and searchable</a:t>
                       </a:r>
                     </a:p>
                   </a:txBody>
@@ -5879,7 +5119,7 @@
                     <a:lstStyle/>
                     <a:p>
                       <a:pPr>
-                        <a:defRPr sz="1300" b="0">
+                        <a:defRPr sz="1500" b="0">
                           <a:solidFill>
                             <a:srgbClr val="1A1A1A"/>
                           </a:solidFill>
@@ -5887,79 +5127,7 @@
                         </a:defRPr>
                       </a:pPr>
                       <a:r>
-                        <a:t>279.4</a:t>
-                      </a:r>
-                    </a:p>
-                  </a:txBody>
-                  <a:tcPr>
-                    <a:solidFill>
-                      <a:srgbClr val="FFFFFF"/>
-                    </a:solidFill>
-                  </a:tcPr>
-                </a:tc>
-                <a:tc>
-                  <a:txBody>
-                    <a:bodyPr/>
-                    <a:lstStyle/>
-                    <a:p>
-                      <a:pPr>
-                        <a:defRPr sz="1300" b="0">
-                          <a:solidFill>
-                            <a:srgbClr val="1A1A1A"/>
-                          </a:solidFill>
-                          <a:latin typeface="Consolas"/>
-                        </a:defRPr>
-                      </a:pPr>
-                      <a:r>
-                        <a:t>50</a:t>
-                      </a:r>
-                    </a:p>
-                  </a:txBody>
-                  <a:tcPr>
-                    <a:solidFill>
-                      <a:srgbClr val="FFFFFF"/>
-                    </a:solidFill>
-                  </a:tcPr>
-                </a:tc>
-                <a:tc>
-                  <a:txBody>
-                    <a:bodyPr/>
-                    <a:lstStyle/>
-                    <a:p>
-                      <a:pPr>
-                        <a:defRPr sz="1300" b="0">
-                          <a:solidFill>
-                            <a:srgbClr val="1A1A1A"/>
-                          </a:solidFill>
-                          <a:latin typeface="Consolas"/>
-                        </a:defRPr>
-                      </a:pPr>
-                      <a:r>
-                        <a:t>55,598</a:t>
-                      </a:r>
-                    </a:p>
-                  </a:txBody>
-                  <a:tcPr>
-                    <a:solidFill>
-                      <a:srgbClr val="FFFFFF"/>
-                    </a:solidFill>
-                  </a:tcPr>
-                </a:tc>
-                <a:tc>
-                  <a:txBody>
-                    <a:bodyPr/>
-                    <a:lstStyle/>
-                    <a:p>
-                      <a:pPr>
-                        <a:defRPr sz="1300" b="0">
-                          <a:solidFill>
-                            <a:srgbClr val="1A1A1A"/>
-                          </a:solidFill>
-                          <a:latin typeface="Consolas"/>
-                        </a:defRPr>
-                      </a:pPr>
-                      <a:r>
-                        <a:t>1.00x</a:t>
+                        <a:t>done</a:t>
                       </a:r>
                     </a:p>
                   </a:txBody>
@@ -5970,354 +5138,14 @@
                   </a:tcPr>
                 </a:tc>
               </a:tr>
-              <a:tr h="384048">
+              <a:tr h="420624">
                 <a:tc>
                   <a:txBody>
                     <a:bodyPr/>
                     <a:lstStyle/>
                     <a:p>
                       <a:pPr>
-                        <a:defRPr sz="1300" b="0">
-                          <a:solidFill>
-                            <a:srgbClr val="1A1A1A"/>
-                          </a:solidFill>
-                          <a:latin typeface="Segoe UI"/>
-                        </a:defRPr>
-                      </a:pPr>
-                      <a:r>
-                        <a:t>300</a:t>
-                      </a:r>
-                    </a:p>
-                  </a:txBody>
-                  <a:tcPr>
-                    <a:solidFill>
-                      <a:srgbClr val="FFFFFF"/>
-                    </a:solidFill>
-                  </a:tcPr>
-                </a:tc>
-                <a:tc>
-                  <a:txBody>
-                    <a:bodyPr/>
-                    <a:lstStyle/>
-                    <a:p>
-                      <a:pPr>
-                        <a:defRPr sz="1300" b="0">
-                          <a:solidFill>
-                            <a:srgbClr val="1A1A1A"/>
-                          </a:solidFill>
-                          <a:latin typeface="Consolas"/>
-                        </a:defRPr>
-                      </a:pPr>
-                      <a:r>
-                        <a:t>60</a:t>
-                      </a:r>
-                    </a:p>
-                  </a:txBody>
-                  <a:tcPr>
-                    <a:solidFill>
-                      <a:srgbClr val="FFFFFF"/>
-                    </a:solidFill>
-                  </a:tcPr>
-                </a:tc>
-                <a:tc>
-                  <a:txBody>
-                    <a:bodyPr/>
-                    <a:lstStyle/>
-                    <a:p>
-                      <a:pPr>
-                        <a:defRPr sz="1300" b="0">
-                          <a:solidFill>
-                            <a:srgbClr val="1A1A1A"/>
-                          </a:solidFill>
-                          <a:latin typeface="Consolas"/>
-                        </a:defRPr>
-                      </a:pPr>
-                      <a:r>
-                        <a:t>252</a:t>
-                      </a:r>
-                    </a:p>
-                  </a:txBody>
-                  <a:tcPr>
-                    <a:solidFill>
-                      <a:srgbClr val="FFFFFF"/>
-                    </a:solidFill>
-                  </a:tcPr>
-                </a:tc>
-                <a:tc>
-                  <a:txBody>
-                    <a:bodyPr/>
-                    <a:lstStyle/>
-                    <a:p>
-                      <a:pPr>
-                        <a:defRPr sz="1300" b="0">
-                          <a:solidFill>
-                            <a:srgbClr val="1A1A1A"/>
-                          </a:solidFill>
-                          <a:latin typeface="Consolas"/>
-                        </a:defRPr>
-                      </a:pPr>
-                      <a:r>
-                        <a:t>279.0</a:t>
-                      </a:r>
-                    </a:p>
-                  </a:txBody>
-                  <a:tcPr>
-                    <a:solidFill>
-                      <a:srgbClr val="FFFFFF"/>
-                    </a:solidFill>
-                  </a:tcPr>
-                </a:tc>
-                <a:tc>
-                  <a:txBody>
-                    <a:bodyPr/>
-                    <a:lstStyle/>
-                    <a:p>
-                      <a:pPr>
-                        <a:defRPr sz="1300" b="0">
-                          <a:solidFill>
-                            <a:srgbClr val="1A1A1A"/>
-                          </a:solidFill>
-                          <a:latin typeface="Consolas"/>
-                        </a:defRPr>
-                      </a:pPr>
-                      <a:r>
-                        <a:t>72</a:t>
-                      </a:r>
-                    </a:p>
-                  </a:txBody>
-                  <a:tcPr>
-                    <a:solidFill>
-                      <a:srgbClr val="FFFFFF"/>
-                    </a:solidFill>
-                  </a:tcPr>
-                </a:tc>
-                <a:tc>
-                  <a:txBody>
-                    <a:bodyPr/>
-                    <a:lstStyle/>
-                    <a:p>
-                      <a:pPr>
-                        <a:defRPr sz="1300" b="0">
-                          <a:solidFill>
-                            <a:srgbClr val="1A1A1A"/>
-                          </a:solidFill>
-                          <a:latin typeface="Consolas"/>
-                        </a:defRPr>
-                      </a:pPr>
-                      <a:r>
-                        <a:t>70,298</a:t>
-                      </a:r>
-                    </a:p>
-                  </a:txBody>
-                  <a:tcPr>
-                    <a:solidFill>
-                      <a:srgbClr val="FFFFFF"/>
-                    </a:solidFill>
-                  </a:tcPr>
-                </a:tc>
-                <a:tc>
-                  <a:txBody>
-                    <a:bodyPr/>
-                    <a:lstStyle/>
-                    <a:p>
-                      <a:pPr>
-                        <a:defRPr sz="1300" b="0">
-                          <a:solidFill>
-                            <a:srgbClr val="1A1A1A"/>
-                          </a:solidFill>
-                          <a:latin typeface="Consolas"/>
-                        </a:defRPr>
-                      </a:pPr>
-                      <a:r>
-                        <a:t>1.26x</a:t>
-                      </a:r>
-                    </a:p>
-                  </a:txBody>
-                  <a:tcPr>
-                    <a:solidFill>
-                      <a:srgbClr val="FFFFFF"/>
-                    </a:solidFill>
-                  </a:tcPr>
-                </a:tc>
-              </a:tr>
-              <a:tr h="384048">
-                <a:tc>
-                  <a:txBody>
-                    <a:bodyPr/>
-                    <a:lstStyle/>
-                    <a:p>
-                      <a:pPr>
-                        <a:defRPr sz="1300" b="0">
-                          <a:solidFill>
-                            <a:srgbClr val="1A1A1A"/>
-                          </a:solidFill>
-                          <a:latin typeface="Segoe UI"/>
-                        </a:defRPr>
-                      </a:pPr>
-                      <a:r>
-                        <a:t>500</a:t>
-                      </a:r>
-                    </a:p>
-                  </a:txBody>
-                  <a:tcPr>
-                    <a:solidFill>
-                      <a:srgbClr val="FFFFFF"/>
-                    </a:solidFill>
-                  </a:tcPr>
-                </a:tc>
-                <a:tc>
-                  <a:txBody>
-                    <a:bodyPr/>
-                    <a:lstStyle/>
-                    <a:p>
-                      <a:pPr>
-                        <a:defRPr sz="1300" b="0">
-                          <a:solidFill>
-                            <a:srgbClr val="1A1A1A"/>
-                          </a:solidFill>
-                          <a:latin typeface="Consolas"/>
-                        </a:defRPr>
-                      </a:pPr>
-                      <a:r>
-                        <a:t>0</a:t>
-                      </a:r>
-                    </a:p>
-                  </a:txBody>
-                  <a:tcPr>
-                    <a:solidFill>
-                      <a:srgbClr val="FFFFFF"/>
-                    </a:solidFill>
-                  </a:tcPr>
-                </a:tc>
-                <a:tc>
-                  <a:txBody>
-                    <a:bodyPr/>
-                    <a:lstStyle/>
-                    <a:p>
-                      <a:pPr>
-                        <a:defRPr sz="1300" b="0">
-                          <a:solidFill>
-                            <a:srgbClr val="1A1A1A"/>
-                          </a:solidFill>
-                          <a:latin typeface="Consolas"/>
-                        </a:defRPr>
-                      </a:pPr>
-                      <a:r>
-                        <a:t>124</a:t>
-                      </a:r>
-                    </a:p>
-                  </a:txBody>
-                  <a:tcPr>
-                    <a:solidFill>
-                      <a:srgbClr val="FFFFFF"/>
-                    </a:solidFill>
-                  </a:tcPr>
-                </a:tc>
-                <a:tc>
-                  <a:txBody>
-                    <a:bodyPr/>
-                    <a:lstStyle/>
-                    <a:p>
-                      <a:pPr>
-                        <a:defRPr sz="1300" b="0">
-                          <a:solidFill>
-                            <a:srgbClr val="1A1A1A"/>
-                          </a:solidFill>
-                          <a:latin typeface="Consolas"/>
-                        </a:defRPr>
-                      </a:pPr>
-                      <a:r>
-                        <a:t>448.4</a:t>
-                      </a:r>
-                    </a:p>
-                  </a:txBody>
-                  <a:tcPr>
-                    <a:solidFill>
-                      <a:srgbClr val="FFFFFF"/>
-                    </a:solidFill>
-                  </a:tcPr>
-                </a:tc>
-                <a:tc>
-                  <a:txBody>
-                    <a:bodyPr/>
-                    <a:lstStyle/>
-                    <a:p>
-                      <a:pPr>
-                        <a:defRPr sz="1300" b="0">
-                          <a:solidFill>
-                            <a:srgbClr val="1A1A1A"/>
-                          </a:solidFill>
-                          <a:latin typeface="Consolas"/>
-                        </a:defRPr>
-                      </a:pPr>
-                      <a:r>
-                        <a:t>23</a:t>
-                      </a:r>
-                    </a:p>
-                  </a:txBody>
-                  <a:tcPr>
-                    <a:solidFill>
-                      <a:srgbClr val="FFFFFF"/>
-                    </a:solidFill>
-                  </a:tcPr>
-                </a:tc>
-                <a:tc>
-                  <a:txBody>
-                    <a:bodyPr/>
-                    <a:lstStyle/>
-                    <a:p>
-                      <a:pPr>
-                        <a:defRPr sz="1300" b="0">
-                          <a:solidFill>
-                            <a:srgbClr val="1A1A1A"/>
-                          </a:solidFill>
-                          <a:latin typeface="Consolas"/>
-                        </a:defRPr>
-                      </a:pPr>
-                      <a:r>
-                        <a:t>55,598</a:t>
-                      </a:r>
-                    </a:p>
-                  </a:txBody>
-                  <a:tcPr>
-                    <a:solidFill>
-                      <a:srgbClr val="FFFFFF"/>
-                    </a:solidFill>
-                  </a:tcPr>
-                </a:tc>
-                <a:tc>
-                  <a:txBody>
-                    <a:bodyPr/>
-                    <a:lstStyle/>
-                    <a:p>
-                      <a:pPr>
-                        <a:defRPr sz="1300" b="0">
-                          <a:solidFill>
-                            <a:srgbClr val="1A1A1A"/>
-                          </a:solidFill>
-                          <a:latin typeface="Consolas"/>
-                        </a:defRPr>
-                      </a:pPr>
-                      <a:r>
-                        <a:t>1.00x</a:t>
-                      </a:r>
-                    </a:p>
-                  </a:txBody>
-                  <a:tcPr>
-                    <a:solidFill>
-                      <a:srgbClr val="FFFFFF"/>
-                    </a:solidFill>
-                  </a:tcPr>
-                </a:tc>
-              </a:tr>
-              <a:tr h="384048">
-                <a:tc>
-                  <a:txBody>
-                    <a:bodyPr/>
-                    <a:lstStyle/>
-                    <a:p>
-                      <a:pPr>
-                        <a:defRPr sz="1300" b="1">
+                        <a:defRPr sz="1500" b="1">
                           <a:solidFill>
                             <a:srgbClr val="B32D2D"/>
                           </a:solidFill>
@@ -6325,7 +5153,7 @@
                         </a:defRPr>
                       </a:pPr>
                       <a:r>
-                        <a:t>500</a:t>
+                        <a:t>Add 5–10 of my own notes as the test set</a:t>
                       </a:r>
                     </a:p>
                   </a:txBody>
@@ -6341,7 +5169,7 @@
                     <a:lstStyle/>
                     <a:p>
                       <a:pPr>
-                        <a:defRPr sz="1300" b="1">
+                        <a:defRPr sz="1500" b="1">
                           <a:solidFill>
                             <a:srgbClr val="B32D2D"/>
                           </a:solidFill>
@@ -6349,7 +5177,33 @@
                         </a:defRPr>
                       </a:pPr>
                       <a:r>
-                        <a:t>100</a:t>
+                        <a:t>STILL TO DO</a:t>
+                      </a:r>
+                    </a:p>
+                  </a:txBody>
+                  <a:tcPr>
+                    <a:solidFill>
+                      <a:srgbClr val="F2F5F8"/>
+                    </a:solidFill>
+                  </a:tcPr>
+                </a:tc>
+              </a:tr>
+              <a:tr h="420624">
+                <a:tc>
+                  <a:txBody>
+                    <a:bodyPr/>
+                    <a:lstStyle/>
+                    <a:p>
+                      <a:pPr>
+                        <a:defRPr sz="1500" b="1">
+                          <a:solidFill>
+                            <a:srgbClr val="B32D2D"/>
+                          </a:solidFill>
+                          <a:latin typeface="Segoe UI"/>
+                        </a:defRPr>
+                      </a:pPr>
+                      <a:r>
+                        <a:t>Write my three explanations in my own words</a:t>
                       </a:r>
                     </a:p>
                   </a:txBody>
@@ -6365,7 +5219,7 @@
                     <a:lstStyle/>
                     <a:p>
                       <a:pPr>
-                        <a:defRPr sz="1300" b="1">
+                        <a:defRPr sz="1500" b="1">
                           <a:solidFill>
                             <a:srgbClr val="B32D2D"/>
                           </a:solidFill>
@@ -6373,103 +5227,7 @@
                         </a:defRPr>
                       </a:pPr>
                       <a:r>
-                        <a:t>155</a:t>
-                      </a:r>
-                    </a:p>
-                  </a:txBody>
-                  <a:tcPr>
-                    <a:solidFill>
-                      <a:srgbClr val="F2F5F8"/>
-                    </a:solidFill>
-                  </a:tcPr>
-                </a:tc>
-                <a:tc>
-                  <a:txBody>
-                    <a:bodyPr/>
-                    <a:lstStyle/>
-                    <a:p>
-                      <a:pPr>
-                        <a:defRPr sz="1300" b="1">
-                          <a:solidFill>
-                            <a:srgbClr val="B32D2D"/>
-                          </a:solidFill>
-                          <a:latin typeface="Consolas"/>
-                        </a:defRPr>
-                      </a:pPr>
-                      <a:r>
-                        <a:t>454.2</a:t>
-                      </a:r>
-                    </a:p>
-                  </a:txBody>
-                  <a:tcPr>
-                    <a:solidFill>
-                      <a:srgbClr val="F2F5F8"/>
-                    </a:solidFill>
-                  </a:tcPr>
-                </a:tc>
-                <a:tc>
-                  <a:txBody>
-                    <a:bodyPr/>
-                    <a:lstStyle/>
-                    <a:p>
-                      <a:pPr>
-                        <a:defRPr sz="1300" b="1">
-                          <a:solidFill>
-                            <a:srgbClr val="B32D2D"/>
-                          </a:solidFill>
-                          <a:latin typeface="Consolas"/>
-                        </a:defRPr>
-                      </a:pPr>
-                      <a:r>
-                        <a:t>112</a:t>
-                      </a:r>
-                    </a:p>
-                  </a:txBody>
-                  <a:tcPr>
-                    <a:solidFill>
-                      <a:srgbClr val="F2F5F8"/>
-                    </a:solidFill>
-                  </a:tcPr>
-                </a:tc>
-                <a:tc>
-                  <a:txBody>
-                    <a:bodyPr/>
-                    <a:lstStyle/>
-                    <a:p>
-                      <a:pPr>
-                        <a:defRPr sz="1300" b="1">
-                          <a:solidFill>
-                            <a:srgbClr val="B32D2D"/>
-                          </a:solidFill>
-                          <a:latin typeface="Consolas"/>
-                        </a:defRPr>
-                      </a:pPr>
-                      <a:r>
-                        <a:t>70,398</a:t>
-                      </a:r>
-                    </a:p>
-                  </a:txBody>
-                  <a:tcPr>
-                    <a:solidFill>
-                      <a:srgbClr val="F2F5F8"/>
-                    </a:solidFill>
-                  </a:tcPr>
-                </a:tc>
-                <a:tc>
-                  <a:txBody>
-                    <a:bodyPr/>
-                    <a:lstStyle/>
-                    <a:p>
-                      <a:pPr>
-                        <a:defRPr sz="1300" b="1">
-                          <a:solidFill>
-                            <a:srgbClr val="B32D2D"/>
-                          </a:solidFill>
-                          <a:latin typeface="Consolas"/>
-                        </a:defRPr>
-                      </a:pPr>
-                      <a:r>
-                        <a:t>1.27x</a:t>
+                        <a:t>STILL TO DO</a:t>
                       </a:r>
                     </a:p>
                   </a:txBody>
@@ -6480,359 +5238,19 @@
                   </a:tcPr>
                 </a:tc>
               </a:tr>
-              <a:tr h="384048">
-                <a:tc>
-                  <a:txBody>
-                    <a:bodyPr/>
-                    <a:lstStyle/>
-                    <a:p>
-                      <a:pPr>
-                        <a:defRPr sz="1300" b="0">
-                          <a:solidFill>
-                            <a:srgbClr val="1A1A1A"/>
-                          </a:solidFill>
-                          <a:latin typeface="Segoe UI"/>
-                        </a:defRPr>
-                      </a:pPr>
-                      <a:r>
-                        <a:t>800</a:t>
-                      </a:r>
-                    </a:p>
-                  </a:txBody>
-                  <a:tcPr>
-                    <a:solidFill>
-                      <a:srgbClr val="FFFFFF"/>
-                    </a:solidFill>
-                  </a:tcPr>
-                </a:tc>
-                <a:tc>
-                  <a:txBody>
-                    <a:bodyPr/>
-                    <a:lstStyle/>
-                    <a:p>
-                      <a:pPr>
-                        <a:defRPr sz="1300" b="0">
-                          <a:solidFill>
-                            <a:srgbClr val="1A1A1A"/>
-                          </a:solidFill>
-                          <a:latin typeface="Consolas"/>
-                        </a:defRPr>
-                      </a:pPr>
-                      <a:r>
-                        <a:t>160</a:t>
-                      </a:r>
-                    </a:p>
-                  </a:txBody>
-                  <a:tcPr>
-                    <a:solidFill>
-                      <a:srgbClr val="FFFFFF"/>
-                    </a:solidFill>
-                  </a:tcPr>
-                </a:tc>
-                <a:tc>
-                  <a:txBody>
-                    <a:bodyPr/>
-                    <a:lstStyle/>
-                    <a:p>
-                      <a:pPr>
-                        <a:defRPr sz="1300" b="0">
-                          <a:solidFill>
-                            <a:srgbClr val="1A1A1A"/>
-                          </a:solidFill>
-                          <a:latin typeface="Consolas"/>
-                        </a:defRPr>
-                      </a:pPr>
-                      <a:r>
-                        <a:t>96</a:t>
-                      </a:r>
-                    </a:p>
-                  </a:txBody>
-                  <a:tcPr>
-                    <a:solidFill>
-                      <a:srgbClr val="FFFFFF"/>
-                    </a:solidFill>
-                  </a:tcPr>
-                </a:tc>
-                <a:tc>
-                  <a:txBody>
-                    <a:bodyPr/>
-                    <a:lstStyle/>
-                    <a:p>
-                      <a:pPr>
-                        <a:defRPr sz="1300" b="0">
-                          <a:solidFill>
-                            <a:srgbClr val="1A1A1A"/>
-                          </a:solidFill>
-                          <a:latin typeface="Consolas"/>
-                        </a:defRPr>
-                      </a:pPr>
-                      <a:r>
-                        <a:t>727.5</a:t>
-                      </a:r>
-                    </a:p>
-                  </a:txBody>
-                  <a:tcPr>
-                    <a:solidFill>
-                      <a:srgbClr val="FFFFFF"/>
-                    </a:solidFill>
-                  </a:tcPr>
-                </a:tc>
-                <a:tc>
-                  <a:txBody>
-                    <a:bodyPr/>
-                    <a:lstStyle/>
-                    <a:p>
-                      <a:pPr>
-                        <a:defRPr sz="1300" b="0">
-                          <a:solidFill>
-                            <a:srgbClr val="1A1A1A"/>
-                          </a:solidFill>
-                          <a:latin typeface="Consolas"/>
-                        </a:defRPr>
-                      </a:pPr>
-                      <a:r>
-                        <a:t>292</a:t>
-                      </a:r>
-                    </a:p>
-                  </a:txBody>
-                  <a:tcPr>
-                    <a:solidFill>
-                      <a:srgbClr val="FFFFFF"/>
-                    </a:solidFill>
-                  </a:tcPr>
-                </a:tc>
-                <a:tc>
-                  <a:txBody>
-                    <a:bodyPr/>
-                    <a:lstStyle/>
-                    <a:p>
-                      <a:pPr>
-                        <a:defRPr sz="1300" b="0">
-                          <a:solidFill>
-                            <a:srgbClr val="1A1A1A"/>
-                          </a:solidFill>
-                          <a:latin typeface="Consolas"/>
-                        </a:defRPr>
-                      </a:pPr>
-                      <a:r>
-                        <a:t>69,838</a:t>
-                      </a:r>
-                    </a:p>
-                  </a:txBody>
-                  <a:tcPr>
-                    <a:solidFill>
-                      <a:srgbClr val="FFFFFF"/>
-                    </a:solidFill>
-                  </a:tcPr>
-                </a:tc>
-                <a:tc>
-                  <a:txBody>
-                    <a:bodyPr/>
-                    <a:lstStyle/>
-                    <a:p>
-                      <a:pPr>
-                        <a:defRPr sz="1300" b="0">
-                          <a:solidFill>
-                            <a:srgbClr val="1A1A1A"/>
-                          </a:solidFill>
-                          <a:latin typeface="Consolas"/>
-                        </a:defRPr>
-                      </a:pPr>
-                      <a:r>
-                        <a:t>1.26x</a:t>
-                      </a:r>
-                    </a:p>
-                  </a:txBody>
-                  <a:tcPr>
-                    <a:solidFill>
-                      <a:srgbClr val="FFFFFF"/>
-                    </a:solidFill>
-                  </a:tcPr>
-                </a:tc>
-              </a:tr>
-              <a:tr h="384048">
-                <a:tc>
-                  <a:txBody>
-                    <a:bodyPr/>
-                    <a:lstStyle/>
-                    <a:p>
-                      <a:pPr>
-                        <a:defRPr sz="1300" b="0">
-                          <a:solidFill>
-                            <a:srgbClr val="1A1A1A"/>
-                          </a:solidFill>
-                          <a:latin typeface="Segoe UI"/>
-                        </a:defRPr>
-                      </a:pPr>
-                      <a:r>
-                        <a:t>1500</a:t>
-                      </a:r>
-                    </a:p>
-                  </a:txBody>
-                  <a:tcPr>
-                    <a:solidFill>
-                      <a:srgbClr val="FFFFFF"/>
-                    </a:solidFill>
-                  </a:tcPr>
-                </a:tc>
-                <a:tc>
-                  <a:txBody>
-                    <a:bodyPr/>
-                    <a:lstStyle/>
-                    <a:p>
-                      <a:pPr>
-                        <a:defRPr sz="1300" b="0">
-                          <a:solidFill>
-                            <a:srgbClr val="1A1A1A"/>
-                          </a:solidFill>
-                          <a:latin typeface="Consolas"/>
-                        </a:defRPr>
-                      </a:pPr>
-                      <a:r>
-                        <a:t>300</a:t>
-                      </a:r>
-                    </a:p>
-                  </a:txBody>
-                  <a:tcPr>
-                    <a:solidFill>
-                      <a:srgbClr val="FFFFFF"/>
-                    </a:solidFill>
-                  </a:tcPr>
-                </a:tc>
-                <a:tc>
-                  <a:txBody>
-                    <a:bodyPr/>
-                    <a:lstStyle/>
-                    <a:p>
-                      <a:pPr>
-                        <a:defRPr sz="1300" b="0">
-                          <a:solidFill>
-                            <a:srgbClr val="1A1A1A"/>
-                          </a:solidFill>
-                          <a:latin typeface="Consolas"/>
-                        </a:defRPr>
-                      </a:pPr>
-                      <a:r>
-                        <a:t>50</a:t>
-                      </a:r>
-                    </a:p>
-                  </a:txBody>
-                  <a:tcPr>
-                    <a:solidFill>
-                      <a:srgbClr val="FFFFFF"/>
-                    </a:solidFill>
-                  </a:tcPr>
-                </a:tc>
-                <a:tc>
-                  <a:txBody>
-                    <a:bodyPr/>
-                    <a:lstStyle/>
-                    <a:p>
-                      <a:pPr>
-                        <a:defRPr sz="1300" b="0">
-                          <a:solidFill>
-                            <a:srgbClr val="1A1A1A"/>
-                          </a:solidFill>
-                          <a:latin typeface="Consolas"/>
-                        </a:defRPr>
-                      </a:pPr>
-                      <a:r>
-                        <a:t>1370.0</a:t>
-                      </a:r>
-                    </a:p>
-                  </a:txBody>
-                  <a:tcPr>
-                    <a:solidFill>
-                      <a:srgbClr val="FFFFFF"/>
-                    </a:solidFill>
-                  </a:tcPr>
-                </a:tc>
-                <a:tc>
-                  <a:txBody>
-                    <a:bodyPr/>
-                    <a:lstStyle/>
-                    <a:p>
-                      <a:pPr>
-                        <a:defRPr sz="1300" b="0">
-                          <a:solidFill>
-                            <a:srgbClr val="1A1A1A"/>
-                          </a:solidFill>
-                          <a:latin typeface="Consolas"/>
-                        </a:defRPr>
-                      </a:pPr>
-                      <a:r>
-                        <a:t>348</a:t>
-                      </a:r>
-                    </a:p>
-                  </a:txBody>
-                  <a:tcPr>
-                    <a:solidFill>
-                      <a:srgbClr val="FFFFFF"/>
-                    </a:solidFill>
-                  </a:tcPr>
-                </a:tc>
-                <a:tc>
-                  <a:txBody>
-                    <a:bodyPr/>
-                    <a:lstStyle/>
-                    <a:p>
-                      <a:pPr>
-                        <a:defRPr sz="1300" b="0">
-                          <a:solidFill>
-                            <a:srgbClr val="1A1A1A"/>
-                          </a:solidFill>
-                          <a:latin typeface="Consolas"/>
-                        </a:defRPr>
-                      </a:pPr>
-                      <a:r>
-                        <a:t>68,498</a:t>
-                      </a:r>
-                    </a:p>
-                  </a:txBody>
-                  <a:tcPr>
-                    <a:solidFill>
-                      <a:srgbClr val="FFFFFF"/>
-                    </a:solidFill>
-                  </a:tcPr>
-                </a:tc>
-                <a:tc>
-                  <a:txBody>
-                    <a:bodyPr/>
-                    <a:lstStyle/>
-                    <a:p>
-                      <a:pPr>
-                        <a:defRPr sz="1300" b="0">
-                          <a:solidFill>
-                            <a:srgbClr val="1A1A1A"/>
-                          </a:solidFill>
-                          <a:latin typeface="Consolas"/>
-                        </a:defRPr>
-                      </a:pPr>
-                      <a:r>
-                        <a:t>1.23x</a:t>
-                      </a:r>
-                    </a:p>
-                  </a:txBody>
-                  <a:tcPr>
-                    <a:solidFill>
-                      <a:srgbClr val="FFFFFF"/>
-                    </a:solidFill>
-                  </a:tcPr>
-                </a:tc>
-              </a:tr>
             </a:tbl>
           </a:graphicData>
         </a:graphic>
       </p:graphicFrame>
       <p:sp>
         <p:nvSpPr>
-          <p:cNvPr id="6" name="TextBox 5"/>
+          <p:cNvPr id="7" name="TextBox 6"/>
           <p:cNvSpPr txBox="1"/>
           <p:nvPr/>
         </p:nvSpPr>
         <p:spPr>
           <a:xfrm>
-            <a:off x="777240" y="6053328"/>
+            <a:off x="777240" y="6035040"/>
             <a:ext cx="10637215" cy="457200"/>
           </a:xfrm>
           <a:prstGeom prst="rect">
@@ -6855,7 +5273,7 @@
               </a:defRPr>
             </a:pPr>
             <a:r>
-              <a:t>Corpus: 7 markdown files, 55,598 characters — an interim stand-in, not my final dataset</a:t>
+              <a:t>Both outstanding items are mine — nothing is blocked on anyone else</a:t>
             </a:r>
           </a:p>
         </p:txBody>
@@ -6868,7 +5286,7 @@
 </p:sld>
 </file>
 
-<file path=ppt/slides/slide11.xml><?xml version="1.0" encoding="utf-8"?>
+<file path=ppt/slides/slide2.xml><?xml version="1.0" encoding="utf-8"?>
 <p:sld xmlns:a="http://schemas.openxmlformats.org/drawingml/2006/main" xmlns:p="http://schemas.openxmlformats.org/presentationml/2006/main" xmlns:r="http://schemas.openxmlformats.org/officeDocument/2006/relationships">
   <p:cSld>
     <p:spTree>
@@ -6909,7 +5327,7 @@
               </a:defRPr>
             </a:pPr>
             <a:r>
-              <a:t>WED–THU</a:t>
+              <a:t>OVERVIEW</a:t>
             </a:r>
           </a:p>
         </p:txBody>
@@ -6945,7 +5363,7 @@
               </a:defRPr>
             </a:pPr>
             <a:r>
-              <a:t>Why chunk size changes answer quality</a:t>
+              <a:t>What the tool will do, and where I am</a:t>
             </a:r>
           </a:p>
         </p:txBody>
@@ -7002,8 +5420,8 @@
         </p:nvSpPr>
         <p:spPr>
           <a:xfrm>
-            <a:off x="777240" y="1773936"/>
-            <a:ext cx="10637215" cy="4023360"/>
+            <a:off x="777240" y="1810512"/>
+            <a:ext cx="10637215" cy="3931920"/>
           </a:xfrm>
           <a:prstGeom prst="rect">
             <a:avLst/>
@@ -7018,9 +5436,9 @@
           <a:p>
             <a:pPr>
               <a:spcAft>
-                <a:spcPts val="1100"/>
+                <a:spcPts val="1400"/>
               </a:spcAft>
-              <a:defRPr sz="1900" b="1">
+              <a:defRPr sz="2000" b="1">
                 <a:solidFill>
                   <a:srgbClr val="1A1A1A"/>
                 </a:solidFill>
@@ -7028,15 +5446,31 @@
               </a:defRPr>
             </a:pPr>
             <a:r>
-              <a:t>One passage from a 15,500-character file, chunked three ways:</a:t>
+              <a:t>Goal: ask questions about my own notes, answered only from those notes</a:t>
+            </a:r>
+          </a:p>
+          <a:p>
+            <a:pPr>
+              <a:spcAft>
+                <a:spcPts val="1400"/>
+              </a:spcAft>
+              <a:defRPr sz="2000" b="0">
+                <a:solidFill>
+                  <a:srgbClr val="1A1A1A"/>
+                </a:solidFill>
+                <a:latin typeface="Segoe UI"/>
+              </a:defRPr>
+            </a:pPr>
+            <a:r>
+              <a:t>•  Five stages, each written by hand:</a:t>
             </a:r>
           </a:p>
           <a:p>
             <a:pPr lvl="1">
               <a:spcAft>
-                <a:spcPts val="1100"/>
+                <a:spcPts val="1400"/>
               </a:spcAft>
-              <a:defRPr sz="1600" b="0">
+              <a:defRPr sz="1700" b="0">
                 <a:solidFill>
                   <a:srgbClr val="666666"/>
                 </a:solidFill>
@@ -7044,47 +5478,15 @@
               </a:defRPr>
             </a:pPr>
             <a:r>
-              <a:t>–  300 chars → one tight idea, nothing else</a:t>
-            </a:r>
-          </a:p>
-          <a:p>
-            <a:pPr lvl="1">
-              <a:spcAft>
-                <a:spcPts val="1100"/>
-              </a:spcAft>
-              <a:defRPr sz="1600" b="0">
-                <a:solidFill>
-                  <a:srgbClr val="666666"/>
-                </a:solidFill>
-                <a:latin typeface="Segoe UI"/>
-              </a:defRPr>
-            </a:pPr>
-            <a:r>
-              <a:t>–  500 chars → that idea, plus the start of an unrelated table</a:t>
-            </a:r>
-          </a:p>
-          <a:p>
-            <a:pPr lvl="1">
-              <a:spcAft>
-                <a:spcPts val="1100"/>
-              </a:spcAft>
-              <a:defRPr sz="1600" b="0">
-                <a:solidFill>
-                  <a:srgbClr val="666666"/>
-                </a:solidFill>
-                <a:latin typeface="Segoe UI"/>
-              </a:defRPr>
-            </a:pPr>
-            <a:r>
-              <a:t>–  1500 chars → the idea, the whole table, and two further sections</a:t>
+              <a:t>–  chunk  →  embed  →  store  →  retrieve  →  generate</a:t>
             </a:r>
           </a:p>
           <a:p>
             <a:pPr>
               <a:spcAft>
-                <a:spcPts val="1100"/>
+                <a:spcPts val="1400"/>
               </a:spcAft>
-              <a:defRPr sz="1900" b="1">
+              <a:defRPr sz="2000" b="1">
                 <a:solidFill>
                   <a:srgbClr val="1A1A1A"/>
                 </a:solidFill>
@@ -7092,15 +5494,15 @@
               </a:defRPr>
             </a:pPr>
             <a:r>
-              <a:t>Small chunks match precisely but may drop the context the answer needs</a:t>
+              <a:t>Week 1 delivered the first two, plus a working search</a:t>
             </a:r>
           </a:p>
           <a:p>
             <a:pPr>
               <a:spcAft>
-                <a:spcPts val="1100"/>
+                <a:spcPts val="1400"/>
               </a:spcAft>
-              <a:defRPr sz="1900" b="1">
+              <a:defRPr sz="2000" b="0">
                 <a:solidFill>
                   <a:srgbClr val="1A1A1A"/>
                 </a:solidFill>
@@ -7108,39 +5510,7 @@
               </a:defRPr>
             </a:pPr>
             <a:r>
-              <a:t>Large chunks carry context along and dilute the match</a:t>
-            </a:r>
-          </a:p>
-          <a:p>
-            <a:pPr lvl="1">
-              <a:spcAft>
-                <a:spcPts val="1100"/>
-              </a:spcAft>
-              <a:defRPr sz="1600" b="0">
-                <a:solidFill>
-                  <a:srgbClr val="666666"/>
-                </a:solidFill>
-                <a:latin typeface="Segoe UI"/>
-              </a:defRPr>
-            </a:pPr>
-            <a:r>
-              <a:t>–  One relevant sentence, averaged in with paragraphs of unrelated material</a:t>
-            </a:r>
-          </a:p>
-          <a:p>
-            <a:pPr>
-              <a:spcAft>
-                <a:spcPts val="1100"/>
-              </a:spcAft>
-              <a:defRPr sz="1900" b="0">
-                <a:solidFill>
-                  <a:srgbClr val="1A1A1A"/>
-                </a:solidFill>
-                <a:latin typeface="Segoe UI"/>
-              </a:defRPr>
-            </a:pPr>
-            <a:r>
-              <a:t>•  No universally correct value — it depends on how the notes are written</a:t>
+              <a:t>•  No LangChain or LlamaIndex — your brief asks for it built manually</a:t>
             </a:r>
           </a:p>
         </p:txBody>
@@ -7153,7 +5523,7 @@
         </p:nvSpPr>
         <p:spPr>
           <a:xfrm>
-            <a:off x="777240" y="6053328"/>
+            <a:off x="777240" y="6035040"/>
             <a:ext cx="10637215" cy="457200"/>
           </a:xfrm>
           <a:prstGeom prst="rect">
@@ -7176,7 +5546,7 @@
               </a:defRPr>
             </a:pPr>
             <a:r>
-              <a:t>Provisional: CHUNK_SIZE=500, CHUNK_OVERLAP=100 — held provisionally until Week 2 tests it with real questions</a:t>
+              <a:t>Repo: ask-my-docs · 4 commits · Python, a free local embedding model, no API key needed yet</a:t>
             </a:r>
           </a:p>
         </p:txBody>
@@ -7189,7 +5559,7 @@
 </p:sld>
 </file>
 
-<file path=ppt/slides/slide12.xml><?xml version="1.0" encoding="utf-8"?>
+<file path=ppt/slides/slide3.xml><?xml version="1.0" encoding="utf-8"?>
 <p:sld xmlns:a="http://schemas.openxmlformats.org/drawingml/2006/main" xmlns:p="http://schemas.openxmlformats.org/presentationml/2006/main" xmlns:r="http://schemas.openxmlformats.org/officeDocument/2006/relationships">
   <p:cSld>
     <p:spTree>
@@ -7230,7 +5600,7 @@
               </a:defRPr>
             </a:pPr>
             <a:r>
-              <a:t>FRI</a:t>
+              <a:t>DECISION NEEDED</a:t>
             </a:r>
           </a:p>
         </p:txBody>
@@ -7266,7 +5636,7 @@
               </a:defRPr>
             </a:pPr>
             <a:r>
-              <a:t>Friday: a search engine with no database in it</a:t>
+              <a:t>One thing I need you to decide</a:t>
             </a:r>
           </a:p>
         </p:txBody>
@@ -7323,8 +5693,8 @@
         </p:nvSpPr>
         <p:spPr>
           <a:xfrm>
-            <a:off x="777240" y="1773936"/>
-            <a:ext cx="10637215" cy="4023360"/>
+            <a:off x="777240" y="1810512"/>
+            <a:ext cx="10637215" cy="3931920"/>
           </a:xfrm>
           <a:prstGeom prst="rect">
             <a:avLst/>
@@ -7339,9 +5709,9 @@
           <a:p>
             <a:pPr>
               <a:spcAft>
-                <a:spcPts val="1100"/>
+                <a:spcPts val="1400"/>
               </a:spcAft>
-              <a:defRPr sz="1900" b="1">
+              <a:defRPr sz="2000" b="1">
                 <a:solidFill>
                   <a:srgbClr val="1A1A1A"/>
                 </a:solidFill>
@@ -7349,15 +5719,15 @@
               </a:defRPr>
             </a:pPr>
             <a:r>
-              <a:t>Embedded every chunk and kept the results in a plain Python list</a:t>
+              <a:t>The brief's dates are a week out</a:t>
             </a:r>
           </a:p>
           <a:p>
             <a:pPr lvl="1">
               <a:spcAft>
-                <a:spcPts val="1100"/>
+                <a:spcPts val="1400"/>
               </a:spcAft>
-              <a:defRPr sz="1600" b="0">
+              <a:defRPr sz="1700" b="0">
                 <a:solidFill>
                   <a:srgbClr val="666666"/>
                 </a:solidFill>
@@ -7365,15 +5735,15 @@
               </a:defRPr>
             </a:pPr>
             <a:r>
-              <a:t>–  155 chunks · 384 numbers each · 59,520 numbers · 29.9s to embed on CPU</a:t>
+              <a:t>–  It says start Mon 14 Sep, deadline Sun 4 Oct</a:t>
             </a:r>
           </a:p>
           <a:p>
             <a:pPr lvl="1">
               <a:spcAft>
-                <a:spcPts val="1100"/>
+                <a:spcPts val="1400"/>
               </a:spcAft>
-              <a:defRPr sz="1600" b="0">
+              <a:defRPr sz="1700" b="0">
                 <a:solidFill>
                   <a:srgbClr val="666666"/>
                 </a:solidFill>
@@ -7381,15 +5751,15 @@
               </a:defRPr>
             </a:pPr>
             <a:r>
-              <a:t>–  Each entry holds three things: the numbers, the chunk text, its source</a:t>
+              <a:t>–  I actually started Mon 21 Sep</a:t>
             </a:r>
           </a:p>
           <a:p>
             <a:pPr>
               <a:spcAft>
-                <a:spcPts val="1100"/>
+                <a:spcPts val="1400"/>
               </a:spcAft>
-              <a:defRPr sz="1900" b="1">
+              <a:defRPr sz="2000" b="1">
                 <a:solidFill>
                   <a:srgbClr val="1A1A1A"/>
                 </a:solidFill>
@@ -7397,47 +5767,15 @@
               </a:defRPr>
             </a:pPr>
             <a:r>
-              <a:t>Search is a for loop over the cosine similarity function from Monday</a:t>
-            </a:r>
-          </a:p>
-          <a:p>
-            <a:pPr lvl="1">
-              <a:spcAft>
-                <a:spcPts val="1100"/>
-              </a:spcAft>
-              <a:defRPr sz="1600" b="0">
-                <a:solidFill>
-                  <a:srgbClr val="666666"/>
-                </a:solidFill>
-                <a:latin typeface="Segoe UI"/>
-              </a:defRPr>
-            </a:pPr>
-            <a:r>
-              <a:t>–  Embedding the question: ~27ms — a fixed cost, does not grow</a:t>
-            </a:r>
-          </a:p>
-          <a:p>
-            <a:pPr lvl="1">
-              <a:spcAft>
-                <a:spcPts val="1100"/>
-              </a:spcAft>
-              <a:defRPr sz="1600" b="0">
-                <a:solidFill>
-                  <a:srgbClr val="666666"/>
-                </a:solidFill>
-                <a:latin typeface="Segoe UI"/>
-              </a:defRPr>
-            </a:pPr>
-            <a:r>
-              <a:t>–  Scanning all 155 chunks: ~15ms — this is the part that grows</a:t>
+              <a:t>So my weeks are 21–27 Sep, 28 Sep–4 Oct, 5–11 Oct</a:t>
             </a:r>
           </a:p>
           <a:p>
             <a:pPr>
               <a:spcAft>
-                <a:spcPts val="1100"/>
+                <a:spcPts val="1400"/>
               </a:spcAft>
-              <a:defRPr sz="1900" b="0">
+              <a:defRPr sz="2000" b="0">
                 <a:solidFill>
                   <a:srgbClr val="1A1A1A"/>
                 </a:solidFill>
@@ -7445,7 +5783,23 @@
               </a:defRPr>
             </a:pPr>
             <a:r>
-              <a:t>•  Deliberately built before touching Chroma, so I know exactly which loop it replaces</a:t>
+              <a:t>•  That puts your 4 Oct deadline at the end of my Week 2</a:t>
+            </a:r>
+          </a:p>
+          <a:p>
+            <a:pPr>
+              <a:spcAft>
+                <a:spcPts val="1400"/>
+              </a:spcAft>
+              <a:defRPr sz="2000" b="1">
+                <a:solidFill>
+                  <a:srgbClr val="1A1A1A"/>
+                </a:solidFill>
+                <a:latin typeface="Segoe UI"/>
+              </a:defRPr>
+            </a:pPr>
+            <a:r>
+              <a:t>Does the deadline move to 11 Oct, or stay at 4 Oct?</a:t>
             </a:r>
           </a:p>
         </p:txBody>
@@ -7458,7 +5812,7 @@
         </p:nvSpPr>
         <p:spPr>
           <a:xfrm>
-            <a:off x="777240" y="6053328"/>
+            <a:off x="777240" y="6035040"/>
             <a:ext cx="10637215" cy="457200"/>
           </a:xfrm>
           <a:prstGeom prst="rect">
@@ -7481,7 +5835,7 @@
               </a:defRPr>
             </a:pPr>
             <a:r>
-              <a:t>A vector database stores the same three things — the only difference is how it searches them</a:t>
+              <a:t>Your brief says adjusting scope is easy in week 1 and hard on the final Sunday — so I'm asking now</a:t>
             </a:r>
           </a:p>
         </p:txBody>
@@ -7494,7 +5848,7 @@
 </p:sld>
 </file>
 
-<file path=ppt/slides/slide13.xml><?xml version="1.0" encoding="utf-8"?>
+<file path=ppt/slides/slide4.xml><?xml version="1.0" encoding="utf-8"?>
 <p:sld xmlns:a="http://schemas.openxmlformats.org/drawingml/2006/main" xmlns:p="http://schemas.openxmlformats.org/presentationml/2006/main" xmlns:r="http://schemas.openxmlformats.org/officeDocument/2006/relationships">
   <p:cSld>
     <p:spTree>
@@ -7535,7 +5889,7 @@
               </a:defRPr>
             </a:pPr>
             <a:r>
-              <a:t>FRI</a:t>
+              <a:t>MON–TUE</a:t>
             </a:r>
           </a:p>
         </p:txBody>
@@ -7571,7 +5925,7 @@
               </a:defRPr>
             </a:pPr>
             <a:r>
-              <a:t>What the database actually buys us</a:t>
+              <a:t>Embeddings: does this actually work?</a:t>
             </a:r>
           </a:p>
         </p:txBody>
@@ -7628,8 +5982,8 @@
         </p:nvSpPr>
         <p:spPr>
           <a:xfrm>
-            <a:off x="777240" y="1956816"/>
-            <a:ext cx="10637215" cy="822960"/>
+            <a:off x="777240" y="1810512"/>
+            <a:ext cx="10637215" cy="365760"/>
           </a:xfrm>
           <a:prstGeom prst="rect">
             <a:avLst/>
@@ -7643,29 +5997,255 @@
           <a:lstStyle/>
           <a:p>
             <a:pPr>
-              <a:defRPr sz="3400" b="1">
+              <a:defRPr sz="1600">
                 <a:solidFill>
-                  <a:srgbClr val="1E7B3C"/>
+                  <a:srgbClr val="666666"/>
                 </a:solidFill>
                 <a:latin typeface="Segoe UI"/>
               </a:defRPr>
             </a:pPr>
             <a:r>
-              <a:t>It is less correct, and far faster</a:t>
-            </a:r>
-          </a:p>
-        </p:txBody>
-      </p:sp>
-      <p:sp>
-        <p:nvSpPr>
-          <p:cNvPr id="6" name="TextBox 5"/>
+              <a:t>I chose a free local model (all-MiniLM-L6-v2) so re-running experiments costs nothing.</a:t>
+            </a:r>
+          </a:p>
+        </p:txBody>
+      </p:sp>
+      <p:graphicFrame>
+        <p:nvGraphicFramePr>
+          <p:cNvPr id="6" name="Table 5"/>
+          <p:cNvGraphicFramePr>
+            <a:graphicFrameLocks noGrp="1"/>
+          </p:cNvGraphicFramePr>
+          <p:nvPr/>
+        </p:nvGraphicFramePr>
+        <p:xfrm>
+          <a:off x="777240" y="2313432"/>
+          <a:ext cx="10637214" cy="1682496"/>
+        </p:xfrm>
+        <a:graphic>
+          <a:graphicData uri="http://schemas.openxmlformats.org/drawingml/2006/table">
+            <a:tbl>
+              <a:tblPr firstRow="1" bandRow="1">
+                <a:tableStyleId>{5C22544A-7EE6-4342-B048-85BDC9FD1C3A}</a:tableStyleId>
+              </a:tblPr>
+              <a:tblGrid>
+                <a:gridCol w="8611078"/>
+                <a:gridCol w="2026136"/>
+              </a:tblGrid>
+              <a:tr h="420624">
+                <a:tc>
+                  <a:txBody>
+                    <a:bodyPr/>
+                    <a:lstStyle/>
+                    <a:p>
+                      <a:pPr>
+                        <a:defRPr sz="1500" b="1">
+                          <a:solidFill>
+                            <a:srgbClr val="FFFFFF"/>
+                          </a:solidFill>
+                          <a:latin typeface="Segoe UI"/>
+                        </a:defRPr>
+                      </a:pPr>
+                      <a:r>
+                        <a:t>what I compared</a:t>
+                      </a:r>
+                    </a:p>
+                  </a:txBody>
+                  <a:tcPr>
+                    <a:solidFill>
+                      <a:srgbClr val="1F4E79"/>
+                    </a:solidFill>
+                  </a:tcPr>
+                </a:tc>
+                <a:tc>
+                  <a:txBody>
+                    <a:bodyPr/>
+                    <a:lstStyle/>
+                    <a:p>
+                      <a:pPr>
+                        <a:defRPr sz="1500" b="1">
+                          <a:solidFill>
+                            <a:srgbClr val="FFFFFF"/>
+                          </a:solidFill>
+                          <a:latin typeface="Segoe UI"/>
+                        </a:defRPr>
+                      </a:pPr>
+                      <a:r>
+                        <a:t>score</a:t>
+                      </a:r>
+                    </a:p>
+                  </a:txBody>
+                  <a:tcPr>
+                    <a:solidFill>
+                      <a:srgbClr val="1F4E79"/>
+                    </a:solidFill>
+                  </a:tcPr>
+                </a:tc>
+              </a:tr>
+              <a:tr h="420624">
+                <a:tc>
+                  <a:txBody>
+                    <a:bodyPr/>
+                    <a:lstStyle/>
+                    <a:p>
+                      <a:pPr>
+                        <a:defRPr sz="1500" b="0">
+                          <a:solidFill>
+                            <a:srgbClr val="1A1A1A"/>
+                          </a:solidFill>
+                          <a:latin typeface="Segoe UI"/>
+                        </a:defRPr>
+                      </a:pPr>
+                      <a:r>
+                        <a:t>Three sentences that all mean "I bake at weekends"</a:t>
+                      </a:r>
+                    </a:p>
+                  </a:txBody>
+                  <a:tcPr>
+                    <a:solidFill>
+                      <a:srgbClr val="FFFFFF"/>
+                    </a:solidFill>
+                  </a:tcPr>
+                </a:tc>
+                <a:tc>
+                  <a:txBody>
+                    <a:bodyPr/>
+                    <a:lstStyle/>
+                    <a:p>
+                      <a:pPr>
+                        <a:defRPr sz="1500" b="0">
+                          <a:solidFill>
+                            <a:srgbClr val="1A1A1A"/>
+                          </a:solidFill>
+                          <a:latin typeface="Consolas"/>
+                        </a:defRPr>
+                      </a:pPr>
+                      <a:r>
+                        <a:t>0.617</a:t>
+                      </a:r>
+                    </a:p>
+                  </a:txBody>
+                  <a:tcPr>
+                    <a:solidFill>
+                      <a:srgbClr val="FFFFFF"/>
+                    </a:solidFill>
+                  </a:tcPr>
+                </a:tc>
+              </a:tr>
+              <a:tr h="420624">
+                <a:tc>
+                  <a:txBody>
+                    <a:bodyPr/>
+                    <a:lstStyle/>
+                    <a:p>
+                      <a:pPr>
+                        <a:defRPr sz="1500" b="0">
+                          <a:solidFill>
+                            <a:srgbClr val="1A1A1A"/>
+                          </a:solidFill>
+                          <a:latin typeface="Segoe UI"/>
+                        </a:defRPr>
+                      </a:pPr>
+                      <a:r>
+                        <a:t>Three sentences on unrelated topics</a:t>
+                      </a:r>
+                    </a:p>
+                  </a:txBody>
+                  <a:tcPr>
+                    <a:solidFill>
+                      <a:srgbClr val="FFFFFF"/>
+                    </a:solidFill>
+                  </a:tcPr>
+                </a:tc>
+                <a:tc>
+                  <a:txBody>
+                    <a:bodyPr/>
+                    <a:lstStyle/>
+                    <a:p>
+                      <a:pPr>
+                        <a:defRPr sz="1500" b="0">
+                          <a:solidFill>
+                            <a:srgbClr val="1A1A1A"/>
+                          </a:solidFill>
+                          <a:latin typeface="Consolas"/>
+                        </a:defRPr>
+                      </a:pPr>
+                      <a:r>
+                        <a:t>0.031</a:t>
+                      </a:r>
+                    </a:p>
+                  </a:txBody>
+                  <a:tcPr>
+                    <a:solidFill>
+                      <a:srgbClr val="FFFFFF"/>
+                    </a:solidFill>
+                  </a:tcPr>
+                </a:tc>
+              </a:tr>
+              <a:tr h="420624">
+                <a:tc>
+                  <a:txBody>
+                    <a:bodyPr/>
+                    <a:lstStyle/>
+                    <a:p>
+                      <a:pPr>
+                        <a:defRPr sz="1500" b="1">
+                          <a:solidFill>
+                            <a:srgbClr val="B32D2D"/>
+                          </a:solidFill>
+                          <a:latin typeface="Segoe UI"/>
+                        </a:defRPr>
+                      </a:pPr>
+                      <a:r>
+                        <a:t>"sourdough every weekend" vs "Saturdays, a loaf from scratch"</a:t>
+                      </a:r>
+                    </a:p>
+                  </a:txBody>
+                  <a:tcPr>
+                    <a:solidFill>
+                      <a:srgbClr val="F2F5F8"/>
+                    </a:solidFill>
+                  </a:tcPr>
+                </a:tc>
+                <a:tc>
+                  <a:txBody>
+                    <a:bodyPr/>
+                    <a:lstStyle/>
+                    <a:p>
+                      <a:pPr>
+                        <a:defRPr sz="1500" b="1">
+                          <a:solidFill>
+                            <a:srgbClr val="B32D2D"/>
+                          </a:solidFill>
+                          <a:latin typeface="Consolas"/>
+                        </a:defRPr>
+                      </a:pPr>
+                      <a:r>
+                        <a:t>0.618</a:t>
+                      </a:r>
+                    </a:p>
+                  </a:txBody>
+                  <a:tcPr>
+                    <a:solidFill>
+                      <a:srgbClr val="F2F5F8"/>
+                    </a:solidFill>
+                  </a:tcPr>
+                </a:tc>
+              </a:tr>
+            </a:tbl>
+          </a:graphicData>
+        </a:graphic>
+      </p:graphicFrame>
+      <p:sp>
+        <p:nvSpPr>
+          <p:cNvPr id="7" name="TextBox 6"/>
           <p:cNvSpPr txBox="1"/>
           <p:nvPr/>
         </p:nvSpPr>
         <p:spPr>
           <a:xfrm>
-            <a:off x="777240" y="3008376"/>
-            <a:ext cx="10637215" cy="3108960"/>
+            <a:off x="777240" y="6035040"/>
+            <a:ext cx="10637215" cy="457200"/>
           </a:xfrm>
           <a:prstGeom prst="rect">
             <a:avLst/>
@@ -7679,82 +6259,15 @@
           <a:lstStyle/>
           <a:p>
             <a:pPr>
-              <a:spcAft>
-                <a:spcPts val="1200"/>
-              </a:spcAft>
-              <a:defRPr sz="1700">
+              <a:defRPr sz="1200" i="1">
                 <a:solidFill>
-                  <a:srgbClr val="1A1A1A"/>
+                  <a:srgbClr val="666666"/>
                 </a:solidFill>
                 <a:latin typeface="Segoe UI"/>
               </a:defRPr>
             </a:pPr>
             <a:r>
-              <a:t>My for loop compares every chunk, so it cannot miss a match. It is exact by construction.</a:t>
-            </a:r>
-          </a:p>
-          <a:p>
-            <a:pPr>
-              <a:spcAft>
-                <a:spcPts val="1200"/>
-              </a:spcAft>
-              <a:defRPr sz="1700">
-                <a:solidFill>
-                  <a:srgbClr val="1A1A1A"/>
-                </a:solidFill>
-                <a:latin typeface="Segoe UI"/>
-              </a:defRPr>
-            </a:pPr>
-            <a:r>
-              <a:t>Chroma's index is approximate — it deliberately skips most comparisons.</a:t>
-            </a:r>
-          </a:p>
-          <a:p>
-            <a:pPr>
-              <a:spcAft>
-                <a:spcPts val="1200"/>
-              </a:spcAft>
-              <a:defRPr sz="1700">
-                <a:solidFill>
-                  <a:srgbClr val="1A1A1A"/>
-                </a:solidFill>
-                <a:latin typeface="Segoe UI"/>
-              </a:defRPr>
-            </a:pPr>
-            <a:r>
-              <a:t>It trades a small chance of missing a true match for search time that barely grows with corpus size.</a:t>
-            </a:r>
-          </a:p>
-          <a:p>
-            <a:pPr>
-              <a:spcAft>
-                <a:spcPts val="1200"/>
-              </a:spcAft>
-              <a:defRPr sz="1700">
-                <a:solidFill>
-                  <a:srgbClr val="1A1A1A"/>
-                </a:solidFill>
-                <a:latin typeface="Segoe UI"/>
-              </a:defRPr>
-            </a:pPr>
-            <a:r>
-              <a:t>Projected scan on my loop: 15ms now · 1.5s at 100x · 147s at 10,000x.</a:t>
-            </a:r>
-          </a:p>
-          <a:p>
-            <a:pPr>
-              <a:spcAft>
-                <a:spcPts val="1200"/>
-              </a:spcAft>
-              <a:defRPr sz="1700">
-                <a:solidFill>
-                  <a:srgbClr val="1A1A1A"/>
-                </a:solidFill>
-                <a:latin typeface="Segoe UI"/>
-              </a:defRPr>
-            </a:pPr>
-            <a:r>
-              <a:t>I had assumed "real database" meant "better". It means a different point on a speed/accuracy trade.</a:t>
+              <a:t>The highlighted pair shares no useful words at all — a keyword search would score it near zero</a:t>
             </a:r>
           </a:p>
         </p:txBody>
@@ -7767,7 +6280,7 @@
 </p:sld>
 </file>
 
-<file path=ppt/slides/slide14.xml><?xml version="1.0" encoding="utf-8"?>
+<file path=ppt/slides/slide5.xml><?xml version="1.0" encoding="utf-8"?>
 <p:sld xmlns:a="http://schemas.openxmlformats.org/drawingml/2006/main" xmlns:p="http://schemas.openxmlformats.org/presentationml/2006/main" xmlns:r="http://schemas.openxmlformats.org/officeDocument/2006/relationships">
   <p:cSld>
     <p:spTree>
@@ -7808,7 +6321,7 @@
               </a:defRPr>
             </a:pPr>
             <a:r>
-              <a:t>FRI</a:t>
+              <a:t>MON–TUE</a:t>
             </a:r>
           </a:p>
         </p:txBody>
@@ -7844,7 +6357,7 @@
               </a:defRPr>
             </a:pPr>
             <a:r>
-              <a:t>Testing a question with no answer in the notes</a:t>
+              <a:t>What an embedding is — in my own words</a:t>
             </a:r>
           </a:p>
         </p:txBody>
@@ -7893,329 +6406,130 @@
           </a:p>
         </p:txBody>
       </p:sp>
-      <p:graphicFrame>
-        <p:nvGraphicFramePr>
-          <p:cNvPr id="5" name="Table 4"/>
-          <p:cNvGraphicFramePr>
-            <a:graphicFrameLocks noGrp="1"/>
-          </p:cNvGraphicFramePr>
+      <p:sp>
+        <p:nvSpPr>
+          <p:cNvPr id="5" name="TextBox 4"/>
+          <p:cNvSpPr txBox="1"/>
           <p:nvPr/>
-        </p:nvGraphicFramePr>
-        <p:xfrm>
-          <a:off x="777240" y="1773936"/>
-          <a:ext cx="10637213" cy="1536192"/>
-        </p:xfrm>
-        <a:graphic>
-          <a:graphicData uri="http://schemas.openxmlformats.org/drawingml/2006/table">
-            <a:tbl>
-              <a:tblPr firstRow="1" bandRow="1">
-                <a:tableStyleId>{5C22544A-7EE6-4342-B048-85BDC9FD1C3A}</a:tableStyleId>
-              </a:tblPr>
-              <a:tblGrid>
-                <a:gridCol w="5318607"/>
-                <a:gridCol w="1636494"/>
-                <a:gridCol w="3682112"/>
-              </a:tblGrid>
-              <a:tr h="384048">
-                <a:tc>
-                  <a:txBody>
-                    <a:bodyPr/>
-                    <a:lstStyle/>
-                    <a:p>
-                      <a:pPr>
-                        <a:defRPr sz="1400" b="1">
-                          <a:solidFill>
-                            <a:srgbClr val="FFFFFF"/>
-                          </a:solidFill>
-                          <a:latin typeface="Segoe UI"/>
-                        </a:defRPr>
-                      </a:pPr>
-                      <a:r>
-                        <a:t>question</a:t>
-                      </a:r>
-                    </a:p>
-                  </a:txBody>
-                  <a:tcPr>
-                    <a:solidFill>
-                      <a:srgbClr val="1F4E79"/>
-                    </a:solidFill>
-                  </a:tcPr>
-                </a:tc>
-                <a:tc>
-                  <a:txBody>
-                    <a:bodyPr/>
-                    <a:lstStyle/>
-                    <a:p>
-                      <a:pPr>
-                        <a:defRPr sz="1400" b="1">
-                          <a:solidFill>
-                            <a:srgbClr val="FFFFFF"/>
-                          </a:solidFill>
-                          <a:latin typeface="Segoe UI"/>
-                        </a:defRPr>
-                      </a:pPr>
-                      <a:r>
-                        <a:t>best score</a:t>
-                      </a:r>
-                    </a:p>
-                  </a:txBody>
-                  <a:tcPr>
-                    <a:solidFill>
-                      <a:srgbClr val="1F4E79"/>
-                    </a:solidFill>
-                  </a:tcPr>
-                </a:tc>
-                <a:tc>
-                  <a:txBody>
-                    <a:bodyPr/>
-                    <a:lstStyle/>
-                    <a:p>
-                      <a:pPr>
-                        <a:defRPr sz="1400" b="1">
-                          <a:solidFill>
-                            <a:srgbClr val="FFFFFF"/>
-                          </a:solidFill>
-                          <a:latin typeface="Segoe UI"/>
-                        </a:defRPr>
-                      </a:pPr>
-                      <a:r>
-                        <a:t>what it matched</a:t>
-                      </a:r>
-                    </a:p>
-                  </a:txBody>
-                  <a:tcPr>
-                    <a:solidFill>
-                      <a:srgbClr val="1F4E79"/>
-                    </a:solidFill>
-                  </a:tcPr>
-                </a:tc>
-              </a:tr>
-              <a:tr h="384048">
-                <a:tc>
-                  <a:txBody>
-                    <a:bodyPr/>
-                    <a:lstStyle/>
-                    <a:p>
-                      <a:pPr>
-                        <a:defRPr sz="1300" b="0">
-                          <a:solidFill>
-                            <a:srgbClr val="1A1A1A"/>
-                          </a:solidFill>
-                          <a:latin typeface="Segoe UI"/>
-                        </a:defRPr>
-                      </a:pPr>
-                      <a:r>
-                        <a:t>"What time does the corner shop close on Sundays?"</a:t>
-                      </a:r>
-                    </a:p>
-                  </a:txBody>
-                  <a:tcPr>
-                    <a:solidFill>
-                      <a:srgbClr val="FFFFFF"/>
-                    </a:solidFill>
-                  </a:tcPr>
-                </a:tc>
-                <a:tc>
-                  <a:txBody>
-                    <a:bodyPr/>
-                    <a:lstStyle/>
-                    <a:p>
-                      <a:pPr>
-                        <a:defRPr sz="1300" b="0">
-                          <a:solidFill>
-                            <a:srgbClr val="1A1A1A"/>
-                          </a:solidFill>
-                          <a:latin typeface="Consolas"/>
-                        </a:defRPr>
-                      </a:pPr>
-                      <a:r>
-                        <a:t>0.3386</a:t>
-                      </a:r>
-                    </a:p>
-                  </a:txBody>
-                  <a:tcPr>
-                    <a:solidFill>
-                      <a:srgbClr val="FFFFFF"/>
-                    </a:solidFill>
-                  </a:tcPr>
-                </a:tc>
-                <a:tc>
-                  <a:txBody>
-                    <a:bodyPr/>
-                    <a:lstStyle/>
-                    <a:p>
-                      <a:pPr>
-                        <a:defRPr sz="1300" b="0">
-                          <a:solidFill>
-                            <a:srgbClr val="1A1A1A"/>
-                          </a:solidFill>
-                          <a:latin typeface="Consolas"/>
-                        </a:defRPr>
-                      </a:pPr>
-                      <a:r>
-                        <a:t>a schedule containing "Sun Oct 4"</a:t>
-                      </a:r>
-                    </a:p>
-                  </a:txBody>
-                  <a:tcPr>
-                    <a:solidFill>
-                      <a:srgbClr val="FFFFFF"/>
-                    </a:solidFill>
-                  </a:tcPr>
-                </a:tc>
-              </a:tr>
-              <a:tr h="384048">
-                <a:tc>
-                  <a:txBody>
-                    <a:bodyPr/>
-                    <a:lstStyle/>
-                    <a:p>
-                      <a:pPr>
-                        <a:defRPr sz="1300" b="0">
-                          <a:solidFill>
-                            <a:srgbClr val="1A1A1A"/>
-                          </a:solidFill>
-                          <a:latin typeface="Segoe UI"/>
-                        </a:defRPr>
-                      </a:pPr>
-                      <a:r>
-                        <a:t>Lowest score from a legitimate question</a:t>
-                      </a:r>
-                    </a:p>
-                  </a:txBody>
-                  <a:tcPr>
-                    <a:solidFill>
-                      <a:srgbClr val="FFFFFF"/>
-                    </a:solidFill>
-                  </a:tcPr>
-                </a:tc>
-                <a:tc>
-                  <a:txBody>
-                    <a:bodyPr/>
-                    <a:lstStyle/>
-                    <a:p>
-                      <a:pPr>
-                        <a:defRPr sz="1300" b="0">
-                          <a:solidFill>
-                            <a:srgbClr val="1A1A1A"/>
-                          </a:solidFill>
-                          <a:latin typeface="Consolas"/>
-                        </a:defRPr>
-                      </a:pPr>
-                      <a:r>
-                        <a:t>0.3655</a:t>
-                      </a:r>
-                    </a:p>
-                  </a:txBody>
-                  <a:tcPr>
-                    <a:solidFill>
-                      <a:srgbClr val="FFFFFF"/>
-                    </a:solidFill>
-                  </a:tcPr>
-                </a:tc>
-                <a:tc>
-                  <a:txBody>
-                    <a:bodyPr/>
-                    <a:lstStyle/>
-                    <a:p>
-                      <a:pPr>
-                        <a:defRPr sz="1300" b="0">
-                          <a:solidFill>
-                            <a:srgbClr val="1A1A1A"/>
-                          </a:solidFill>
-                          <a:latin typeface="Consolas"/>
-                        </a:defRPr>
-                      </a:pPr>
-                      <a:r>
-                        <a:t>a genuinely relevant passage</a:t>
-                      </a:r>
-                    </a:p>
-                  </a:txBody>
-                  <a:tcPr>
-                    <a:solidFill>
-                      <a:srgbClr val="FFFFFF"/>
-                    </a:solidFill>
-                  </a:tcPr>
-                </a:tc>
-              </a:tr>
-              <a:tr h="384048">
-                <a:tc>
-                  <a:txBody>
-                    <a:bodyPr/>
-                    <a:lstStyle/>
-                    <a:p>
-                      <a:pPr>
-                        <a:defRPr sz="1300" b="1">
-                          <a:solidFill>
-                            <a:srgbClr val="B32D2D"/>
-                          </a:solidFill>
-                          <a:latin typeface="Segoe UI"/>
-                        </a:defRPr>
-                      </a:pPr>
-                      <a:r>
-                        <a:t>Margin between them</a:t>
-                      </a:r>
-                    </a:p>
-                  </a:txBody>
-                  <a:tcPr>
-                    <a:solidFill>
-                      <a:srgbClr val="F2F5F8"/>
-                    </a:solidFill>
-                  </a:tcPr>
-                </a:tc>
-                <a:tc>
-                  <a:txBody>
-                    <a:bodyPr/>
-                    <a:lstStyle/>
-                    <a:p>
-                      <a:pPr>
-                        <a:defRPr sz="1300" b="1">
-                          <a:solidFill>
-                            <a:srgbClr val="B32D2D"/>
-                          </a:solidFill>
-                          <a:latin typeface="Consolas"/>
-                        </a:defRPr>
-                      </a:pPr>
-                      <a:r>
-                        <a:t>0.0269</a:t>
-                      </a:r>
-                    </a:p>
-                  </a:txBody>
-                  <a:tcPr>
-                    <a:solidFill>
-                      <a:srgbClr val="F2F5F8"/>
-                    </a:solidFill>
-                  </a:tcPr>
-                </a:tc>
-                <a:tc>
-                  <a:txBody>
-                    <a:bodyPr/>
-                    <a:lstStyle/>
-                    <a:p>
-                      <a:pPr>
-                        <a:defRPr sz="1300" b="1">
-                          <a:solidFill>
-                            <a:srgbClr val="B32D2D"/>
-                          </a:solidFill>
-                          <a:latin typeface="Consolas"/>
-                        </a:defRPr>
-                      </a:pPr>
-                      <a:r>
-                        <a:t>≈ 20x narrower than Monday suggested</a:t>
-                      </a:r>
-                    </a:p>
-                  </a:txBody>
-                  <a:tcPr>
-                    <a:solidFill>
-                      <a:srgbClr val="F2F5F8"/>
-                    </a:solidFill>
-                  </a:tcPr>
-                </a:tc>
-              </a:tr>
-            </a:tbl>
-          </a:graphicData>
-        </a:graphic>
-      </p:graphicFrame>
+        </p:nvSpPr>
+        <p:spPr>
+          <a:xfrm>
+            <a:off x="777240" y="1810512"/>
+            <a:ext cx="10637215" cy="3931920"/>
+          </a:xfrm>
+          <a:prstGeom prst="rect">
+            <a:avLst/>
+          </a:prstGeom>
+          <a:noFill/>
+        </p:spPr>
+        <p:txBody>
+          <a:bodyPr wrap="square">
+            <a:spAutoFit/>
+          </a:bodyPr>
+          <a:lstStyle/>
+          <a:p>
+            <a:pPr>
+              <a:spcAft>
+                <a:spcPts val="1400"/>
+              </a:spcAft>
+              <a:defRPr sz="2000" b="0">
+                <a:solidFill>
+                  <a:srgbClr val="1A1A1A"/>
+                </a:solidFill>
+                <a:latin typeface="Segoe UI"/>
+              </a:defRPr>
+            </a:pPr>
+            <a:r>
+              <a:t>•  [ I fill this in before presenting ]</a:t>
+            </a:r>
+          </a:p>
+          <a:p>
+            <a:pPr>
+              <a:defRPr sz="800"/>
+            </a:pPr>
+          </a:p>
+          <a:p>
+            <a:pPr>
+              <a:spcAft>
+                <a:spcPts val="1400"/>
+              </a:spcAft>
+              <a:defRPr sz="2000" b="1">
+                <a:solidFill>
+                  <a:srgbClr val="1A1A1A"/>
+                </a:solidFill>
+                <a:latin typeface="Segoe UI"/>
+              </a:defRPr>
+            </a:pPr>
+            <a:r>
+              <a:t>Your self-check: explain it without using "vector" as a cop-out</a:t>
+            </a:r>
+          </a:p>
+          <a:p>
+            <a:pPr>
+              <a:spcAft>
+                <a:spcPts val="1400"/>
+              </a:spcAft>
+              <a:defRPr sz="2000" b="0">
+                <a:solidFill>
+                  <a:srgbClr val="1A1A1A"/>
+                </a:solidFill>
+                <a:latin typeface="Segoe UI"/>
+              </a:defRPr>
+            </a:pPr>
+            <a:r>
+              <a:t>•  What I have to work with:</a:t>
+            </a:r>
+          </a:p>
+          <a:p>
+            <a:pPr lvl="1">
+              <a:spcAft>
+                <a:spcPts val="1400"/>
+              </a:spcAft>
+              <a:defRPr sz="1700" b="0">
+                <a:solidFill>
+                  <a:srgbClr val="666666"/>
+                </a:solidFill>
+                <a:latin typeface="Segoe UI"/>
+              </a:defRPr>
+            </a:pPr>
+            <a:r>
+              <a:t>–  7 characters in and 196 characters in both give exactly 384 numbers out</a:t>
+            </a:r>
+          </a:p>
+          <a:p>
+            <a:pPr lvl="1">
+              <a:spcAft>
+                <a:spcPts val="1400"/>
+              </a:spcAft>
+              <a:defRPr sz="1700" b="0">
+                <a:solidFill>
+                  <a:srgbClr val="666666"/>
+                </a:solidFill>
+                <a:latin typeface="Segoe UI"/>
+              </a:defRPr>
+            </a:pPr>
+            <a:r>
+              <a:t>–  Two sentences with no shared words scored 0.618</a:t>
+            </a:r>
+          </a:p>
+          <a:p>
+            <a:pPr lvl="1">
+              <a:spcAft>
+                <a:spcPts val="1400"/>
+              </a:spcAft>
+              <a:defRPr sz="1700" b="0">
+                <a:solidFill>
+                  <a:srgbClr val="666666"/>
+                </a:solidFill>
+                <a:latin typeface="Segoe UI"/>
+              </a:defRPr>
+            </a:pPr>
+            <a:r>
+              <a:t>–  The numbers mean nothing alone — only their positions relative to each other</a:t>
+            </a:r>
+          </a:p>
+        </p:txBody>
+      </p:sp>
       <p:sp>
         <p:nvSpPr>
           <p:cNvPr id="6" name="TextBox 5"/>
@@ -8224,7 +6538,7 @@
         </p:nvSpPr>
         <p:spPr>
           <a:xfrm>
-            <a:off x="777240" y="6053328"/>
+            <a:off x="777240" y="6035040"/>
             <a:ext cx="10637215" cy="457200"/>
           </a:xfrm>
           <a:prstGeom prst="rect">
@@ -8247,7 +6561,7 @@
               </a:defRPr>
             </a:pPr>
             <a:r>
-              <a:t>Monday's clean 0.617-vs-0.031 gap does not survive contact with a real corpus</a:t>
+              <a:t>Left blank on purpose — this one has to be mine, or it falls apart when you ask a follow-up</a:t>
             </a:r>
           </a:p>
         </p:txBody>
@@ -8260,7 +6574,7 @@
 </p:sld>
 </file>
 
-<file path=ppt/slides/slide15.xml><?xml version="1.0" encoding="utf-8"?>
+<file path=ppt/slides/slide6.xml><?xml version="1.0" encoding="utf-8"?>
 <p:sld xmlns:a="http://schemas.openxmlformats.org/drawingml/2006/main" xmlns:p="http://schemas.openxmlformats.org/presentationml/2006/main" xmlns:r="http://schemas.openxmlformats.org/officeDocument/2006/relationships">
   <p:cSld>
     <p:spTree>
@@ -8301,7 +6615,7 @@
               </a:defRPr>
             </a:pPr>
             <a:r>
-              <a:t>FRI</a:t>
+              <a:t>WED–THU</a:t>
             </a:r>
           </a:p>
         </p:txBody>
@@ -8337,7 +6651,7 @@
               </a:defRPr>
             </a:pPr>
             <a:r>
-              <a:t>Semantic search versus keyword search</a:t>
+              <a:t>Why chunking needs care: a fact that vanished</a:t>
             </a:r>
           </a:p>
         </p:txBody>
@@ -8394,8 +6708,8 @@
         </p:nvSpPr>
         <p:spPr>
           <a:xfrm>
-            <a:off x="777240" y="1773936"/>
-            <a:ext cx="10637215" cy="4023360"/>
+            <a:off x="777240" y="1810512"/>
+            <a:ext cx="10637215" cy="365760"/>
           </a:xfrm>
           <a:prstGeom prst="rect">
             <a:avLst/>
@@ -8409,26 +6723,7 @@
           <a:lstStyle/>
           <a:p>
             <a:pPr>
-              <a:spcAft>
-                <a:spcPts val="1100"/>
-              </a:spcAft>
-              <a:defRPr sz="1900" b="0">
-                <a:solidFill>
-                  <a:srgbClr val="1A1A1A"/>
-                </a:solidFill>
-                <a:latin typeface="Segoe UI"/>
-              </a:defRPr>
-            </a:pPr>
-            <a:r>
-              <a:t>•  Question deliberately phrased to avoid the vocabulary of its own answer:</a:t>
-            </a:r>
-          </a:p>
-          <a:p>
-            <a:pPr lvl="1">
-              <a:spcAft>
-                <a:spcPts val="1100"/>
-              </a:spcAft>
-              <a:defRPr sz="1600" b="0">
+              <a:defRPr sz="1600">
                 <a:solidFill>
                   <a:srgbClr val="666666"/>
                 </a:solidFill>
@@ -8436,116 +6731,246 @@
               </a:defRPr>
             </a:pPr>
             <a:r>
-              <a:t>–  "Why would splitting a document in the wrong place lose information?"</a:t>
-            </a:r>
-          </a:p>
-          <a:p>
-            <a:pPr>
-              <a:spcAft>
-                <a:spcPts val="1100"/>
-              </a:spcAft>
-              <a:defRPr sz="1900" b="1">
-                <a:solidFill>
-                  <a:srgbClr val="1A1A1A"/>
-                </a:solidFill>
-                <a:latin typeface="Segoe UI"/>
-              </a:defRPr>
-            </a:pPr>
-            <a:r>
-              <a:t>Overlap between the two top-3 result lists: 0 of 3</a:t>
-            </a:r>
-          </a:p>
-          <a:p>
-            <a:pPr>
-              <a:spcAft>
-                <a:spcPts val="1100"/>
-              </a:spcAft>
-              <a:defRPr sz="1900" b="1">
-                <a:solidFill>
-                  <a:srgbClr val="1A1A1A"/>
-                </a:solidFill>
-                <a:latin typeface="Segoe UI"/>
-              </a:defRPr>
-            </a:pPr>
-            <a:r>
-              <a:t>Every keyword result tied at exactly 0.2857</a:t>
-            </a:r>
-          </a:p>
-          <a:p>
-            <a:pPr lvl="1">
-              <a:spcAft>
-                <a:spcPts val="1100"/>
-              </a:spcAft>
-              <a:defRPr sz="1600" b="0">
-                <a:solidFill>
-                  <a:srgbClr val="666666"/>
-                </a:solidFill>
-                <a:latin typeface="Segoe UI"/>
-              </a:defRPr>
-            </a:pPr>
-            <a:r>
-              <a:t>–  It found the same shallow word-hit count everywhere and could not rank between them</a:t>
-            </a:r>
-          </a:p>
-          <a:p>
-            <a:pPr lvl="1">
-              <a:spcAft>
-                <a:spcPts val="1100"/>
-              </a:spcAft>
-              <a:defRPr sz="1600" b="0">
-                <a:solidFill>
-                  <a:srgbClr val="666666"/>
-                </a:solidFill>
-                <a:latin typeface="Segoe UI"/>
-              </a:defRPr>
-            </a:pPr>
-            <a:r>
-              <a:t>–  Its ordering was arbitrary; the semantic scores were distinct and ordered</a:t>
-            </a:r>
-          </a:p>
-          <a:p>
-            <a:pPr>
-              <a:spcAft>
-                <a:spcPts val="1100"/>
-              </a:spcAft>
-              <a:defRPr sz="1900" b="0">
-                <a:solidFill>
-                  <a:srgbClr val="1A1A1A"/>
-                </a:solidFill>
-                <a:latin typeface="Segoe UI"/>
-              </a:defRPr>
-            </a:pPr>
-            <a:r>
-              <a:t>•  Honest limit: disagreeing proves they rank differently, not that one ranked better</a:t>
-            </a:r>
-          </a:p>
-          <a:p>
-            <a:pPr lvl="1">
-              <a:spcAft>
-                <a:spcPts val="1100"/>
-              </a:spcAft>
-              <a:defRPr sz="1600" b="0">
-                <a:solidFill>
-                  <a:srgbClr val="666666"/>
-                </a:solidFill>
-                <a:latin typeface="Segoe UI"/>
-              </a:defRPr>
-            </a:pPr>
-            <a:r>
-              <a:t>–  Judging that means reading the chunks — worth redoing on my own notes</a:t>
-            </a:r>
-          </a:p>
-        </p:txBody>
-      </p:sp>
-      <p:sp>
-        <p:nvSpPr>
-          <p:cNvPr id="6" name="TextBox 5"/>
+              <a:t>I hid one sentence so that a 500-character cut would land in the middle of it.</a:t>
+            </a:r>
+          </a:p>
+        </p:txBody>
+      </p:sp>
+      <p:graphicFrame>
+        <p:nvGraphicFramePr>
+          <p:cNvPr id="6" name="Table 5"/>
+          <p:cNvGraphicFramePr>
+            <a:graphicFrameLocks noGrp="1"/>
+          </p:cNvGraphicFramePr>
+          <p:nvPr/>
+        </p:nvGraphicFramePr>
+        <p:xfrm>
+          <a:off x="777240" y="2313432"/>
+          <a:ext cx="10637215" cy="1682496"/>
+        </p:xfrm>
+        <a:graphic>
+          <a:graphicData uri="http://schemas.openxmlformats.org/drawingml/2006/table">
+            <a:tbl>
+              <a:tblPr firstRow="1" bandRow="1">
+                <a:tableStyleId>{5C22544A-7EE6-4342-B048-85BDC9FD1C3A}</a:tableStyleId>
+              </a:tblPr>
+              <a:tblGrid>
+                <a:gridCol w="6382329"/>
+                <a:gridCol w="4254886"/>
+              </a:tblGrid>
+              <a:tr h="420624">
+                <a:tc>
+                  <a:txBody>
+                    <a:bodyPr/>
+                    <a:lstStyle/>
+                    <a:p>
+                      <a:pPr>
+                        <a:defRPr sz="1500" b="1">
+                          <a:solidFill>
+                            <a:srgbClr val="FFFFFF"/>
+                          </a:solidFill>
+                          <a:latin typeface="Segoe UI"/>
+                        </a:defRPr>
+                      </a:pPr>
+                      <a:r>
+                        <a:t>how I cut the document</a:t>
+                      </a:r>
+                    </a:p>
+                  </a:txBody>
+                  <a:tcPr>
+                    <a:solidFill>
+                      <a:srgbClr val="1F4E79"/>
+                    </a:solidFill>
+                  </a:tcPr>
+                </a:tc>
+                <a:tc>
+                  <a:txBody>
+                    <a:bodyPr/>
+                    <a:lstStyle/>
+                    <a:p>
+                      <a:pPr>
+                        <a:defRPr sz="1500" b="1">
+                          <a:solidFill>
+                            <a:srgbClr val="FFFFFF"/>
+                          </a:solidFill>
+                          <a:latin typeface="Segoe UI"/>
+                        </a:defRPr>
+                      </a:pPr>
+                      <a:r>
+                        <a:t>can the fact be found?</a:t>
+                      </a:r>
+                    </a:p>
+                  </a:txBody>
+                  <a:tcPr>
+                    <a:solidFill>
+                      <a:srgbClr val="1F4E79"/>
+                    </a:solidFill>
+                  </a:tcPr>
+                </a:tc>
+              </a:tr>
+              <a:tr h="420624">
+                <a:tc>
+                  <a:txBody>
+                    <a:bodyPr/>
+                    <a:lstStyle/>
+                    <a:p>
+                      <a:pPr>
+                        <a:defRPr sz="1500" b="1">
+                          <a:solidFill>
+                            <a:srgbClr val="B32D2D"/>
+                          </a:solidFill>
+                          <a:latin typeface="Segoe UI"/>
+                        </a:defRPr>
+                      </a:pPr>
+                      <a:r>
+                        <a:t>500 characters, no overlap</a:t>
+                      </a:r>
+                    </a:p>
+                  </a:txBody>
+                  <a:tcPr>
+                    <a:solidFill>
+                      <a:srgbClr val="F2F5F8"/>
+                    </a:solidFill>
+                  </a:tcPr>
+                </a:tc>
+                <a:tc>
+                  <a:txBody>
+                    <a:bodyPr/>
+                    <a:lstStyle/>
+                    <a:p>
+                      <a:pPr>
+                        <a:defRPr sz="1500" b="1">
+                          <a:solidFill>
+                            <a:srgbClr val="B32D2D"/>
+                          </a:solidFill>
+                          <a:latin typeface="Consolas"/>
+                        </a:defRPr>
+                      </a:pPr>
+                      <a:r>
+                        <a:t>NO — it is in no chunk</a:t>
+                      </a:r>
+                    </a:p>
+                  </a:txBody>
+                  <a:tcPr>
+                    <a:solidFill>
+                      <a:srgbClr val="F2F5F8"/>
+                    </a:solidFill>
+                  </a:tcPr>
+                </a:tc>
+              </a:tr>
+              <a:tr h="420624">
+                <a:tc>
+                  <a:txBody>
+                    <a:bodyPr/>
+                    <a:lstStyle/>
+                    <a:p>
+                      <a:pPr>
+                        <a:defRPr sz="1500" b="0">
+                          <a:solidFill>
+                            <a:srgbClr val="1A1A1A"/>
+                          </a:solidFill>
+                          <a:latin typeface="Segoe UI"/>
+                        </a:defRPr>
+                      </a:pPr>
+                      <a:r>
+                        <a:t>500 characters, cut at sentence ends</a:t>
+                      </a:r>
+                    </a:p>
+                  </a:txBody>
+                  <a:tcPr>
+                    <a:solidFill>
+                      <a:srgbClr val="FFFFFF"/>
+                    </a:solidFill>
+                  </a:tcPr>
+                </a:tc>
+                <a:tc>
+                  <a:txBody>
+                    <a:bodyPr/>
+                    <a:lstStyle/>
+                    <a:p>
+                      <a:pPr>
+                        <a:defRPr sz="1500" b="0">
+                          <a:solidFill>
+                            <a:srgbClr val="1A1A1A"/>
+                          </a:solidFill>
+                          <a:latin typeface="Consolas"/>
+                        </a:defRPr>
+                      </a:pPr>
+                      <a:r>
+                        <a:t>yes</a:t>
+                      </a:r>
+                    </a:p>
+                  </a:txBody>
+                  <a:tcPr>
+                    <a:solidFill>
+                      <a:srgbClr val="FFFFFF"/>
+                    </a:solidFill>
+                  </a:tcPr>
+                </a:tc>
+              </a:tr>
+              <a:tr h="420624">
+                <a:tc>
+                  <a:txBody>
+                    <a:bodyPr/>
+                    <a:lstStyle/>
+                    <a:p>
+                      <a:pPr>
+                        <a:defRPr sz="1500" b="0">
+                          <a:solidFill>
+                            <a:srgbClr val="1A1A1A"/>
+                          </a:solidFill>
+                          <a:latin typeface="Segoe UI"/>
+                        </a:defRPr>
+                      </a:pPr>
+                      <a:r>
+                        <a:t>500 characters, with 100 overlapping</a:t>
+                      </a:r>
+                    </a:p>
+                  </a:txBody>
+                  <a:tcPr>
+                    <a:solidFill>
+                      <a:srgbClr val="FFFFFF"/>
+                    </a:solidFill>
+                  </a:tcPr>
+                </a:tc>
+                <a:tc>
+                  <a:txBody>
+                    <a:bodyPr/>
+                    <a:lstStyle/>
+                    <a:p>
+                      <a:pPr>
+                        <a:defRPr sz="1500" b="0">
+                          <a:solidFill>
+                            <a:srgbClr val="1A1A1A"/>
+                          </a:solidFill>
+                          <a:latin typeface="Consolas"/>
+                        </a:defRPr>
+                      </a:pPr>
+                      <a:r>
+                        <a:t>yes</a:t>
+                      </a:r>
+                    </a:p>
+                  </a:txBody>
+                  <a:tcPr>
+                    <a:solidFill>
+                      <a:srgbClr val="FFFFFF"/>
+                    </a:solidFill>
+                  </a:tcPr>
+                </a:tc>
+              </a:tr>
+            </a:tbl>
+          </a:graphicData>
+        </a:graphic>
+      </p:graphicFrame>
+      <p:sp>
+        <p:nvSpPr>
+          <p:cNvPr id="7" name="TextBox 6"/>
           <p:cNvSpPr txBox="1"/>
           <p:nvPr/>
         </p:nvSpPr>
         <p:spPr>
           <a:xfrm>
-            <a:off x="777240" y="6053328"/>
+            <a:off x="777240" y="6035040"/>
             <a:ext cx="10637215" cy="457200"/>
           </a:xfrm>
           <a:prstGeom prst="rect">
@@ -8568,7 +6993,7 @@
               </a:defRPr>
             </a:pPr>
             <a:r>
-              <a:t>The keyword baseline exists for contrast only — it is not part of the pipeline</a:t>
+              <a:t>Overlap means each chunk repeats the last 100 characters of the one before it</a:t>
             </a:r>
           </a:p>
         </p:txBody>
@@ -8581,7 +7006,7 @@
 </p:sld>
 </file>
 
-<file path=ppt/slides/slide16.xml><?xml version="1.0" encoding="utf-8"?>
+<file path=ppt/slides/slide7.xml><?xml version="1.0" encoding="utf-8"?>
 <p:sld xmlns:a="http://schemas.openxmlformats.org/drawingml/2006/main" xmlns:p="http://schemas.openxmlformats.org/presentationml/2006/main" xmlns:r="http://schemas.openxmlformats.org/officeDocument/2006/relationships">
   <p:cSld>
     <p:spTree>
@@ -8622,7 +7047,7 @@
               </a:defRPr>
             </a:pPr>
             <a:r>
-              <a:t>FRI</a:t>
+              <a:t>WED–THU</a:t>
             </a:r>
           </a:p>
         </p:txBody>
@@ -8658,7 +7083,7 @@
               </a:defRPr>
             </a:pPr>
             <a:r>
-              <a:t>Two bugs found by actually running it</a:t>
+              <a:t>Picking a chunk size</a:t>
             </a:r>
           </a:p>
         </p:txBody>
@@ -8715,8 +7140,8 @@
         </p:nvSpPr>
         <p:spPr>
           <a:xfrm>
-            <a:off x="777240" y="1773936"/>
-            <a:ext cx="10637215" cy="4023360"/>
+            <a:off x="777240" y="1810512"/>
+            <a:ext cx="10637215" cy="365760"/>
           </a:xfrm>
           <a:prstGeom prst="rect">
             <a:avLst/>
@@ -8730,26 +7155,7 @@
           <a:lstStyle/>
           <a:p>
             <a:pPr>
-              <a:spcAft>
-                <a:spcPts val="1100"/>
-              </a:spcAft>
-              <a:defRPr sz="1900" b="1">
-                <a:solidFill>
-                  <a:srgbClr val="1A1A1A"/>
-                </a:solidFill>
-                <a:latin typeface="Segoe UI"/>
-              </a:defRPr>
-            </a:pPr>
-            <a:r>
-              <a:t>A single → character crashed the script</a:t>
-            </a:r>
-          </a:p>
-          <a:p>
-            <a:pPr lvl="1">
-              <a:spcAft>
-                <a:spcPts val="1100"/>
-              </a:spcAft>
-              <a:defRPr sz="1600" b="0">
+              <a:defRPr sz="1600">
                 <a:solidFill>
                   <a:srgbClr val="666666"/>
                 </a:solidFill>
@@ -8757,116 +7163,343 @@
               </a:defRPr>
             </a:pPr>
             <a:r>
-              <a:t>–  The Windows console defaults to cp1252 and cannot encode arrows, em dashes or curly quotes</a:t>
-            </a:r>
-          </a:p>
-          <a:p>
-            <a:pPr lvl="1">
-              <a:spcAft>
-                <a:spcPts val="1100"/>
-              </a:spcAft>
-              <a:defRPr sz="1600" b="0">
-                <a:solidFill>
-                  <a:srgbClr val="666666"/>
-                </a:solidFill>
-                <a:latin typeface="Segoe UI"/>
-              </a:defRPr>
-            </a:pPr>
-            <a:r>
-              <a:t>–  The chunking was correct — the crash came from trying to display the result</a:t>
-            </a:r>
-          </a:p>
-          <a:p>
-            <a:pPr lvl="1">
-              <a:spcAft>
-                <a:spcPts val="1100"/>
-              </a:spcAft>
-              <a:defRPr sz="1600" b="0">
-                <a:solidFill>
-                  <a:srgbClr val="666666"/>
-                </a:solidFill>
-                <a:latin typeface="Segoe UI"/>
-              </a:defRPr>
-            </a:pPr>
-            <a:r>
-              <a:t>–  Fixed by switching output to UTF-8 with a replacement character as fallback</a:t>
-            </a:r>
-          </a:p>
-          <a:p>
-            <a:pPr lvl="1">
-              <a:spcAft>
-                <a:spcPts val="1100"/>
-              </a:spcAft>
-              <a:defRPr sz="1600" b="0">
-                <a:solidFill>
-                  <a:srgbClr val="666666"/>
-                </a:solidFill>
-                <a:latin typeface="Segoe UI"/>
-              </a:defRPr>
-            </a:pPr>
-            <a:r>
-              <a:t>–  This would have hit my own notes on the very first run</a:t>
-            </a:r>
-          </a:p>
-          <a:p>
-            <a:pPr>
-              <a:spcAft>
-                <a:spcPts val="1100"/>
-              </a:spcAft>
-              <a:defRPr sz="1900" b="1">
-                <a:solidFill>
-                  <a:srgbClr val="1A1A1A"/>
-                </a:solidFill>
-                <a:latin typeface="Segoe UI"/>
-              </a:defRPr>
-            </a:pPr>
-            <a:r>
-              <a:t>An infinite-loop risk in the boundary softener</a:t>
-            </a:r>
-          </a:p>
-          <a:p>
-            <a:pPr lvl="1">
-              <a:spcAft>
-                <a:spcPts val="1100"/>
-              </a:spcAft>
-              <a:defRPr sz="1600" b="0">
-                <a:solidFill>
-                  <a:srgbClr val="666666"/>
-                </a:solidFill>
-                <a:latin typeface="Segoe UI"/>
-              </a:defRPr>
-            </a:pPr>
-            <a:r>
-              <a:t>–  Cutting backwards for a natural break could return a point before the overlap ended</a:t>
-            </a:r>
-          </a:p>
-          <a:p>
-            <a:pPr lvl="1">
-              <a:spcAft>
-                <a:spcPts val="1100"/>
-              </a:spcAft>
-              <a:defRPr sz="1600" b="0">
-                <a:solidFill>
-                  <a:srgbClr val="666666"/>
-                </a:solidFill>
-                <a:latin typeface="Segoe UI"/>
-              </a:defRPr>
-            </a:pPr>
-            <a:r>
-              <a:t>–  Guarded, then verified on a 2,000-character string containing no whitespace at all</a:t>
-            </a:r>
-          </a:p>
-        </p:txBody>
-      </p:sp>
-      <p:sp>
-        <p:nvSpPr>
-          <p:cNvPr id="6" name="TextBox 5"/>
+              <a:t>Same document, cut three ways. Small chunks are precise; big chunks drag in clutter.</a:t>
+            </a:r>
+          </a:p>
+        </p:txBody>
+      </p:sp>
+      <p:graphicFrame>
+        <p:nvGraphicFramePr>
+          <p:cNvPr id="6" name="Table 5"/>
+          <p:cNvGraphicFramePr>
+            <a:graphicFrameLocks noGrp="1"/>
+          </p:cNvGraphicFramePr>
+          <p:nvPr/>
+        </p:nvGraphicFramePr>
+        <p:xfrm>
+          <a:off x="777240" y="2313432"/>
+          <a:ext cx="10637213" cy="1682496"/>
+        </p:xfrm>
+        <a:graphic>
+          <a:graphicData uri="http://schemas.openxmlformats.org/drawingml/2006/table">
+            <a:tbl>
+              <a:tblPr firstRow="1" bandRow="1">
+                <a:tableStyleId>{5C22544A-7EE6-4342-B048-85BDC9FD1C3A}</a:tableStyleId>
+              </a:tblPr>
+              <a:tblGrid>
+                <a:gridCol w="2774925"/>
+                <a:gridCol w="1849950"/>
+                <a:gridCol w="6012338"/>
+              </a:tblGrid>
+              <a:tr h="420624">
+                <a:tc>
+                  <a:txBody>
+                    <a:bodyPr/>
+                    <a:lstStyle/>
+                    <a:p>
+                      <a:pPr>
+                        <a:defRPr sz="1500" b="1">
+                          <a:solidFill>
+                            <a:srgbClr val="FFFFFF"/>
+                          </a:solidFill>
+                          <a:latin typeface="Segoe UI"/>
+                        </a:defRPr>
+                      </a:pPr>
+                      <a:r>
+                        <a:t>chunk size</a:t>
+                      </a:r>
+                    </a:p>
+                  </a:txBody>
+                  <a:tcPr>
+                    <a:solidFill>
+                      <a:srgbClr val="1F4E79"/>
+                    </a:solidFill>
+                  </a:tcPr>
+                </a:tc>
+                <a:tc>
+                  <a:txBody>
+                    <a:bodyPr/>
+                    <a:lstStyle/>
+                    <a:p>
+                      <a:pPr>
+                        <a:defRPr sz="1500" b="1">
+                          <a:solidFill>
+                            <a:srgbClr val="FFFFFF"/>
+                          </a:solidFill>
+                          <a:latin typeface="Segoe UI"/>
+                        </a:defRPr>
+                      </a:pPr>
+                      <a:r>
+                        <a:t>chunks</a:t>
+                      </a:r>
+                    </a:p>
+                  </a:txBody>
+                  <a:tcPr>
+                    <a:solidFill>
+                      <a:srgbClr val="1F4E79"/>
+                    </a:solidFill>
+                  </a:tcPr>
+                </a:tc>
+                <a:tc>
+                  <a:txBody>
+                    <a:bodyPr/>
+                    <a:lstStyle/>
+                    <a:p>
+                      <a:pPr>
+                        <a:defRPr sz="1500" b="1">
+                          <a:solidFill>
+                            <a:srgbClr val="FFFFFF"/>
+                          </a:solidFill>
+                          <a:latin typeface="Segoe UI"/>
+                        </a:defRPr>
+                      </a:pPr>
+                      <a:r>
+                        <a:t>what one chunk held</a:t>
+                      </a:r>
+                    </a:p>
+                  </a:txBody>
+                  <a:tcPr>
+                    <a:solidFill>
+                      <a:srgbClr val="1F4E79"/>
+                    </a:solidFill>
+                  </a:tcPr>
+                </a:tc>
+              </a:tr>
+              <a:tr h="420624">
+                <a:tc>
+                  <a:txBody>
+                    <a:bodyPr/>
+                    <a:lstStyle/>
+                    <a:p>
+                      <a:pPr>
+                        <a:defRPr sz="1500" b="0">
+                          <a:solidFill>
+                            <a:srgbClr val="1A1A1A"/>
+                          </a:solidFill>
+                          <a:latin typeface="Segoe UI"/>
+                        </a:defRPr>
+                      </a:pPr>
+                      <a:r>
+                        <a:t>300 characters</a:t>
+                      </a:r>
+                    </a:p>
+                  </a:txBody>
+                  <a:tcPr>
+                    <a:solidFill>
+                      <a:srgbClr val="FFFFFF"/>
+                    </a:solidFill>
+                  </a:tcPr>
+                </a:tc>
+                <a:tc>
+                  <a:txBody>
+                    <a:bodyPr/>
+                    <a:lstStyle/>
+                    <a:p>
+                      <a:pPr>
+                        <a:defRPr sz="1500" b="0">
+                          <a:solidFill>
+                            <a:srgbClr val="1A1A1A"/>
+                          </a:solidFill>
+                          <a:latin typeface="Consolas"/>
+                        </a:defRPr>
+                      </a:pPr>
+                      <a:r>
+                        <a:t>199</a:t>
+                      </a:r>
+                    </a:p>
+                  </a:txBody>
+                  <a:tcPr>
+                    <a:solidFill>
+                      <a:srgbClr val="FFFFFF"/>
+                    </a:solidFill>
+                  </a:tcPr>
+                </a:tc>
+                <a:tc>
+                  <a:txBody>
+                    <a:bodyPr/>
+                    <a:lstStyle/>
+                    <a:p>
+                      <a:pPr>
+                        <a:defRPr sz="1500" b="0">
+                          <a:solidFill>
+                            <a:srgbClr val="1A1A1A"/>
+                          </a:solidFill>
+                          <a:latin typeface="Consolas"/>
+                        </a:defRPr>
+                      </a:pPr>
+                      <a:r>
+                        <a:t>one idea, nothing else</a:t>
+                      </a:r>
+                    </a:p>
+                  </a:txBody>
+                  <a:tcPr>
+                    <a:solidFill>
+                      <a:srgbClr val="FFFFFF"/>
+                    </a:solidFill>
+                  </a:tcPr>
+                </a:tc>
+              </a:tr>
+              <a:tr h="420624">
+                <a:tc>
+                  <a:txBody>
+                    <a:bodyPr/>
+                    <a:lstStyle/>
+                    <a:p>
+                      <a:pPr>
+                        <a:defRPr sz="1500" b="1">
+                          <a:solidFill>
+                            <a:srgbClr val="B32D2D"/>
+                          </a:solidFill>
+                          <a:latin typeface="Segoe UI"/>
+                        </a:defRPr>
+                      </a:pPr>
+                      <a:r>
+                        <a:t>500 characters</a:t>
+                      </a:r>
+                    </a:p>
+                  </a:txBody>
+                  <a:tcPr>
+                    <a:solidFill>
+                      <a:srgbClr val="F2F5F8"/>
+                    </a:solidFill>
+                  </a:tcPr>
+                </a:tc>
+                <a:tc>
+                  <a:txBody>
+                    <a:bodyPr/>
+                    <a:lstStyle/>
+                    <a:p>
+                      <a:pPr>
+                        <a:defRPr sz="1500" b="1">
+                          <a:solidFill>
+                            <a:srgbClr val="B32D2D"/>
+                          </a:solidFill>
+                          <a:latin typeface="Consolas"/>
+                        </a:defRPr>
+                      </a:pPr>
+                      <a:r>
+                        <a:t>155</a:t>
+                      </a:r>
+                    </a:p>
+                  </a:txBody>
+                  <a:tcPr>
+                    <a:solidFill>
+                      <a:srgbClr val="F2F5F8"/>
+                    </a:solidFill>
+                  </a:tcPr>
+                </a:tc>
+                <a:tc>
+                  <a:txBody>
+                    <a:bodyPr/>
+                    <a:lstStyle/>
+                    <a:p>
+                      <a:pPr>
+                        <a:defRPr sz="1500" b="1">
+                          <a:solidFill>
+                            <a:srgbClr val="B32D2D"/>
+                          </a:solidFill>
+                          <a:latin typeface="Consolas"/>
+                        </a:defRPr>
+                      </a:pPr>
+                      <a:r>
+                        <a:t>one idea + start of a table</a:t>
+                      </a:r>
+                    </a:p>
+                  </a:txBody>
+                  <a:tcPr>
+                    <a:solidFill>
+                      <a:srgbClr val="F2F5F8"/>
+                    </a:solidFill>
+                  </a:tcPr>
+                </a:tc>
+              </a:tr>
+              <a:tr h="420624">
+                <a:tc>
+                  <a:txBody>
+                    <a:bodyPr/>
+                    <a:lstStyle/>
+                    <a:p>
+                      <a:pPr>
+                        <a:defRPr sz="1500" b="0">
+                          <a:solidFill>
+                            <a:srgbClr val="1A1A1A"/>
+                          </a:solidFill>
+                          <a:latin typeface="Segoe UI"/>
+                        </a:defRPr>
+                      </a:pPr>
+                      <a:r>
+                        <a:t>1500 characters</a:t>
+                      </a:r>
+                    </a:p>
+                  </a:txBody>
+                  <a:tcPr>
+                    <a:solidFill>
+                      <a:srgbClr val="FFFFFF"/>
+                    </a:solidFill>
+                  </a:tcPr>
+                </a:tc>
+                <a:tc>
+                  <a:txBody>
+                    <a:bodyPr/>
+                    <a:lstStyle/>
+                    <a:p>
+                      <a:pPr>
+                        <a:defRPr sz="1500" b="0">
+                          <a:solidFill>
+                            <a:srgbClr val="1A1A1A"/>
+                          </a:solidFill>
+                          <a:latin typeface="Consolas"/>
+                        </a:defRPr>
+                      </a:pPr>
+                      <a:r>
+                        <a:t>50</a:t>
+                      </a:r>
+                    </a:p>
+                  </a:txBody>
+                  <a:tcPr>
+                    <a:solidFill>
+                      <a:srgbClr val="FFFFFF"/>
+                    </a:solidFill>
+                  </a:tcPr>
+                </a:tc>
+                <a:tc>
+                  <a:txBody>
+                    <a:bodyPr/>
+                    <a:lstStyle/>
+                    <a:p>
+                      <a:pPr>
+                        <a:defRPr sz="1500" b="0">
+                          <a:solidFill>
+                            <a:srgbClr val="1A1A1A"/>
+                          </a:solidFill>
+                          <a:latin typeface="Consolas"/>
+                        </a:defRPr>
+                      </a:pPr>
+                      <a:r>
+                        <a:t>the idea, a whole table, 2 more sections</a:t>
+                      </a:r>
+                    </a:p>
+                  </a:txBody>
+                  <a:tcPr>
+                    <a:solidFill>
+                      <a:srgbClr val="FFFFFF"/>
+                    </a:solidFill>
+                  </a:tcPr>
+                </a:tc>
+              </a:tr>
+            </a:tbl>
+          </a:graphicData>
+        </a:graphic>
+      </p:graphicFrame>
+      <p:sp>
+        <p:nvSpPr>
+          <p:cNvPr id="7" name="TextBox 6"/>
           <p:cNvSpPr txBox="1"/>
           <p:nvPr/>
         </p:nvSpPr>
         <p:spPr>
           <a:xfrm>
-            <a:off x="777240" y="6053328"/>
+            <a:off x="777240" y="6035040"/>
             <a:ext cx="10637215" cy="457200"/>
           </a:xfrm>
           <a:prstGeom prst="rect">
@@ -8889,7 +7522,7 @@
               </a:defRPr>
             </a:pPr>
             <a:r>
-              <a:t>Also verified: overlap ≥ chunk size rejected · missing folder · empty folder · whitespace-only chunks dropped</a:t>
+              <a:t>My choice for now: 500 characters with 100 overlap — provisional until Week 2 tests it</a:t>
             </a:r>
           </a:p>
         </p:txBody>
@@ -8902,7 +7535,7 @@
 </p:sld>
 </file>
 
-<file path=ppt/slides/slide17.xml><?xml version="1.0" encoding="utf-8"?>
+<file path=ppt/slides/slide8.xml><?xml version="1.0" encoding="utf-8"?>
 <p:sld xmlns:a="http://schemas.openxmlformats.org/drawingml/2006/main" xmlns:p="http://schemas.openxmlformats.org/presentationml/2006/main" xmlns:r="http://schemas.openxmlformats.org/officeDocument/2006/relationships">
   <p:cSld>
     <p:spTree>
@@ -8943,7 +7576,7 @@
               </a:defRPr>
             </a:pPr>
             <a:r>
-              <a:t>STATUS</a:t>
+              <a:t>FRI</a:t>
             </a:r>
           </a:p>
         </p:txBody>
@@ -8979,7 +7612,7 @@
               </a:defRPr>
             </a:pPr>
             <a:r>
-              <a:t>Where Week 1 actually stands</a:t>
+              <a:t>Friday: I built search with no database at all</a:t>
             </a:r>
           </a:p>
         </p:txBody>
@@ -9028,542 +7661,16 @@
           </a:p>
         </p:txBody>
       </p:sp>
-      <p:graphicFrame>
-        <p:nvGraphicFramePr>
-          <p:cNvPr id="5" name="Table 4"/>
-          <p:cNvGraphicFramePr>
-            <a:graphicFrameLocks noGrp="1"/>
-          </p:cNvGraphicFramePr>
-          <p:nvPr/>
-        </p:nvGraphicFramePr>
-        <p:xfrm>
-          <a:off x="777240" y="1773936"/>
-          <a:ext cx="10637214" cy="3840480"/>
-        </p:xfrm>
-        <a:graphic>
-          <a:graphicData uri="http://schemas.openxmlformats.org/drawingml/2006/table">
-            <a:tbl>
-              <a:tblPr firstRow="1" bandRow="1">
-                <a:tableStyleId>{5C22544A-7EE6-4342-B048-85BDC9FD1C3A}</a:tableStyleId>
-              </a:tblPr>
-              <a:tblGrid>
-                <a:gridCol w="7091476"/>
-                <a:gridCol w="3545738"/>
-              </a:tblGrid>
-              <a:tr h="384048">
-                <a:tc>
-                  <a:txBody>
-                    <a:bodyPr/>
-                    <a:lstStyle/>
-                    <a:p>
-                      <a:pPr>
-                        <a:defRPr sz="1400" b="1">
-                          <a:solidFill>
-                            <a:srgbClr val="FFFFFF"/>
-                          </a:solidFill>
-                          <a:latin typeface="Segoe UI"/>
-                        </a:defRPr>
-                      </a:pPr>
-                      <a:r>
-                        <a:t>deliverable</a:t>
-                      </a:r>
-                    </a:p>
-                  </a:txBody>
-                  <a:tcPr>
-                    <a:solidFill>
-                      <a:srgbClr val="1F4E79"/>
-                    </a:solidFill>
-                  </a:tcPr>
-                </a:tc>
-                <a:tc>
-                  <a:txBody>
-                    <a:bodyPr/>
-                    <a:lstStyle/>
-                    <a:p>
-                      <a:pPr>
-                        <a:defRPr sz="1400" b="1">
-                          <a:solidFill>
-                            <a:srgbClr val="FFFFFF"/>
-                          </a:solidFill>
-                          <a:latin typeface="Segoe UI"/>
-                        </a:defRPr>
-                      </a:pPr>
-                      <a:r>
-                        <a:t>state</a:t>
-                      </a:r>
-                    </a:p>
-                  </a:txBody>
-                  <a:tcPr>
-                    <a:solidFill>
-                      <a:srgbClr val="1F4E79"/>
-                    </a:solidFill>
-                  </a:tcPr>
-                </a:tc>
-              </a:tr>
-              <a:tr h="384048">
-                <a:tc>
-                  <a:txBody>
-                    <a:bodyPr/>
-                    <a:lstStyle/>
-                    <a:p>
-                      <a:pPr>
-                        <a:defRPr sz="1300" b="0">
-                          <a:solidFill>
-                            <a:srgbClr val="1A1A1A"/>
-                          </a:solidFill>
-                          <a:latin typeface="Segoe UI"/>
-                        </a:defRPr>
-                      </a:pPr>
-                      <a:r>
-                        <a:t>Embeddings generated, dimensionality shown</a:t>
-                      </a:r>
-                    </a:p>
-                  </a:txBody>
-                  <a:tcPr>
-                    <a:solidFill>
-                      <a:srgbClr val="FFFFFF"/>
-                    </a:solidFill>
-                  </a:tcPr>
-                </a:tc>
-                <a:tc>
-                  <a:txBody>
-                    <a:bodyPr/>
-                    <a:lstStyle/>
-                    <a:p>
-                      <a:pPr>
-                        <a:defRPr sz="1300" b="0">
-                          <a:solidFill>
-                            <a:srgbClr val="1A1A1A"/>
-                          </a:solidFill>
-                          <a:latin typeface="Consolas"/>
-                        </a:defRPr>
-                      </a:pPr>
-                      <a:r>
-                        <a:t>done</a:t>
-                      </a:r>
-                    </a:p>
-                  </a:txBody>
-                  <a:tcPr>
-                    <a:solidFill>
-                      <a:srgbClr val="FFFFFF"/>
-                    </a:solidFill>
-                  </a:tcPr>
-                </a:tc>
-              </a:tr>
-              <a:tr h="384048">
-                <a:tc>
-                  <a:txBody>
-                    <a:bodyPr/>
-                    <a:lstStyle/>
-                    <a:p>
-                      <a:pPr>
-                        <a:defRPr sz="1300" b="0">
-                          <a:solidFill>
-                            <a:srgbClr val="1A1A1A"/>
-                          </a:solidFill>
-                          <a:latin typeface="Segoe UI"/>
-                        </a:defRPr>
-                      </a:pPr>
-                      <a:r>
-                        <a:t>Similar vs unrelated cosine comparison</a:t>
-                      </a:r>
-                    </a:p>
-                  </a:txBody>
-                  <a:tcPr>
-                    <a:solidFill>
-                      <a:srgbClr val="FFFFFF"/>
-                    </a:solidFill>
-                  </a:tcPr>
-                </a:tc>
-                <a:tc>
-                  <a:txBody>
-                    <a:bodyPr/>
-                    <a:lstStyle/>
-                    <a:p>
-                      <a:pPr>
-                        <a:defRPr sz="1300" b="0">
-                          <a:solidFill>
-                            <a:srgbClr val="1A1A1A"/>
-                          </a:solidFill>
-                          <a:latin typeface="Consolas"/>
-                        </a:defRPr>
-                      </a:pPr>
-                      <a:r>
-                        <a:t>done — 0.617 vs 0.031</a:t>
-                      </a:r>
-                    </a:p>
-                  </a:txBody>
-                  <a:tcPr>
-                    <a:solidFill>
-                      <a:srgbClr val="FFFFFF"/>
-                    </a:solidFill>
-                  </a:tcPr>
-                </a:tc>
-              </a:tr>
-              <a:tr h="384048">
-                <a:tc>
-                  <a:txBody>
-                    <a:bodyPr/>
-                    <a:lstStyle/>
-                    <a:p>
-                      <a:pPr>
-                        <a:defRPr sz="1300" b="0">
-                          <a:solidFill>
-                            <a:srgbClr val="1A1A1A"/>
-                          </a:solidFill>
-                          <a:latin typeface="Segoe UI"/>
-                        </a:defRPr>
-                      </a:pPr>
-                      <a:r>
-                        <a:t>Chunking, fixed size with overlap</a:t>
-                      </a:r>
-                    </a:p>
-                  </a:txBody>
-                  <a:tcPr>
-                    <a:solidFill>
-                      <a:srgbClr val="FFFFFF"/>
-                    </a:solidFill>
-                  </a:tcPr>
-                </a:tc>
-                <a:tc>
-                  <a:txBody>
-                    <a:bodyPr/>
-                    <a:lstStyle/>
-                    <a:p>
-                      <a:pPr>
-                        <a:defRPr sz="1300" b="0">
-                          <a:solidFill>
-                            <a:srgbClr val="1A1A1A"/>
-                          </a:solidFill>
-                          <a:latin typeface="Consolas"/>
-                        </a:defRPr>
-                      </a:pPr>
-                      <a:r>
-                        <a:t>done</a:t>
-                      </a:r>
-                    </a:p>
-                  </a:txBody>
-                  <a:tcPr>
-                    <a:solidFill>
-                      <a:srgbClr val="FFFFFF"/>
-                    </a:solidFill>
-                  </a:tcPr>
-                </a:tc>
-              </a:tr>
-              <a:tr h="384048">
-                <a:tc>
-                  <a:txBody>
-                    <a:bodyPr/>
-                    <a:lstStyle/>
-                    <a:p>
-                      <a:pPr>
-                        <a:defRPr sz="1300" b="0">
-                          <a:solidFill>
-                            <a:srgbClr val="1A1A1A"/>
-                          </a:solidFill>
-                          <a:latin typeface="Segoe UI"/>
-                        </a:defRPr>
-                      </a:pPr>
-                      <a:r>
-                        <a:t>Chunk size / overlap experiments</a:t>
-                      </a:r>
-                    </a:p>
-                  </a:txBody>
-                  <a:tcPr>
-                    <a:solidFill>
-                      <a:srgbClr val="FFFFFF"/>
-                    </a:solidFill>
-                  </a:tcPr>
-                </a:tc>
-                <a:tc>
-                  <a:txBody>
-                    <a:bodyPr/>
-                    <a:lstStyle/>
-                    <a:p>
-                      <a:pPr>
-                        <a:defRPr sz="1300" b="0">
-                          <a:solidFill>
-                            <a:srgbClr val="1A1A1A"/>
-                          </a:solidFill>
-                          <a:latin typeface="Consolas"/>
-                        </a:defRPr>
-                      </a:pPr>
-                      <a:r>
-                        <a:t>done on interim corpus</a:t>
-                      </a:r>
-                    </a:p>
-                  </a:txBody>
-                  <a:tcPr>
-                    <a:solidFill>
-                      <a:srgbClr val="FFFFFF"/>
-                    </a:solidFill>
-                  </a:tcPr>
-                </a:tc>
-              </a:tr>
-              <a:tr h="384048">
-                <a:tc>
-                  <a:txBody>
-                    <a:bodyPr/>
-                    <a:lstStyle/>
-                    <a:p>
-                      <a:pPr>
-                        <a:defRPr sz="1300" b="0">
-                          <a:solidFill>
-                            <a:srgbClr val="1A1A1A"/>
-                          </a:solidFill>
-                          <a:latin typeface="Segoe UI"/>
-                        </a:defRPr>
-                      </a:pPr>
-                      <a:r>
-                        <a:t>Every chunk embedded and held in memory</a:t>
-                      </a:r>
-                    </a:p>
-                  </a:txBody>
-                  <a:tcPr>
-                    <a:solidFill>
-                      <a:srgbClr val="FFFFFF"/>
-                    </a:solidFill>
-                  </a:tcPr>
-                </a:tc>
-                <a:tc>
-                  <a:txBody>
-                    <a:bodyPr/>
-                    <a:lstStyle/>
-                    <a:p>
-                      <a:pPr>
-                        <a:defRPr sz="1300" b="0">
-                          <a:solidFill>
-                            <a:srgbClr val="1A1A1A"/>
-                          </a:solidFill>
-                          <a:latin typeface="Consolas"/>
-                        </a:defRPr>
-                      </a:pPr>
-                      <a:r>
-                        <a:t>done — 155 chunks</a:t>
-                      </a:r>
-                    </a:p>
-                  </a:txBody>
-                  <a:tcPr>
-                    <a:solidFill>
-                      <a:srgbClr val="FFFFFF"/>
-                    </a:solidFill>
-                  </a:tcPr>
-                </a:tc>
-              </a:tr>
-              <a:tr h="384048">
-                <a:tc>
-                  <a:txBody>
-                    <a:bodyPr/>
-                    <a:lstStyle/>
-                    <a:p>
-                      <a:pPr>
-                        <a:defRPr sz="1300" b="1">
-                          <a:solidFill>
-                            <a:srgbClr val="B32D2D"/>
-                          </a:solidFill>
-                          <a:latin typeface="Segoe UI"/>
-                        </a:defRPr>
-                      </a:pPr>
-                      <a:r>
-                        <a:t>5–10 of my own notes in sample-notes/</a:t>
-                      </a:r>
-                    </a:p>
-                  </a:txBody>
-                  <a:tcPr>
-                    <a:solidFill>
-                      <a:srgbClr val="F2F5F8"/>
-                    </a:solidFill>
-                  </a:tcPr>
-                </a:tc>
-                <a:tc>
-                  <a:txBody>
-                    <a:bodyPr/>
-                    <a:lstStyle/>
-                    <a:p>
-                      <a:pPr>
-                        <a:defRPr sz="1300" b="1">
-                          <a:solidFill>
-                            <a:srgbClr val="B32D2D"/>
-                          </a:solidFill>
-                          <a:latin typeface="Consolas"/>
-                        </a:defRPr>
-                      </a:pPr>
-                      <a:r>
-                        <a:t>OUTSTANDING</a:t>
-                      </a:r>
-                    </a:p>
-                  </a:txBody>
-                  <a:tcPr>
-                    <a:solidFill>
-                      <a:srgbClr val="F2F5F8"/>
-                    </a:solidFill>
-                  </a:tcPr>
-                </a:tc>
-              </a:tr>
-              <a:tr h="384048">
-                <a:tc>
-                  <a:txBody>
-                    <a:bodyPr/>
-                    <a:lstStyle/>
-                    <a:p>
-                      <a:pPr>
-                        <a:defRPr sz="1300" b="1">
-                          <a:solidFill>
-                            <a:srgbClr val="B32D2D"/>
-                          </a:solidFill>
-                          <a:latin typeface="Segoe UI"/>
-                        </a:defRPr>
-                      </a:pPr>
-                      <a:r>
-                        <a:t>"What an embedding is" in my own words</a:t>
-                      </a:r>
-                    </a:p>
-                  </a:txBody>
-                  <a:tcPr>
-                    <a:solidFill>
-                      <a:srgbClr val="F2F5F8"/>
-                    </a:solidFill>
-                  </a:tcPr>
-                </a:tc>
-                <a:tc>
-                  <a:txBody>
-                    <a:bodyPr/>
-                    <a:lstStyle/>
-                    <a:p>
-                      <a:pPr>
-                        <a:defRPr sz="1300" b="1">
-                          <a:solidFill>
-                            <a:srgbClr val="B32D2D"/>
-                          </a:solidFill>
-                          <a:latin typeface="Consolas"/>
-                        </a:defRPr>
-                      </a:pPr>
-                      <a:r>
-                        <a:t>OUTSTANDING</a:t>
-                      </a:r>
-                    </a:p>
-                  </a:txBody>
-                  <a:tcPr>
-                    <a:solidFill>
-                      <a:srgbClr val="F2F5F8"/>
-                    </a:solidFill>
-                  </a:tcPr>
-                </a:tc>
-              </a:tr>
-              <a:tr h="384048">
-                <a:tc>
-                  <a:txBody>
-                    <a:bodyPr/>
-                    <a:lstStyle/>
-                    <a:p>
-                      <a:pPr>
-                        <a:defRPr sz="1300" b="1">
-                          <a:solidFill>
-                            <a:srgbClr val="B32D2D"/>
-                          </a:solidFill>
-                          <a:latin typeface="Segoe UI"/>
-                        </a:defRPr>
-                      </a:pPr>
-                      <a:r>
-                        <a:t>"Why splitting matters" in my own words</a:t>
-                      </a:r>
-                    </a:p>
-                  </a:txBody>
-                  <a:tcPr>
-                    <a:solidFill>
-                      <a:srgbClr val="F2F5F8"/>
-                    </a:solidFill>
-                  </a:tcPr>
-                </a:tc>
-                <a:tc>
-                  <a:txBody>
-                    <a:bodyPr/>
-                    <a:lstStyle/>
-                    <a:p>
-                      <a:pPr>
-                        <a:defRPr sz="1300" b="1">
-                          <a:solidFill>
-                            <a:srgbClr val="B32D2D"/>
-                          </a:solidFill>
-                          <a:latin typeface="Consolas"/>
-                        </a:defRPr>
-                      </a:pPr>
-                      <a:r>
-                        <a:t>OUTSTANDING</a:t>
-                      </a:r>
-                    </a:p>
-                  </a:txBody>
-                  <a:tcPr>
-                    <a:solidFill>
-                      <a:srgbClr val="F2F5F8"/>
-                    </a:solidFill>
-                  </a:tcPr>
-                </a:tc>
-              </a:tr>
-              <a:tr h="384048">
-                <a:tc>
-                  <a:txBody>
-                    <a:bodyPr/>
-                    <a:lstStyle/>
-                    <a:p>
-                      <a:pPr>
-                        <a:defRPr sz="1300" b="1">
-                          <a:solidFill>
-                            <a:srgbClr val="B32D2D"/>
-                          </a:solidFill>
-                          <a:latin typeface="Segoe UI"/>
-                        </a:defRPr>
-                      </a:pPr>
-                      <a:r>
-                        <a:t>"What semantic search means" in my own words</a:t>
-                      </a:r>
-                    </a:p>
-                  </a:txBody>
-                  <a:tcPr>
-                    <a:solidFill>
-                      <a:srgbClr val="F2F5F8"/>
-                    </a:solidFill>
-                  </a:tcPr>
-                </a:tc>
-                <a:tc>
-                  <a:txBody>
-                    <a:bodyPr/>
-                    <a:lstStyle/>
-                    <a:p>
-                      <a:pPr>
-                        <a:defRPr sz="1300" b="1">
-                          <a:solidFill>
-                            <a:srgbClr val="B32D2D"/>
-                          </a:solidFill>
-                          <a:latin typeface="Consolas"/>
-                        </a:defRPr>
-                      </a:pPr>
-                      <a:r>
-                        <a:t>OUTSTANDING</a:t>
-                      </a:r>
-                    </a:p>
-                  </a:txBody>
-                  <a:tcPr>
-                    <a:solidFill>
-                      <a:srgbClr val="F2F5F8"/>
-                    </a:solidFill>
-                  </a:tcPr>
-                </a:tc>
-              </a:tr>
-            </a:tbl>
-          </a:graphicData>
-        </a:graphic>
-      </p:graphicFrame>
-      <p:sp>
-        <p:nvSpPr>
-          <p:cNvPr id="6" name="TextBox 5"/>
+      <p:sp>
+        <p:nvSpPr>
+          <p:cNvPr id="5" name="TextBox 4"/>
           <p:cNvSpPr txBox="1"/>
           <p:nvPr/>
         </p:nvSpPr>
         <p:spPr>
           <a:xfrm>
-            <a:off x="777240" y="6053328"/>
-            <a:ext cx="10637215" cy="457200"/>
+            <a:off x="777240" y="1993392"/>
+            <a:ext cx="10637215" cy="822960"/>
           </a:xfrm>
           <a:prstGeom prst="rect">
             <a:avLst/>
@@ -9577,15 +7684,118 @@
           <a:lstStyle/>
           <a:p>
             <a:pPr>
-              <a:defRPr sz="1200" i="1">
+              <a:defRPr sz="3600" b="1">
                 <a:solidFill>
-                  <a:srgbClr val="666666"/>
+                  <a:srgbClr val="1E7B3C"/>
                 </a:solidFill>
                 <a:latin typeface="Segoe UI"/>
               </a:defRPr>
             </a:pPr>
             <a:r>
-              <a:t>All four outstanding items are mine to write — no blockers on anyone else</a:t>
+              <a:t>The database is less accurate than my version</a:t>
+            </a:r>
+          </a:p>
+        </p:txBody>
+      </p:sp>
+      <p:sp>
+        <p:nvSpPr>
+          <p:cNvPr id="6" name="TextBox 5"/>
+          <p:cNvSpPr txBox="1"/>
+          <p:nvPr/>
+        </p:nvSpPr>
+        <p:spPr>
+          <a:xfrm>
+            <a:off x="777240" y="3090672"/>
+            <a:ext cx="10637215" cy="3017520"/>
+          </a:xfrm>
+          <a:prstGeom prst="rect">
+            <a:avLst/>
+          </a:prstGeom>
+          <a:noFill/>
+        </p:spPr>
+        <p:txBody>
+          <a:bodyPr wrap="square">
+            <a:spAutoFit/>
+          </a:bodyPr>
+          <a:lstStyle/>
+          <a:p>
+            <a:pPr>
+              <a:spcAft>
+                <a:spcPts val="1500"/>
+              </a:spcAft>
+              <a:defRPr sz="1900">
+                <a:solidFill>
+                  <a:srgbClr val="1A1A1A"/>
+                </a:solidFill>
+                <a:latin typeface="Segoe UI"/>
+              </a:defRPr>
+            </a:pPr>
+            <a:r>
+              <a:t>I embedded all 155 chunks into a plain Python list and searched it with a loop.</a:t>
+            </a:r>
+          </a:p>
+          <a:p>
+            <a:pPr>
+              <a:spcAft>
+                <a:spcPts val="1500"/>
+              </a:spcAft>
+              <a:defRPr sz="1900">
+                <a:solidFill>
+                  <a:srgbClr val="1A1A1A"/>
+                </a:solidFill>
+                <a:latin typeface="Segoe UI"/>
+              </a:defRPr>
+            </a:pPr>
+            <a:r>
+              <a:t>My loop compares every chunk, so it cannot miss a match. It is exact.</a:t>
+            </a:r>
+          </a:p>
+          <a:p>
+            <a:pPr>
+              <a:spcAft>
+                <a:spcPts val="1500"/>
+              </a:spcAft>
+              <a:defRPr sz="1900">
+                <a:solidFill>
+                  <a:srgbClr val="1A1A1A"/>
+                </a:solidFill>
+                <a:latin typeface="Segoe UI"/>
+              </a:defRPr>
+            </a:pPr>
+            <a:r>
+              <a:t>Chroma, which I add next week, deliberately skips most comparisons.</a:t>
+            </a:r>
+          </a:p>
+          <a:p>
+            <a:pPr>
+              <a:spcAft>
+                <a:spcPts val="1500"/>
+              </a:spcAft>
+              <a:defRPr sz="1900">
+                <a:solidFill>
+                  <a:srgbClr val="1A1A1A"/>
+                </a:solidFill>
+                <a:latin typeface="Segoe UI"/>
+              </a:defRPr>
+            </a:pPr>
+            <a:r>
+              <a:t>It trades a small chance of missing a match for speed that holds up as notes grow.</a:t>
+            </a:r>
+          </a:p>
+          <a:p>
+            <a:pPr>
+              <a:spcAft>
+                <a:spcPts val="1500"/>
+              </a:spcAft>
+              <a:defRPr sz="1900">
+                <a:solidFill>
+                  <a:srgbClr val="1A1A1A"/>
+                </a:solidFill>
+                <a:latin typeface="Segoe UI"/>
+              </a:defRPr>
+            </a:pPr>
+            <a:r>
+              <a:t>I assumed a real database meant better. It means faster, and slightly less reliable.</a:t>
             </a:r>
           </a:p>
         </p:txBody>
@@ -9598,7 +7808,7 @@
 </p:sld>
 </file>
 
-<file path=ppt/slides/slide18.xml><?xml version="1.0" encoding="utf-8"?>
+<file path=ppt/slides/slide9.xml><?xml version="1.0" encoding="utf-8"?>
 <p:sld xmlns:a="http://schemas.openxmlformats.org/drawingml/2006/main" xmlns:p="http://schemas.openxmlformats.org/presentationml/2006/main" xmlns:r="http://schemas.openxmlformats.org/officeDocument/2006/relationships">
   <p:cSld>
     <p:spTree>
@@ -9639,7 +7849,7 @@
               </a:defRPr>
             </a:pPr>
             <a:r>
-              <a:t>NEXT</a:t>
+              <a:t>FRI</a:t>
             </a:r>
           </a:p>
         </p:txBody>
@@ -9675,7 +7885,7 @@
               </a:defRPr>
             </a:pPr>
             <a:r>
-              <a:t>Week 2 plan, and what I need from you</a:t>
+              <a:t>Asking a question my notes cannot answer</a:t>
             </a:r>
           </a:p>
         </p:txBody>
@@ -9732,8 +7942,8 @@
         </p:nvSpPr>
         <p:spPr>
           <a:xfrm>
-            <a:off x="777240" y="1773936"/>
-            <a:ext cx="10637215" cy="4023360"/>
+            <a:off x="777240" y="1810512"/>
+            <a:ext cx="10637215" cy="365760"/>
           </a:xfrm>
           <a:prstGeom prst="rect">
             <a:avLst/>
@@ -9747,26 +7957,7 @@
           <a:lstStyle/>
           <a:p>
             <a:pPr>
-              <a:spcAft>
-                <a:spcPts val="1100"/>
-              </a:spcAft>
-              <a:defRPr sz="1900" b="1">
-                <a:solidFill>
-                  <a:srgbClr val="1A1A1A"/>
-                </a:solidFill>
-                <a:latin typeface="Segoe UI"/>
-              </a:defRPr>
-            </a:pPr>
-            <a:r>
-              <a:t>Mon–Tue — index the chunks into Chroma, configured for cosine distance</a:t>
-            </a:r>
-          </a:p>
-          <a:p>
-            <a:pPr lvl="1">
-              <a:spcAft>
-                <a:spcPts val="1100"/>
-              </a:spcAft>
-              <a:defRPr sz="1600" b="0">
+              <a:defRPr sz="1600">
                 <a:solidFill>
                   <a:srgbClr val="666666"/>
                 </a:solidFill>
@@ -9774,1187 +7965,22 @@
               </a:defRPr>
             </a:pPr>
             <a:r>
-              <a:t>–  The L2 default would rank differently from everything measured this week</a:t>
-            </a:r>
-          </a:p>
-          <a:p>
-            <a:pPr>
-              <a:spcAft>
-                <a:spcPts val="1100"/>
-              </a:spcAft>
-              <a:defRPr sz="1900" b="1">
-                <a:solidFill>
-                  <a:srgbClr val="1A1A1A"/>
-                </a:solidFill>
-                <a:latin typeface="Segoe UI"/>
-              </a:defRPr>
-            </a:pPr>
-            <a:r>
-              <a:t>Wed–Thu — retrieval: embed the question, return top-k with scores, compare k of 3, 5, 10</a:t>
-            </a:r>
-          </a:p>
-          <a:p>
-            <a:pPr>
-              <a:spcAft>
-                <a:spcPts val="1100"/>
-              </a:spcAft>
-              <a:defRPr sz="1900" b="1">
-                <a:solidFill>
-                  <a:srgbClr val="1A1A1A"/>
-                </a:solidFill>
-                <a:latin typeface="Segoe UI"/>
-              </a:defRPr>
-            </a:pPr>
-            <a:r>
-              <a:t>Fri — log every retrieval to a file, and compare Chroma against one alternative</a:t>
-            </a:r>
-          </a:p>
-          <a:p>
-            <a:pPr>
-              <a:spcAft>
-                <a:spcPts val="1100"/>
-              </a:spcAft>
-              <a:defRPr sz="1900" b="1">
-                <a:solidFill>
-                  <a:srgbClr val="1A1A1A"/>
-                </a:solidFill>
-                <a:latin typeface="Segoe UI"/>
-              </a:defRPr>
-            </a:pPr>
-            <a:r>
-              <a:t>Two decisions I need from you:</a:t>
-            </a:r>
-          </a:p>
-          <a:p>
-            <a:pPr lvl="1">
-              <a:spcAft>
-                <a:spcPts val="1100"/>
-              </a:spcAft>
-              <a:defRPr sz="1600" b="0">
-                <a:solidFill>
-                  <a:srgbClr val="666666"/>
-                </a:solidFill>
-                <a:latin typeface="Segoe UI"/>
-              </a:defRPr>
-            </a:pPr>
-            <a:r>
-              <a:t>–  Does the deadline stay 4 October, or move to 11 October with the corrected calendar?</a:t>
-            </a:r>
-          </a:p>
-          <a:p>
-            <a:pPr lvl="1">
-              <a:spcAft>
-                <a:spcPts val="1100"/>
-              </a:spcAft>
-              <a:defRPr sz="1600" b="0">
-                <a:solidFill>
-                  <a:srgbClr val="666666"/>
-                </a:solidFill>
-                <a:latin typeface="Segoe UI"/>
-              </a:defRPr>
-            </a:pPr>
-            <a:r>
-              <a:t>–  Is there anything you would rather I cut if it stays at 4 October?</a:t>
-            </a:r>
-          </a:p>
-        </p:txBody>
-      </p:sp>
-      <p:sp>
-        <p:nvSpPr>
-          <p:cNvPr id="6" name="TextBox 5"/>
-          <p:cNvSpPr txBox="1"/>
-          <p:nvPr/>
-        </p:nvSpPr>
-        <p:spPr>
-          <a:xfrm>
-            <a:off x="777240" y="6053328"/>
-            <a:ext cx="10637215" cy="457200"/>
-          </a:xfrm>
-          <a:prstGeom prst="rect">
-            <a:avLst/>
-          </a:prstGeom>
-          <a:noFill/>
-        </p:spPr>
-        <p:txBody>
-          <a:bodyPr wrap="square">
-            <a:spAutoFit/>
-          </a:bodyPr>
-          <a:lstStyle/>
-          <a:p>
-            <a:pPr>
-              <a:defRPr sz="1200" i="1">
-                <a:solidFill>
-                  <a:srgbClr val="666666"/>
-                </a:solidFill>
-                <a:latin typeface="Segoe UI"/>
-              </a:defRPr>
-            </a:pPr>
-            <a:r>
-              <a:t>Widening the no-answer test is my first priority — Week 3's refusal behaviour depends on that 0.027 margin</a:t>
-            </a:r>
-          </a:p>
-        </p:txBody>
-      </p:sp>
-    </p:spTree>
-  </p:cSld>
-  <p:clrMapOvr>
-    <a:masterClrMapping/>
-  </p:clrMapOvr>
-</p:sld>
-</file>
-
-<file path=ppt/slides/slide2.xml><?xml version="1.0" encoding="utf-8"?>
-<p:sld xmlns:a="http://schemas.openxmlformats.org/drawingml/2006/main" xmlns:p="http://schemas.openxmlformats.org/presentationml/2006/main" xmlns:r="http://schemas.openxmlformats.org/officeDocument/2006/relationships">
-  <p:cSld>
-    <p:spTree>
-      <p:nvGrpSpPr>
-        <p:cNvPr id="1" name=""/>
-        <p:cNvGrpSpPr/>
-        <p:nvPr/>
-      </p:nvGrpSpPr>
-      <p:grpSpPr/>
-      <p:sp>
-        <p:nvSpPr>
-          <p:cNvPr id="2" name="TextBox 1"/>
-          <p:cNvSpPr txBox="1"/>
-          <p:nvPr/>
-        </p:nvSpPr>
-        <p:spPr>
-          <a:xfrm>
-            <a:off x="777240" y="457200"/>
-            <a:ext cx="10637215" cy="274320"/>
-          </a:xfrm>
-          <a:prstGeom prst="rect">
-            <a:avLst/>
-          </a:prstGeom>
-          <a:noFill/>
-        </p:spPr>
-        <p:txBody>
-          <a:bodyPr wrap="square">
-            <a:spAutoFit/>
-          </a:bodyPr>
-          <a:lstStyle/>
-          <a:p>
-            <a:pPr>
-              <a:defRPr sz="1200" b="1">
-                <a:solidFill>
-                  <a:srgbClr val="1F4E79"/>
-                </a:solidFill>
-                <a:latin typeface="Segoe UI"/>
-              </a:defRPr>
-            </a:pPr>
-            <a:r>
-              <a:t>CONTEXT</a:t>
-            </a:r>
-          </a:p>
-        </p:txBody>
-      </p:sp>
-      <p:sp>
-        <p:nvSpPr>
-          <p:cNvPr id="3" name="TextBox 2"/>
-          <p:cNvSpPr txBox="1"/>
-          <p:nvPr/>
-        </p:nvSpPr>
-        <p:spPr>
-          <a:xfrm>
-            <a:off x="777240" y="786384"/>
-            <a:ext cx="10637215" cy="731520"/>
-          </a:xfrm>
-          <a:prstGeom prst="rect">
-            <a:avLst/>
-          </a:prstGeom>
-          <a:noFill/>
-        </p:spPr>
-        <p:txBody>
-          <a:bodyPr wrap="square">
-            <a:spAutoFit/>
-          </a:bodyPr>
-          <a:lstStyle/>
-          <a:p>
-            <a:pPr>
-              <a:defRPr sz="3000" b="1">
-                <a:solidFill>
-                  <a:srgbClr val="1A1A1A"/>
-                </a:solidFill>
-                <a:latin typeface="Segoe UI"/>
-              </a:defRPr>
-            </a:pPr>
-            <a:r>
-              <a:t>What I'm building</a:t>
-            </a:r>
-          </a:p>
-        </p:txBody>
-      </p:sp>
-      <p:sp>
-        <p:nvSpPr>
-          <p:cNvPr id="4" name="Rectangle 3"/>
-          <p:cNvSpPr/>
-          <p:nvPr/>
-        </p:nvSpPr>
-        <p:spPr>
-          <a:xfrm>
-            <a:off x="777240" y="1499616"/>
-            <a:ext cx="10637215" cy="19050"/>
-          </a:xfrm>
-          <a:prstGeom prst="rect">
-            <a:avLst/>
-          </a:prstGeom>
-          <a:solidFill>
-            <a:srgbClr val="D8D8D8"/>
-          </a:solidFill>
-          <a:ln>
-            <a:noFill/>
-          </a:ln>
-          <a:effectLst/>
-        </p:spPr>
-        <p:style>
-          <a:lnRef idx="1">
-            <a:schemeClr val="accent1"/>
-          </a:lnRef>
-          <a:fillRef idx="3">
-            <a:schemeClr val="accent1"/>
-          </a:fillRef>
-          <a:effectRef idx="2">
-            <a:schemeClr val="accent1"/>
-          </a:effectRef>
-          <a:fontRef idx="minor">
-            <a:schemeClr val="lt1"/>
-          </a:fontRef>
-        </p:style>
-        <p:txBody>
-          <a:bodyPr rtlCol="0" anchor="ctr"/>
-          <a:lstStyle/>
-          <a:p>
-            <a:pPr algn="ctr"/>
-          </a:p>
-        </p:txBody>
-      </p:sp>
-      <p:sp>
-        <p:nvSpPr>
-          <p:cNvPr id="5" name="TextBox 4"/>
-          <p:cNvSpPr txBox="1"/>
-          <p:nvPr/>
-        </p:nvSpPr>
-        <p:spPr>
-          <a:xfrm>
-            <a:off x="777240" y="1773936"/>
-            <a:ext cx="10637215" cy="4023360"/>
-          </a:xfrm>
-          <a:prstGeom prst="rect">
-            <a:avLst/>
-          </a:prstGeom>
-          <a:noFill/>
-        </p:spPr>
-        <p:txBody>
-          <a:bodyPr wrap="square">
-            <a:spAutoFit/>
-          </a:bodyPr>
-          <a:lstStyle/>
-          <a:p>
-            <a:pPr>
-              <a:spcAft>
-                <a:spcPts val="1100"/>
-              </a:spcAft>
-              <a:defRPr sz="1900" b="0">
-                <a:solidFill>
-                  <a:srgbClr val="1A1A1A"/>
-                </a:solidFill>
-                <a:latin typeface="Segoe UI"/>
-              </a:defRPr>
-            </a:pPr>
-            <a:r>
-              <a:t>•  A tool that answers questions about my own notes, using only passages retrieved from them</a:t>
-            </a:r>
-          </a:p>
-          <a:p>
-            <a:pPr>
-              <a:spcAft>
-                <a:spcPts val="1100"/>
-              </a:spcAft>
-              <a:defRPr sz="1900" b="1">
-                <a:solidFill>
-                  <a:srgbClr val="1A1A1A"/>
-                </a:solidFill>
-                <a:latin typeface="Segoe UI"/>
-              </a:defRPr>
-            </a:pPr>
-            <a:r>
-              <a:t>Five stages, each written by hand:</a:t>
-            </a:r>
-          </a:p>
-          <a:p>
-            <a:pPr lvl="1">
-              <a:spcAft>
-                <a:spcPts val="1100"/>
-              </a:spcAft>
-              <a:defRPr sz="1600" b="0">
-                <a:solidFill>
-                  <a:srgbClr val="666666"/>
-                </a:solidFill>
-                <a:latin typeface="Segoe UI"/>
-              </a:defRPr>
-            </a:pPr>
-            <a:r>
-              <a:t>–  chunk → embed → store → retrieve → generate</a:t>
-            </a:r>
-          </a:p>
-          <a:p>
-            <a:pPr>
-              <a:spcAft>
-                <a:spcPts val="1100"/>
-              </a:spcAft>
-              <a:defRPr sz="1900" b="0">
-                <a:solidFill>
-                  <a:srgbClr val="1A1A1A"/>
-                </a:solidFill>
-                <a:latin typeface="Segoe UI"/>
-              </a:defRPr>
-            </a:pPr>
-            <a:r>
-              <a:t>•  No LangChain, no LlamaIndex — the brief asks for the pipeline built manually</a:t>
-            </a:r>
-          </a:p>
-          <a:p>
-            <a:pPr lvl="1">
-              <a:spcAft>
-                <a:spcPts val="1100"/>
-              </a:spcAft>
-              <a:defRPr sz="1600" b="0">
-                <a:solidFill>
-                  <a:srgbClr val="666666"/>
-                </a:solidFill>
-                <a:latin typeface="Segoe UI"/>
-              </a:defRPr>
-            </a:pPr>
-            <a:r>
-              <a:t>–  Building it once by hand is what makes every future shortcut make sense</a:t>
-            </a:r>
-          </a:p>
-          <a:p>
-            <a:pPr>
-              <a:spcAft>
-                <a:spcPts val="1100"/>
-              </a:spcAft>
-              <a:defRPr sz="1900" b="0">
-                <a:solidFill>
-                  <a:srgbClr val="1A1A1A"/>
-                </a:solidFill>
-                <a:latin typeface="Segoe UI"/>
-              </a:defRPr>
-            </a:pPr>
-            <a:r>
-              <a:t>•  Week 1 delivers the first two stages, plus a working search with no database in it</a:t>
-            </a:r>
-          </a:p>
-        </p:txBody>
-      </p:sp>
-      <p:sp>
-        <p:nvSpPr>
-          <p:cNvPr id="6" name="TextBox 5"/>
-          <p:cNvSpPr txBox="1"/>
-          <p:nvPr/>
-        </p:nvSpPr>
-        <p:spPr>
-          <a:xfrm>
-            <a:off x="777240" y="6053328"/>
-            <a:ext cx="10637215" cy="457200"/>
-          </a:xfrm>
-          <a:prstGeom prst="rect">
-            <a:avLst/>
-          </a:prstGeom>
-          <a:noFill/>
-        </p:spPr>
-        <p:txBody>
-          <a:bodyPr wrap="square">
-            <a:spAutoFit/>
-          </a:bodyPr>
-          <a:lstStyle/>
-          <a:p>
-            <a:pPr>
-              <a:defRPr sz="1200" i="1">
-                <a:solidFill>
-                  <a:srgbClr val="666666"/>
-                </a:solidFill>
-                <a:latin typeface="Segoe UI"/>
-              </a:defRPr>
-            </a:pPr>
-            <a:r>
-              <a:t>Repo: ask-my-docs · 4 commits · Python 3.12, local embedding model, no API key needed yet</a:t>
-            </a:r>
-          </a:p>
-        </p:txBody>
-      </p:sp>
-    </p:spTree>
-  </p:cSld>
-  <p:clrMapOvr>
-    <a:masterClrMapping/>
-  </p:clrMapOvr>
-</p:sld>
-</file>
-
-<file path=ppt/slides/slide3.xml><?xml version="1.0" encoding="utf-8"?>
-<p:sld xmlns:a="http://schemas.openxmlformats.org/drawingml/2006/main" xmlns:p="http://schemas.openxmlformats.org/presentationml/2006/main" xmlns:r="http://schemas.openxmlformats.org/officeDocument/2006/relationships">
-  <p:cSld>
-    <p:spTree>
-      <p:nvGrpSpPr>
-        <p:cNvPr id="1" name=""/>
-        <p:cNvGrpSpPr/>
-        <p:nvPr/>
-      </p:nvGrpSpPr>
-      <p:grpSpPr/>
-      <p:sp>
-        <p:nvSpPr>
-          <p:cNvPr id="2" name="TextBox 1"/>
-          <p:cNvSpPr txBox="1"/>
-          <p:nvPr/>
-        </p:nvSpPr>
-        <p:spPr>
-          <a:xfrm>
-            <a:off x="777240" y="457200"/>
-            <a:ext cx="10637215" cy="274320"/>
-          </a:xfrm>
-          <a:prstGeom prst="rect">
-            <a:avLst/>
-          </a:prstGeom>
-          <a:noFill/>
-        </p:spPr>
-        <p:txBody>
-          <a:bodyPr wrap="square">
-            <a:spAutoFit/>
-          </a:bodyPr>
-          <a:lstStyle/>
-          <a:p>
-            <a:pPr>
-              <a:defRPr sz="1200" b="1">
-                <a:solidFill>
-                  <a:srgbClr val="1F4E79"/>
-                </a:solidFill>
-                <a:latin typeface="Segoe UI"/>
-              </a:defRPr>
-            </a:pPr>
-            <a:r>
-              <a:t>QUESTION FOR YOU</a:t>
-            </a:r>
-          </a:p>
-        </p:txBody>
-      </p:sp>
-      <p:sp>
-        <p:nvSpPr>
-          <p:cNvPr id="3" name="TextBox 2"/>
-          <p:cNvSpPr txBox="1"/>
-          <p:nvPr/>
-        </p:nvSpPr>
-        <p:spPr>
-          <a:xfrm>
-            <a:off x="777240" y="786384"/>
-            <a:ext cx="10637215" cy="731520"/>
-          </a:xfrm>
-          <a:prstGeom prst="rect">
-            <a:avLst/>
-          </a:prstGeom>
-          <a:noFill/>
-        </p:spPr>
-        <p:txBody>
-          <a:bodyPr wrap="square">
-            <a:spAutoFit/>
-          </a:bodyPr>
-          <a:lstStyle/>
-          <a:p>
-            <a:pPr>
-              <a:defRPr sz="3000" b="1">
-                <a:solidFill>
-                  <a:srgbClr val="1A1A1A"/>
-                </a:solidFill>
-                <a:latin typeface="Segoe UI"/>
-              </a:defRPr>
-            </a:pPr>
-            <a:r>
-              <a:t>One correction before I start</a:t>
-            </a:r>
-          </a:p>
-        </p:txBody>
-      </p:sp>
-      <p:sp>
-        <p:nvSpPr>
-          <p:cNvPr id="4" name="Rectangle 3"/>
-          <p:cNvSpPr/>
-          <p:nvPr/>
-        </p:nvSpPr>
-        <p:spPr>
-          <a:xfrm>
-            <a:off x="777240" y="1499616"/>
-            <a:ext cx="10637215" cy="19050"/>
-          </a:xfrm>
-          <a:prstGeom prst="rect">
-            <a:avLst/>
-          </a:prstGeom>
-          <a:solidFill>
-            <a:srgbClr val="D8D8D8"/>
-          </a:solidFill>
-          <a:ln>
-            <a:noFill/>
-          </a:ln>
-          <a:effectLst/>
-        </p:spPr>
-        <p:style>
-          <a:lnRef idx="1">
-            <a:schemeClr val="accent1"/>
-          </a:lnRef>
-          <a:fillRef idx="3">
-            <a:schemeClr val="accent1"/>
-          </a:fillRef>
-          <a:effectRef idx="2">
-            <a:schemeClr val="accent1"/>
-          </a:effectRef>
-          <a:fontRef idx="minor">
-            <a:schemeClr val="lt1"/>
-          </a:fontRef>
-        </p:style>
-        <p:txBody>
-          <a:bodyPr rtlCol="0" anchor="ctr"/>
-          <a:lstStyle/>
-          <a:p>
-            <a:pPr algn="ctr"/>
-          </a:p>
-        </p:txBody>
-      </p:sp>
-      <p:sp>
-        <p:nvSpPr>
-          <p:cNvPr id="5" name="TextBox 4"/>
-          <p:cNvSpPr txBox="1"/>
-          <p:nvPr/>
-        </p:nvSpPr>
-        <p:spPr>
-          <a:xfrm>
-            <a:off x="777240" y="1773936"/>
-            <a:ext cx="10637215" cy="4023360"/>
-          </a:xfrm>
-          <a:prstGeom prst="rect">
-            <a:avLst/>
-          </a:prstGeom>
-          <a:noFill/>
-        </p:spPr>
-        <p:txBody>
-          <a:bodyPr wrap="square">
-            <a:spAutoFit/>
-          </a:bodyPr>
-          <a:lstStyle/>
-          <a:p>
-            <a:pPr>
-              <a:spcAft>
-                <a:spcPts val="1100"/>
-              </a:spcAft>
-              <a:defRPr sz="1900" b="1">
-                <a:solidFill>
-                  <a:srgbClr val="1A1A1A"/>
-                </a:solidFill>
-                <a:latin typeface="Segoe UI"/>
-              </a:defRPr>
-            </a:pPr>
-            <a:r>
-              <a:t>The brief's dates are off by a week</a:t>
-            </a:r>
-          </a:p>
-          <a:p>
-            <a:pPr lvl="1">
-              <a:spcAft>
-                <a:spcPts val="1100"/>
-              </a:spcAft>
-              <a:defRPr sz="1600" b="0">
-                <a:solidFill>
-                  <a:srgbClr val="666666"/>
-                </a:solidFill>
-                <a:latin typeface="Segoe UI"/>
-              </a:defRPr>
-            </a:pPr>
-            <a:r>
-              <a:t>–  It says the project starts Mon 14 Sep and is due Sun 4 Oct</a:t>
-            </a:r>
-          </a:p>
-          <a:p>
-            <a:pPr lvl="1">
-              <a:spcAft>
-                <a:spcPts val="1100"/>
-              </a:spcAft>
-              <a:defRPr sz="1600" b="0">
-                <a:solidFill>
-                  <a:srgbClr val="666666"/>
-                </a:solidFill>
-                <a:latin typeface="Segoe UI"/>
-              </a:defRPr>
-            </a:pPr>
-            <a:r>
-              <a:t>–  Week 1 actually began Mon 21 Sep</a:t>
-            </a:r>
-          </a:p>
-          <a:p>
-            <a:pPr>
-              <a:spcAft>
-                <a:spcPts val="1100"/>
-              </a:spcAft>
-              <a:defRPr sz="1900" b="1">
-                <a:solidFill>
-                  <a:srgbClr val="1A1A1A"/>
-                </a:solidFill>
-                <a:latin typeface="Segoe UI"/>
-              </a:defRPr>
-            </a:pPr>
-            <a:r>
-              <a:t>Shifting each week forward by one:</a:t>
-            </a:r>
-          </a:p>
-          <a:p>
-            <a:pPr lvl="1">
-              <a:spcAft>
-                <a:spcPts val="1100"/>
-              </a:spcAft>
-              <a:defRPr sz="1600" b="0">
-                <a:solidFill>
-                  <a:srgbClr val="666666"/>
-                </a:solidFill>
-                <a:latin typeface="Segoe UI"/>
-              </a:defRPr>
-            </a:pPr>
-            <a:r>
-              <a:t>–  Week 1 — 21–27 Sep · embeddings &amp; chunking  (this review)</a:t>
-            </a:r>
-          </a:p>
-          <a:p>
-            <a:pPr lvl="1">
-              <a:spcAft>
-                <a:spcPts val="1100"/>
-              </a:spcAft>
-              <a:defRPr sz="1600" b="0">
-                <a:solidFill>
-                  <a:srgbClr val="666666"/>
-                </a:solidFill>
-                <a:latin typeface="Segoe UI"/>
-              </a:defRPr>
-            </a:pPr>
-            <a:r>
-              <a:t>–  Week 2 — 28 Sep–4 Oct · vector database &amp; retrieval</a:t>
-            </a:r>
-          </a:p>
-          <a:p>
-            <a:pPr lvl="1">
-              <a:spcAft>
-                <a:spcPts val="1100"/>
-              </a:spcAft>
-              <a:defRPr sz="1600" b="0">
-                <a:solidFill>
-                  <a:srgbClr val="666666"/>
-                </a:solidFill>
-                <a:latin typeface="Segoe UI"/>
-              </a:defRPr>
-            </a:pPr>
-            <a:r>
-              <a:t>–  Week 3 — 5–11 Oct · generation, citations, submission</a:t>
-            </a:r>
-          </a:p>
-          <a:p>
-            <a:pPr>
-              <a:spcAft>
-                <a:spcPts val="1100"/>
-              </a:spcAft>
-              <a:defRPr sz="1900" b="0">
-                <a:solidFill>
-                  <a:srgbClr val="1A1A1A"/>
-                </a:solidFill>
-                <a:latin typeface="Segoe UI"/>
-              </a:defRPr>
-            </a:pPr>
-            <a:r>
-              <a:t>•  That puts the printed 4 Oct deadline at the end of Week 2 — I need a decision on which date holds</a:t>
-            </a:r>
-          </a:p>
-        </p:txBody>
-      </p:sp>
-      <p:sp>
-        <p:nvSpPr>
-          <p:cNvPr id="6" name="TextBox 5"/>
-          <p:cNvSpPr txBox="1"/>
-          <p:nvPr/>
-        </p:nvSpPr>
-        <p:spPr>
-          <a:xfrm>
-            <a:off x="777240" y="6053328"/>
-            <a:ext cx="10637215" cy="457200"/>
-          </a:xfrm>
-          <a:prstGeom prst="rect">
-            <a:avLst/>
-          </a:prstGeom>
-          <a:noFill/>
-        </p:spPr>
-        <p:txBody>
-          <a:bodyPr wrap="square">
-            <a:spAutoFit/>
-          </a:bodyPr>
-          <a:lstStyle/>
-          <a:p>
-            <a:pPr>
-              <a:defRPr sz="1200" i="1">
-                <a:solidFill>
-                  <a:srgbClr val="666666"/>
-                </a:solidFill>
-                <a:latin typeface="Segoe UI"/>
-              </a:defRPr>
-            </a:pPr>
-            <a:r>
-              <a:t>Your brief says adjusting scope is easy in week 1 and hard on the final Sunday — hence raising it now</a:t>
-            </a:r>
-          </a:p>
-        </p:txBody>
-      </p:sp>
-    </p:spTree>
-  </p:cSld>
-  <p:clrMapOvr>
-    <a:masterClrMapping/>
-  </p:clrMapOvr>
-</p:sld>
-</file>
-
-<file path=ppt/slides/slide4.xml><?xml version="1.0" encoding="utf-8"?>
-<p:sld xmlns:a="http://schemas.openxmlformats.org/drawingml/2006/main" xmlns:p="http://schemas.openxmlformats.org/presentationml/2006/main" xmlns:r="http://schemas.openxmlformats.org/officeDocument/2006/relationships">
-  <p:cSld>
-    <p:spTree>
-      <p:nvGrpSpPr>
-        <p:cNvPr id="1" name=""/>
-        <p:cNvGrpSpPr/>
-        <p:nvPr/>
-      </p:nvGrpSpPr>
-      <p:grpSpPr/>
-      <p:sp>
-        <p:nvSpPr>
-          <p:cNvPr id="2" name="TextBox 1"/>
-          <p:cNvSpPr txBox="1"/>
-          <p:nvPr/>
-        </p:nvSpPr>
-        <p:spPr>
-          <a:xfrm>
-            <a:off x="777240" y="457200"/>
-            <a:ext cx="10637215" cy="274320"/>
-          </a:xfrm>
-          <a:prstGeom prst="rect">
-            <a:avLst/>
-          </a:prstGeom>
-          <a:noFill/>
-        </p:spPr>
-        <p:txBody>
-          <a:bodyPr wrap="square">
-            <a:spAutoFit/>
-          </a:bodyPr>
-          <a:lstStyle/>
-          <a:p>
-            <a:pPr>
-              <a:defRPr sz="1200" b="1">
-                <a:solidFill>
-                  <a:srgbClr val="1F4E79"/>
-                </a:solidFill>
-                <a:latin typeface="Segoe UI"/>
-              </a:defRPr>
-            </a:pPr>
-            <a:r>
-              <a:t>MON–TUE</a:t>
-            </a:r>
-          </a:p>
-        </p:txBody>
-      </p:sp>
-      <p:sp>
-        <p:nvSpPr>
-          <p:cNvPr id="3" name="TextBox 2"/>
-          <p:cNvSpPr txBox="1"/>
-          <p:nvPr/>
-        </p:nvSpPr>
-        <p:spPr>
-          <a:xfrm>
-            <a:off x="777240" y="786384"/>
-            <a:ext cx="10637215" cy="731520"/>
-          </a:xfrm>
-          <a:prstGeom prst="rect">
-            <a:avLst/>
-          </a:prstGeom>
-          <a:noFill/>
-        </p:spPr>
-        <p:txBody>
-          <a:bodyPr wrap="square">
-            <a:spAutoFit/>
-          </a:bodyPr>
-          <a:lstStyle/>
-          <a:p>
-            <a:pPr>
-              <a:defRPr sz="3000" b="1">
-                <a:solidFill>
-                  <a:srgbClr val="1A1A1A"/>
-                </a:solidFill>
-                <a:latin typeface="Segoe UI"/>
-              </a:defRPr>
-            </a:pPr>
-            <a:r>
-              <a:t>Embeddings: what I built</a:t>
-            </a:r>
-          </a:p>
-        </p:txBody>
-      </p:sp>
-      <p:sp>
-        <p:nvSpPr>
-          <p:cNvPr id="4" name="Rectangle 3"/>
-          <p:cNvSpPr/>
-          <p:nvPr/>
-        </p:nvSpPr>
-        <p:spPr>
-          <a:xfrm>
-            <a:off x="777240" y="1499616"/>
-            <a:ext cx="10637215" cy="19050"/>
-          </a:xfrm>
-          <a:prstGeom prst="rect">
-            <a:avLst/>
-          </a:prstGeom>
-          <a:solidFill>
-            <a:srgbClr val="D8D8D8"/>
-          </a:solidFill>
-          <a:ln>
-            <a:noFill/>
-          </a:ln>
-          <a:effectLst/>
-        </p:spPr>
-        <p:style>
-          <a:lnRef idx="1">
-            <a:schemeClr val="accent1"/>
-          </a:lnRef>
-          <a:fillRef idx="3">
-            <a:schemeClr val="accent1"/>
-          </a:fillRef>
-          <a:effectRef idx="2">
-            <a:schemeClr val="accent1"/>
-          </a:effectRef>
-          <a:fontRef idx="minor">
-            <a:schemeClr val="lt1"/>
-          </a:fontRef>
-        </p:style>
-        <p:txBody>
-          <a:bodyPr rtlCol="0" anchor="ctr"/>
-          <a:lstStyle/>
-          <a:p>
-            <a:pPr algn="ctr"/>
-          </a:p>
-        </p:txBody>
-      </p:sp>
-      <p:sp>
-        <p:nvSpPr>
-          <p:cNvPr id="5" name="TextBox 4"/>
-          <p:cNvSpPr txBox="1"/>
-          <p:nvPr/>
-        </p:nvSpPr>
-        <p:spPr>
-          <a:xfrm>
-            <a:off x="777240" y="1773936"/>
-            <a:ext cx="10637215" cy="4023360"/>
-          </a:xfrm>
-          <a:prstGeom prst="rect">
-            <a:avLst/>
-          </a:prstGeom>
-          <a:noFill/>
-        </p:spPr>
-        <p:txBody>
-          <a:bodyPr wrap="square">
-            <a:spAutoFit/>
-          </a:bodyPr>
-          <a:lstStyle/>
-          <a:p>
-            <a:pPr>
-              <a:spcAft>
-                <a:spcPts val="1100"/>
-              </a:spcAft>
-              <a:defRPr sz="1900" b="1">
-                <a:solidFill>
-                  <a:srgbClr val="1A1A1A"/>
-                </a:solidFill>
-                <a:latin typeface="Segoe UI"/>
-              </a:defRPr>
-            </a:pPr>
-            <a:r>
-              <a:t>Provider chosen: Sentence Transformers, all-MiniLM-L6-v2, 384 dimensions, running locally</a:t>
-            </a:r>
-          </a:p>
-          <a:p>
-            <a:pPr>
-              <a:spcAft>
-                <a:spcPts val="1100"/>
-              </a:spcAft>
-              <a:defRPr sz="1900" b="0">
-                <a:solidFill>
-                  <a:srgbClr val="1A1A1A"/>
-                </a:solidFill>
-                <a:latin typeface="Segoe UI"/>
-              </a:defRPr>
-            </a:pPr>
-            <a:r>
-              <a:t>•  Free, no API key, works offline after a one-time 90 MB download</a:t>
-            </a:r>
-          </a:p>
-          <a:p>
-            <a:pPr>
-              <a:spcAft>
-                <a:spcPts val="1100"/>
-              </a:spcAft>
-              <a:defRPr sz="1900" b="1">
-                <a:solidFill>
-                  <a:srgbClr val="1A1A1A"/>
-                </a:solidFill>
-                <a:latin typeface="Segoe UI"/>
-              </a:defRPr>
-            </a:pPr>
-            <a:r>
-              <a:t>Why local rather than the OpenAI API — and this is a project-management reason, not a technical one:</a:t>
-            </a:r>
-          </a:p>
-          <a:p>
-            <a:pPr lvl="1">
-              <a:spcAft>
-                <a:spcPts val="1100"/>
-              </a:spcAft>
-              <a:defRPr sz="1600" b="0">
-                <a:solidFill>
-                  <a:srgbClr val="666666"/>
-                </a:solidFill>
-                <a:latin typeface="Segoe UI"/>
-              </a:defRPr>
-            </a:pPr>
-            <a:r>
-              <a:t>–  Wednesday needed the whole corpus re-embedded repeatedly to compare chunk sizes</a:t>
-            </a:r>
-          </a:p>
-          <a:p>
-            <a:pPr lvl="1">
-              <a:spcAft>
-                <a:spcPts val="1100"/>
-              </a:spcAft>
-              <a:defRPr sz="1600" b="0">
-                <a:solidFill>
-                  <a:srgbClr val="666666"/>
-                </a:solidFill>
-                <a:latin typeface="Segoe UI"/>
-              </a:defRPr>
-            </a:pPr>
-            <a:r>
-              <a:t>–  Week 2 will do it again for top-k</a:t>
-            </a:r>
-          </a:p>
-          <a:p>
-            <a:pPr lvl="1">
-              <a:spcAft>
-                <a:spcPts val="1100"/>
-              </a:spcAft>
-              <a:defRPr sz="1600" b="0">
-                <a:solidFill>
-                  <a:srgbClr val="666666"/>
-                </a:solidFill>
-                <a:latin typeface="Segoe UI"/>
-              </a:defRPr>
-            </a:pPr>
-            <a:r>
-              <a:t>–  Per-call billing makes you hesitate to re-run an experiment, and hesitation is what this project cannot afford</a:t>
-            </a:r>
-          </a:p>
-          <a:p>
-            <a:pPr>
-              <a:spcAft>
-                <a:spcPts val="1100"/>
-              </a:spcAft>
-              <a:defRPr sz="1900" b="0">
-                <a:solidFill>
-                  <a:srgbClr val="1A1A1A"/>
-                </a:solidFill>
-                <a:latin typeface="Segoe UI"/>
-              </a:defRPr>
-            </a:pPr>
-            <a:r>
-              <a:t>•  OpenAI embeddings are wired up behind one setting, so switching is a one-line change</a:t>
-            </a:r>
-          </a:p>
-        </p:txBody>
-      </p:sp>
-      <p:sp>
-        <p:nvSpPr>
-          <p:cNvPr id="6" name="TextBox 5"/>
-          <p:cNvSpPr txBox="1"/>
-          <p:nvPr/>
-        </p:nvSpPr>
-        <p:spPr>
-          <a:xfrm>
-            <a:off x="777240" y="6053328"/>
-            <a:ext cx="10637215" cy="457200"/>
-          </a:xfrm>
-          <a:prstGeom prst="rect">
-            <a:avLst/>
-          </a:prstGeom>
-          <a:noFill/>
-        </p:spPr>
-        <p:txBody>
-          <a:bodyPr wrap="square">
-            <a:spAutoFit/>
-          </a:bodyPr>
-          <a:lstStyle/>
-          <a:p>
-            <a:pPr>
-              <a:defRPr sz="1200" i="1">
-                <a:solidFill>
-                  <a:srgbClr val="666666"/>
-                </a:solidFill>
-                <a:latin typeface="Segoe UI"/>
-              </a:defRPr>
-            </a:pPr>
-            <a:r>
-              <a:t>src/embedder.py — nothing else in the project knows which backend is active</a:t>
-            </a:r>
-          </a:p>
-        </p:txBody>
-      </p:sp>
-    </p:spTree>
-  </p:cSld>
-  <p:clrMapOvr>
-    <a:masterClrMapping/>
-  </p:clrMapOvr>
-</p:sld>
-</file>
-
-<file path=ppt/slides/slide5.xml><?xml version="1.0" encoding="utf-8"?>
-<p:sld xmlns:a="http://schemas.openxmlformats.org/drawingml/2006/main" xmlns:p="http://schemas.openxmlformats.org/presentationml/2006/main" xmlns:r="http://schemas.openxmlformats.org/officeDocument/2006/relationships">
-  <p:cSld>
-    <p:spTree>
-      <p:nvGrpSpPr>
-        <p:cNvPr id="1" name=""/>
-        <p:cNvGrpSpPr/>
-        <p:nvPr/>
-      </p:nvGrpSpPr>
-      <p:grpSpPr/>
-      <p:sp>
-        <p:nvSpPr>
-          <p:cNvPr id="2" name="TextBox 1"/>
-          <p:cNvSpPr txBox="1"/>
-          <p:nvPr/>
-        </p:nvSpPr>
-        <p:spPr>
-          <a:xfrm>
-            <a:off x="777240" y="457200"/>
-            <a:ext cx="10637215" cy="274320"/>
-          </a:xfrm>
-          <a:prstGeom prst="rect">
-            <a:avLst/>
-          </a:prstGeom>
-          <a:noFill/>
-        </p:spPr>
-        <p:txBody>
-          <a:bodyPr wrap="square">
-            <a:spAutoFit/>
-          </a:bodyPr>
-          <a:lstStyle/>
-          <a:p>
-            <a:pPr>
-              <a:defRPr sz="1200" b="1">
-                <a:solidFill>
-                  <a:srgbClr val="1F4E79"/>
-                </a:solidFill>
-                <a:latin typeface="Segoe UI"/>
-              </a:defRPr>
-            </a:pPr>
-            <a:r>
-              <a:t>MON–TUE</a:t>
-            </a:r>
-          </a:p>
-        </p:txBody>
-      </p:sp>
-      <p:sp>
-        <p:nvSpPr>
-          <p:cNvPr id="3" name="TextBox 2"/>
-          <p:cNvSpPr txBox="1"/>
-          <p:nvPr/>
-        </p:nvSpPr>
-        <p:spPr>
-          <a:xfrm>
-            <a:off x="777240" y="786384"/>
-            <a:ext cx="10637215" cy="731520"/>
-          </a:xfrm>
-          <a:prstGeom prst="rect">
-            <a:avLst/>
-          </a:prstGeom>
-          <a:noFill/>
-        </p:spPr>
-        <p:txBody>
-          <a:bodyPr wrap="square">
-            <a:spAutoFit/>
-          </a:bodyPr>
-          <a:lstStyle/>
-          <a:p>
-            <a:pPr>
-              <a:defRPr sz="3000" b="1">
-                <a:solidFill>
-                  <a:srgbClr val="1A1A1A"/>
-                </a:solidFill>
-                <a:latin typeface="Segoe UI"/>
-              </a:defRPr>
-            </a:pPr>
-            <a:r>
-              <a:t>Embeddings: the measurement</a:t>
-            </a:r>
-          </a:p>
-        </p:txBody>
-      </p:sp>
-      <p:sp>
-        <p:nvSpPr>
-          <p:cNvPr id="4" name="Rectangle 3"/>
-          <p:cNvSpPr/>
-          <p:nvPr/>
-        </p:nvSpPr>
-        <p:spPr>
-          <a:xfrm>
-            <a:off x="777240" y="1499616"/>
-            <a:ext cx="10637215" cy="19050"/>
-          </a:xfrm>
-          <a:prstGeom prst="rect">
-            <a:avLst/>
-          </a:prstGeom>
-          <a:solidFill>
-            <a:srgbClr val="D8D8D8"/>
-          </a:solidFill>
-          <a:ln>
-            <a:noFill/>
-          </a:ln>
-          <a:effectLst/>
-        </p:spPr>
-        <p:style>
-          <a:lnRef idx="1">
-            <a:schemeClr val="accent1"/>
-          </a:lnRef>
-          <a:fillRef idx="3">
-            <a:schemeClr val="accent1"/>
-          </a:fillRef>
-          <a:effectRef idx="2">
-            <a:schemeClr val="accent1"/>
-          </a:effectRef>
-          <a:fontRef idx="minor">
-            <a:schemeClr val="lt1"/>
-          </a:fontRef>
-        </p:style>
-        <p:txBody>
-          <a:bodyPr rtlCol="0" anchor="ctr"/>
-          <a:lstStyle/>
-          <a:p>
-            <a:pPr algn="ctr"/>
+              <a:t>The search still returned five chunks. It always returns something.</a:t>
+            </a:r>
           </a:p>
         </p:txBody>
       </p:sp>
       <p:graphicFrame>
         <p:nvGraphicFramePr>
-          <p:cNvPr id="5" name="Table 4"/>
+          <p:cNvPr id="6" name="Table 5"/>
           <p:cNvGraphicFramePr>
             <a:graphicFrameLocks noGrp="1"/>
           </p:cNvGraphicFramePr>
           <p:nvPr/>
         </p:nvGraphicFramePr>
         <p:xfrm>
-          <a:off x="777240" y="1773936"/>
-          <a:ext cx="10637214" cy="3456432"/>
+          <a:off x="777240" y="2313432"/>
+          <a:ext cx="10637214" cy="1682496"/>
         </p:xfrm>
         <a:graphic>
           <a:graphicData uri="http://schemas.openxmlformats.org/drawingml/2006/table">
@@ -10966,14 +7992,14 @@
                 <a:gridCol w="8104544"/>
                 <a:gridCol w="2532670"/>
               </a:tblGrid>
-              <a:tr h="384048">
+              <a:tr h="420624">
                 <a:tc>
                   <a:txBody>
                     <a:bodyPr/>
                     <a:lstStyle/>
                     <a:p>
                       <a:pPr>
-                        <a:defRPr sz="1400" b="1">
+                        <a:defRPr sz="1500" b="1">
                           <a:solidFill>
                             <a:srgbClr val="FFFFFF"/>
                           </a:solidFill>
@@ -10981,7 +8007,7 @@
                         </a:defRPr>
                       </a:pPr>
                       <a:r>
-                        <a:t>comparison</a:t>
+                        <a:t>what I asked</a:t>
                       </a:r>
                     </a:p>
                   </a:txBody>
@@ -10997,7 +8023,7 @@
                     <a:lstStyle/>
                     <a:p>
                       <a:pPr>
-                        <a:defRPr sz="1400" b="1">
+                        <a:defRPr sz="1500" b="1">
                           <a:solidFill>
                             <a:srgbClr val="FFFFFF"/>
                           </a:solidFill>
@@ -11005,7 +8031,7 @@
                         </a:defRPr>
                       </a:pPr>
                       <a:r>
-                        <a:t>cosine similarity</a:t>
+                        <a:t>best score</a:t>
                       </a:r>
                     </a:p>
                   </a:txBody>
@@ -11016,14 +8042,14 @@
                   </a:tcPr>
                 </a:tc>
               </a:tr>
-              <a:tr h="384048">
+              <a:tr h="420624">
                 <a:tc>
                   <a:txBody>
                     <a:bodyPr/>
                     <a:lstStyle/>
                     <a:p>
                       <a:pPr>
-                        <a:defRPr sz="1300" b="0">
+                        <a:defRPr sz="1500" b="0">
                           <a:solidFill>
                             <a:srgbClr val="1A1A1A"/>
                           </a:solidFill>
@@ -11031,7 +8057,7 @@
                         </a:defRPr>
                       </a:pPr>
                       <a:r>
-                        <a:t>A1 vs A2  — sourdough / loaf from scratch</a:t>
+                        <a:t>"What time does the corner shop close on Sundays?"</a:t>
                       </a:r>
                     </a:p>
                   </a:txBody>
@@ -11047,7 +8073,7 @@
                     <a:lstStyle/>
                     <a:p>
                       <a:pPr>
-                        <a:defRPr sz="1300" b="0">
+                        <a:defRPr sz="1500" b="0">
                           <a:solidFill>
                             <a:srgbClr val="1A1A1A"/>
                           </a:solidFill>
@@ -11055,7 +8081,7 @@
                         </a:defRPr>
                       </a:pPr>
                       <a:r>
-                        <a:t>0.6178</a:t>
+                        <a:t>0.339</a:t>
                       </a:r>
                     </a:p>
                   </a:txBody>
@@ -11066,14 +8092,14 @@
                   </a:tcPr>
                 </a:tc>
               </a:tr>
-              <a:tr h="384048">
+              <a:tr h="420624">
                 <a:tc>
                   <a:txBody>
                     <a:bodyPr/>
                     <a:lstStyle/>
                     <a:p>
                       <a:pPr>
-                        <a:defRPr sz="1300" b="0">
+                        <a:defRPr sz="1500" b="0">
                           <a:solidFill>
                             <a:srgbClr val="1A1A1A"/>
                           </a:solidFill>
@@ -11081,7 +8107,7 @@
                         </a:defRPr>
                       </a:pPr>
                       <a:r>
-                        <a:t>A1 vs A3  — sourdough / weekend baking</a:t>
+                        <a:t>The weakest score from a real, answerable question</a:t>
                       </a:r>
                     </a:p>
                   </a:txBody>
@@ -11097,7 +8123,7 @@
                     <a:lstStyle/>
                     <a:p>
                       <a:pPr>
-                        <a:defRPr sz="1300" b="0">
+                        <a:defRPr sz="1500" b="0">
                           <a:solidFill>
                             <a:srgbClr val="1A1A1A"/>
                           </a:solidFill>
@@ -11105,7 +8131,7 @@
                         </a:defRPr>
                       </a:pPr>
                       <a:r>
-                        <a:t>0.6082</a:t>
+                        <a:t>0.366</a:t>
                       </a:r>
                     </a:p>
                   </a:txBody>
@@ -11116,214 +8142,14 @@
                   </a:tcPr>
                 </a:tc>
               </a:tr>
-              <a:tr h="384048">
+              <a:tr h="420624">
                 <a:tc>
                   <a:txBody>
                     <a:bodyPr/>
                     <a:lstStyle/>
                     <a:p>
                       <a:pPr>
-                        <a:defRPr sz="1300" b="0">
-                          <a:solidFill>
-                            <a:srgbClr val="1A1A1A"/>
-                          </a:solidFill>
-                          <a:latin typeface="Segoe UI"/>
-                        </a:defRPr>
-                      </a:pPr>
-                      <a:r>
-                        <a:t>A2 vs A3  — loaf from scratch / weekend baking</a:t>
-                      </a:r>
-                    </a:p>
-                  </a:txBody>
-                  <a:tcPr>
-                    <a:solidFill>
-                      <a:srgbClr val="FFFFFF"/>
-                    </a:solidFill>
-                  </a:tcPr>
-                </a:tc>
-                <a:tc>
-                  <a:txBody>
-                    <a:bodyPr/>
-                    <a:lstStyle/>
-                    <a:p>
-                      <a:pPr>
-                        <a:defRPr sz="1300" b="0">
-                          <a:solidFill>
-                            <a:srgbClr val="1A1A1A"/>
-                          </a:solidFill>
-                          <a:latin typeface="Consolas"/>
-                        </a:defRPr>
-                      </a:pPr>
-                      <a:r>
-                        <a:t>0.6254</a:t>
-                      </a:r>
-                    </a:p>
-                  </a:txBody>
-                  <a:tcPr>
-                    <a:solidFill>
-                      <a:srgbClr val="FFFFFF"/>
-                    </a:solidFill>
-                  </a:tcPr>
-                </a:tc>
-              </a:tr>
-              <a:tr h="384048">
-                <a:tc>
-                  <a:txBody>
-                    <a:bodyPr/>
-                    <a:lstStyle/>
-                    <a:p>
-                      <a:pPr>
-                        <a:defRPr sz="1300" b="0">
-                          <a:solidFill>
-                            <a:srgbClr val="1A1A1A"/>
-                          </a:solidFill>
-                          <a:latin typeface="Segoe UI"/>
-                        </a:defRPr>
-                      </a:pPr>
-                      <a:r>
-                        <a:t>B1 vs B2  — tax deadline / Saturn's moons</a:t>
-                      </a:r>
-                    </a:p>
-                  </a:txBody>
-                  <a:tcPr>
-                    <a:solidFill>
-                      <a:srgbClr val="FFFFFF"/>
-                    </a:solidFill>
-                  </a:tcPr>
-                </a:tc>
-                <a:tc>
-                  <a:txBody>
-                    <a:bodyPr/>
-                    <a:lstStyle/>
-                    <a:p>
-                      <a:pPr>
-                        <a:defRPr sz="1300" b="0">
-                          <a:solidFill>
-                            <a:srgbClr val="1A1A1A"/>
-                          </a:solidFill>
-                          <a:latin typeface="Consolas"/>
-                        </a:defRPr>
-                      </a:pPr>
-                      <a:r>
-                        <a:t>-0.0190</a:t>
-                      </a:r>
-                    </a:p>
-                  </a:txBody>
-                  <a:tcPr>
-                    <a:solidFill>
-                      <a:srgbClr val="FFFFFF"/>
-                    </a:solidFill>
-                  </a:tcPr>
-                </a:tc>
-              </a:tr>
-              <a:tr h="384048">
-                <a:tc>
-                  <a:txBody>
-                    <a:bodyPr/>
-                    <a:lstStyle/>
-                    <a:p>
-                      <a:pPr>
-                        <a:defRPr sz="1300" b="0">
-                          <a:solidFill>
-                            <a:srgbClr val="1A1A1A"/>
-                          </a:solidFill>
-                          <a:latin typeface="Segoe UI"/>
-                        </a:defRPr>
-                      </a:pPr>
-                      <a:r>
-                        <a:t>B1 vs B3  — tax deadline / router reboot</a:t>
-                      </a:r>
-                    </a:p>
-                  </a:txBody>
-                  <a:tcPr>
-                    <a:solidFill>
-                      <a:srgbClr val="FFFFFF"/>
-                    </a:solidFill>
-                  </a:tcPr>
-                </a:tc>
-                <a:tc>
-                  <a:txBody>
-                    <a:bodyPr/>
-                    <a:lstStyle/>
-                    <a:p>
-                      <a:pPr>
-                        <a:defRPr sz="1300" b="0">
-                          <a:solidFill>
-                            <a:srgbClr val="1A1A1A"/>
-                          </a:solidFill>
-                          <a:latin typeface="Consolas"/>
-                        </a:defRPr>
-                      </a:pPr>
-                      <a:r>
-                        <a:t>0.1112</a:t>
-                      </a:r>
-                    </a:p>
-                  </a:txBody>
-                  <a:tcPr>
-                    <a:solidFill>
-                      <a:srgbClr val="FFFFFF"/>
-                    </a:solidFill>
-                  </a:tcPr>
-                </a:tc>
-              </a:tr>
-              <a:tr h="384048">
-                <a:tc>
-                  <a:txBody>
-                    <a:bodyPr/>
-                    <a:lstStyle/>
-                    <a:p>
-                      <a:pPr>
-                        <a:defRPr sz="1300" b="0">
-                          <a:solidFill>
-                            <a:srgbClr val="1A1A1A"/>
-                          </a:solidFill>
-                          <a:latin typeface="Segoe UI"/>
-                        </a:defRPr>
-                      </a:pPr>
-                      <a:r>
-                        <a:t>B2 vs B3  — Saturn's moons / router reboot</a:t>
-                      </a:r>
-                    </a:p>
-                  </a:txBody>
-                  <a:tcPr>
-                    <a:solidFill>
-                      <a:srgbClr val="FFFFFF"/>
-                    </a:solidFill>
-                  </a:tcPr>
-                </a:tc>
-                <a:tc>
-                  <a:txBody>
-                    <a:bodyPr/>
-                    <a:lstStyle/>
-                    <a:p>
-                      <a:pPr>
-                        <a:defRPr sz="1300" b="0">
-                          <a:solidFill>
-                            <a:srgbClr val="1A1A1A"/>
-                          </a:solidFill>
-                          <a:latin typeface="Consolas"/>
-                        </a:defRPr>
-                      </a:pPr>
-                      <a:r>
-                        <a:t>0.0009</a:t>
-                      </a:r>
-                    </a:p>
-                  </a:txBody>
-                  <a:tcPr>
-                    <a:solidFill>
-                      <a:srgbClr val="FFFFFF"/>
-                    </a:solidFill>
-                  </a:tcPr>
-                </a:tc>
-              </a:tr>
-              <a:tr h="384048">
-                <a:tc>
-                  <a:txBody>
-                    <a:bodyPr/>
-                    <a:lstStyle/>
-                    <a:p>
-                      <a:pPr>
-                        <a:defRPr sz="1300" b="1">
+                        <a:defRPr sz="1500" b="1">
                           <a:solidFill>
                             <a:srgbClr val="B32D2D"/>
                           </a:solidFill>
@@ -11331,7 +8157,7 @@
                         </a:defRPr>
                       </a:pPr>
                       <a:r>
-                        <a:t>Group A average (related)</a:t>
+                        <a:t>Gap between them</a:t>
                       </a:r>
                     </a:p>
                   </a:txBody>
@@ -11347,7 +8173,7 @@
                     <a:lstStyle/>
                     <a:p>
                       <a:pPr>
-                        <a:defRPr sz="1300" b="1">
+                        <a:defRPr sz="1500" b="1">
                           <a:solidFill>
                             <a:srgbClr val="B32D2D"/>
                           </a:solidFill>
@@ -11355,57 +8181,7 @@
                         </a:defRPr>
                       </a:pPr>
                       <a:r>
-                        <a:t>0.6172</a:t>
-                      </a:r>
-                    </a:p>
-                  </a:txBody>
-                  <a:tcPr>
-                    <a:solidFill>
-                      <a:srgbClr val="F2F5F8"/>
-                    </a:solidFill>
-                  </a:tcPr>
-                </a:tc>
-              </a:tr>
-              <a:tr h="384048">
-                <a:tc>
-                  <a:txBody>
-                    <a:bodyPr/>
-                    <a:lstStyle/>
-                    <a:p>
-                      <a:pPr>
-                        <a:defRPr sz="1300" b="1">
-                          <a:solidFill>
-                            <a:srgbClr val="B32D2D"/>
-                          </a:solidFill>
-                          <a:latin typeface="Segoe UI"/>
-                        </a:defRPr>
-                      </a:pPr>
-                      <a:r>
-                        <a:t>Group B average (unrelated)</a:t>
-                      </a:r>
-                    </a:p>
-                  </a:txBody>
-                  <a:tcPr>
-                    <a:solidFill>
-                      <a:srgbClr val="F2F5F8"/>
-                    </a:solidFill>
-                  </a:tcPr>
-                </a:tc>
-                <a:tc>
-                  <a:txBody>
-                    <a:bodyPr/>
-                    <a:lstStyle/>
-                    <a:p>
-                      <a:pPr>
-                        <a:defRPr sz="1300" b="1">
-                          <a:solidFill>
-                            <a:srgbClr val="B32D2D"/>
-                          </a:solidFill>
-                          <a:latin typeface="Consolas"/>
-                        </a:defRPr>
-                      </a:pPr>
-                      <a:r>
-                        <a:t>0.0310</a:t>
+                        <a:t>0.027</a:t>
                       </a:r>
                     </a:p>
                   </a:txBody>
@@ -11422,13 +8198,13 @@
       </p:graphicFrame>
       <p:sp>
         <p:nvSpPr>
-          <p:cNvPr id="6" name="TextBox 5"/>
+          <p:cNvPr id="7" name="TextBox 6"/>
           <p:cNvSpPr txBox="1"/>
           <p:nvPr/>
         </p:nvSpPr>
         <p:spPr>
           <a:xfrm>
-            <a:off x="777240" y="6053328"/>
+            <a:off x="777240" y="6035040"/>
             <a:ext cx="10637215" cy="457200"/>
           </a:xfrm>
           <a:prstGeom prst="rect">
@@ -11451,1388 +8227,7 @@
               </a:defRPr>
             </a:pPr>
             <a:r>
-              <a:t>Cosine similarity written by hand in src/similarity.py — dot product ÷ both magnitudes, no library shortcut</a:t>
-            </a:r>
-          </a:p>
-        </p:txBody>
-      </p:sp>
-    </p:spTree>
-  </p:cSld>
-  <p:clrMapOvr>
-    <a:masterClrMapping/>
-  </p:clrMapOvr>
-</p:sld>
-</file>
-
-<file path=ppt/slides/slide6.xml><?xml version="1.0" encoding="utf-8"?>
-<p:sld xmlns:a="http://schemas.openxmlformats.org/drawingml/2006/main" xmlns:p="http://schemas.openxmlformats.org/presentationml/2006/main" xmlns:r="http://schemas.openxmlformats.org/officeDocument/2006/relationships">
-  <p:cSld>
-    <p:spTree>
-      <p:nvGrpSpPr>
-        <p:cNvPr id="1" name=""/>
-        <p:cNvGrpSpPr/>
-        <p:nvPr/>
-      </p:nvGrpSpPr>
-      <p:grpSpPr/>
-      <p:sp>
-        <p:nvSpPr>
-          <p:cNvPr id="2" name="TextBox 1"/>
-          <p:cNvSpPr txBox="1"/>
-          <p:nvPr/>
-        </p:nvSpPr>
-        <p:spPr>
-          <a:xfrm>
-            <a:off x="777240" y="457200"/>
-            <a:ext cx="10637215" cy="274320"/>
-          </a:xfrm>
-          <a:prstGeom prst="rect">
-            <a:avLst/>
-          </a:prstGeom>
-          <a:noFill/>
-        </p:spPr>
-        <p:txBody>
-          <a:bodyPr wrap="square">
-            <a:spAutoFit/>
-          </a:bodyPr>
-          <a:lstStyle/>
-          <a:p>
-            <a:pPr>
-              <a:defRPr sz="1200" b="1">
-                <a:solidFill>
-                  <a:srgbClr val="1F4E79"/>
-                </a:solidFill>
-                <a:latin typeface="Segoe UI"/>
-              </a:defRPr>
-            </a:pPr>
-            <a:r>
-              <a:t>MON–TUE</a:t>
-            </a:r>
-          </a:p>
-        </p:txBody>
-      </p:sp>
-      <p:sp>
-        <p:nvSpPr>
-          <p:cNvPr id="3" name="TextBox 2"/>
-          <p:cNvSpPr txBox="1"/>
-          <p:nvPr/>
-        </p:nvSpPr>
-        <p:spPr>
-          <a:xfrm>
-            <a:off x="777240" y="786384"/>
-            <a:ext cx="10637215" cy="731520"/>
-          </a:xfrm>
-          <a:prstGeom prst="rect">
-            <a:avLst/>
-          </a:prstGeom>
-          <a:noFill/>
-        </p:spPr>
-        <p:txBody>
-          <a:bodyPr wrap="square">
-            <a:spAutoFit/>
-          </a:bodyPr>
-          <a:lstStyle/>
-          <a:p>
-            <a:pPr>
-              <a:defRPr sz="3000" b="1">
-                <a:solidFill>
-                  <a:srgbClr val="1A1A1A"/>
-                </a:solidFill>
-                <a:latin typeface="Segoe UI"/>
-              </a:defRPr>
-            </a:pPr>
-            <a:r>
-              <a:t>The result that reframed my thinking</a:t>
-            </a:r>
-          </a:p>
-        </p:txBody>
-      </p:sp>
-      <p:sp>
-        <p:nvSpPr>
-          <p:cNvPr id="4" name="Rectangle 3"/>
-          <p:cNvSpPr/>
-          <p:nvPr/>
-        </p:nvSpPr>
-        <p:spPr>
-          <a:xfrm>
-            <a:off x="777240" y="1499616"/>
-            <a:ext cx="10637215" cy="19050"/>
-          </a:xfrm>
-          <a:prstGeom prst="rect">
-            <a:avLst/>
-          </a:prstGeom>
-          <a:solidFill>
-            <a:srgbClr val="D8D8D8"/>
-          </a:solidFill>
-          <a:ln>
-            <a:noFill/>
-          </a:ln>
-          <a:effectLst/>
-        </p:spPr>
-        <p:style>
-          <a:lnRef idx="1">
-            <a:schemeClr val="accent1"/>
-          </a:lnRef>
-          <a:fillRef idx="3">
-            <a:schemeClr val="accent1"/>
-          </a:fillRef>
-          <a:effectRef idx="2">
-            <a:schemeClr val="accent1"/>
-          </a:effectRef>
-          <a:fontRef idx="minor">
-            <a:schemeClr val="lt1"/>
-          </a:fontRef>
-        </p:style>
-        <p:txBody>
-          <a:bodyPr rtlCol="0" anchor="ctr"/>
-          <a:lstStyle/>
-          <a:p>
-            <a:pPr algn="ctr"/>
-          </a:p>
-        </p:txBody>
-      </p:sp>
-      <p:sp>
-        <p:nvSpPr>
-          <p:cNvPr id="5" name="TextBox 4"/>
-          <p:cNvSpPr txBox="1"/>
-          <p:nvPr/>
-        </p:nvSpPr>
-        <p:spPr>
-          <a:xfrm>
-            <a:off x="777240" y="1956816"/>
-            <a:ext cx="10637215" cy="822960"/>
-          </a:xfrm>
-          <a:prstGeom prst="rect">
-            <a:avLst/>
-          </a:prstGeom>
-          <a:noFill/>
-        </p:spPr>
-        <p:txBody>
-          <a:bodyPr wrap="square">
-            <a:spAutoFit/>
-          </a:bodyPr>
-          <a:lstStyle/>
-          <a:p>
-            <a:pPr>
-              <a:defRPr sz="3400" b="1">
-                <a:solidFill>
-                  <a:srgbClr val="1F4E79"/>
-                </a:solidFill>
-                <a:latin typeface="Segoe UI"/>
-              </a:defRPr>
-            </a:pPr>
-            <a:r>
-              <a:t>0.62, not 0.95</a:t>
-            </a:r>
-          </a:p>
-        </p:txBody>
-      </p:sp>
-      <p:sp>
-        <p:nvSpPr>
-          <p:cNvPr id="6" name="TextBox 5"/>
-          <p:cNvSpPr txBox="1"/>
-          <p:nvPr/>
-        </p:nvSpPr>
-        <p:spPr>
-          <a:xfrm>
-            <a:off x="777240" y="3008376"/>
-            <a:ext cx="10637215" cy="3108960"/>
-          </a:xfrm>
-          <a:prstGeom prst="rect">
-            <a:avLst/>
-          </a:prstGeom>
-          <a:noFill/>
-        </p:spPr>
-        <p:txBody>
-          <a:bodyPr wrap="square">
-            <a:spAutoFit/>
-          </a:bodyPr>
-          <a:lstStyle/>
-          <a:p>
-            <a:pPr>
-              <a:spcAft>
-                <a:spcPts val="1200"/>
-              </a:spcAft>
-              <a:defRPr sz="1700">
-                <a:solidFill>
-                  <a:srgbClr val="1A1A1A"/>
-                </a:solidFill>
-                <a:latin typeface="Segoe UI"/>
-              </a:defRPr>
-            </a:pPr>
-            <a:r>
-              <a:t>Related sentences scored 0.617. I expected "similar" to mean "close to 1.0".</a:t>
-            </a:r>
-          </a:p>
-          <a:p>
-            <a:pPr>
-              <a:spcAft>
-                <a:spcPts val="1200"/>
-              </a:spcAft>
-              <a:defRPr sz="1700">
-                <a:solidFill>
-                  <a:srgbClr val="1A1A1A"/>
-                </a:solidFill>
-                <a:latin typeface="Segoe UI"/>
-              </a:defRPr>
-            </a:pPr>
-            <a:r>
-              <a:t>What makes 0.617 meaningful is the 0.031 baseline sitting underneath it.</a:t>
-            </a:r>
-          </a:p>
-          <a:p>
-            <a:pPr>
-              <a:spcAft>
-                <a:spcPts val="1200"/>
-              </a:spcAft>
-              <a:defRPr sz="1700">
-                <a:solidFill>
-                  <a:srgbClr val="1A1A1A"/>
-                </a:solidFill>
-                <a:latin typeface="Segoe UI"/>
-              </a:defRPr>
-            </a:pPr>
-            <a:r>
-              <a:t>A sensible-looking filter — "keep anything above 0.8" — would have discarded every correct match.</a:t>
-            </a:r>
-          </a:p>
-          <a:p>
-            <a:pPr>
-              <a:spcAft>
-                <a:spcPts val="1200"/>
-              </a:spcAft>
-              <a:defRPr sz="1700">
-                <a:solidFill>
-                  <a:srgbClr val="1A1A1A"/>
-                </a:solidFill>
-                <a:latin typeface="Segoe UI"/>
-              </a:defRPr>
-            </a:pPr>
-            <a:r>
-              <a:t>So: rank candidates against each other. Never filter on a threshold that feels right.</a:t>
-            </a:r>
-          </a:p>
-          <a:p>
-            <a:pPr>
-              <a:spcAft>
-                <a:spcPts val="1200"/>
-              </a:spcAft>
-              <a:defRPr sz="1700">
-                <a:solidFill>
-                  <a:srgbClr val="1A1A1A"/>
-                </a:solidFill>
-                <a:latin typeface="Segoe UI"/>
-              </a:defRPr>
-            </a:pPr>
-            <a:r>
-              <a:t>These scores are only comparable within one model. Change the model and every number changes.</a:t>
-            </a:r>
-          </a:p>
-        </p:txBody>
-      </p:sp>
-    </p:spTree>
-  </p:cSld>
-  <p:clrMapOvr>
-    <a:masterClrMapping/>
-  </p:clrMapOvr>
-</p:sld>
-</file>
-
-<file path=ppt/slides/slide7.xml><?xml version="1.0" encoding="utf-8"?>
-<p:sld xmlns:a="http://schemas.openxmlformats.org/drawingml/2006/main" xmlns:p="http://schemas.openxmlformats.org/presentationml/2006/main" xmlns:r="http://schemas.openxmlformats.org/officeDocument/2006/relationships">
-  <p:cSld>
-    <p:spTree>
-      <p:nvGrpSpPr>
-        <p:cNvPr id="1" name=""/>
-        <p:cNvGrpSpPr/>
-        <p:nvPr/>
-      </p:nvGrpSpPr>
-      <p:grpSpPr/>
-      <p:sp>
-        <p:nvSpPr>
-          <p:cNvPr id="2" name="TextBox 1"/>
-          <p:cNvSpPr txBox="1"/>
-          <p:nvPr/>
-        </p:nvSpPr>
-        <p:spPr>
-          <a:xfrm>
-            <a:off x="777240" y="457200"/>
-            <a:ext cx="10637215" cy="274320"/>
-          </a:xfrm>
-          <a:prstGeom prst="rect">
-            <a:avLst/>
-          </a:prstGeom>
-          <a:noFill/>
-        </p:spPr>
-        <p:txBody>
-          <a:bodyPr wrap="square">
-            <a:spAutoFit/>
-          </a:bodyPr>
-          <a:lstStyle/>
-          <a:p>
-            <a:pPr>
-              <a:defRPr sz="1200" b="1">
-                <a:solidFill>
-                  <a:srgbClr val="1F4E79"/>
-                </a:solidFill>
-                <a:latin typeface="Segoe UI"/>
-              </a:defRPr>
-            </a:pPr>
-            <a:r>
-              <a:t>MON–TUE</a:t>
-            </a:r>
-          </a:p>
-        </p:txBody>
-      </p:sp>
-      <p:sp>
-        <p:nvSpPr>
-          <p:cNvPr id="3" name="TextBox 2"/>
-          <p:cNvSpPr txBox="1"/>
-          <p:nvPr/>
-        </p:nvSpPr>
-        <p:spPr>
-          <a:xfrm>
-            <a:off x="777240" y="786384"/>
-            <a:ext cx="10637215" cy="731520"/>
-          </a:xfrm>
-          <a:prstGeom prst="rect">
-            <a:avLst/>
-          </a:prstGeom>
-          <a:noFill/>
-        </p:spPr>
-        <p:txBody>
-          <a:bodyPr wrap="square">
-            <a:spAutoFit/>
-          </a:bodyPr>
-          <a:lstStyle/>
-          <a:p>
-            <a:pPr>
-              <a:defRPr sz="3000" b="1">
-                <a:solidFill>
-                  <a:srgbClr val="1A1A1A"/>
-                </a:solidFill>
-                <a:latin typeface="Segoe UI"/>
-              </a:defRPr>
-            </a:pPr>
-            <a:r>
-              <a:t>What an embedding is — in my own words</a:t>
-            </a:r>
-          </a:p>
-        </p:txBody>
-      </p:sp>
-      <p:sp>
-        <p:nvSpPr>
-          <p:cNvPr id="4" name="Rectangle 3"/>
-          <p:cNvSpPr/>
-          <p:nvPr/>
-        </p:nvSpPr>
-        <p:spPr>
-          <a:xfrm>
-            <a:off x="777240" y="1499616"/>
-            <a:ext cx="10637215" cy="19050"/>
-          </a:xfrm>
-          <a:prstGeom prst="rect">
-            <a:avLst/>
-          </a:prstGeom>
-          <a:solidFill>
-            <a:srgbClr val="D8D8D8"/>
-          </a:solidFill>
-          <a:ln>
-            <a:noFill/>
-          </a:ln>
-          <a:effectLst/>
-        </p:spPr>
-        <p:style>
-          <a:lnRef idx="1">
-            <a:schemeClr val="accent1"/>
-          </a:lnRef>
-          <a:fillRef idx="3">
-            <a:schemeClr val="accent1"/>
-          </a:fillRef>
-          <a:effectRef idx="2">
-            <a:schemeClr val="accent1"/>
-          </a:effectRef>
-          <a:fontRef idx="minor">
-            <a:schemeClr val="lt1"/>
-          </a:fontRef>
-        </p:style>
-        <p:txBody>
-          <a:bodyPr rtlCol="0" anchor="ctr"/>
-          <a:lstStyle/>
-          <a:p>
-            <a:pPr algn="ctr"/>
-          </a:p>
-        </p:txBody>
-      </p:sp>
-      <p:sp>
-        <p:nvSpPr>
-          <p:cNvPr id="5" name="TextBox 4"/>
-          <p:cNvSpPr txBox="1"/>
-          <p:nvPr/>
-        </p:nvSpPr>
-        <p:spPr>
-          <a:xfrm>
-            <a:off x="777240" y="1773936"/>
-            <a:ext cx="10637215" cy="4023360"/>
-          </a:xfrm>
-          <a:prstGeom prst="rect">
-            <a:avLst/>
-          </a:prstGeom>
-          <a:noFill/>
-        </p:spPr>
-        <p:txBody>
-          <a:bodyPr wrap="square">
-            <a:spAutoFit/>
-          </a:bodyPr>
-          <a:lstStyle/>
-          <a:p>
-            <a:pPr>
-              <a:spcAft>
-                <a:spcPts val="1100"/>
-              </a:spcAft>
-              <a:defRPr sz="1900" b="0">
-                <a:solidFill>
-                  <a:srgbClr val="1A1A1A"/>
-                </a:solidFill>
-                <a:latin typeface="Segoe UI"/>
-              </a:defRPr>
-            </a:pPr>
-            <a:r>
-              <a:t>•  [ TO WRITE BEFORE PRESENTING ]</a:t>
-            </a:r>
-          </a:p>
-          <a:p>
-            <a:pPr lvl="1">
-              <a:spcAft>
-                <a:spcPts val="1100"/>
-              </a:spcAft>
-              <a:defRPr sz="1600" b="0">
-                <a:solidFill>
-                  <a:srgbClr val="666666"/>
-                </a:solidFill>
-                <a:latin typeface="Segoe UI"/>
-              </a:defRPr>
-            </a:pPr>
-            <a:r>
-              <a:t>–  Your self-check asks me to explain this without using "vector" as a cop-out</a:t>
-            </a:r>
-          </a:p>
-          <a:p>
-            <a:pPr lvl="1">
-              <a:spcAft>
-                <a:spcPts val="1100"/>
-              </a:spcAft>
-              <a:defRPr sz="1600" b="0">
-                <a:solidFill>
-                  <a:srgbClr val="666666"/>
-                </a:solidFill>
-                <a:latin typeface="Segoe UI"/>
-              </a:defRPr>
-            </a:pPr>
-            <a:r>
-              <a:t>–  Constraint I'm holding myself to: explainable to someone who has never seen the word</a:t>
-            </a:r>
-          </a:p>
-          <a:p>
-            <a:pPr>
-              <a:defRPr sz="1000"/>
-            </a:pPr>
-          </a:p>
-          <a:p>
-            <a:pPr>
-              <a:spcAft>
-                <a:spcPts val="1100"/>
-              </a:spcAft>
-              <a:defRPr sz="1900" b="0">
-                <a:solidFill>
-                  <a:srgbClr val="1A1A1A"/>
-                </a:solidFill>
-                <a:latin typeface="Segoe UI"/>
-              </a:defRPr>
-            </a:pPr>
-            <a:r>
-              <a:t>•  Evidence I can draw on:</a:t>
-            </a:r>
-          </a:p>
-          <a:p>
-            <a:pPr lvl="1">
-              <a:spcAft>
-                <a:spcPts val="1100"/>
-              </a:spcAft>
-              <a:defRPr sz="1600" b="0">
-                <a:solidFill>
-                  <a:srgbClr val="666666"/>
-                </a:solidFill>
-                <a:latin typeface="Segoe UI"/>
-              </a:defRPr>
-            </a:pPr>
-            <a:r>
-              <a:t>–  A 7-character input and a 196-character input both produce exactly 384 numbers</a:t>
-            </a:r>
-          </a:p>
-          <a:p>
-            <a:pPr lvl="1">
-              <a:spcAft>
-                <a:spcPts val="1100"/>
-              </a:spcAft>
-              <a:defRPr sz="1600" b="0">
-                <a:solidFill>
-                  <a:srgbClr val="666666"/>
-                </a:solidFill>
-                <a:latin typeface="Segoe UI"/>
-              </a:defRPr>
-            </a:pPr>
-            <a:r>
-              <a:t>–  Two sentences with no shared keywords scored 0.62 against each other</a:t>
-            </a:r>
-          </a:p>
-          <a:p>
-            <a:pPr lvl="1">
-              <a:spcAft>
-                <a:spcPts val="1100"/>
-              </a:spcAft>
-              <a:defRPr sz="1600" b="0">
-                <a:solidFill>
-                  <a:srgbClr val="666666"/>
-                </a:solidFill>
-                <a:latin typeface="Segoe UI"/>
-              </a:defRPr>
-            </a:pPr>
-            <a:r>
-              <a:t>–  The numbers mean nothing on their own — only their positions relative to each other</a:t>
-            </a:r>
-          </a:p>
-        </p:txBody>
-      </p:sp>
-      <p:sp>
-        <p:nvSpPr>
-          <p:cNvPr id="6" name="TextBox 5"/>
-          <p:cNvSpPr txBox="1"/>
-          <p:nvPr/>
-        </p:nvSpPr>
-        <p:spPr>
-          <a:xfrm>
-            <a:off x="777240" y="6053328"/>
-            <a:ext cx="10637215" cy="457200"/>
-          </a:xfrm>
-          <a:prstGeom prst="rect">
-            <a:avLst/>
-          </a:prstGeom>
-          <a:noFill/>
-        </p:spPr>
-        <p:txBody>
-          <a:bodyPr wrap="square">
-            <a:spAutoFit/>
-          </a:bodyPr>
-          <a:lstStyle/>
-          <a:p>
-            <a:pPr>
-              <a:defRPr sz="1200" i="1">
-                <a:solidFill>
-                  <a:srgbClr val="666666"/>
-                </a:solidFill>
-                <a:latin typeface="Segoe UI"/>
-              </a:defRPr>
-            </a:pPr>
-            <a:r>
-              <a:t>Deliberately left blank — this one has to be mine, or it will not survive your follow-up question</a:t>
-            </a:r>
-          </a:p>
-        </p:txBody>
-      </p:sp>
-    </p:spTree>
-  </p:cSld>
-  <p:clrMapOvr>
-    <a:masterClrMapping/>
-  </p:clrMapOvr>
-</p:sld>
-</file>
-
-<file path=ppt/slides/slide8.xml><?xml version="1.0" encoding="utf-8"?>
-<p:sld xmlns:a="http://schemas.openxmlformats.org/drawingml/2006/main" xmlns:p="http://schemas.openxmlformats.org/presentationml/2006/main" xmlns:r="http://schemas.openxmlformats.org/officeDocument/2006/relationships">
-  <p:cSld>
-    <p:spTree>
-      <p:nvGrpSpPr>
-        <p:cNvPr id="1" name=""/>
-        <p:cNvGrpSpPr/>
-        <p:nvPr/>
-      </p:nvGrpSpPr>
-      <p:grpSpPr/>
-      <p:sp>
-        <p:nvSpPr>
-          <p:cNvPr id="2" name="TextBox 1"/>
-          <p:cNvSpPr txBox="1"/>
-          <p:nvPr/>
-        </p:nvSpPr>
-        <p:spPr>
-          <a:xfrm>
-            <a:off x="777240" y="457200"/>
-            <a:ext cx="10637215" cy="274320"/>
-          </a:xfrm>
-          <a:prstGeom prst="rect">
-            <a:avLst/>
-          </a:prstGeom>
-          <a:noFill/>
-        </p:spPr>
-        <p:txBody>
-          <a:bodyPr wrap="square">
-            <a:spAutoFit/>
-          </a:bodyPr>
-          <a:lstStyle/>
-          <a:p>
-            <a:pPr>
-              <a:defRPr sz="1200" b="1">
-                <a:solidFill>
-                  <a:srgbClr val="1F4E79"/>
-                </a:solidFill>
-                <a:latin typeface="Segoe UI"/>
-              </a:defRPr>
-            </a:pPr>
-            <a:r>
-              <a:t>WED–THU</a:t>
-            </a:r>
-          </a:p>
-        </p:txBody>
-      </p:sp>
-      <p:sp>
-        <p:nvSpPr>
-          <p:cNvPr id="3" name="TextBox 2"/>
-          <p:cNvSpPr txBox="1"/>
-          <p:nvPr/>
-        </p:nvSpPr>
-        <p:spPr>
-          <a:xfrm>
-            <a:off x="777240" y="786384"/>
-            <a:ext cx="10637215" cy="731520"/>
-          </a:xfrm>
-          <a:prstGeom prst="rect">
-            <a:avLst/>
-          </a:prstGeom>
-          <a:noFill/>
-        </p:spPr>
-        <p:txBody>
-          <a:bodyPr wrap="square">
-            <a:spAutoFit/>
-          </a:bodyPr>
-          <a:lstStyle/>
-          <a:p>
-            <a:pPr>
-              <a:defRPr sz="3000" b="1">
-                <a:solidFill>
-                  <a:srgbClr val="1A1A1A"/>
-                </a:solidFill>
-                <a:latin typeface="Segoe UI"/>
-              </a:defRPr>
-            </a:pPr>
-            <a:r>
-              <a:t>Chunking: what I built</a:t>
-            </a:r>
-          </a:p>
-        </p:txBody>
-      </p:sp>
-      <p:sp>
-        <p:nvSpPr>
-          <p:cNvPr id="4" name="Rectangle 3"/>
-          <p:cNvSpPr/>
-          <p:nvPr/>
-        </p:nvSpPr>
-        <p:spPr>
-          <a:xfrm>
-            <a:off x="777240" y="1499616"/>
-            <a:ext cx="10637215" cy="19050"/>
-          </a:xfrm>
-          <a:prstGeom prst="rect">
-            <a:avLst/>
-          </a:prstGeom>
-          <a:solidFill>
-            <a:srgbClr val="D8D8D8"/>
-          </a:solidFill>
-          <a:ln>
-            <a:noFill/>
-          </a:ln>
-          <a:effectLst/>
-        </p:spPr>
-        <p:style>
-          <a:lnRef idx="1">
-            <a:schemeClr val="accent1"/>
-          </a:lnRef>
-          <a:fillRef idx="3">
-            <a:schemeClr val="accent1"/>
-          </a:fillRef>
-          <a:effectRef idx="2">
-            <a:schemeClr val="accent1"/>
-          </a:effectRef>
-          <a:fontRef idx="minor">
-            <a:schemeClr val="lt1"/>
-          </a:fontRef>
-        </p:style>
-        <p:txBody>
-          <a:bodyPr rtlCol="0" anchor="ctr"/>
-          <a:lstStyle/>
-          <a:p>
-            <a:pPr algn="ctr"/>
-          </a:p>
-        </p:txBody>
-      </p:sp>
-      <p:sp>
-        <p:nvSpPr>
-          <p:cNvPr id="5" name="TextBox 4"/>
-          <p:cNvSpPr txBox="1"/>
-          <p:nvPr/>
-        </p:nvSpPr>
-        <p:spPr>
-          <a:xfrm>
-            <a:off x="777240" y="1773936"/>
-            <a:ext cx="10637215" cy="4023360"/>
-          </a:xfrm>
-          <a:prstGeom prst="rect">
-            <a:avLst/>
-          </a:prstGeom>
-          <a:noFill/>
-        </p:spPr>
-        <p:txBody>
-          <a:bodyPr wrap="square">
-            <a:spAutoFit/>
-          </a:bodyPr>
-          <a:lstStyle/>
-          <a:p>
-            <a:pPr>
-              <a:spcAft>
-                <a:spcPts val="1100"/>
-              </a:spcAft>
-              <a:defRPr sz="1900" b="1">
-                <a:solidFill>
-                  <a:srgbClr val="1A1A1A"/>
-                </a:solidFill>
-                <a:latin typeface="Segoe UI"/>
-              </a:defRPr>
-            </a:pPr>
-            <a:r>
-              <a:t>src/loader.py — reads .md, .txt and .pdf from a folder, including subfolders</a:t>
-            </a:r>
-          </a:p>
-          <a:p>
-            <a:pPr lvl="1">
-              <a:spcAft>
-                <a:spcPts val="1100"/>
-              </a:spcAft>
-              <a:defRPr sz="1600" b="0">
-                <a:solidFill>
-                  <a:srgbClr val="666666"/>
-                </a:solidFill>
-                <a:latin typeface="Segoe UI"/>
-              </a:defRPr>
-            </a:pPr>
-            <a:r>
-              <a:t>–  PDFs become one document per page, so page numbers survive into citations later</a:t>
-            </a:r>
-          </a:p>
-          <a:p>
-            <a:pPr lvl="1">
-              <a:spcAft>
-                <a:spcPts val="1100"/>
-              </a:spcAft>
-              <a:defRPr sz="1600" b="0">
-                <a:solidFill>
-                  <a:srgbClr val="666666"/>
-                </a:solidFill>
-                <a:latin typeface="Segoe UI"/>
-              </a:defRPr>
-            </a:pPr>
-            <a:r>
-              <a:t>–  One unreadable file warns by name and is skipped; it never aborts the run</a:t>
-            </a:r>
-          </a:p>
-          <a:p>
-            <a:pPr>
-              <a:spcAft>
-                <a:spcPts val="1100"/>
-              </a:spcAft>
-              <a:defRPr sz="1900" b="1">
-                <a:solidFill>
-                  <a:srgbClr val="1A1A1A"/>
-                </a:solidFill>
-                <a:latin typeface="Segoe UI"/>
-              </a:defRPr>
-            </a:pPr>
-            <a:r>
-              <a:t>src/chunker.py — fixed-size character windows with overlap</a:t>
-            </a:r>
-          </a:p>
-          <a:p>
-            <a:pPr lvl="1">
-              <a:spcAft>
-                <a:spcPts val="1100"/>
-              </a:spcAft>
-              <a:defRPr sz="1600" b="0">
-                <a:solidFill>
-                  <a:srgbClr val="666666"/>
-                </a:solidFill>
-                <a:latin typeface="Segoe UI"/>
-              </a:defRPr>
-            </a:pPr>
-            <a:r>
-              <a:t>–  Cut points scan backwards a short distance for a paragraph break, then a sentence end, then any space</a:t>
-            </a:r>
-          </a:p>
-          <a:p>
-            <a:pPr lvl="1">
-              <a:spcAft>
-                <a:spcPts val="1100"/>
-              </a:spcAft>
-              <a:defRPr sz="1600" b="0">
-                <a:solidFill>
-                  <a:srgbClr val="666666"/>
-                </a:solidFill>
-                <a:latin typeface="Segoe UI"/>
-              </a:defRPr>
-            </a:pPr>
-            <a:r>
-              <a:t>–  So chunks never split a word in half, and prefer to break between ideas</a:t>
-            </a:r>
-          </a:p>
-          <a:p>
-            <a:pPr>
-              <a:spcAft>
-                <a:spcPts val="1100"/>
-              </a:spcAft>
-              <a:defRPr sz="1900" b="0">
-                <a:solidFill>
-                  <a:srgbClr val="1A1A1A"/>
-                </a:solidFill>
-                <a:latin typeface="Segoe UI"/>
-              </a:defRPr>
-            </a:pPr>
-            <a:r>
-              <a:t>•  Each chunk carries its source, index, character offset and page — citations need all four</a:t>
-            </a:r>
-          </a:p>
-        </p:txBody>
-      </p:sp>
-      <p:sp>
-        <p:nvSpPr>
-          <p:cNvPr id="6" name="TextBox 5"/>
-          <p:cNvSpPr txBox="1"/>
-          <p:nvPr/>
-        </p:nvSpPr>
-        <p:spPr>
-          <a:xfrm>
-            <a:off x="777240" y="6053328"/>
-            <a:ext cx="10637215" cy="457200"/>
-          </a:xfrm>
-          <a:prstGeom prst="rect">
-            <a:avLst/>
-          </a:prstGeom>
-          <a:noFill/>
-        </p:spPr>
-        <p:txBody>
-          <a:bodyPr wrap="square">
-            <a:spAutoFit/>
-          </a:bodyPr>
-          <a:lstStyle/>
-          <a:p>
-            <a:pPr>
-              <a:defRPr sz="1200" i="1">
-                <a:solidFill>
-                  <a:srgbClr val="666666"/>
-                </a:solidFill>
-                <a:latin typeface="Segoe UI"/>
-              </a:defRPr>
-            </a:pPr>
-            <a:r>
-              <a:t>Verified on an 11-page PDF: 11 pages → 11 documents → 21 chunks, cited as gen-ai-brochure.pdf#1 (p.2)</a:t>
-            </a:r>
-          </a:p>
-        </p:txBody>
-      </p:sp>
-    </p:spTree>
-  </p:cSld>
-  <p:clrMapOvr>
-    <a:masterClrMapping/>
-  </p:clrMapOvr>
-</p:sld>
-</file>
-
-<file path=ppt/slides/slide9.xml><?xml version="1.0" encoding="utf-8"?>
-<p:sld xmlns:a="http://schemas.openxmlformats.org/drawingml/2006/main" xmlns:p="http://schemas.openxmlformats.org/presentationml/2006/main" xmlns:r="http://schemas.openxmlformats.org/officeDocument/2006/relationships">
-  <p:cSld>
-    <p:spTree>
-      <p:nvGrpSpPr>
-        <p:cNvPr id="1" name=""/>
-        <p:cNvGrpSpPr/>
-        <p:nvPr/>
-      </p:nvGrpSpPr>
-      <p:grpSpPr/>
-      <p:sp>
-        <p:nvSpPr>
-          <p:cNvPr id="2" name="TextBox 1"/>
-          <p:cNvSpPr txBox="1"/>
-          <p:nvPr/>
-        </p:nvSpPr>
-        <p:spPr>
-          <a:xfrm>
-            <a:off x="777240" y="457200"/>
-            <a:ext cx="10637215" cy="274320"/>
-          </a:xfrm>
-          <a:prstGeom prst="rect">
-            <a:avLst/>
-          </a:prstGeom>
-          <a:noFill/>
-        </p:spPr>
-        <p:txBody>
-          <a:bodyPr wrap="square">
-            <a:spAutoFit/>
-          </a:bodyPr>
-          <a:lstStyle/>
-          <a:p>
-            <a:pPr>
-              <a:defRPr sz="1200" b="1">
-                <a:solidFill>
-                  <a:srgbClr val="1F4E79"/>
-                </a:solidFill>
-                <a:latin typeface="Segoe UI"/>
-              </a:defRPr>
-            </a:pPr>
-            <a:r>
-              <a:t>WED–THU</a:t>
-            </a:r>
-          </a:p>
-        </p:txBody>
-      </p:sp>
-      <p:sp>
-        <p:nvSpPr>
-          <p:cNvPr id="3" name="TextBox 2"/>
-          <p:cNvSpPr txBox="1"/>
-          <p:nvPr/>
-        </p:nvSpPr>
-        <p:spPr>
-          <a:xfrm>
-            <a:off x="777240" y="786384"/>
-            <a:ext cx="10637215" cy="731520"/>
-          </a:xfrm>
-          <a:prstGeom prst="rect">
-            <a:avLst/>
-          </a:prstGeom>
-          <a:noFill/>
-        </p:spPr>
-        <p:txBody>
-          <a:bodyPr wrap="square">
-            <a:spAutoFit/>
-          </a:bodyPr>
-          <a:lstStyle/>
-          <a:p>
-            <a:pPr>
-              <a:defRPr sz="3000" b="1">
-                <a:solidFill>
-                  <a:srgbClr val="1A1A1A"/>
-                </a:solidFill>
-                <a:latin typeface="Segoe UI"/>
-              </a:defRPr>
-            </a:pPr>
-            <a:r>
-              <a:t>The failure that chunk tuning exists to prevent</a:t>
-            </a:r>
-          </a:p>
-        </p:txBody>
-      </p:sp>
-      <p:sp>
-        <p:nvSpPr>
-          <p:cNvPr id="4" name="Rectangle 3"/>
-          <p:cNvSpPr/>
-          <p:nvPr/>
-        </p:nvSpPr>
-        <p:spPr>
-          <a:xfrm>
-            <a:off x="777240" y="1499616"/>
-            <a:ext cx="10637215" cy="19050"/>
-          </a:xfrm>
-          <a:prstGeom prst="rect">
-            <a:avLst/>
-          </a:prstGeom>
-          <a:solidFill>
-            <a:srgbClr val="D8D8D8"/>
-          </a:solidFill>
-          <a:ln>
-            <a:noFill/>
-          </a:ln>
-          <a:effectLst/>
-        </p:spPr>
-        <p:style>
-          <a:lnRef idx="1">
-            <a:schemeClr val="accent1"/>
-          </a:lnRef>
-          <a:fillRef idx="3">
-            <a:schemeClr val="accent1"/>
-          </a:fillRef>
-          <a:effectRef idx="2">
-            <a:schemeClr val="accent1"/>
-          </a:effectRef>
-          <a:fontRef idx="minor">
-            <a:schemeClr val="lt1"/>
-          </a:fontRef>
-        </p:style>
-        <p:txBody>
-          <a:bodyPr rtlCol="0" anchor="ctr"/>
-          <a:lstStyle/>
-          <a:p>
-            <a:pPr algn="ctr"/>
-          </a:p>
-        </p:txBody>
-      </p:sp>
-      <p:graphicFrame>
-        <p:nvGraphicFramePr>
-          <p:cNvPr id="5" name="Table 4"/>
-          <p:cNvGraphicFramePr>
-            <a:graphicFrameLocks noGrp="1"/>
-          </p:cNvGraphicFramePr>
-          <p:nvPr/>
-        </p:nvGraphicFramePr>
-        <p:xfrm>
-          <a:off x="777240" y="1773936"/>
-          <a:ext cx="10637214" cy="1536192"/>
-        </p:xfrm>
-        <a:graphic>
-          <a:graphicData uri="http://schemas.openxmlformats.org/drawingml/2006/table">
-            <a:tbl>
-              <a:tblPr firstRow="1" bandRow="1">
-                <a:tableStyleId>{5C22544A-7EE6-4342-B048-85BDC9FD1C3A}</a:tableStyleId>
-              </a:tblPr>
-              <a:tblGrid>
-                <a:gridCol w="5431769"/>
-                <a:gridCol w="1584266"/>
-                <a:gridCol w="3621179"/>
-              </a:tblGrid>
-              <a:tr h="384048">
-                <a:tc>
-                  <a:txBody>
-                    <a:bodyPr/>
-                    <a:lstStyle/>
-                    <a:p>
-                      <a:pPr>
-                        <a:defRPr sz="1400" b="1">
-                          <a:solidFill>
-                            <a:srgbClr val="FFFFFF"/>
-                          </a:solidFill>
-                          <a:latin typeface="Segoe UI"/>
-                        </a:defRPr>
-                      </a:pPr>
-                      <a:r>
-                        <a:t>configuration</a:t>
-                      </a:r>
-                    </a:p>
-                  </a:txBody>
-                  <a:tcPr>
-                    <a:solidFill>
-                      <a:srgbClr val="1F4E79"/>
-                    </a:solidFill>
-                  </a:tcPr>
-                </a:tc>
-                <a:tc>
-                  <a:txBody>
-                    <a:bodyPr/>
-                    <a:lstStyle/>
-                    <a:p>
-                      <a:pPr>
-                        <a:defRPr sz="1400" b="1">
-                          <a:solidFill>
-                            <a:srgbClr val="FFFFFF"/>
-                          </a:solidFill>
-                          <a:latin typeface="Segoe UI"/>
-                        </a:defRPr>
-                      </a:pPr>
-                      <a:r>
-                        <a:t>chunks</a:t>
-                      </a:r>
-                    </a:p>
-                  </a:txBody>
-                  <a:tcPr>
-                    <a:solidFill>
-                      <a:srgbClr val="1F4E79"/>
-                    </a:solidFill>
-                  </a:tcPr>
-                </a:tc>
-                <a:tc>
-                  <a:txBody>
-                    <a:bodyPr/>
-                    <a:lstStyle/>
-                    <a:p>
-                      <a:pPr>
-                        <a:defRPr sz="1400" b="1">
-                          <a:solidFill>
-                            <a:srgbClr val="FFFFFF"/>
-                          </a:solidFill>
-                          <a:latin typeface="Segoe UI"/>
-                        </a:defRPr>
-                      </a:pPr>
-                      <a:r>
-                        <a:t>is the fact retrievable?</a:t>
-                      </a:r>
-                    </a:p>
-                  </a:txBody>
-                  <a:tcPr>
-                    <a:solidFill>
-                      <a:srgbClr val="1F4E79"/>
-                    </a:solidFill>
-                  </a:tcPr>
-                </a:tc>
-              </a:tr>
-              <a:tr h="384048">
-                <a:tc>
-                  <a:txBody>
-                    <a:bodyPr/>
-                    <a:lstStyle/>
-                    <a:p>
-                      <a:pPr>
-                        <a:defRPr sz="1300" b="1">
-                          <a:solidFill>
-                            <a:srgbClr val="B32D2D"/>
-                          </a:solidFill>
-                          <a:latin typeface="Segoe UI"/>
-                        </a:defRPr>
-                      </a:pPr>
-                      <a:r>
-                        <a:t>500 size / 0 overlap, hard cuts</a:t>
-                      </a:r>
-                    </a:p>
-                  </a:txBody>
-                  <a:tcPr>
-                    <a:solidFill>
-                      <a:srgbClr val="F2F5F8"/>
-                    </a:solidFill>
-                  </a:tcPr>
-                </a:tc>
-                <a:tc>
-                  <a:txBody>
-                    <a:bodyPr/>
-                    <a:lstStyle/>
-                    <a:p>
-                      <a:pPr>
-                        <a:defRPr sz="1300" b="1">
-                          <a:solidFill>
-                            <a:srgbClr val="B32D2D"/>
-                          </a:solidFill>
-                          <a:latin typeface="Consolas"/>
-                        </a:defRPr>
-                      </a:pPr>
-                      <a:r>
-                        <a:t>2</a:t>
-                      </a:r>
-                    </a:p>
-                  </a:txBody>
-                  <a:tcPr>
-                    <a:solidFill>
-                      <a:srgbClr val="F2F5F8"/>
-                    </a:solidFill>
-                  </a:tcPr>
-                </a:tc>
-                <a:tc>
-                  <a:txBody>
-                    <a:bodyPr/>
-                    <a:lstStyle/>
-                    <a:p>
-                      <a:pPr>
-                        <a:defRPr sz="1300" b="1">
-                          <a:solidFill>
-                            <a:srgbClr val="B32D2D"/>
-                          </a:solidFill>
-                          <a:latin typeface="Consolas"/>
-                        </a:defRPr>
-                      </a:pPr>
-                      <a:r>
-                        <a:t>NO CHUNK CONTAINS IT</a:t>
-                      </a:r>
-                    </a:p>
-                  </a:txBody>
-                  <a:tcPr>
-                    <a:solidFill>
-                      <a:srgbClr val="F2F5F8"/>
-                    </a:solidFill>
-                  </a:tcPr>
-                </a:tc>
-              </a:tr>
-              <a:tr h="384048">
-                <a:tc>
-                  <a:txBody>
-                    <a:bodyPr/>
-                    <a:lstStyle/>
-                    <a:p>
-                      <a:pPr>
-                        <a:defRPr sz="1300" b="0">
-                          <a:solidFill>
-                            <a:srgbClr val="1A1A1A"/>
-                          </a:solidFill>
-                          <a:latin typeface="Segoe UI"/>
-                        </a:defRPr>
-                      </a:pPr>
-                      <a:r>
-                        <a:t>500 / 0, softened boundaries</a:t>
-                      </a:r>
-                    </a:p>
-                  </a:txBody>
-                  <a:tcPr>
-                    <a:solidFill>
-                      <a:srgbClr val="FFFFFF"/>
-                    </a:solidFill>
-                  </a:tcPr>
-                </a:tc>
-                <a:tc>
-                  <a:txBody>
-                    <a:bodyPr/>
-                    <a:lstStyle/>
-                    <a:p>
-                      <a:pPr>
-                        <a:defRPr sz="1300" b="0">
-                          <a:solidFill>
-                            <a:srgbClr val="1A1A1A"/>
-                          </a:solidFill>
-                          <a:latin typeface="Consolas"/>
-                        </a:defRPr>
-                      </a:pPr>
-                      <a:r>
-                        <a:t>2</a:t>
-                      </a:r>
-                    </a:p>
-                  </a:txBody>
-                  <a:tcPr>
-                    <a:solidFill>
-                      <a:srgbClr val="FFFFFF"/>
-                    </a:solidFill>
-                  </a:tcPr>
-                </a:tc>
-                <a:tc>
-                  <a:txBody>
-                    <a:bodyPr/>
-                    <a:lstStyle/>
-                    <a:p>
-                      <a:pPr>
-                        <a:defRPr sz="1300" b="0">
-                          <a:solidFill>
-                            <a:srgbClr val="1A1A1A"/>
-                          </a:solidFill>
-                          <a:latin typeface="Consolas"/>
-                        </a:defRPr>
-                      </a:pPr>
-                      <a:r>
-                        <a:t>yes — 1 chunk</a:t>
-                      </a:r>
-                    </a:p>
-                  </a:txBody>
-                  <a:tcPr>
-                    <a:solidFill>
-                      <a:srgbClr val="FFFFFF"/>
-                    </a:solidFill>
-                  </a:tcPr>
-                </a:tc>
-              </a:tr>
-              <a:tr h="384048">
-                <a:tc>
-                  <a:txBody>
-                    <a:bodyPr/>
-                    <a:lstStyle/>
-                    <a:p>
-                      <a:pPr>
-                        <a:defRPr sz="1300" b="0">
-                          <a:solidFill>
-                            <a:srgbClr val="1A1A1A"/>
-                          </a:solidFill>
-                          <a:latin typeface="Segoe UI"/>
-                        </a:defRPr>
-                      </a:pPr>
-                      <a:r>
-                        <a:t>500 / 100, softened boundaries</a:t>
-                      </a:r>
-                    </a:p>
-                  </a:txBody>
-                  <a:tcPr>
-                    <a:solidFill>
-                      <a:srgbClr val="FFFFFF"/>
-                    </a:solidFill>
-                  </a:tcPr>
-                </a:tc>
-                <a:tc>
-                  <a:txBody>
-                    <a:bodyPr/>
-                    <a:lstStyle/>
-                    <a:p>
-                      <a:pPr>
-                        <a:defRPr sz="1300" b="0">
-                          <a:solidFill>
-                            <a:srgbClr val="1A1A1A"/>
-                          </a:solidFill>
-                          <a:latin typeface="Consolas"/>
-                        </a:defRPr>
-                      </a:pPr>
-                      <a:r>
-                        <a:t>3</a:t>
-                      </a:r>
-                    </a:p>
-                  </a:txBody>
-                  <a:tcPr>
-                    <a:solidFill>
-                      <a:srgbClr val="FFFFFF"/>
-                    </a:solidFill>
-                  </a:tcPr>
-                </a:tc>
-                <a:tc>
-                  <a:txBody>
-                    <a:bodyPr/>
-                    <a:lstStyle/>
-                    <a:p>
-                      <a:pPr>
-                        <a:defRPr sz="1300" b="0">
-                          <a:solidFill>
-                            <a:srgbClr val="1A1A1A"/>
-                          </a:solidFill>
-                          <a:latin typeface="Consolas"/>
-                        </a:defRPr>
-                      </a:pPr>
-                      <a:r>
-                        <a:t>yes — 1 chunk</a:t>
-                      </a:r>
-                    </a:p>
-                  </a:txBody>
-                  <a:tcPr>
-                    <a:solidFill>
-                      <a:srgbClr val="FFFFFF"/>
-                    </a:solidFill>
-                  </a:tcPr>
-                </a:tc>
-              </a:tr>
-            </a:tbl>
-          </a:graphicData>
-        </a:graphic>
-      </p:graphicFrame>
-      <p:sp>
-        <p:nvSpPr>
-          <p:cNvPr id="6" name="TextBox 5"/>
-          <p:cNvSpPr txBox="1"/>
-          <p:nvPr/>
-        </p:nvSpPr>
-        <p:spPr>
-          <a:xfrm>
-            <a:off x="777240" y="6053328"/>
-            <a:ext cx="10637215" cy="457200"/>
-          </a:xfrm>
-          <a:prstGeom prst="rect">
-            <a:avLst/>
-          </a:prstGeom>
-          <a:noFill/>
-        </p:spPr>
-        <p:txBody>
-          <a:bodyPr wrap="square">
-            <a:spAutoFit/>
-          </a:bodyPr>
-          <a:lstStyle/>
-          <a:p>
-            <a:pPr>
-              <a:defRPr sz="1200" i="1">
-                <a:solidFill>
-                  <a:srgbClr val="666666"/>
-                </a:solidFill>
-                <a:latin typeface="Segoe UI"/>
-              </a:defRPr>
-            </a:pPr>
-            <a:r>
-              <a:t>A 73-character fact planted at chars 460–533 of a test document, straddling the 500 boundary</a:t>
+              <a:t>So cutting off low scores is necessary but not enough — Week 3's prompt must also allow "I don't know"</a:t>
             </a:r>
           </a:p>
         </p:txBody>

--- a/presentation/week1-review.pptx
+++ b/presentation/week1-review.pptx
@@ -4602,14 +4602,14 @@
         </p:nvSpPr>
         <p:spPr>
           <a:xfrm>
-            <a:off x="0" y="2057400"/>
-            <a:ext cx="12191695" cy="1920240"/>
+            <a:off x="0" y="0"/>
+            <a:ext cx="12191695" cy="6858000"/>
           </a:xfrm>
           <a:prstGeom prst="rect">
             <a:avLst/>
           </a:prstGeom>
           <a:solidFill>
-            <a:srgbClr val="F2F5F8"/>
+            <a:srgbClr val="0F2A44"/>
           </a:solidFill>
           <a:ln>
             <a:noFill/>
@@ -4640,14 +4640,58 @@
       </p:sp>
       <p:sp>
         <p:nvSpPr>
-          <p:cNvPr id="3" name="TextBox 2"/>
+          <p:cNvPr id="3" name="Rectangle 2"/>
+          <p:cNvSpPr/>
+          <p:nvPr/>
+        </p:nvSpPr>
+        <p:spPr>
+          <a:xfrm>
+            <a:off x="822960" y="2331720"/>
+            <a:ext cx="1737360" cy="63500"/>
+          </a:xfrm>
+          <a:prstGeom prst="rect">
+            <a:avLst/>
+          </a:prstGeom>
+          <a:solidFill>
+            <a:srgbClr val="2E8B84"/>
+          </a:solidFill>
+          <a:ln>
+            <a:noFill/>
+          </a:ln>
+          <a:effectLst/>
+        </p:spPr>
+        <p:style>
+          <a:lnRef idx="1">
+            <a:schemeClr val="accent1"/>
+          </a:lnRef>
+          <a:fillRef idx="3">
+            <a:schemeClr val="accent1"/>
+          </a:fillRef>
+          <a:effectRef idx="2">
+            <a:schemeClr val="accent1"/>
+          </a:effectRef>
+          <a:fontRef idx="minor">
+            <a:schemeClr val="lt1"/>
+          </a:fontRef>
+        </p:style>
+        <p:txBody>
+          <a:bodyPr rtlCol="0" anchor="ctr"/>
+          <a:lstStyle/>
+          <a:p>
+            <a:pPr algn="ctr"/>
+          </a:p>
+        </p:txBody>
+      </p:sp>
+      <p:sp>
+        <p:nvSpPr>
+          <p:cNvPr id="4" name="TextBox 3"/>
           <p:cNvSpPr txBox="1"/>
           <p:nvPr/>
         </p:nvSpPr>
         <p:spPr>
           <a:xfrm>
-            <a:off x="777240" y="2286000"/>
-            <a:ext cx="10637215" cy="822960"/>
+            <a:off x="822960" y="2606040"/>
+            <a:ext cx="10545775" cy="1005840"/>
           </a:xfrm>
           <a:prstGeom prst="rect">
             <a:avLst/>
@@ -4661,9 +4705,9 @@
           <a:lstStyle/>
           <a:p>
             <a:pPr>
-              <a:defRPr sz="4600" b="1">
+              <a:defRPr sz="5400" b="1">
                 <a:solidFill>
-                  <a:srgbClr val="1A1A1A"/>
+                  <a:srgbClr val="FFFFFF"/>
                 </a:solidFill>
                 <a:latin typeface="Segoe UI"/>
               </a:defRPr>
@@ -4676,14 +4720,14 @@
       </p:sp>
       <p:sp>
         <p:nvSpPr>
-          <p:cNvPr id="4" name="TextBox 3"/>
+          <p:cNvPr id="5" name="TextBox 4"/>
           <p:cNvSpPr txBox="1"/>
           <p:nvPr/>
         </p:nvSpPr>
         <p:spPr>
           <a:xfrm>
-            <a:off x="777240" y="3154680"/>
-            <a:ext cx="10637215" cy="822960"/>
+            <a:off x="822960" y="3611880"/>
+            <a:ext cx="10545775" cy="548640"/>
           </a:xfrm>
           <a:prstGeom prst="rect">
             <a:avLst/>
@@ -4697,9 +4741,9 @@
           <a:lstStyle/>
           <a:p>
             <a:pPr>
-              <a:defRPr sz="2000" b="0">
+              <a:defRPr sz="2100">
                 <a:solidFill>
-                  <a:srgbClr val="1F4E79"/>
+                  <a:srgbClr val="AEC6D8"/>
                 </a:solidFill>
                 <a:latin typeface="Segoe UI"/>
               </a:defRPr>
@@ -4712,14 +4756,14 @@
       </p:sp>
       <p:sp>
         <p:nvSpPr>
-          <p:cNvPr id="5" name="TextBox 4"/>
+          <p:cNvPr id="6" name="TextBox 5"/>
           <p:cNvSpPr txBox="1"/>
           <p:nvPr/>
         </p:nvSpPr>
         <p:spPr>
           <a:xfrm>
-            <a:off x="777240" y="4343400"/>
-            <a:ext cx="10637215" cy="822960"/>
+            <a:off x="822960" y="5029200"/>
+            <a:ext cx="10545775" cy="731520"/>
           </a:xfrm>
           <a:prstGeom prst="rect">
             <a:avLst/>
@@ -4733,15 +4777,15 @@
           <a:lstStyle/>
           <a:p>
             <a:pPr>
-              <a:defRPr sz="1400" b="0">
+              <a:defRPr sz="1300">
                 <a:solidFill>
-                  <a:srgbClr val="666666"/>
+                  <a:srgbClr val="7C97AB"/>
                 </a:solidFill>
                 <a:latin typeface="Segoe UI"/>
               </a:defRPr>
             </a:pPr>
             <a:r>
-              <a:t>Mon 21 – Sun 27 Sep 2026   ·   A question-answering tool over my own notes, built without a framework</a:t>
+              <a:t>Mon 21 – Sun 27 Sep 2026     ·     A question-answering tool over my own notes, built without a framework</a:t>
             </a:r>
           </a:p>
         </p:txBody>
@@ -4766,92 +4810,20 @@
       <p:grpSpPr/>
       <p:sp>
         <p:nvSpPr>
-          <p:cNvPr id="2" name="TextBox 1"/>
-          <p:cNvSpPr txBox="1"/>
-          <p:nvPr/>
-        </p:nvSpPr>
-        <p:spPr>
-          <a:xfrm>
-            <a:off x="777240" y="457200"/>
-            <a:ext cx="10637215" cy="274320"/>
-          </a:xfrm>
-          <a:prstGeom prst="rect">
-            <a:avLst/>
-          </a:prstGeom>
-          <a:noFill/>
-        </p:spPr>
-        <p:txBody>
-          <a:bodyPr wrap="square">
-            <a:spAutoFit/>
-          </a:bodyPr>
-          <a:lstStyle/>
-          <a:p>
-            <a:pPr>
-              <a:defRPr sz="1200" b="1">
-                <a:solidFill>
-                  <a:srgbClr val="1F4E79"/>
-                </a:solidFill>
-                <a:latin typeface="Segoe UI"/>
-              </a:defRPr>
-            </a:pPr>
-            <a:r>
-              <a:t>STATUS</a:t>
-            </a:r>
-          </a:p>
-        </p:txBody>
-      </p:sp>
-      <p:sp>
-        <p:nvSpPr>
-          <p:cNvPr id="3" name="TextBox 2"/>
-          <p:cNvSpPr txBox="1"/>
-          <p:nvPr/>
-        </p:nvSpPr>
-        <p:spPr>
-          <a:xfrm>
-            <a:off x="777240" y="786384"/>
-            <a:ext cx="10637215" cy="731520"/>
-          </a:xfrm>
-          <a:prstGeom prst="rect">
-            <a:avLst/>
-          </a:prstGeom>
-          <a:noFill/>
-        </p:spPr>
-        <p:txBody>
-          <a:bodyPr wrap="square">
-            <a:spAutoFit/>
-          </a:bodyPr>
-          <a:lstStyle/>
-          <a:p>
-            <a:pPr>
-              <a:defRPr sz="3000" b="1">
-                <a:solidFill>
-                  <a:srgbClr val="1A1A1A"/>
-                </a:solidFill>
-                <a:latin typeface="Segoe UI"/>
-              </a:defRPr>
-            </a:pPr>
-            <a:r>
-              <a:t>Where I stand, and what is left</a:t>
-            </a:r>
-          </a:p>
-        </p:txBody>
-      </p:sp>
-      <p:sp>
-        <p:nvSpPr>
-          <p:cNvPr id="4" name="Rectangle 3"/>
+          <p:cNvPr id="2" name="Rectangle 1"/>
           <p:cNvSpPr/>
           <p:nvPr/>
         </p:nvSpPr>
         <p:spPr>
           <a:xfrm>
-            <a:off x="777240" y="1499616"/>
-            <a:ext cx="10637215" cy="19050"/>
+            <a:off x="0" y="0"/>
+            <a:ext cx="155448" cy="6858000"/>
           </a:xfrm>
           <a:prstGeom prst="rect">
             <a:avLst/>
           </a:prstGeom>
           <a:solidFill>
-            <a:srgbClr val="D8D8D8"/>
+            <a:srgbClr val="0F2A44"/>
           </a:solidFill>
           <a:ln>
             <a:noFill/>
@@ -4882,14 +4854,14 @@
       </p:sp>
       <p:sp>
         <p:nvSpPr>
-          <p:cNvPr id="5" name="TextBox 4"/>
+          <p:cNvPr id="3" name="TextBox 2"/>
           <p:cNvSpPr txBox="1"/>
           <p:nvPr/>
         </p:nvSpPr>
         <p:spPr>
           <a:xfrm>
-            <a:off x="777240" y="1810512"/>
-            <a:ext cx="10637215" cy="365760"/>
+            <a:off x="9082735" y="6263640"/>
+            <a:ext cx="2286000" cy="320040"/>
           </a:xfrm>
           <a:prstGeom prst="rect">
             <a:avLst/>
@@ -4902,15 +4874,255 @@
           </a:bodyPr>
           <a:lstStyle/>
           <a:p>
-            <a:pPr>
-              <a:defRPr sz="1600">
+            <a:pPr algn="r">
+              <a:defRPr sz="1000">
                 <a:solidFill>
-                  <a:srgbClr val="666666"/>
+                  <a:srgbClr val="6B7280"/>
                 </a:solidFill>
                 <a:latin typeface="Segoe UI"/>
               </a:defRPr>
             </a:pPr>
             <a:r>
+              <a:t>Ask My Docs  ·  Week 1   ·   9</a:t>
+            </a:r>
+          </a:p>
+        </p:txBody>
+      </p:sp>
+      <p:sp>
+        <p:nvSpPr>
+          <p:cNvPr id="4" name="Rectangle 3"/>
+          <p:cNvSpPr/>
+          <p:nvPr/>
+        </p:nvSpPr>
+        <p:spPr>
+          <a:xfrm>
+            <a:off x="822960" y="566928"/>
+            <a:ext cx="987552" cy="256032"/>
+          </a:xfrm>
+          <a:prstGeom prst="rect">
+            <a:avLst/>
+          </a:prstGeom>
+          <a:solidFill>
+            <a:srgbClr val="1C4E7A"/>
+          </a:solidFill>
+          <a:ln>
+            <a:noFill/>
+          </a:ln>
+          <a:effectLst/>
+        </p:spPr>
+        <p:style>
+          <a:lnRef idx="1">
+            <a:schemeClr val="accent1"/>
+          </a:lnRef>
+          <a:fillRef idx="3">
+            <a:schemeClr val="accent1"/>
+          </a:fillRef>
+          <a:effectRef idx="2">
+            <a:schemeClr val="accent1"/>
+          </a:effectRef>
+          <a:fontRef idx="minor">
+            <a:schemeClr val="lt1"/>
+          </a:fontRef>
+        </p:style>
+        <p:txBody>
+          <a:bodyPr rtlCol="0" anchor="ctr"/>
+          <a:lstStyle/>
+          <a:p>
+            <a:pPr algn="ctr"/>
+          </a:p>
+        </p:txBody>
+      </p:sp>
+      <p:sp>
+        <p:nvSpPr>
+          <p:cNvPr id="5" name="TextBox 4"/>
+          <p:cNvSpPr txBox="1"/>
+          <p:nvPr/>
+        </p:nvSpPr>
+        <p:spPr>
+          <a:xfrm>
+            <a:off x="822960" y="548640"/>
+            <a:ext cx="987552" cy="292608"/>
+          </a:xfrm>
+          <a:prstGeom prst="rect">
+            <a:avLst/>
+          </a:prstGeom>
+          <a:noFill/>
+        </p:spPr>
+        <p:txBody>
+          <a:bodyPr wrap="square" lIns="0" rIns="0">
+            <a:spAutoFit/>
+          </a:bodyPr>
+          <a:lstStyle/>
+          <a:p>
+            <a:pPr algn="ctr">
+              <a:defRPr sz="1100" b="1">
+                <a:solidFill>
+                  <a:srgbClr val="FFFFFF"/>
+                </a:solidFill>
+                <a:latin typeface="Segoe UI"/>
+              </a:defRPr>
+            </a:pPr>
+            <a:r>
+              <a:t>STATUS</a:t>
+            </a:r>
+          </a:p>
+        </p:txBody>
+      </p:sp>
+      <p:sp>
+        <p:nvSpPr>
+          <p:cNvPr id="6" name="TextBox 5"/>
+          <p:cNvSpPr txBox="1"/>
+          <p:nvPr/>
+        </p:nvSpPr>
+        <p:spPr>
+          <a:xfrm>
+            <a:off x="822960" y="978408"/>
+            <a:ext cx="10545775" cy="658368"/>
+          </a:xfrm>
+          <a:prstGeom prst="rect">
+            <a:avLst/>
+          </a:prstGeom>
+          <a:noFill/>
+        </p:spPr>
+        <p:txBody>
+          <a:bodyPr wrap="square">
+            <a:spAutoFit/>
+          </a:bodyPr>
+          <a:lstStyle/>
+          <a:p>
+            <a:pPr>
+              <a:defRPr sz="3100" b="1">
+                <a:solidFill>
+                  <a:srgbClr val="0F2A44"/>
+                </a:solidFill>
+                <a:latin typeface="Segoe UI"/>
+              </a:defRPr>
+            </a:pPr>
+            <a:r>
+              <a:t>Where I stand, and what is left</a:t>
+            </a:r>
+          </a:p>
+        </p:txBody>
+      </p:sp>
+      <p:sp>
+        <p:nvSpPr>
+          <p:cNvPr id="7" name="Rectangle 6"/>
+          <p:cNvSpPr/>
+          <p:nvPr/>
+        </p:nvSpPr>
+        <p:spPr>
+          <a:xfrm>
+            <a:off x="822960" y="1673352"/>
+            <a:ext cx="1371600" cy="38100"/>
+          </a:xfrm>
+          <a:prstGeom prst="rect">
+            <a:avLst/>
+          </a:prstGeom>
+          <a:solidFill>
+            <a:srgbClr val="1C4E7A"/>
+          </a:solidFill>
+          <a:ln>
+            <a:noFill/>
+          </a:ln>
+          <a:effectLst/>
+        </p:spPr>
+        <p:style>
+          <a:lnRef idx="1">
+            <a:schemeClr val="accent1"/>
+          </a:lnRef>
+          <a:fillRef idx="3">
+            <a:schemeClr val="accent1"/>
+          </a:fillRef>
+          <a:effectRef idx="2">
+            <a:schemeClr val="accent1"/>
+          </a:effectRef>
+          <a:fontRef idx="minor">
+            <a:schemeClr val="lt1"/>
+          </a:fontRef>
+        </p:style>
+        <p:txBody>
+          <a:bodyPr rtlCol="0" anchor="ctr"/>
+          <a:lstStyle/>
+          <a:p>
+            <a:pPr algn="ctr"/>
+          </a:p>
+        </p:txBody>
+      </p:sp>
+      <p:sp>
+        <p:nvSpPr>
+          <p:cNvPr id="8" name="Rectangle 7"/>
+          <p:cNvSpPr/>
+          <p:nvPr/>
+        </p:nvSpPr>
+        <p:spPr>
+          <a:xfrm>
+            <a:off x="2194560" y="1686052"/>
+            <a:ext cx="9174175" cy="12700"/>
+          </a:xfrm>
+          <a:prstGeom prst="rect">
+            <a:avLst/>
+          </a:prstGeom>
+          <a:solidFill>
+            <a:srgbClr val="DDE3E8"/>
+          </a:solidFill>
+          <a:ln>
+            <a:noFill/>
+          </a:ln>
+          <a:effectLst/>
+        </p:spPr>
+        <p:style>
+          <a:lnRef idx="1">
+            <a:schemeClr val="accent1"/>
+          </a:lnRef>
+          <a:fillRef idx="3">
+            <a:schemeClr val="accent1"/>
+          </a:fillRef>
+          <a:effectRef idx="2">
+            <a:schemeClr val="accent1"/>
+          </a:effectRef>
+          <a:fontRef idx="minor">
+            <a:schemeClr val="lt1"/>
+          </a:fontRef>
+        </p:style>
+        <p:txBody>
+          <a:bodyPr rtlCol="0" anchor="ctr"/>
+          <a:lstStyle/>
+          <a:p>
+            <a:pPr algn="ctr"/>
+          </a:p>
+        </p:txBody>
+      </p:sp>
+      <p:sp>
+        <p:nvSpPr>
+          <p:cNvPr id="9" name="TextBox 8"/>
+          <p:cNvSpPr txBox="1"/>
+          <p:nvPr/>
+        </p:nvSpPr>
+        <p:spPr>
+          <a:xfrm>
+            <a:off x="822960" y="2125980"/>
+            <a:ext cx="10545775" cy="365760"/>
+          </a:xfrm>
+          <a:prstGeom prst="rect">
+            <a:avLst/>
+          </a:prstGeom>
+          <a:noFill/>
+        </p:spPr>
+        <p:txBody>
+          <a:bodyPr wrap="square">
+            <a:spAutoFit/>
+          </a:bodyPr>
+          <a:lstStyle/>
+          <a:p>
+            <a:pPr>
+              <a:defRPr sz="1600">
+                <a:solidFill>
+                  <a:srgbClr val="6B7280"/>
+                </a:solidFill>
+                <a:latin typeface="Segoe UI"/>
+              </a:defRPr>
+            </a:pPr>
+            <a:r>
               <a:t>Next week: Chroma, retrieval, and tuning how many chunks to fetch per question.</a:t>
             </a:r>
           </a:p>
@@ -4918,15 +5130,15 @@
       </p:sp>
       <p:graphicFrame>
         <p:nvGraphicFramePr>
-          <p:cNvPr id="6" name="Table 5"/>
+          <p:cNvPr id="10" name="Table 9"/>
           <p:cNvGraphicFramePr>
             <a:graphicFrameLocks noGrp="1"/>
           </p:cNvGraphicFramePr>
           <p:nvPr/>
         </p:nvGraphicFramePr>
         <p:xfrm>
-          <a:off x="777240" y="2313432"/>
-          <a:ext cx="10637214" cy="2523744"/>
+          <a:off x="822960" y="2656332"/>
+          <a:ext cx="10545774" cy="2852928"/>
         </p:xfrm>
         <a:graphic>
           <a:graphicData uri="http://schemas.openxmlformats.org/drawingml/2006/table">
@@ -4935,17 +5147,17 @@
                 <a:tableStyleId>{5C22544A-7EE6-4342-B048-85BDC9FD1C3A}</a:tableStyleId>
               </a:tblPr>
               <a:tblGrid>
-                <a:gridCol w="7783328"/>
-                <a:gridCol w="2853886"/>
+                <a:gridCol w="7716420"/>
+                <a:gridCol w="2829354"/>
               </a:tblGrid>
-              <a:tr h="420624">
+              <a:tr h="475488">
                 <a:tc>
                   <a:txBody>
                     <a:bodyPr/>
                     <a:lstStyle/>
                     <a:p>
                       <a:pPr>
-                        <a:defRPr sz="1500" b="1">
+                        <a:defRPr sz="1400" b="1">
                           <a:solidFill>
                             <a:srgbClr val="FFFFFF"/>
                           </a:solidFill>
@@ -4957,9 +5169,21 @@
                       </a:r>
                     </a:p>
                   </a:txBody>
-                  <a:tcPr>
+                  <a:tcPr anchor="ctr" marL="146304" marR="146304">
+                    <a:lnL w="0" cap="flat" cmpd="sng" algn="ctr">
+                      <a:noFill/>
+                    </a:lnL>
+                    <a:lnR w="0" cap="flat" cmpd="sng" algn="ctr">
+                      <a:noFill/>
+                    </a:lnR>
+                    <a:lnT w="0" cap="flat" cmpd="sng" algn="ctr">
+                      <a:noFill/>
+                    </a:lnT>
+                    <a:lnB w="0" cap="flat" cmpd="sng" algn="ctr">
+                      <a:noFill/>
+                    </a:lnB>
                     <a:solidFill>
-                      <a:srgbClr val="1F4E79"/>
+                      <a:srgbClr val="0F2A44"/>
                     </a:solidFill>
                   </a:tcPr>
                 </a:tc>
@@ -4969,7 +5193,7 @@
                     <a:lstStyle/>
                     <a:p>
                       <a:pPr>
-                        <a:defRPr sz="1500" b="1">
+                        <a:defRPr sz="1400" b="1">
                           <a:solidFill>
                             <a:srgbClr val="FFFFFF"/>
                           </a:solidFill>
@@ -4981,14 +5205,26 @@
                       </a:r>
                     </a:p>
                   </a:txBody>
-                  <a:tcPr>
+                  <a:tcPr anchor="ctr" marL="146304" marR="146304">
+                    <a:lnL w="0" cap="flat" cmpd="sng" algn="ctr">
+                      <a:noFill/>
+                    </a:lnL>
+                    <a:lnR w="0" cap="flat" cmpd="sng" algn="ctr">
+                      <a:noFill/>
+                    </a:lnR>
+                    <a:lnT w="0" cap="flat" cmpd="sng" algn="ctr">
+                      <a:noFill/>
+                    </a:lnT>
+                    <a:lnB w="0" cap="flat" cmpd="sng" algn="ctr">
+                      <a:noFill/>
+                    </a:lnB>
                     <a:solidFill>
-                      <a:srgbClr val="1F4E79"/>
+                      <a:srgbClr val="0F2A44"/>
                     </a:solidFill>
                   </a:tcPr>
                 </a:tc>
               </a:tr>
-              <a:tr h="420624">
+              <a:tr h="475488">
                 <a:tc>
                   <a:txBody>
                     <a:bodyPr/>
@@ -4997,7 +5233,7 @@
                       <a:pPr>
                         <a:defRPr sz="1500" b="0">
                           <a:solidFill>
-                            <a:srgbClr val="1A1A1A"/>
+                            <a:srgbClr val="1B1B1B"/>
                           </a:solidFill>
                           <a:latin typeface="Segoe UI"/>
                         </a:defRPr>
@@ -5007,7 +5243,19 @@
                       </a:r>
                     </a:p>
                   </a:txBody>
-                  <a:tcPr>
+                  <a:tcPr anchor="ctr" marL="146304" marR="146304">
+                    <a:lnL w="0" cap="flat" cmpd="sng" algn="ctr">
+                      <a:noFill/>
+                    </a:lnL>
+                    <a:lnR w="0" cap="flat" cmpd="sng" algn="ctr">
+                      <a:noFill/>
+                    </a:lnR>
+                    <a:lnT w="0" cap="flat" cmpd="sng" algn="ctr">
+                      <a:noFill/>
+                    </a:lnT>
+                    <a:lnB w="0" cap="flat" cmpd="sng" algn="ctr">
+                      <a:noFill/>
+                    </a:lnB>
                     <a:solidFill>
                       <a:srgbClr val="FFFFFF"/>
                     </a:solidFill>
@@ -5021,7 +5269,7 @@
                       <a:pPr>
                         <a:defRPr sz="1500" b="0">
                           <a:solidFill>
-                            <a:srgbClr val="1A1A1A"/>
+                            <a:srgbClr val="1B1B1B"/>
                           </a:solidFill>
                           <a:latin typeface="Consolas"/>
                         </a:defRPr>
@@ -5031,14 +5279,26 @@
                       </a:r>
                     </a:p>
                   </a:txBody>
-                  <a:tcPr>
+                  <a:tcPr anchor="ctr" marL="146304" marR="146304">
+                    <a:lnL w="0" cap="flat" cmpd="sng" algn="ctr">
+                      <a:noFill/>
+                    </a:lnL>
+                    <a:lnR w="0" cap="flat" cmpd="sng" algn="ctr">
+                      <a:noFill/>
+                    </a:lnR>
+                    <a:lnT w="0" cap="flat" cmpd="sng" algn="ctr">
+                      <a:noFill/>
+                    </a:lnT>
+                    <a:lnB w="0" cap="flat" cmpd="sng" algn="ctr">
+                      <a:noFill/>
+                    </a:lnB>
                     <a:solidFill>
                       <a:srgbClr val="FFFFFF"/>
                     </a:solidFill>
                   </a:tcPr>
                 </a:tc>
               </a:tr>
-              <a:tr h="420624">
+              <a:tr h="475488">
                 <a:tc>
                   <a:txBody>
                     <a:bodyPr/>
@@ -5047,7 +5307,7 @@
                       <a:pPr>
                         <a:defRPr sz="1500" b="0">
                           <a:solidFill>
-                            <a:srgbClr val="1A1A1A"/>
+                            <a:srgbClr val="1B1B1B"/>
                           </a:solidFill>
                           <a:latin typeface="Segoe UI"/>
                         </a:defRPr>
@@ -5057,7 +5317,93 @@
                       </a:r>
                     </a:p>
                   </a:txBody>
-                  <a:tcPr>
+                  <a:tcPr anchor="ctr" marL="146304" marR="146304">
+                    <a:lnL w="0" cap="flat" cmpd="sng" algn="ctr">
+                      <a:noFill/>
+                    </a:lnL>
+                    <a:lnR w="0" cap="flat" cmpd="sng" algn="ctr">
+                      <a:noFill/>
+                    </a:lnR>
+                    <a:lnT w="0" cap="flat" cmpd="sng" algn="ctr">
+                      <a:noFill/>
+                    </a:lnT>
+                    <a:lnB w="0" cap="flat" cmpd="sng" algn="ctr">
+                      <a:noFill/>
+                    </a:lnB>
+                    <a:solidFill>
+                      <a:srgbClr val="F7F9FB"/>
+                    </a:solidFill>
+                  </a:tcPr>
+                </a:tc>
+                <a:tc>
+                  <a:txBody>
+                    <a:bodyPr/>
+                    <a:lstStyle/>
+                    <a:p>
+                      <a:pPr>
+                        <a:defRPr sz="1500" b="0">
+                          <a:solidFill>
+                            <a:srgbClr val="1B1B1B"/>
+                          </a:solidFill>
+                          <a:latin typeface="Consolas"/>
+                        </a:defRPr>
+                      </a:pPr>
+                      <a:r>
+                        <a:t>done</a:t>
+                      </a:r>
+                    </a:p>
+                  </a:txBody>
+                  <a:tcPr anchor="ctr" marL="146304" marR="146304">
+                    <a:lnL w="0" cap="flat" cmpd="sng" algn="ctr">
+                      <a:noFill/>
+                    </a:lnL>
+                    <a:lnR w="0" cap="flat" cmpd="sng" algn="ctr">
+                      <a:noFill/>
+                    </a:lnR>
+                    <a:lnT w="0" cap="flat" cmpd="sng" algn="ctr">
+                      <a:noFill/>
+                    </a:lnT>
+                    <a:lnB w="0" cap="flat" cmpd="sng" algn="ctr">
+                      <a:noFill/>
+                    </a:lnB>
+                    <a:solidFill>
+                      <a:srgbClr val="F7F9FB"/>
+                    </a:solidFill>
+                  </a:tcPr>
+                </a:tc>
+              </a:tr>
+              <a:tr h="475488">
+                <a:tc>
+                  <a:txBody>
+                    <a:bodyPr/>
+                    <a:lstStyle/>
+                    <a:p>
+                      <a:pPr>
+                        <a:defRPr sz="1500" b="0">
+                          <a:solidFill>
+                            <a:srgbClr val="1B1B1B"/>
+                          </a:solidFill>
+                          <a:latin typeface="Segoe UI"/>
+                        </a:defRPr>
+                      </a:pPr>
+                      <a:r>
+                        <a:t>All chunks embedded and searchable</a:t>
+                      </a:r>
+                    </a:p>
+                  </a:txBody>
+                  <a:tcPr anchor="ctr" marL="146304" marR="146304">
+                    <a:lnL w="0" cap="flat" cmpd="sng" algn="ctr">
+                      <a:noFill/>
+                    </a:lnL>
+                    <a:lnR w="0" cap="flat" cmpd="sng" algn="ctr">
+                      <a:noFill/>
+                    </a:lnR>
+                    <a:lnT w="0" cap="flat" cmpd="sng" algn="ctr">
+                      <a:noFill/>
+                    </a:lnT>
+                    <a:lnB w="0" cap="flat" cmpd="sng" algn="ctr">
+                      <a:noFill/>
+                    </a:lnB>
                     <a:solidFill>
                       <a:srgbClr val="FFFFFF"/>
                     </a:solidFill>
@@ -5071,7 +5417,7 @@
                       <a:pPr>
                         <a:defRPr sz="1500" b="0">
                           <a:solidFill>
-                            <a:srgbClr val="1A1A1A"/>
+                            <a:srgbClr val="1B1B1B"/>
                           </a:solidFill>
                           <a:latin typeface="Consolas"/>
                         </a:defRPr>
@@ -5081,64 +5427,26 @@
                       </a:r>
                     </a:p>
                   </a:txBody>
-                  <a:tcPr>
+                  <a:tcPr anchor="ctr" marL="146304" marR="146304">
+                    <a:lnL w="0" cap="flat" cmpd="sng" algn="ctr">
+                      <a:noFill/>
+                    </a:lnL>
+                    <a:lnR w="0" cap="flat" cmpd="sng" algn="ctr">
+                      <a:noFill/>
+                    </a:lnR>
+                    <a:lnT w="0" cap="flat" cmpd="sng" algn="ctr">
+                      <a:noFill/>
+                    </a:lnT>
+                    <a:lnB w="0" cap="flat" cmpd="sng" algn="ctr">
+                      <a:noFill/>
+                    </a:lnB>
                     <a:solidFill>
                       <a:srgbClr val="FFFFFF"/>
                     </a:solidFill>
                   </a:tcPr>
                 </a:tc>
               </a:tr>
-              <a:tr h="420624">
-                <a:tc>
-                  <a:txBody>
-                    <a:bodyPr/>
-                    <a:lstStyle/>
-                    <a:p>
-                      <a:pPr>
-                        <a:defRPr sz="1500" b="0">
-                          <a:solidFill>
-                            <a:srgbClr val="1A1A1A"/>
-                          </a:solidFill>
-                          <a:latin typeface="Segoe UI"/>
-                        </a:defRPr>
-                      </a:pPr>
-                      <a:r>
-                        <a:t>All chunks embedded and searchable</a:t>
-                      </a:r>
-                    </a:p>
-                  </a:txBody>
-                  <a:tcPr>
-                    <a:solidFill>
-                      <a:srgbClr val="FFFFFF"/>
-                    </a:solidFill>
-                  </a:tcPr>
-                </a:tc>
-                <a:tc>
-                  <a:txBody>
-                    <a:bodyPr/>
-                    <a:lstStyle/>
-                    <a:p>
-                      <a:pPr>
-                        <a:defRPr sz="1500" b="0">
-                          <a:solidFill>
-                            <a:srgbClr val="1A1A1A"/>
-                          </a:solidFill>
-                          <a:latin typeface="Consolas"/>
-                        </a:defRPr>
-                      </a:pPr>
-                      <a:r>
-                        <a:t>done</a:t>
-                      </a:r>
-                    </a:p>
-                  </a:txBody>
-                  <a:tcPr>
-                    <a:solidFill>
-                      <a:srgbClr val="FFFFFF"/>
-                    </a:solidFill>
-                  </a:tcPr>
-                </a:tc>
-              </a:tr>
-              <a:tr h="420624">
+              <a:tr h="475488">
                 <a:tc>
                   <a:txBody>
                     <a:bodyPr/>
@@ -5147,7 +5455,7 @@
                       <a:pPr>
                         <a:defRPr sz="1500" b="1">
                           <a:solidFill>
-                            <a:srgbClr val="B32D2D"/>
+                            <a:srgbClr val="B56E0C"/>
                           </a:solidFill>
                           <a:latin typeface="Segoe UI"/>
                         </a:defRPr>
@@ -5157,9 +5465,21 @@
                       </a:r>
                     </a:p>
                   </a:txBody>
-                  <a:tcPr>
+                  <a:tcPr anchor="ctr" marL="146304" marR="146304">
+                    <a:lnL w="0" cap="flat" cmpd="sng" algn="ctr">
+                      <a:noFill/>
+                    </a:lnL>
+                    <a:lnR w="0" cap="flat" cmpd="sng" algn="ctr">
+                      <a:noFill/>
+                    </a:lnR>
+                    <a:lnT w="0" cap="flat" cmpd="sng" algn="ctr">
+                      <a:noFill/>
+                    </a:lnT>
+                    <a:lnB w="0" cap="flat" cmpd="sng" algn="ctr">
+                      <a:noFill/>
+                    </a:lnB>
                     <a:solidFill>
-                      <a:srgbClr val="F2F5F8"/>
+                      <a:srgbClr val="FDF4E6"/>
                     </a:solidFill>
                   </a:tcPr>
                 </a:tc>
@@ -5171,7 +5491,7 @@
                       <a:pPr>
                         <a:defRPr sz="1500" b="1">
                           <a:solidFill>
-                            <a:srgbClr val="B32D2D"/>
+                            <a:srgbClr val="B56E0C"/>
                           </a:solidFill>
                           <a:latin typeface="Consolas"/>
                         </a:defRPr>
@@ -5181,14 +5501,26 @@
                       </a:r>
                     </a:p>
                   </a:txBody>
-                  <a:tcPr>
+                  <a:tcPr anchor="ctr" marL="146304" marR="146304">
+                    <a:lnL w="0" cap="flat" cmpd="sng" algn="ctr">
+                      <a:noFill/>
+                    </a:lnL>
+                    <a:lnR w="0" cap="flat" cmpd="sng" algn="ctr">
+                      <a:noFill/>
+                    </a:lnR>
+                    <a:lnT w="0" cap="flat" cmpd="sng" algn="ctr">
+                      <a:noFill/>
+                    </a:lnT>
+                    <a:lnB w="0" cap="flat" cmpd="sng" algn="ctr">
+                      <a:noFill/>
+                    </a:lnB>
                     <a:solidFill>
-                      <a:srgbClr val="F2F5F8"/>
+                      <a:srgbClr val="FDF4E6"/>
                     </a:solidFill>
                   </a:tcPr>
                 </a:tc>
               </a:tr>
-              <a:tr h="420624">
+              <a:tr h="475488">
                 <a:tc>
                   <a:txBody>
                     <a:bodyPr/>
@@ -5197,7 +5529,7 @@
                       <a:pPr>
                         <a:defRPr sz="1500" b="1">
                           <a:solidFill>
-                            <a:srgbClr val="B32D2D"/>
+                            <a:srgbClr val="B56E0C"/>
                           </a:solidFill>
                           <a:latin typeface="Segoe UI"/>
                         </a:defRPr>
@@ -5207,9 +5539,21 @@
                       </a:r>
                     </a:p>
                   </a:txBody>
-                  <a:tcPr>
+                  <a:tcPr anchor="ctr" marL="146304" marR="146304">
+                    <a:lnL w="0" cap="flat" cmpd="sng" algn="ctr">
+                      <a:noFill/>
+                    </a:lnL>
+                    <a:lnR w="0" cap="flat" cmpd="sng" algn="ctr">
+                      <a:noFill/>
+                    </a:lnR>
+                    <a:lnT w="0" cap="flat" cmpd="sng" algn="ctr">
+                      <a:noFill/>
+                    </a:lnT>
+                    <a:lnB w="0" cap="flat" cmpd="sng" algn="ctr">
+                      <a:noFill/>
+                    </a:lnB>
                     <a:solidFill>
-                      <a:srgbClr val="F2F5F8"/>
+                      <a:srgbClr val="FDF4E6"/>
                     </a:solidFill>
                   </a:tcPr>
                 </a:tc>
@@ -5221,7 +5565,7 @@
                       <a:pPr>
                         <a:defRPr sz="1500" b="1">
                           <a:solidFill>
-                            <a:srgbClr val="B32D2D"/>
+                            <a:srgbClr val="B56E0C"/>
                           </a:solidFill>
                           <a:latin typeface="Consolas"/>
                         </a:defRPr>
@@ -5231,9 +5575,21 @@
                       </a:r>
                     </a:p>
                   </a:txBody>
-                  <a:tcPr>
+                  <a:tcPr anchor="ctr" marL="146304" marR="146304">
+                    <a:lnL w="0" cap="flat" cmpd="sng" algn="ctr">
+                      <a:noFill/>
+                    </a:lnL>
+                    <a:lnR w="0" cap="flat" cmpd="sng" algn="ctr">
+                      <a:noFill/>
+                    </a:lnR>
+                    <a:lnT w="0" cap="flat" cmpd="sng" algn="ctr">
+                      <a:noFill/>
+                    </a:lnT>
+                    <a:lnB w="0" cap="flat" cmpd="sng" algn="ctr">
+                      <a:noFill/>
+                    </a:lnB>
                     <a:solidFill>
-                      <a:srgbClr val="F2F5F8"/>
+                      <a:srgbClr val="FDF4E6"/>
                     </a:solidFill>
                   </a:tcPr>
                 </a:tc>
@@ -5244,14 +5600,14 @@
       </p:graphicFrame>
       <p:sp>
         <p:nvSpPr>
-          <p:cNvPr id="7" name="TextBox 6"/>
+          <p:cNvPr id="11" name="TextBox 10"/>
           <p:cNvSpPr txBox="1"/>
           <p:nvPr/>
         </p:nvSpPr>
         <p:spPr>
           <a:xfrm>
-            <a:off x="777240" y="6035040"/>
-            <a:ext cx="10637215" cy="457200"/>
+            <a:off x="822960" y="5989320"/>
+            <a:ext cx="8168335" cy="548640"/>
           </a:xfrm>
           <a:prstGeom prst="rect">
             <a:avLst/>
@@ -5267,7 +5623,7 @@
             <a:pPr>
               <a:defRPr sz="1200" i="1">
                 <a:solidFill>
-                  <a:srgbClr val="666666"/>
+                  <a:srgbClr val="6B7280"/>
                 </a:solidFill>
                 <a:latin typeface="Segoe UI"/>
               </a:defRPr>
@@ -5298,92 +5654,20 @@
       <p:grpSpPr/>
       <p:sp>
         <p:nvSpPr>
-          <p:cNvPr id="2" name="TextBox 1"/>
-          <p:cNvSpPr txBox="1"/>
-          <p:nvPr/>
-        </p:nvSpPr>
-        <p:spPr>
-          <a:xfrm>
-            <a:off x="777240" y="457200"/>
-            <a:ext cx="10637215" cy="274320"/>
-          </a:xfrm>
-          <a:prstGeom prst="rect">
-            <a:avLst/>
-          </a:prstGeom>
-          <a:noFill/>
-        </p:spPr>
-        <p:txBody>
-          <a:bodyPr wrap="square">
-            <a:spAutoFit/>
-          </a:bodyPr>
-          <a:lstStyle/>
-          <a:p>
-            <a:pPr>
-              <a:defRPr sz="1200" b="1">
-                <a:solidFill>
-                  <a:srgbClr val="1F4E79"/>
-                </a:solidFill>
-                <a:latin typeface="Segoe UI"/>
-              </a:defRPr>
-            </a:pPr>
-            <a:r>
-              <a:t>OVERVIEW</a:t>
-            </a:r>
-          </a:p>
-        </p:txBody>
-      </p:sp>
-      <p:sp>
-        <p:nvSpPr>
-          <p:cNvPr id="3" name="TextBox 2"/>
-          <p:cNvSpPr txBox="1"/>
-          <p:nvPr/>
-        </p:nvSpPr>
-        <p:spPr>
-          <a:xfrm>
-            <a:off x="777240" y="786384"/>
-            <a:ext cx="10637215" cy="731520"/>
-          </a:xfrm>
-          <a:prstGeom prst="rect">
-            <a:avLst/>
-          </a:prstGeom>
-          <a:noFill/>
-        </p:spPr>
-        <p:txBody>
-          <a:bodyPr wrap="square">
-            <a:spAutoFit/>
-          </a:bodyPr>
-          <a:lstStyle/>
-          <a:p>
-            <a:pPr>
-              <a:defRPr sz="3000" b="1">
-                <a:solidFill>
-                  <a:srgbClr val="1A1A1A"/>
-                </a:solidFill>
-                <a:latin typeface="Segoe UI"/>
-              </a:defRPr>
-            </a:pPr>
-            <a:r>
-              <a:t>What the tool will do, and where I am</a:t>
-            </a:r>
-          </a:p>
-        </p:txBody>
-      </p:sp>
-      <p:sp>
-        <p:nvSpPr>
-          <p:cNvPr id="4" name="Rectangle 3"/>
+          <p:cNvPr id="2" name="Rectangle 1"/>
           <p:cNvSpPr/>
           <p:nvPr/>
         </p:nvSpPr>
         <p:spPr>
           <a:xfrm>
-            <a:off x="777240" y="1499616"/>
-            <a:ext cx="10637215" cy="19050"/>
+            <a:off x="0" y="0"/>
+            <a:ext cx="155448" cy="6858000"/>
           </a:xfrm>
           <a:prstGeom prst="rect">
             <a:avLst/>
           </a:prstGeom>
           <a:solidFill>
-            <a:srgbClr val="D8D8D8"/>
+            <a:srgbClr val="0F2A44"/>
           </a:solidFill>
           <a:ln>
             <a:noFill/>
@@ -5414,14 +5698,14 @@
       </p:sp>
       <p:sp>
         <p:nvSpPr>
-          <p:cNvPr id="5" name="TextBox 4"/>
+          <p:cNvPr id="3" name="TextBox 2"/>
           <p:cNvSpPr txBox="1"/>
           <p:nvPr/>
         </p:nvSpPr>
         <p:spPr>
           <a:xfrm>
-            <a:off x="777240" y="1810512"/>
-            <a:ext cx="10637215" cy="3931920"/>
+            <a:off x="9082735" y="6263640"/>
+            <a:ext cx="2286000" cy="320040"/>
           </a:xfrm>
           <a:prstGeom prst="rect">
             <a:avLst/>
@@ -5434,97 +5718,337 @@
           </a:bodyPr>
           <a:lstStyle/>
           <a:p>
-            <a:pPr>
-              <a:spcAft>
-                <a:spcPts val="1400"/>
-              </a:spcAft>
-              <a:defRPr sz="2000" b="1">
+            <a:pPr algn="r">
+              <a:defRPr sz="1000">
                 <a:solidFill>
-                  <a:srgbClr val="1A1A1A"/>
+                  <a:srgbClr val="6B7280"/>
                 </a:solidFill>
                 <a:latin typeface="Segoe UI"/>
               </a:defRPr>
             </a:pPr>
             <a:r>
-              <a:t>Goal: ask questions about my own notes, answered only from those notes</a:t>
-            </a:r>
-          </a:p>
-          <a:p>
-            <a:pPr>
-              <a:spcAft>
-                <a:spcPts val="1400"/>
-              </a:spcAft>
-              <a:defRPr sz="2000" b="0">
+              <a:t>Ask My Docs  ·  Week 1   ·   1</a:t>
+            </a:r>
+          </a:p>
+        </p:txBody>
+      </p:sp>
+      <p:sp>
+        <p:nvSpPr>
+          <p:cNvPr id="4" name="Rectangle 3"/>
+          <p:cNvSpPr/>
+          <p:nvPr/>
+        </p:nvSpPr>
+        <p:spPr>
+          <a:xfrm>
+            <a:off x="822960" y="566928"/>
+            <a:ext cx="1188720" cy="256032"/>
+          </a:xfrm>
+          <a:prstGeom prst="rect">
+            <a:avLst/>
+          </a:prstGeom>
+          <a:solidFill>
+            <a:srgbClr val="1C4E7A"/>
+          </a:solidFill>
+          <a:ln>
+            <a:noFill/>
+          </a:ln>
+          <a:effectLst/>
+        </p:spPr>
+        <p:style>
+          <a:lnRef idx="1">
+            <a:schemeClr val="accent1"/>
+          </a:lnRef>
+          <a:fillRef idx="3">
+            <a:schemeClr val="accent1"/>
+          </a:fillRef>
+          <a:effectRef idx="2">
+            <a:schemeClr val="accent1"/>
+          </a:effectRef>
+          <a:fontRef idx="minor">
+            <a:schemeClr val="lt1"/>
+          </a:fontRef>
+        </p:style>
+        <p:txBody>
+          <a:bodyPr rtlCol="0" anchor="ctr"/>
+          <a:lstStyle/>
+          <a:p>
+            <a:pPr algn="ctr"/>
+          </a:p>
+        </p:txBody>
+      </p:sp>
+      <p:sp>
+        <p:nvSpPr>
+          <p:cNvPr id="5" name="TextBox 4"/>
+          <p:cNvSpPr txBox="1"/>
+          <p:nvPr/>
+        </p:nvSpPr>
+        <p:spPr>
+          <a:xfrm>
+            <a:off x="822960" y="548640"/>
+            <a:ext cx="1188720" cy="292608"/>
+          </a:xfrm>
+          <a:prstGeom prst="rect">
+            <a:avLst/>
+          </a:prstGeom>
+          <a:noFill/>
+        </p:spPr>
+        <p:txBody>
+          <a:bodyPr wrap="square" lIns="0" rIns="0">
+            <a:spAutoFit/>
+          </a:bodyPr>
+          <a:lstStyle/>
+          <a:p>
+            <a:pPr algn="ctr">
+              <a:defRPr sz="1100" b="1">
                 <a:solidFill>
-                  <a:srgbClr val="1A1A1A"/>
+                  <a:srgbClr val="FFFFFF"/>
                 </a:solidFill>
                 <a:latin typeface="Segoe UI"/>
               </a:defRPr>
             </a:pPr>
             <a:r>
-              <a:t>•  Five stages, each written by hand:</a:t>
-            </a:r>
-          </a:p>
-          <a:p>
-            <a:pPr lvl="1">
-              <a:spcAft>
-                <a:spcPts val="1400"/>
-              </a:spcAft>
-              <a:defRPr sz="1700" b="0">
+              <a:t>OVERVIEW</a:t>
+            </a:r>
+          </a:p>
+        </p:txBody>
+      </p:sp>
+      <p:sp>
+        <p:nvSpPr>
+          <p:cNvPr id="6" name="TextBox 5"/>
+          <p:cNvSpPr txBox="1"/>
+          <p:nvPr/>
+        </p:nvSpPr>
+        <p:spPr>
+          <a:xfrm>
+            <a:off x="822960" y="978408"/>
+            <a:ext cx="10545775" cy="658368"/>
+          </a:xfrm>
+          <a:prstGeom prst="rect">
+            <a:avLst/>
+          </a:prstGeom>
+          <a:noFill/>
+        </p:spPr>
+        <p:txBody>
+          <a:bodyPr wrap="square">
+            <a:spAutoFit/>
+          </a:bodyPr>
+          <a:lstStyle/>
+          <a:p>
+            <a:pPr>
+              <a:defRPr sz="3100" b="1">
                 <a:solidFill>
-                  <a:srgbClr val="666666"/>
+                  <a:srgbClr val="0F2A44"/>
                 </a:solidFill>
                 <a:latin typeface="Segoe UI"/>
               </a:defRPr>
             </a:pPr>
             <a:r>
-              <a:t>–  chunk  →  embed  →  store  →  retrieve  →  generate</a:t>
-            </a:r>
-          </a:p>
+              <a:t>What the tool will do, and where I am</a:t>
+            </a:r>
+          </a:p>
+        </p:txBody>
+      </p:sp>
+      <p:sp>
+        <p:nvSpPr>
+          <p:cNvPr id="7" name="Rectangle 6"/>
+          <p:cNvSpPr/>
+          <p:nvPr/>
+        </p:nvSpPr>
+        <p:spPr>
+          <a:xfrm>
+            <a:off x="822960" y="1673352"/>
+            <a:ext cx="1371600" cy="38100"/>
+          </a:xfrm>
+          <a:prstGeom prst="rect">
+            <a:avLst/>
+          </a:prstGeom>
+          <a:solidFill>
+            <a:srgbClr val="1C4E7A"/>
+          </a:solidFill>
+          <a:ln>
+            <a:noFill/>
+          </a:ln>
+          <a:effectLst/>
+        </p:spPr>
+        <p:style>
+          <a:lnRef idx="1">
+            <a:schemeClr val="accent1"/>
+          </a:lnRef>
+          <a:fillRef idx="3">
+            <a:schemeClr val="accent1"/>
+          </a:fillRef>
+          <a:effectRef idx="2">
+            <a:schemeClr val="accent1"/>
+          </a:effectRef>
+          <a:fontRef idx="minor">
+            <a:schemeClr val="lt1"/>
+          </a:fontRef>
+        </p:style>
+        <p:txBody>
+          <a:bodyPr rtlCol="0" anchor="ctr"/>
+          <a:lstStyle/>
+          <a:p>
+            <a:pPr algn="ctr"/>
+          </a:p>
+        </p:txBody>
+      </p:sp>
+      <p:sp>
+        <p:nvSpPr>
+          <p:cNvPr id="8" name="Rectangle 7"/>
+          <p:cNvSpPr/>
+          <p:nvPr/>
+        </p:nvSpPr>
+        <p:spPr>
+          <a:xfrm>
+            <a:off x="2194560" y="1686052"/>
+            <a:ext cx="9174175" cy="12700"/>
+          </a:xfrm>
+          <a:prstGeom prst="rect">
+            <a:avLst/>
+          </a:prstGeom>
+          <a:solidFill>
+            <a:srgbClr val="DDE3E8"/>
+          </a:solidFill>
+          <a:ln>
+            <a:noFill/>
+          </a:ln>
+          <a:effectLst/>
+        </p:spPr>
+        <p:style>
+          <a:lnRef idx="1">
+            <a:schemeClr val="accent1"/>
+          </a:lnRef>
+          <a:fillRef idx="3">
+            <a:schemeClr val="accent1"/>
+          </a:fillRef>
+          <a:effectRef idx="2">
+            <a:schemeClr val="accent1"/>
+          </a:effectRef>
+          <a:fontRef idx="minor">
+            <a:schemeClr val="lt1"/>
+          </a:fontRef>
+        </p:style>
+        <p:txBody>
+          <a:bodyPr rtlCol="0" anchor="ctr"/>
+          <a:lstStyle/>
+          <a:p>
+            <a:pPr algn="ctr"/>
+          </a:p>
+        </p:txBody>
+      </p:sp>
+      <p:sp>
+        <p:nvSpPr>
+          <p:cNvPr id="9" name="TextBox 8"/>
+          <p:cNvSpPr txBox="1"/>
+          <p:nvPr/>
+        </p:nvSpPr>
+        <p:spPr>
+          <a:xfrm>
+            <a:off x="822960" y="1828800"/>
+            <a:ext cx="10545775" cy="3977640"/>
+          </a:xfrm>
+          <a:prstGeom prst="rect">
+            <a:avLst/>
+          </a:prstGeom>
+          <a:noFill/>
+        </p:spPr>
+        <p:txBody>
+          <a:bodyPr wrap="square" anchor="t">
+            <a:spAutoFit/>
+          </a:bodyPr>
+          <a:lstStyle/>
           <a:p>
             <a:pPr>
               <a:spcAft>
-                <a:spcPts val="1400"/>
+                <a:spcPts val="1500"/>
               </a:spcAft>
               <a:defRPr sz="2000" b="1">
                 <a:solidFill>
-                  <a:srgbClr val="1A1A1A"/>
+                  <a:srgbClr val="0F2A44"/>
                 </a:solidFill>
                 <a:latin typeface="Segoe UI"/>
               </a:defRPr>
             </a:pPr>
             <a:r>
-              <a:t>Week 1 delivered the first two, plus a working search</a:t>
+              <a:t>Goal: ask questions about my own notes, answered only from those notes</a:t>
             </a:r>
           </a:p>
           <a:p>
             <a:pPr>
               <a:spcAft>
-                <a:spcPts val="1400"/>
+                <a:spcPts val="1500"/>
               </a:spcAft>
               <a:defRPr sz="2000" b="0">
                 <a:solidFill>
-                  <a:srgbClr val="1A1A1A"/>
+                  <a:srgbClr val="1B1B1B"/>
                 </a:solidFill>
                 <a:latin typeface="Segoe UI"/>
               </a:defRPr>
             </a:pPr>
             <a:r>
-              <a:t>•  No LangChain or LlamaIndex — your brief asks for it built manually</a:t>
-            </a:r>
-          </a:p>
-        </p:txBody>
-      </p:sp>
-      <p:sp>
-        <p:nvSpPr>
-          <p:cNvPr id="6" name="TextBox 5"/>
+              <a:t>•   Five stages, each written by hand:</a:t>
+            </a:r>
+          </a:p>
+          <a:p>
+            <a:pPr lvl="1">
+              <a:spcAft>
+                <a:spcPts val="1500"/>
+              </a:spcAft>
+              <a:defRPr sz="1700" b="0">
+                <a:solidFill>
+                  <a:srgbClr val="6B7280"/>
+                </a:solidFill>
+                <a:latin typeface="Segoe UI"/>
+              </a:defRPr>
+            </a:pPr>
+            <a:r>
+              <a:t>–   chunk   →   embed   →   store   →   retrieve   →   generate</a:t>
+            </a:r>
+          </a:p>
+          <a:p>
+            <a:pPr>
+              <a:spcAft>
+                <a:spcPts val="1500"/>
+              </a:spcAft>
+              <a:defRPr sz="2000" b="1">
+                <a:solidFill>
+                  <a:srgbClr val="0F2A44"/>
+                </a:solidFill>
+                <a:latin typeface="Segoe UI"/>
+              </a:defRPr>
+            </a:pPr>
+            <a:r>
+              <a:t>Week 1 delivered the first two, plus a working search</a:t>
+            </a:r>
+          </a:p>
+          <a:p>
+            <a:pPr>
+              <a:spcAft>
+                <a:spcPts val="1500"/>
+              </a:spcAft>
+              <a:defRPr sz="2000" b="0">
+                <a:solidFill>
+                  <a:srgbClr val="1B1B1B"/>
+                </a:solidFill>
+                <a:latin typeface="Segoe UI"/>
+              </a:defRPr>
+            </a:pPr>
+            <a:r>
+              <a:t>•   No LangChain or LlamaIndex — your brief asks for it built manually</a:t>
+            </a:r>
+          </a:p>
+        </p:txBody>
+      </p:sp>
+      <p:sp>
+        <p:nvSpPr>
+          <p:cNvPr id="10" name="TextBox 9"/>
           <p:cNvSpPr txBox="1"/>
           <p:nvPr/>
         </p:nvSpPr>
         <p:spPr>
           <a:xfrm>
-            <a:off x="777240" y="6035040"/>
-            <a:ext cx="10637215" cy="457200"/>
+            <a:off x="822960" y="5989320"/>
+            <a:ext cx="8168335" cy="548640"/>
           </a:xfrm>
           <a:prstGeom prst="rect">
             <a:avLst/>
@@ -5540,13 +6064,13 @@
             <a:pPr>
               <a:defRPr sz="1200" i="1">
                 <a:solidFill>
-                  <a:srgbClr val="666666"/>
+                  <a:srgbClr val="6B7280"/>
                 </a:solidFill>
                 <a:latin typeface="Segoe UI"/>
               </a:defRPr>
             </a:pPr>
             <a:r>
-              <a:t>Repo: ask-my-docs · 4 commits · Python, a free local embedding model, no API key needed yet</a:t>
+              <a:t>Repo: ask-my-docs  ·  4 commits  ·  Python, a free local embedding model, no API key needed yet</a:t>
             </a:r>
           </a:p>
         </p:txBody>
@@ -5571,92 +6095,20 @@
       <p:grpSpPr/>
       <p:sp>
         <p:nvSpPr>
-          <p:cNvPr id="2" name="TextBox 1"/>
-          <p:cNvSpPr txBox="1"/>
-          <p:nvPr/>
-        </p:nvSpPr>
-        <p:spPr>
-          <a:xfrm>
-            <a:off x="777240" y="457200"/>
-            <a:ext cx="10637215" cy="274320"/>
-          </a:xfrm>
-          <a:prstGeom prst="rect">
-            <a:avLst/>
-          </a:prstGeom>
-          <a:noFill/>
-        </p:spPr>
-        <p:txBody>
-          <a:bodyPr wrap="square">
-            <a:spAutoFit/>
-          </a:bodyPr>
-          <a:lstStyle/>
-          <a:p>
-            <a:pPr>
-              <a:defRPr sz="1200" b="1">
-                <a:solidFill>
-                  <a:srgbClr val="1F4E79"/>
-                </a:solidFill>
-                <a:latin typeface="Segoe UI"/>
-              </a:defRPr>
-            </a:pPr>
-            <a:r>
-              <a:t>DECISION NEEDED</a:t>
-            </a:r>
-          </a:p>
-        </p:txBody>
-      </p:sp>
-      <p:sp>
-        <p:nvSpPr>
-          <p:cNvPr id="3" name="TextBox 2"/>
-          <p:cNvSpPr txBox="1"/>
-          <p:nvPr/>
-        </p:nvSpPr>
-        <p:spPr>
-          <a:xfrm>
-            <a:off x="777240" y="786384"/>
-            <a:ext cx="10637215" cy="731520"/>
-          </a:xfrm>
-          <a:prstGeom prst="rect">
-            <a:avLst/>
-          </a:prstGeom>
-          <a:noFill/>
-        </p:spPr>
-        <p:txBody>
-          <a:bodyPr wrap="square">
-            <a:spAutoFit/>
-          </a:bodyPr>
-          <a:lstStyle/>
-          <a:p>
-            <a:pPr>
-              <a:defRPr sz="3000" b="1">
-                <a:solidFill>
-                  <a:srgbClr val="1A1A1A"/>
-                </a:solidFill>
-                <a:latin typeface="Segoe UI"/>
-              </a:defRPr>
-            </a:pPr>
-            <a:r>
-              <a:t>One thing I need you to decide</a:t>
-            </a:r>
-          </a:p>
-        </p:txBody>
-      </p:sp>
-      <p:sp>
-        <p:nvSpPr>
-          <p:cNvPr id="4" name="Rectangle 3"/>
+          <p:cNvPr id="2" name="Rectangle 1"/>
           <p:cNvSpPr/>
           <p:nvPr/>
         </p:nvSpPr>
         <p:spPr>
           <a:xfrm>
-            <a:off x="777240" y="1499616"/>
-            <a:ext cx="10637215" cy="19050"/>
+            <a:off x="0" y="0"/>
+            <a:ext cx="155448" cy="6858000"/>
           </a:xfrm>
           <a:prstGeom prst="rect">
             <a:avLst/>
           </a:prstGeom>
           <a:solidFill>
-            <a:srgbClr val="D8D8D8"/>
+            <a:srgbClr val="0F2A44"/>
           </a:solidFill>
           <a:ln>
             <a:noFill/>
@@ -5687,14 +6139,14 @@
       </p:sp>
       <p:sp>
         <p:nvSpPr>
-          <p:cNvPr id="5" name="TextBox 4"/>
+          <p:cNvPr id="3" name="TextBox 2"/>
           <p:cNvSpPr txBox="1"/>
           <p:nvPr/>
         </p:nvSpPr>
         <p:spPr>
           <a:xfrm>
-            <a:off x="777240" y="1810512"/>
-            <a:ext cx="10637215" cy="3931920"/>
+            <a:off x="9082735" y="6263640"/>
+            <a:ext cx="2286000" cy="320040"/>
           </a:xfrm>
           <a:prstGeom prst="rect">
             <a:avLst/>
@@ -5707,98 +6159,338 @@
           </a:bodyPr>
           <a:lstStyle/>
           <a:p>
-            <a:pPr>
-              <a:spcAft>
-                <a:spcPts val="1400"/>
-              </a:spcAft>
-              <a:defRPr sz="2000" b="1">
+            <a:pPr algn="r">
+              <a:defRPr sz="1000">
                 <a:solidFill>
-                  <a:srgbClr val="1A1A1A"/>
+                  <a:srgbClr val="6B7280"/>
                 </a:solidFill>
                 <a:latin typeface="Segoe UI"/>
               </a:defRPr>
             </a:pPr>
             <a:r>
-              <a:t>The brief's dates are a week out</a:t>
-            </a:r>
-          </a:p>
-          <a:p>
-            <a:pPr lvl="1">
-              <a:spcAft>
-                <a:spcPts val="1400"/>
-              </a:spcAft>
-              <a:defRPr sz="1700" b="0">
+              <a:t>Ask My Docs  ·  Week 1   ·   2</a:t>
+            </a:r>
+          </a:p>
+        </p:txBody>
+      </p:sp>
+      <p:sp>
+        <p:nvSpPr>
+          <p:cNvPr id="4" name="Rectangle 3"/>
+          <p:cNvSpPr/>
+          <p:nvPr/>
+        </p:nvSpPr>
+        <p:spPr>
+          <a:xfrm>
+            <a:off x="822960" y="566928"/>
+            <a:ext cx="1892807" cy="256032"/>
+          </a:xfrm>
+          <a:prstGeom prst="rect">
+            <a:avLst/>
+          </a:prstGeom>
+          <a:solidFill>
+            <a:srgbClr val="1C4E7A"/>
+          </a:solidFill>
+          <a:ln>
+            <a:noFill/>
+          </a:ln>
+          <a:effectLst/>
+        </p:spPr>
+        <p:style>
+          <a:lnRef idx="1">
+            <a:schemeClr val="accent1"/>
+          </a:lnRef>
+          <a:fillRef idx="3">
+            <a:schemeClr val="accent1"/>
+          </a:fillRef>
+          <a:effectRef idx="2">
+            <a:schemeClr val="accent1"/>
+          </a:effectRef>
+          <a:fontRef idx="minor">
+            <a:schemeClr val="lt1"/>
+          </a:fontRef>
+        </p:style>
+        <p:txBody>
+          <a:bodyPr rtlCol="0" anchor="ctr"/>
+          <a:lstStyle/>
+          <a:p>
+            <a:pPr algn="ctr"/>
+          </a:p>
+        </p:txBody>
+      </p:sp>
+      <p:sp>
+        <p:nvSpPr>
+          <p:cNvPr id="5" name="TextBox 4"/>
+          <p:cNvSpPr txBox="1"/>
+          <p:nvPr/>
+        </p:nvSpPr>
+        <p:spPr>
+          <a:xfrm>
+            <a:off x="822960" y="548640"/>
+            <a:ext cx="1892807" cy="292608"/>
+          </a:xfrm>
+          <a:prstGeom prst="rect">
+            <a:avLst/>
+          </a:prstGeom>
+          <a:noFill/>
+        </p:spPr>
+        <p:txBody>
+          <a:bodyPr wrap="square" lIns="0" rIns="0">
+            <a:spAutoFit/>
+          </a:bodyPr>
+          <a:lstStyle/>
+          <a:p>
+            <a:pPr algn="ctr">
+              <a:defRPr sz="1100" b="1">
                 <a:solidFill>
-                  <a:srgbClr val="666666"/>
+                  <a:srgbClr val="FFFFFF"/>
                 </a:solidFill>
                 <a:latin typeface="Segoe UI"/>
               </a:defRPr>
             </a:pPr>
             <a:r>
-              <a:t>–  It says start Mon 14 Sep, deadline Sun 4 Oct</a:t>
-            </a:r>
-          </a:p>
-          <a:p>
-            <a:pPr lvl="1">
-              <a:spcAft>
-                <a:spcPts val="1400"/>
-              </a:spcAft>
-              <a:defRPr sz="1700" b="0">
+              <a:t>DECISION NEEDED</a:t>
+            </a:r>
+          </a:p>
+        </p:txBody>
+      </p:sp>
+      <p:sp>
+        <p:nvSpPr>
+          <p:cNvPr id="6" name="TextBox 5"/>
+          <p:cNvSpPr txBox="1"/>
+          <p:nvPr/>
+        </p:nvSpPr>
+        <p:spPr>
+          <a:xfrm>
+            <a:off x="822960" y="978408"/>
+            <a:ext cx="10545775" cy="658368"/>
+          </a:xfrm>
+          <a:prstGeom prst="rect">
+            <a:avLst/>
+          </a:prstGeom>
+          <a:noFill/>
+        </p:spPr>
+        <p:txBody>
+          <a:bodyPr wrap="square">
+            <a:spAutoFit/>
+          </a:bodyPr>
+          <a:lstStyle/>
+          <a:p>
+            <a:pPr>
+              <a:defRPr sz="3100" b="1">
                 <a:solidFill>
-                  <a:srgbClr val="666666"/>
+                  <a:srgbClr val="0F2A44"/>
                 </a:solidFill>
                 <a:latin typeface="Segoe UI"/>
               </a:defRPr>
             </a:pPr>
             <a:r>
-              <a:t>–  I actually started Mon 21 Sep</a:t>
-            </a:r>
-          </a:p>
+              <a:t>One thing I need you to decide</a:t>
+            </a:r>
+          </a:p>
+        </p:txBody>
+      </p:sp>
+      <p:sp>
+        <p:nvSpPr>
+          <p:cNvPr id="7" name="Rectangle 6"/>
+          <p:cNvSpPr/>
+          <p:nvPr/>
+        </p:nvSpPr>
+        <p:spPr>
+          <a:xfrm>
+            <a:off x="822960" y="1673352"/>
+            <a:ext cx="1371600" cy="38100"/>
+          </a:xfrm>
+          <a:prstGeom prst="rect">
+            <a:avLst/>
+          </a:prstGeom>
+          <a:solidFill>
+            <a:srgbClr val="1C4E7A"/>
+          </a:solidFill>
+          <a:ln>
+            <a:noFill/>
+          </a:ln>
+          <a:effectLst/>
+        </p:spPr>
+        <p:style>
+          <a:lnRef idx="1">
+            <a:schemeClr val="accent1"/>
+          </a:lnRef>
+          <a:fillRef idx="3">
+            <a:schemeClr val="accent1"/>
+          </a:fillRef>
+          <a:effectRef idx="2">
+            <a:schemeClr val="accent1"/>
+          </a:effectRef>
+          <a:fontRef idx="minor">
+            <a:schemeClr val="lt1"/>
+          </a:fontRef>
+        </p:style>
+        <p:txBody>
+          <a:bodyPr rtlCol="0" anchor="ctr"/>
+          <a:lstStyle/>
+          <a:p>
+            <a:pPr algn="ctr"/>
+          </a:p>
+        </p:txBody>
+      </p:sp>
+      <p:sp>
+        <p:nvSpPr>
+          <p:cNvPr id="8" name="Rectangle 7"/>
+          <p:cNvSpPr/>
+          <p:nvPr/>
+        </p:nvSpPr>
+        <p:spPr>
+          <a:xfrm>
+            <a:off x="2194560" y="1686052"/>
+            <a:ext cx="9174175" cy="12700"/>
+          </a:xfrm>
+          <a:prstGeom prst="rect">
+            <a:avLst/>
+          </a:prstGeom>
+          <a:solidFill>
+            <a:srgbClr val="DDE3E8"/>
+          </a:solidFill>
+          <a:ln>
+            <a:noFill/>
+          </a:ln>
+          <a:effectLst/>
+        </p:spPr>
+        <p:style>
+          <a:lnRef idx="1">
+            <a:schemeClr val="accent1"/>
+          </a:lnRef>
+          <a:fillRef idx="3">
+            <a:schemeClr val="accent1"/>
+          </a:fillRef>
+          <a:effectRef idx="2">
+            <a:schemeClr val="accent1"/>
+          </a:effectRef>
+          <a:fontRef idx="minor">
+            <a:schemeClr val="lt1"/>
+          </a:fontRef>
+        </p:style>
+        <p:txBody>
+          <a:bodyPr rtlCol="0" anchor="ctr"/>
+          <a:lstStyle/>
+          <a:p>
+            <a:pPr algn="ctr"/>
+          </a:p>
+        </p:txBody>
+      </p:sp>
+      <p:sp>
+        <p:nvSpPr>
+          <p:cNvPr id="9" name="TextBox 8"/>
+          <p:cNvSpPr txBox="1"/>
+          <p:nvPr/>
+        </p:nvSpPr>
+        <p:spPr>
+          <a:xfrm>
+            <a:off x="822960" y="1828800"/>
+            <a:ext cx="10545775" cy="3977640"/>
+          </a:xfrm>
+          <a:prstGeom prst="rect">
+            <a:avLst/>
+          </a:prstGeom>
+          <a:noFill/>
+        </p:spPr>
+        <p:txBody>
+          <a:bodyPr wrap="square" anchor="t">
+            <a:spAutoFit/>
+          </a:bodyPr>
+          <a:lstStyle/>
           <a:p>
             <a:pPr>
               <a:spcAft>
-                <a:spcPts val="1400"/>
+                <a:spcPts val="1500"/>
               </a:spcAft>
               <a:defRPr sz="2000" b="1">
                 <a:solidFill>
-                  <a:srgbClr val="1A1A1A"/>
+                  <a:srgbClr val="0F2A44"/>
                 </a:solidFill>
                 <a:latin typeface="Segoe UI"/>
               </a:defRPr>
             </a:pPr>
             <a:r>
-              <a:t>So my weeks are 21–27 Sep, 28 Sep–4 Oct, 5–11 Oct</a:t>
-            </a:r>
-          </a:p>
-          <a:p>
-            <a:pPr>
+              <a:t>The brief's dates are a week out</a:t>
+            </a:r>
+          </a:p>
+          <a:p>
+            <a:pPr lvl="1">
               <a:spcAft>
-                <a:spcPts val="1400"/>
+                <a:spcPts val="1500"/>
               </a:spcAft>
-              <a:defRPr sz="2000" b="0">
+              <a:defRPr sz="1700" b="0">
                 <a:solidFill>
-                  <a:srgbClr val="1A1A1A"/>
+                  <a:srgbClr val="6B7280"/>
                 </a:solidFill>
                 <a:latin typeface="Segoe UI"/>
               </a:defRPr>
             </a:pPr>
             <a:r>
-              <a:t>•  That puts your 4 Oct deadline at the end of my Week 2</a:t>
-            </a:r>
-          </a:p>
-          <a:p>
-            <a:pPr>
+              <a:t>–   It says start Mon 14 Sep, deadline Sun 4 Oct</a:t>
+            </a:r>
+          </a:p>
+          <a:p>
+            <a:pPr lvl="1">
               <a:spcAft>
-                <a:spcPts val="1400"/>
+                <a:spcPts val="1500"/>
               </a:spcAft>
-              <a:defRPr sz="2000" b="1">
+              <a:defRPr sz="1700" b="0">
                 <a:solidFill>
-                  <a:srgbClr val="1A1A1A"/>
+                  <a:srgbClr val="6B7280"/>
                 </a:solidFill>
                 <a:latin typeface="Segoe UI"/>
               </a:defRPr>
             </a:pPr>
             <a:r>
+              <a:t>–   I actually started Mon 21 Sep</a:t>
+            </a:r>
+          </a:p>
+          <a:p>
+            <a:pPr>
+              <a:spcAft>
+                <a:spcPts val="1500"/>
+              </a:spcAft>
+              <a:defRPr sz="2000" b="1">
+                <a:solidFill>
+                  <a:srgbClr val="0F2A44"/>
+                </a:solidFill>
+                <a:latin typeface="Segoe UI"/>
+              </a:defRPr>
+            </a:pPr>
+            <a:r>
+              <a:t>So my weeks are 21–27 Sep, 28 Sep–4 Oct, 5–11 Oct</a:t>
+            </a:r>
+          </a:p>
+          <a:p>
+            <a:pPr>
+              <a:spcAft>
+                <a:spcPts val="1500"/>
+              </a:spcAft>
+              <a:defRPr sz="2000" b="0">
+                <a:solidFill>
+                  <a:srgbClr val="1B1B1B"/>
+                </a:solidFill>
+                <a:latin typeface="Segoe UI"/>
+              </a:defRPr>
+            </a:pPr>
+            <a:r>
+              <a:t>•   That puts your 4 Oct deadline at the end of my Week 2</a:t>
+            </a:r>
+          </a:p>
+          <a:p>
+            <a:pPr>
+              <a:spcAft>
+                <a:spcPts val="1500"/>
+              </a:spcAft>
+              <a:defRPr sz="2000" b="1">
+                <a:solidFill>
+                  <a:srgbClr val="0F2A44"/>
+                </a:solidFill>
+                <a:latin typeface="Segoe UI"/>
+              </a:defRPr>
+            </a:pPr>
+            <a:r>
               <a:t>Does the deadline move to 11 Oct, or stay at 4 Oct?</a:t>
             </a:r>
           </a:p>
@@ -5806,14 +6498,14 @@
       </p:sp>
       <p:sp>
         <p:nvSpPr>
-          <p:cNvPr id="6" name="TextBox 5"/>
+          <p:cNvPr id="10" name="TextBox 9"/>
           <p:cNvSpPr txBox="1"/>
           <p:nvPr/>
         </p:nvSpPr>
         <p:spPr>
           <a:xfrm>
-            <a:off x="777240" y="6035040"/>
-            <a:ext cx="10637215" cy="457200"/>
+            <a:off x="822960" y="5989320"/>
+            <a:ext cx="8168335" cy="548640"/>
           </a:xfrm>
           <a:prstGeom prst="rect">
             <a:avLst/>
@@ -5829,7 +6521,7 @@
             <a:pPr>
               <a:defRPr sz="1200" i="1">
                 <a:solidFill>
-                  <a:srgbClr val="666666"/>
+                  <a:srgbClr val="6B7280"/>
                 </a:solidFill>
                 <a:latin typeface="Segoe UI"/>
               </a:defRPr>
@@ -5860,92 +6552,20 @@
       <p:grpSpPr/>
       <p:sp>
         <p:nvSpPr>
-          <p:cNvPr id="2" name="TextBox 1"/>
-          <p:cNvSpPr txBox="1"/>
-          <p:nvPr/>
-        </p:nvSpPr>
-        <p:spPr>
-          <a:xfrm>
-            <a:off x="777240" y="457200"/>
-            <a:ext cx="10637215" cy="274320"/>
-          </a:xfrm>
-          <a:prstGeom prst="rect">
-            <a:avLst/>
-          </a:prstGeom>
-          <a:noFill/>
-        </p:spPr>
-        <p:txBody>
-          <a:bodyPr wrap="square">
-            <a:spAutoFit/>
-          </a:bodyPr>
-          <a:lstStyle/>
-          <a:p>
-            <a:pPr>
-              <a:defRPr sz="1200" b="1">
-                <a:solidFill>
-                  <a:srgbClr val="1F4E79"/>
-                </a:solidFill>
-                <a:latin typeface="Segoe UI"/>
-              </a:defRPr>
-            </a:pPr>
-            <a:r>
-              <a:t>MON–TUE</a:t>
-            </a:r>
-          </a:p>
-        </p:txBody>
-      </p:sp>
-      <p:sp>
-        <p:nvSpPr>
-          <p:cNvPr id="3" name="TextBox 2"/>
-          <p:cNvSpPr txBox="1"/>
-          <p:nvPr/>
-        </p:nvSpPr>
-        <p:spPr>
-          <a:xfrm>
-            <a:off x="777240" y="786384"/>
-            <a:ext cx="10637215" cy="731520"/>
-          </a:xfrm>
-          <a:prstGeom prst="rect">
-            <a:avLst/>
-          </a:prstGeom>
-          <a:noFill/>
-        </p:spPr>
-        <p:txBody>
-          <a:bodyPr wrap="square">
-            <a:spAutoFit/>
-          </a:bodyPr>
-          <a:lstStyle/>
-          <a:p>
-            <a:pPr>
-              <a:defRPr sz="3000" b="1">
-                <a:solidFill>
-                  <a:srgbClr val="1A1A1A"/>
-                </a:solidFill>
-                <a:latin typeface="Segoe UI"/>
-              </a:defRPr>
-            </a:pPr>
-            <a:r>
-              <a:t>Embeddings: does this actually work?</a:t>
-            </a:r>
-          </a:p>
-        </p:txBody>
-      </p:sp>
-      <p:sp>
-        <p:nvSpPr>
-          <p:cNvPr id="4" name="Rectangle 3"/>
+          <p:cNvPr id="2" name="Rectangle 1"/>
           <p:cNvSpPr/>
           <p:nvPr/>
         </p:nvSpPr>
         <p:spPr>
           <a:xfrm>
-            <a:off x="777240" y="1499616"/>
-            <a:ext cx="10637215" cy="19050"/>
+            <a:off x="0" y="0"/>
+            <a:ext cx="155448" cy="6858000"/>
           </a:xfrm>
           <a:prstGeom prst="rect">
             <a:avLst/>
           </a:prstGeom>
           <a:solidFill>
-            <a:srgbClr val="D8D8D8"/>
+            <a:srgbClr val="0F2A44"/>
           </a:solidFill>
           <a:ln>
             <a:noFill/>
@@ -5976,14 +6596,14 @@
       </p:sp>
       <p:sp>
         <p:nvSpPr>
-          <p:cNvPr id="5" name="TextBox 4"/>
+          <p:cNvPr id="3" name="TextBox 2"/>
           <p:cNvSpPr txBox="1"/>
           <p:nvPr/>
         </p:nvSpPr>
         <p:spPr>
           <a:xfrm>
-            <a:off x="777240" y="1810512"/>
-            <a:ext cx="10637215" cy="365760"/>
+            <a:off x="9082735" y="6263640"/>
+            <a:ext cx="2286000" cy="320040"/>
           </a:xfrm>
           <a:prstGeom prst="rect">
             <a:avLst/>
@@ -5996,15 +6616,255 @@
           </a:bodyPr>
           <a:lstStyle/>
           <a:p>
-            <a:pPr>
-              <a:defRPr sz="1600">
+            <a:pPr algn="r">
+              <a:defRPr sz="1000">
                 <a:solidFill>
-                  <a:srgbClr val="666666"/>
+                  <a:srgbClr val="6B7280"/>
                 </a:solidFill>
                 <a:latin typeface="Segoe UI"/>
               </a:defRPr>
             </a:pPr>
             <a:r>
+              <a:t>Ask My Docs  ·  Week 1   ·   3</a:t>
+            </a:r>
+          </a:p>
+        </p:txBody>
+      </p:sp>
+      <p:sp>
+        <p:nvSpPr>
+          <p:cNvPr id="4" name="Rectangle 3"/>
+          <p:cNvSpPr/>
+          <p:nvPr/>
+        </p:nvSpPr>
+        <p:spPr>
+          <a:xfrm>
+            <a:off x="822960" y="566928"/>
+            <a:ext cx="1088136" cy="256032"/>
+          </a:xfrm>
+          <a:prstGeom prst="rect">
+            <a:avLst/>
+          </a:prstGeom>
+          <a:solidFill>
+            <a:srgbClr val="1C4E7A"/>
+          </a:solidFill>
+          <a:ln>
+            <a:noFill/>
+          </a:ln>
+          <a:effectLst/>
+        </p:spPr>
+        <p:style>
+          <a:lnRef idx="1">
+            <a:schemeClr val="accent1"/>
+          </a:lnRef>
+          <a:fillRef idx="3">
+            <a:schemeClr val="accent1"/>
+          </a:fillRef>
+          <a:effectRef idx="2">
+            <a:schemeClr val="accent1"/>
+          </a:effectRef>
+          <a:fontRef idx="minor">
+            <a:schemeClr val="lt1"/>
+          </a:fontRef>
+        </p:style>
+        <p:txBody>
+          <a:bodyPr rtlCol="0" anchor="ctr"/>
+          <a:lstStyle/>
+          <a:p>
+            <a:pPr algn="ctr"/>
+          </a:p>
+        </p:txBody>
+      </p:sp>
+      <p:sp>
+        <p:nvSpPr>
+          <p:cNvPr id="5" name="TextBox 4"/>
+          <p:cNvSpPr txBox="1"/>
+          <p:nvPr/>
+        </p:nvSpPr>
+        <p:spPr>
+          <a:xfrm>
+            <a:off x="822960" y="548640"/>
+            <a:ext cx="1088136" cy="292608"/>
+          </a:xfrm>
+          <a:prstGeom prst="rect">
+            <a:avLst/>
+          </a:prstGeom>
+          <a:noFill/>
+        </p:spPr>
+        <p:txBody>
+          <a:bodyPr wrap="square" lIns="0" rIns="0">
+            <a:spAutoFit/>
+          </a:bodyPr>
+          <a:lstStyle/>
+          <a:p>
+            <a:pPr algn="ctr">
+              <a:defRPr sz="1100" b="1">
+                <a:solidFill>
+                  <a:srgbClr val="FFFFFF"/>
+                </a:solidFill>
+                <a:latin typeface="Segoe UI"/>
+              </a:defRPr>
+            </a:pPr>
+            <a:r>
+              <a:t>MON–TUE</a:t>
+            </a:r>
+          </a:p>
+        </p:txBody>
+      </p:sp>
+      <p:sp>
+        <p:nvSpPr>
+          <p:cNvPr id="6" name="TextBox 5"/>
+          <p:cNvSpPr txBox="1"/>
+          <p:nvPr/>
+        </p:nvSpPr>
+        <p:spPr>
+          <a:xfrm>
+            <a:off x="822960" y="978408"/>
+            <a:ext cx="10545775" cy="658368"/>
+          </a:xfrm>
+          <a:prstGeom prst="rect">
+            <a:avLst/>
+          </a:prstGeom>
+          <a:noFill/>
+        </p:spPr>
+        <p:txBody>
+          <a:bodyPr wrap="square">
+            <a:spAutoFit/>
+          </a:bodyPr>
+          <a:lstStyle/>
+          <a:p>
+            <a:pPr>
+              <a:defRPr sz="3100" b="1">
+                <a:solidFill>
+                  <a:srgbClr val="0F2A44"/>
+                </a:solidFill>
+                <a:latin typeface="Segoe UI"/>
+              </a:defRPr>
+            </a:pPr>
+            <a:r>
+              <a:t>Embeddings: does this actually work?</a:t>
+            </a:r>
+          </a:p>
+        </p:txBody>
+      </p:sp>
+      <p:sp>
+        <p:nvSpPr>
+          <p:cNvPr id="7" name="Rectangle 6"/>
+          <p:cNvSpPr/>
+          <p:nvPr/>
+        </p:nvSpPr>
+        <p:spPr>
+          <a:xfrm>
+            <a:off x="822960" y="1673352"/>
+            <a:ext cx="1371600" cy="38100"/>
+          </a:xfrm>
+          <a:prstGeom prst="rect">
+            <a:avLst/>
+          </a:prstGeom>
+          <a:solidFill>
+            <a:srgbClr val="1C4E7A"/>
+          </a:solidFill>
+          <a:ln>
+            <a:noFill/>
+          </a:ln>
+          <a:effectLst/>
+        </p:spPr>
+        <p:style>
+          <a:lnRef idx="1">
+            <a:schemeClr val="accent1"/>
+          </a:lnRef>
+          <a:fillRef idx="3">
+            <a:schemeClr val="accent1"/>
+          </a:fillRef>
+          <a:effectRef idx="2">
+            <a:schemeClr val="accent1"/>
+          </a:effectRef>
+          <a:fontRef idx="minor">
+            <a:schemeClr val="lt1"/>
+          </a:fontRef>
+        </p:style>
+        <p:txBody>
+          <a:bodyPr rtlCol="0" anchor="ctr"/>
+          <a:lstStyle/>
+          <a:p>
+            <a:pPr algn="ctr"/>
+          </a:p>
+        </p:txBody>
+      </p:sp>
+      <p:sp>
+        <p:nvSpPr>
+          <p:cNvPr id="8" name="Rectangle 7"/>
+          <p:cNvSpPr/>
+          <p:nvPr/>
+        </p:nvSpPr>
+        <p:spPr>
+          <a:xfrm>
+            <a:off x="2194560" y="1686052"/>
+            <a:ext cx="9174175" cy="12700"/>
+          </a:xfrm>
+          <a:prstGeom prst="rect">
+            <a:avLst/>
+          </a:prstGeom>
+          <a:solidFill>
+            <a:srgbClr val="DDE3E8"/>
+          </a:solidFill>
+          <a:ln>
+            <a:noFill/>
+          </a:ln>
+          <a:effectLst/>
+        </p:spPr>
+        <p:style>
+          <a:lnRef idx="1">
+            <a:schemeClr val="accent1"/>
+          </a:lnRef>
+          <a:fillRef idx="3">
+            <a:schemeClr val="accent1"/>
+          </a:fillRef>
+          <a:effectRef idx="2">
+            <a:schemeClr val="accent1"/>
+          </a:effectRef>
+          <a:fontRef idx="minor">
+            <a:schemeClr val="lt1"/>
+          </a:fontRef>
+        </p:style>
+        <p:txBody>
+          <a:bodyPr rtlCol="0" anchor="ctr"/>
+          <a:lstStyle/>
+          <a:p>
+            <a:pPr algn="ctr"/>
+          </a:p>
+        </p:txBody>
+      </p:sp>
+      <p:sp>
+        <p:nvSpPr>
+          <p:cNvPr id="9" name="TextBox 8"/>
+          <p:cNvSpPr txBox="1"/>
+          <p:nvPr/>
+        </p:nvSpPr>
+        <p:spPr>
+          <a:xfrm>
+            <a:off x="822960" y="2601468"/>
+            <a:ext cx="10545775" cy="365760"/>
+          </a:xfrm>
+          <a:prstGeom prst="rect">
+            <a:avLst/>
+          </a:prstGeom>
+          <a:noFill/>
+        </p:spPr>
+        <p:txBody>
+          <a:bodyPr wrap="square">
+            <a:spAutoFit/>
+          </a:bodyPr>
+          <a:lstStyle/>
+          <a:p>
+            <a:pPr>
+              <a:defRPr sz="1600">
+                <a:solidFill>
+                  <a:srgbClr val="6B7280"/>
+                </a:solidFill>
+                <a:latin typeface="Segoe UI"/>
+              </a:defRPr>
+            </a:pPr>
+            <a:r>
               <a:t>I chose a free local model (all-MiniLM-L6-v2) so re-running experiments costs nothing.</a:t>
             </a:r>
           </a:p>
@@ -6012,15 +6872,15 @@
       </p:sp>
       <p:graphicFrame>
         <p:nvGraphicFramePr>
-          <p:cNvPr id="6" name="Table 5"/>
+          <p:cNvPr id="10" name="Table 9"/>
           <p:cNvGraphicFramePr>
             <a:graphicFrameLocks noGrp="1"/>
           </p:cNvGraphicFramePr>
           <p:nvPr/>
         </p:nvGraphicFramePr>
         <p:xfrm>
-          <a:off x="777240" y="2313432"/>
-          <a:ext cx="10637214" cy="1682496"/>
+          <a:off x="822960" y="3131820"/>
+          <a:ext cx="10545774" cy="1901952"/>
         </p:xfrm>
         <a:graphic>
           <a:graphicData uri="http://schemas.openxmlformats.org/drawingml/2006/table">
@@ -6029,17 +6889,17 @@
                 <a:tableStyleId>{5C22544A-7EE6-4342-B048-85BDC9FD1C3A}</a:tableStyleId>
               </a:tblPr>
               <a:tblGrid>
-                <a:gridCol w="8611078"/>
-                <a:gridCol w="2026136"/>
+                <a:gridCol w="8537055"/>
+                <a:gridCol w="2008719"/>
               </a:tblGrid>
-              <a:tr h="420624">
+              <a:tr h="475488">
                 <a:tc>
                   <a:txBody>
                     <a:bodyPr/>
                     <a:lstStyle/>
                     <a:p>
                       <a:pPr>
-                        <a:defRPr sz="1500" b="1">
+                        <a:defRPr sz="1400" b="1">
                           <a:solidFill>
                             <a:srgbClr val="FFFFFF"/>
                           </a:solidFill>
@@ -6051,9 +6911,21 @@
                       </a:r>
                     </a:p>
                   </a:txBody>
-                  <a:tcPr>
+                  <a:tcPr anchor="ctr" marL="146304" marR="146304">
+                    <a:lnL w="0" cap="flat" cmpd="sng" algn="ctr">
+                      <a:noFill/>
+                    </a:lnL>
+                    <a:lnR w="0" cap="flat" cmpd="sng" algn="ctr">
+                      <a:noFill/>
+                    </a:lnR>
+                    <a:lnT w="0" cap="flat" cmpd="sng" algn="ctr">
+                      <a:noFill/>
+                    </a:lnT>
+                    <a:lnB w="0" cap="flat" cmpd="sng" algn="ctr">
+                      <a:noFill/>
+                    </a:lnB>
                     <a:solidFill>
-                      <a:srgbClr val="1F4E79"/>
+                      <a:srgbClr val="0F2A44"/>
                     </a:solidFill>
                   </a:tcPr>
                 </a:tc>
@@ -6063,7 +6935,7 @@
                     <a:lstStyle/>
                     <a:p>
                       <a:pPr>
-                        <a:defRPr sz="1500" b="1">
+                        <a:defRPr sz="1400" b="1">
                           <a:solidFill>
                             <a:srgbClr val="FFFFFF"/>
                           </a:solidFill>
@@ -6075,14 +6947,26 @@
                       </a:r>
                     </a:p>
                   </a:txBody>
-                  <a:tcPr>
+                  <a:tcPr anchor="ctr" marL="146304" marR="146304">
+                    <a:lnL w="0" cap="flat" cmpd="sng" algn="ctr">
+                      <a:noFill/>
+                    </a:lnL>
+                    <a:lnR w="0" cap="flat" cmpd="sng" algn="ctr">
+                      <a:noFill/>
+                    </a:lnR>
+                    <a:lnT w="0" cap="flat" cmpd="sng" algn="ctr">
+                      <a:noFill/>
+                    </a:lnT>
+                    <a:lnB w="0" cap="flat" cmpd="sng" algn="ctr">
+                      <a:noFill/>
+                    </a:lnB>
                     <a:solidFill>
-                      <a:srgbClr val="1F4E79"/>
+                      <a:srgbClr val="0F2A44"/>
                     </a:solidFill>
                   </a:tcPr>
                 </a:tc>
               </a:tr>
-              <a:tr h="420624">
+              <a:tr h="475488">
                 <a:tc>
                   <a:txBody>
                     <a:bodyPr/>
@@ -6091,7 +6975,7 @@
                       <a:pPr>
                         <a:defRPr sz="1500" b="0">
                           <a:solidFill>
-                            <a:srgbClr val="1A1A1A"/>
+                            <a:srgbClr val="1B1B1B"/>
                           </a:solidFill>
                           <a:latin typeface="Segoe UI"/>
                         </a:defRPr>
@@ -6101,7 +6985,19 @@
                       </a:r>
                     </a:p>
                   </a:txBody>
-                  <a:tcPr>
+                  <a:tcPr anchor="ctr" marL="146304" marR="146304">
+                    <a:lnL w="0" cap="flat" cmpd="sng" algn="ctr">
+                      <a:noFill/>
+                    </a:lnL>
+                    <a:lnR w="0" cap="flat" cmpd="sng" algn="ctr">
+                      <a:noFill/>
+                    </a:lnR>
+                    <a:lnT w="0" cap="flat" cmpd="sng" algn="ctr">
+                      <a:noFill/>
+                    </a:lnT>
+                    <a:lnB w="0" cap="flat" cmpd="sng" algn="ctr">
+                      <a:noFill/>
+                    </a:lnB>
                     <a:solidFill>
                       <a:srgbClr val="FFFFFF"/>
                     </a:solidFill>
@@ -6115,7 +7011,7 @@
                       <a:pPr>
                         <a:defRPr sz="1500" b="0">
                           <a:solidFill>
-                            <a:srgbClr val="1A1A1A"/>
+                            <a:srgbClr val="1B1B1B"/>
                           </a:solidFill>
                           <a:latin typeface="Consolas"/>
                         </a:defRPr>
@@ -6125,14 +7021,26 @@
                       </a:r>
                     </a:p>
                   </a:txBody>
-                  <a:tcPr>
+                  <a:tcPr anchor="ctr" marL="146304" marR="146304">
+                    <a:lnL w="0" cap="flat" cmpd="sng" algn="ctr">
+                      <a:noFill/>
+                    </a:lnL>
+                    <a:lnR w="0" cap="flat" cmpd="sng" algn="ctr">
+                      <a:noFill/>
+                    </a:lnR>
+                    <a:lnT w="0" cap="flat" cmpd="sng" algn="ctr">
+                      <a:noFill/>
+                    </a:lnT>
+                    <a:lnB w="0" cap="flat" cmpd="sng" algn="ctr">
+                      <a:noFill/>
+                    </a:lnB>
                     <a:solidFill>
                       <a:srgbClr val="FFFFFF"/>
                     </a:solidFill>
                   </a:tcPr>
                 </a:tc>
               </a:tr>
-              <a:tr h="420624">
+              <a:tr h="475488">
                 <a:tc>
                   <a:txBody>
                     <a:bodyPr/>
@@ -6141,7 +7049,7 @@
                       <a:pPr>
                         <a:defRPr sz="1500" b="0">
                           <a:solidFill>
-                            <a:srgbClr val="1A1A1A"/>
+                            <a:srgbClr val="1B1B1B"/>
                           </a:solidFill>
                           <a:latin typeface="Segoe UI"/>
                         </a:defRPr>
@@ -6151,9 +7059,21 @@
                       </a:r>
                     </a:p>
                   </a:txBody>
-                  <a:tcPr>
+                  <a:tcPr anchor="ctr" marL="146304" marR="146304">
+                    <a:lnL w="0" cap="flat" cmpd="sng" algn="ctr">
+                      <a:noFill/>
+                    </a:lnL>
+                    <a:lnR w="0" cap="flat" cmpd="sng" algn="ctr">
+                      <a:noFill/>
+                    </a:lnR>
+                    <a:lnT w="0" cap="flat" cmpd="sng" algn="ctr">
+                      <a:noFill/>
+                    </a:lnT>
+                    <a:lnB w="0" cap="flat" cmpd="sng" algn="ctr">
+                      <a:noFill/>
+                    </a:lnB>
                     <a:solidFill>
-                      <a:srgbClr val="FFFFFF"/>
+                      <a:srgbClr val="F7F9FB"/>
                     </a:solidFill>
                   </a:tcPr>
                 </a:tc>
@@ -6165,7 +7085,7 @@
                       <a:pPr>
                         <a:defRPr sz="1500" b="0">
                           <a:solidFill>
-                            <a:srgbClr val="1A1A1A"/>
+                            <a:srgbClr val="1B1B1B"/>
                           </a:solidFill>
                           <a:latin typeface="Consolas"/>
                         </a:defRPr>
@@ -6175,14 +7095,26 @@
                       </a:r>
                     </a:p>
                   </a:txBody>
-                  <a:tcPr>
+                  <a:tcPr anchor="ctr" marL="146304" marR="146304">
+                    <a:lnL w="0" cap="flat" cmpd="sng" algn="ctr">
+                      <a:noFill/>
+                    </a:lnL>
+                    <a:lnR w="0" cap="flat" cmpd="sng" algn="ctr">
+                      <a:noFill/>
+                    </a:lnR>
+                    <a:lnT w="0" cap="flat" cmpd="sng" algn="ctr">
+                      <a:noFill/>
+                    </a:lnT>
+                    <a:lnB w="0" cap="flat" cmpd="sng" algn="ctr">
+                      <a:noFill/>
+                    </a:lnB>
                     <a:solidFill>
-                      <a:srgbClr val="FFFFFF"/>
+                      <a:srgbClr val="F7F9FB"/>
                     </a:solidFill>
                   </a:tcPr>
                 </a:tc>
               </a:tr>
-              <a:tr h="420624">
+              <a:tr h="475488">
                 <a:tc>
                   <a:txBody>
                     <a:bodyPr/>
@@ -6191,7 +7123,7 @@
                       <a:pPr>
                         <a:defRPr sz="1500" b="1">
                           <a:solidFill>
-                            <a:srgbClr val="B32D2D"/>
+                            <a:srgbClr val="B56E0C"/>
                           </a:solidFill>
                           <a:latin typeface="Segoe UI"/>
                         </a:defRPr>
@@ -6201,9 +7133,21 @@
                       </a:r>
                     </a:p>
                   </a:txBody>
-                  <a:tcPr>
+                  <a:tcPr anchor="ctr" marL="146304" marR="146304">
+                    <a:lnL w="0" cap="flat" cmpd="sng" algn="ctr">
+                      <a:noFill/>
+                    </a:lnL>
+                    <a:lnR w="0" cap="flat" cmpd="sng" algn="ctr">
+                      <a:noFill/>
+                    </a:lnR>
+                    <a:lnT w="0" cap="flat" cmpd="sng" algn="ctr">
+                      <a:noFill/>
+                    </a:lnT>
+                    <a:lnB w="0" cap="flat" cmpd="sng" algn="ctr">
+                      <a:noFill/>
+                    </a:lnB>
                     <a:solidFill>
-                      <a:srgbClr val="F2F5F8"/>
+                      <a:srgbClr val="FDF4E6"/>
                     </a:solidFill>
                   </a:tcPr>
                 </a:tc>
@@ -6215,7 +7159,7 @@
                       <a:pPr>
                         <a:defRPr sz="1500" b="1">
                           <a:solidFill>
-                            <a:srgbClr val="B32D2D"/>
+                            <a:srgbClr val="B56E0C"/>
                           </a:solidFill>
                           <a:latin typeface="Consolas"/>
                         </a:defRPr>
@@ -6225,9 +7169,21 @@
                       </a:r>
                     </a:p>
                   </a:txBody>
-                  <a:tcPr>
+                  <a:tcPr anchor="ctr" marL="146304" marR="146304">
+                    <a:lnL w="0" cap="flat" cmpd="sng" algn="ctr">
+                      <a:noFill/>
+                    </a:lnL>
+                    <a:lnR w="0" cap="flat" cmpd="sng" algn="ctr">
+                      <a:noFill/>
+                    </a:lnR>
+                    <a:lnT w="0" cap="flat" cmpd="sng" algn="ctr">
+                      <a:noFill/>
+                    </a:lnT>
+                    <a:lnB w="0" cap="flat" cmpd="sng" algn="ctr">
+                      <a:noFill/>
+                    </a:lnB>
                     <a:solidFill>
-                      <a:srgbClr val="F2F5F8"/>
+                      <a:srgbClr val="FDF4E6"/>
                     </a:solidFill>
                   </a:tcPr>
                 </a:tc>
@@ -6238,14 +7194,14 @@
       </p:graphicFrame>
       <p:sp>
         <p:nvSpPr>
-          <p:cNvPr id="7" name="TextBox 6"/>
+          <p:cNvPr id="11" name="TextBox 10"/>
           <p:cNvSpPr txBox="1"/>
           <p:nvPr/>
         </p:nvSpPr>
         <p:spPr>
           <a:xfrm>
-            <a:off x="777240" y="6035040"/>
-            <a:ext cx="10637215" cy="457200"/>
+            <a:off x="822960" y="5989320"/>
+            <a:ext cx="8168335" cy="548640"/>
           </a:xfrm>
           <a:prstGeom prst="rect">
             <a:avLst/>
@@ -6261,7 +7217,7 @@
             <a:pPr>
               <a:defRPr sz="1200" i="1">
                 <a:solidFill>
-                  <a:srgbClr val="666666"/>
+                  <a:srgbClr val="6B7280"/>
                 </a:solidFill>
                 <a:latin typeface="Segoe UI"/>
               </a:defRPr>
@@ -6292,92 +7248,20 @@
       <p:grpSpPr/>
       <p:sp>
         <p:nvSpPr>
-          <p:cNvPr id="2" name="TextBox 1"/>
-          <p:cNvSpPr txBox="1"/>
-          <p:nvPr/>
-        </p:nvSpPr>
-        <p:spPr>
-          <a:xfrm>
-            <a:off x="777240" y="457200"/>
-            <a:ext cx="10637215" cy="274320"/>
-          </a:xfrm>
-          <a:prstGeom prst="rect">
-            <a:avLst/>
-          </a:prstGeom>
-          <a:noFill/>
-        </p:spPr>
-        <p:txBody>
-          <a:bodyPr wrap="square">
-            <a:spAutoFit/>
-          </a:bodyPr>
-          <a:lstStyle/>
-          <a:p>
-            <a:pPr>
-              <a:defRPr sz="1200" b="1">
-                <a:solidFill>
-                  <a:srgbClr val="1F4E79"/>
-                </a:solidFill>
-                <a:latin typeface="Segoe UI"/>
-              </a:defRPr>
-            </a:pPr>
-            <a:r>
-              <a:t>MON–TUE</a:t>
-            </a:r>
-          </a:p>
-        </p:txBody>
-      </p:sp>
-      <p:sp>
-        <p:nvSpPr>
-          <p:cNvPr id="3" name="TextBox 2"/>
-          <p:cNvSpPr txBox="1"/>
-          <p:nvPr/>
-        </p:nvSpPr>
-        <p:spPr>
-          <a:xfrm>
-            <a:off x="777240" y="786384"/>
-            <a:ext cx="10637215" cy="731520"/>
-          </a:xfrm>
-          <a:prstGeom prst="rect">
-            <a:avLst/>
-          </a:prstGeom>
-          <a:noFill/>
-        </p:spPr>
-        <p:txBody>
-          <a:bodyPr wrap="square">
-            <a:spAutoFit/>
-          </a:bodyPr>
-          <a:lstStyle/>
-          <a:p>
-            <a:pPr>
-              <a:defRPr sz="3000" b="1">
-                <a:solidFill>
-                  <a:srgbClr val="1A1A1A"/>
-                </a:solidFill>
-                <a:latin typeface="Segoe UI"/>
-              </a:defRPr>
-            </a:pPr>
-            <a:r>
-              <a:t>What an embedding is — in my own words</a:t>
-            </a:r>
-          </a:p>
-        </p:txBody>
-      </p:sp>
-      <p:sp>
-        <p:nvSpPr>
-          <p:cNvPr id="4" name="Rectangle 3"/>
+          <p:cNvPr id="2" name="Rectangle 1"/>
           <p:cNvSpPr/>
           <p:nvPr/>
         </p:nvSpPr>
         <p:spPr>
           <a:xfrm>
-            <a:off x="777240" y="1499616"/>
-            <a:ext cx="10637215" cy="19050"/>
+            <a:off x="0" y="0"/>
+            <a:ext cx="155448" cy="6858000"/>
           </a:xfrm>
           <a:prstGeom prst="rect">
             <a:avLst/>
           </a:prstGeom>
           <a:solidFill>
-            <a:srgbClr val="D8D8D8"/>
+            <a:srgbClr val="0F2A44"/>
           </a:solidFill>
           <a:ln>
             <a:noFill/>
@@ -6408,14 +7292,14 @@
       </p:sp>
       <p:sp>
         <p:nvSpPr>
-          <p:cNvPr id="5" name="TextBox 4"/>
+          <p:cNvPr id="3" name="TextBox 2"/>
           <p:cNvSpPr txBox="1"/>
           <p:nvPr/>
         </p:nvSpPr>
         <p:spPr>
           <a:xfrm>
-            <a:off x="777240" y="1810512"/>
-            <a:ext cx="10637215" cy="3931920"/>
+            <a:off x="9082735" y="6263640"/>
+            <a:ext cx="2286000" cy="320040"/>
           </a:xfrm>
           <a:prstGeom prst="rect">
             <a:avLst/>
@@ -6428,118 +7312,358 @@
           </a:bodyPr>
           <a:lstStyle/>
           <a:p>
-            <a:pPr>
-              <a:spcAft>
-                <a:spcPts val="1400"/>
-              </a:spcAft>
-              <a:defRPr sz="2000" b="0">
+            <a:pPr algn="r">
+              <a:defRPr sz="1000">
                 <a:solidFill>
-                  <a:srgbClr val="1A1A1A"/>
+                  <a:srgbClr val="6B7280"/>
                 </a:solidFill>
                 <a:latin typeface="Segoe UI"/>
               </a:defRPr>
             </a:pPr>
             <a:r>
-              <a:t>•  [ I fill this in before presenting ]</a:t>
-            </a:r>
-          </a:p>
-          <a:p>
-            <a:pPr>
-              <a:defRPr sz="800"/>
-            </a:pPr>
-          </a:p>
-          <a:p>
-            <a:pPr>
-              <a:spcAft>
-                <a:spcPts val="1400"/>
-              </a:spcAft>
-              <a:defRPr sz="2000" b="1">
+              <a:t>Ask My Docs  ·  Week 1   ·   4</a:t>
+            </a:r>
+          </a:p>
+        </p:txBody>
+      </p:sp>
+      <p:sp>
+        <p:nvSpPr>
+          <p:cNvPr id="4" name="Rectangle 3"/>
+          <p:cNvSpPr/>
+          <p:nvPr/>
+        </p:nvSpPr>
+        <p:spPr>
+          <a:xfrm>
+            <a:off x="822960" y="566928"/>
+            <a:ext cx="1088136" cy="256032"/>
+          </a:xfrm>
+          <a:prstGeom prst="rect">
+            <a:avLst/>
+          </a:prstGeom>
+          <a:solidFill>
+            <a:srgbClr val="1C4E7A"/>
+          </a:solidFill>
+          <a:ln>
+            <a:noFill/>
+          </a:ln>
+          <a:effectLst/>
+        </p:spPr>
+        <p:style>
+          <a:lnRef idx="1">
+            <a:schemeClr val="accent1"/>
+          </a:lnRef>
+          <a:fillRef idx="3">
+            <a:schemeClr val="accent1"/>
+          </a:fillRef>
+          <a:effectRef idx="2">
+            <a:schemeClr val="accent1"/>
+          </a:effectRef>
+          <a:fontRef idx="minor">
+            <a:schemeClr val="lt1"/>
+          </a:fontRef>
+        </p:style>
+        <p:txBody>
+          <a:bodyPr rtlCol="0" anchor="ctr"/>
+          <a:lstStyle/>
+          <a:p>
+            <a:pPr algn="ctr"/>
+          </a:p>
+        </p:txBody>
+      </p:sp>
+      <p:sp>
+        <p:nvSpPr>
+          <p:cNvPr id="5" name="TextBox 4"/>
+          <p:cNvSpPr txBox="1"/>
+          <p:nvPr/>
+        </p:nvSpPr>
+        <p:spPr>
+          <a:xfrm>
+            <a:off x="822960" y="548640"/>
+            <a:ext cx="1088136" cy="292608"/>
+          </a:xfrm>
+          <a:prstGeom prst="rect">
+            <a:avLst/>
+          </a:prstGeom>
+          <a:noFill/>
+        </p:spPr>
+        <p:txBody>
+          <a:bodyPr wrap="square" lIns="0" rIns="0">
+            <a:spAutoFit/>
+          </a:bodyPr>
+          <a:lstStyle/>
+          <a:p>
+            <a:pPr algn="ctr">
+              <a:defRPr sz="1100" b="1">
                 <a:solidFill>
-                  <a:srgbClr val="1A1A1A"/>
+                  <a:srgbClr val="FFFFFF"/>
                 </a:solidFill>
                 <a:latin typeface="Segoe UI"/>
               </a:defRPr>
             </a:pPr>
             <a:r>
-              <a:t>Your self-check: explain it without using "vector" as a cop-out</a:t>
-            </a:r>
-          </a:p>
+              <a:t>MON–TUE</a:t>
+            </a:r>
+          </a:p>
+        </p:txBody>
+      </p:sp>
+      <p:sp>
+        <p:nvSpPr>
+          <p:cNvPr id="6" name="TextBox 5"/>
+          <p:cNvSpPr txBox="1"/>
+          <p:nvPr/>
+        </p:nvSpPr>
+        <p:spPr>
+          <a:xfrm>
+            <a:off x="822960" y="978408"/>
+            <a:ext cx="10545775" cy="658368"/>
+          </a:xfrm>
+          <a:prstGeom prst="rect">
+            <a:avLst/>
+          </a:prstGeom>
+          <a:noFill/>
+        </p:spPr>
+        <p:txBody>
+          <a:bodyPr wrap="square">
+            <a:spAutoFit/>
+          </a:bodyPr>
+          <a:lstStyle/>
           <a:p>
             <a:pPr>
-              <a:spcAft>
-                <a:spcPts val="1400"/>
-              </a:spcAft>
-              <a:defRPr sz="2000" b="0">
+              <a:defRPr sz="3100" b="1">
                 <a:solidFill>
-                  <a:srgbClr val="1A1A1A"/>
+                  <a:srgbClr val="0F2A44"/>
                 </a:solidFill>
                 <a:latin typeface="Segoe UI"/>
               </a:defRPr>
             </a:pPr>
             <a:r>
-              <a:t>•  What I have to work with:</a:t>
-            </a:r>
-          </a:p>
-          <a:p>
-            <a:pPr lvl="1">
+              <a:t>What an embedding is — in my own words</a:t>
+            </a:r>
+          </a:p>
+        </p:txBody>
+      </p:sp>
+      <p:sp>
+        <p:nvSpPr>
+          <p:cNvPr id="7" name="Rectangle 6"/>
+          <p:cNvSpPr/>
+          <p:nvPr/>
+        </p:nvSpPr>
+        <p:spPr>
+          <a:xfrm>
+            <a:off x="822960" y="1673352"/>
+            <a:ext cx="1371600" cy="38100"/>
+          </a:xfrm>
+          <a:prstGeom prst="rect">
+            <a:avLst/>
+          </a:prstGeom>
+          <a:solidFill>
+            <a:srgbClr val="1C4E7A"/>
+          </a:solidFill>
+          <a:ln>
+            <a:noFill/>
+          </a:ln>
+          <a:effectLst/>
+        </p:spPr>
+        <p:style>
+          <a:lnRef idx="1">
+            <a:schemeClr val="accent1"/>
+          </a:lnRef>
+          <a:fillRef idx="3">
+            <a:schemeClr val="accent1"/>
+          </a:fillRef>
+          <a:effectRef idx="2">
+            <a:schemeClr val="accent1"/>
+          </a:effectRef>
+          <a:fontRef idx="minor">
+            <a:schemeClr val="lt1"/>
+          </a:fontRef>
+        </p:style>
+        <p:txBody>
+          <a:bodyPr rtlCol="0" anchor="ctr"/>
+          <a:lstStyle/>
+          <a:p>
+            <a:pPr algn="ctr"/>
+          </a:p>
+        </p:txBody>
+      </p:sp>
+      <p:sp>
+        <p:nvSpPr>
+          <p:cNvPr id="8" name="Rectangle 7"/>
+          <p:cNvSpPr/>
+          <p:nvPr/>
+        </p:nvSpPr>
+        <p:spPr>
+          <a:xfrm>
+            <a:off x="2194560" y="1686052"/>
+            <a:ext cx="9174175" cy="12700"/>
+          </a:xfrm>
+          <a:prstGeom prst="rect">
+            <a:avLst/>
+          </a:prstGeom>
+          <a:solidFill>
+            <a:srgbClr val="DDE3E8"/>
+          </a:solidFill>
+          <a:ln>
+            <a:noFill/>
+          </a:ln>
+          <a:effectLst/>
+        </p:spPr>
+        <p:style>
+          <a:lnRef idx="1">
+            <a:schemeClr val="accent1"/>
+          </a:lnRef>
+          <a:fillRef idx="3">
+            <a:schemeClr val="accent1"/>
+          </a:fillRef>
+          <a:effectRef idx="2">
+            <a:schemeClr val="accent1"/>
+          </a:effectRef>
+          <a:fontRef idx="minor">
+            <a:schemeClr val="lt1"/>
+          </a:fontRef>
+        </p:style>
+        <p:txBody>
+          <a:bodyPr rtlCol="0" anchor="ctr"/>
+          <a:lstStyle/>
+          <a:p>
+            <a:pPr algn="ctr"/>
+          </a:p>
+        </p:txBody>
+      </p:sp>
+      <p:sp>
+        <p:nvSpPr>
+          <p:cNvPr id="9" name="TextBox 8"/>
+          <p:cNvSpPr txBox="1"/>
+          <p:nvPr/>
+        </p:nvSpPr>
+        <p:spPr>
+          <a:xfrm>
+            <a:off x="822960" y="1828800"/>
+            <a:ext cx="10545775" cy="3977640"/>
+          </a:xfrm>
+          <a:prstGeom prst="rect">
+            <a:avLst/>
+          </a:prstGeom>
+          <a:noFill/>
+        </p:spPr>
+        <p:txBody>
+          <a:bodyPr wrap="square" anchor="t">
+            <a:spAutoFit/>
+          </a:bodyPr>
+          <a:lstStyle/>
+          <a:p>
+            <a:pPr>
               <a:spcAft>
-                <a:spcPts val="1400"/>
+                <a:spcPts val="1500"/>
               </a:spcAft>
-              <a:defRPr sz="1700" b="0">
+              <a:defRPr sz="2000" b="1">
                 <a:solidFill>
-                  <a:srgbClr val="666666"/>
+                  <a:srgbClr val="0F2A44"/>
                 </a:solidFill>
                 <a:latin typeface="Segoe UI"/>
               </a:defRPr>
             </a:pPr>
             <a:r>
-              <a:t>–  7 characters in and 196 characters in both give exactly 384 numbers out</a:t>
-            </a:r>
-          </a:p>
-          <a:p>
-            <a:pPr lvl="1">
+              <a:t>[ I fill this in before presenting ]</a:t>
+            </a:r>
+          </a:p>
+          <a:p>
+            <a:pPr>
+              <a:defRPr sz="900"/>
+            </a:pPr>
+          </a:p>
+          <a:p>
+            <a:pPr>
               <a:spcAft>
-                <a:spcPts val="1400"/>
+                <a:spcPts val="1500"/>
               </a:spcAft>
-              <a:defRPr sz="1700" b="0">
+              <a:defRPr sz="2000" b="0">
                 <a:solidFill>
-                  <a:srgbClr val="666666"/>
+                  <a:srgbClr val="1B1B1B"/>
                 </a:solidFill>
                 <a:latin typeface="Segoe UI"/>
               </a:defRPr>
             </a:pPr>
             <a:r>
-              <a:t>–  Two sentences with no shared words scored 0.618</a:t>
-            </a:r>
-          </a:p>
-          <a:p>
-            <a:pPr lvl="1">
+              <a:t>•   Your self-check: explain it without using "vector" as a cop-out</a:t>
+            </a:r>
+          </a:p>
+          <a:p>
+            <a:pPr>
               <a:spcAft>
-                <a:spcPts val="1400"/>
+                <a:spcPts val="1500"/>
               </a:spcAft>
-              <a:defRPr sz="1700" b="0">
+              <a:defRPr sz="2000" b="1">
                 <a:solidFill>
-                  <a:srgbClr val="666666"/>
+                  <a:srgbClr val="0F2A44"/>
                 </a:solidFill>
                 <a:latin typeface="Segoe UI"/>
               </a:defRPr>
             </a:pPr>
             <a:r>
-              <a:t>–  The numbers mean nothing alone — only their positions relative to each other</a:t>
-            </a:r>
-          </a:p>
-        </p:txBody>
-      </p:sp>
-      <p:sp>
-        <p:nvSpPr>
-          <p:cNvPr id="6" name="TextBox 5"/>
+              <a:t>What I have to work with:</a:t>
+            </a:r>
+          </a:p>
+          <a:p>
+            <a:pPr lvl="1">
+              <a:spcAft>
+                <a:spcPts val="1500"/>
+              </a:spcAft>
+              <a:defRPr sz="1700" b="0">
+                <a:solidFill>
+                  <a:srgbClr val="6B7280"/>
+                </a:solidFill>
+                <a:latin typeface="Segoe UI"/>
+              </a:defRPr>
+            </a:pPr>
+            <a:r>
+              <a:t>–   7 characters in and 196 characters in both give exactly 384 numbers out</a:t>
+            </a:r>
+          </a:p>
+          <a:p>
+            <a:pPr lvl="1">
+              <a:spcAft>
+                <a:spcPts val="1500"/>
+              </a:spcAft>
+              <a:defRPr sz="1700" b="0">
+                <a:solidFill>
+                  <a:srgbClr val="6B7280"/>
+                </a:solidFill>
+                <a:latin typeface="Segoe UI"/>
+              </a:defRPr>
+            </a:pPr>
+            <a:r>
+              <a:t>–   Two sentences with no shared words scored 0.618</a:t>
+            </a:r>
+          </a:p>
+          <a:p>
+            <a:pPr lvl="1">
+              <a:spcAft>
+                <a:spcPts val="1500"/>
+              </a:spcAft>
+              <a:defRPr sz="1700" b="0">
+                <a:solidFill>
+                  <a:srgbClr val="6B7280"/>
+                </a:solidFill>
+                <a:latin typeface="Segoe UI"/>
+              </a:defRPr>
+            </a:pPr>
+            <a:r>
+              <a:t>–   The numbers mean nothing alone — only their positions relative to each other</a:t>
+            </a:r>
+          </a:p>
+        </p:txBody>
+      </p:sp>
+      <p:sp>
+        <p:nvSpPr>
+          <p:cNvPr id="10" name="TextBox 9"/>
           <p:cNvSpPr txBox="1"/>
           <p:nvPr/>
         </p:nvSpPr>
         <p:spPr>
           <a:xfrm>
-            <a:off x="777240" y="6035040"/>
-            <a:ext cx="10637215" cy="457200"/>
+            <a:off x="822960" y="5989320"/>
+            <a:ext cx="8168335" cy="548640"/>
           </a:xfrm>
           <a:prstGeom prst="rect">
             <a:avLst/>
@@ -6555,7 +7679,7 @@
             <a:pPr>
               <a:defRPr sz="1200" i="1">
                 <a:solidFill>
-                  <a:srgbClr val="666666"/>
+                  <a:srgbClr val="6B7280"/>
                 </a:solidFill>
                 <a:latin typeface="Segoe UI"/>
               </a:defRPr>
@@ -6586,92 +7710,20 @@
       <p:grpSpPr/>
       <p:sp>
         <p:nvSpPr>
-          <p:cNvPr id="2" name="TextBox 1"/>
-          <p:cNvSpPr txBox="1"/>
-          <p:nvPr/>
-        </p:nvSpPr>
-        <p:spPr>
-          <a:xfrm>
-            <a:off x="777240" y="457200"/>
-            <a:ext cx="10637215" cy="274320"/>
-          </a:xfrm>
-          <a:prstGeom prst="rect">
-            <a:avLst/>
-          </a:prstGeom>
-          <a:noFill/>
-        </p:spPr>
-        <p:txBody>
-          <a:bodyPr wrap="square">
-            <a:spAutoFit/>
-          </a:bodyPr>
-          <a:lstStyle/>
-          <a:p>
-            <a:pPr>
-              <a:defRPr sz="1200" b="1">
-                <a:solidFill>
-                  <a:srgbClr val="1F4E79"/>
-                </a:solidFill>
-                <a:latin typeface="Segoe UI"/>
-              </a:defRPr>
-            </a:pPr>
-            <a:r>
-              <a:t>WED–THU</a:t>
-            </a:r>
-          </a:p>
-        </p:txBody>
-      </p:sp>
-      <p:sp>
-        <p:nvSpPr>
-          <p:cNvPr id="3" name="TextBox 2"/>
-          <p:cNvSpPr txBox="1"/>
-          <p:nvPr/>
-        </p:nvSpPr>
-        <p:spPr>
-          <a:xfrm>
-            <a:off x="777240" y="786384"/>
-            <a:ext cx="10637215" cy="731520"/>
-          </a:xfrm>
-          <a:prstGeom prst="rect">
-            <a:avLst/>
-          </a:prstGeom>
-          <a:noFill/>
-        </p:spPr>
-        <p:txBody>
-          <a:bodyPr wrap="square">
-            <a:spAutoFit/>
-          </a:bodyPr>
-          <a:lstStyle/>
-          <a:p>
-            <a:pPr>
-              <a:defRPr sz="3000" b="1">
-                <a:solidFill>
-                  <a:srgbClr val="1A1A1A"/>
-                </a:solidFill>
-                <a:latin typeface="Segoe UI"/>
-              </a:defRPr>
-            </a:pPr>
-            <a:r>
-              <a:t>Why chunking needs care: a fact that vanished</a:t>
-            </a:r>
-          </a:p>
-        </p:txBody>
-      </p:sp>
-      <p:sp>
-        <p:nvSpPr>
-          <p:cNvPr id="4" name="Rectangle 3"/>
+          <p:cNvPr id="2" name="Rectangle 1"/>
           <p:cNvSpPr/>
           <p:nvPr/>
         </p:nvSpPr>
         <p:spPr>
           <a:xfrm>
-            <a:off x="777240" y="1499616"/>
-            <a:ext cx="10637215" cy="19050"/>
+            <a:off x="0" y="0"/>
+            <a:ext cx="155448" cy="6858000"/>
           </a:xfrm>
           <a:prstGeom prst="rect">
             <a:avLst/>
           </a:prstGeom>
           <a:solidFill>
-            <a:srgbClr val="D8D8D8"/>
+            <a:srgbClr val="0F2A44"/>
           </a:solidFill>
           <a:ln>
             <a:noFill/>
@@ -6702,14 +7754,14 @@
       </p:sp>
       <p:sp>
         <p:nvSpPr>
-          <p:cNvPr id="5" name="TextBox 4"/>
+          <p:cNvPr id="3" name="TextBox 2"/>
           <p:cNvSpPr txBox="1"/>
           <p:nvPr/>
         </p:nvSpPr>
         <p:spPr>
           <a:xfrm>
-            <a:off x="777240" y="1810512"/>
-            <a:ext cx="10637215" cy="365760"/>
+            <a:off x="9082735" y="6263640"/>
+            <a:ext cx="2286000" cy="320040"/>
           </a:xfrm>
           <a:prstGeom prst="rect">
             <a:avLst/>
@@ -6722,15 +7774,255 @@
           </a:bodyPr>
           <a:lstStyle/>
           <a:p>
-            <a:pPr>
-              <a:defRPr sz="1600">
+            <a:pPr algn="r">
+              <a:defRPr sz="1000">
                 <a:solidFill>
-                  <a:srgbClr val="666666"/>
+                  <a:srgbClr val="6B7280"/>
                 </a:solidFill>
                 <a:latin typeface="Segoe UI"/>
               </a:defRPr>
             </a:pPr>
             <a:r>
+              <a:t>Ask My Docs  ·  Week 1   ·   5</a:t>
+            </a:r>
+          </a:p>
+        </p:txBody>
+      </p:sp>
+      <p:sp>
+        <p:nvSpPr>
+          <p:cNvPr id="4" name="Rectangle 3"/>
+          <p:cNvSpPr/>
+          <p:nvPr/>
+        </p:nvSpPr>
+        <p:spPr>
+          <a:xfrm>
+            <a:off x="822960" y="566928"/>
+            <a:ext cx="1088136" cy="256032"/>
+          </a:xfrm>
+          <a:prstGeom prst="rect">
+            <a:avLst/>
+          </a:prstGeom>
+          <a:solidFill>
+            <a:srgbClr val="1C4E7A"/>
+          </a:solidFill>
+          <a:ln>
+            <a:noFill/>
+          </a:ln>
+          <a:effectLst/>
+        </p:spPr>
+        <p:style>
+          <a:lnRef idx="1">
+            <a:schemeClr val="accent1"/>
+          </a:lnRef>
+          <a:fillRef idx="3">
+            <a:schemeClr val="accent1"/>
+          </a:fillRef>
+          <a:effectRef idx="2">
+            <a:schemeClr val="accent1"/>
+          </a:effectRef>
+          <a:fontRef idx="minor">
+            <a:schemeClr val="lt1"/>
+          </a:fontRef>
+        </p:style>
+        <p:txBody>
+          <a:bodyPr rtlCol="0" anchor="ctr"/>
+          <a:lstStyle/>
+          <a:p>
+            <a:pPr algn="ctr"/>
+          </a:p>
+        </p:txBody>
+      </p:sp>
+      <p:sp>
+        <p:nvSpPr>
+          <p:cNvPr id="5" name="TextBox 4"/>
+          <p:cNvSpPr txBox="1"/>
+          <p:nvPr/>
+        </p:nvSpPr>
+        <p:spPr>
+          <a:xfrm>
+            <a:off x="822960" y="548640"/>
+            <a:ext cx="1088136" cy="292608"/>
+          </a:xfrm>
+          <a:prstGeom prst="rect">
+            <a:avLst/>
+          </a:prstGeom>
+          <a:noFill/>
+        </p:spPr>
+        <p:txBody>
+          <a:bodyPr wrap="square" lIns="0" rIns="0">
+            <a:spAutoFit/>
+          </a:bodyPr>
+          <a:lstStyle/>
+          <a:p>
+            <a:pPr algn="ctr">
+              <a:defRPr sz="1100" b="1">
+                <a:solidFill>
+                  <a:srgbClr val="FFFFFF"/>
+                </a:solidFill>
+                <a:latin typeface="Segoe UI"/>
+              </a:defRPr>
+            </a:pPr>
+            <a:r>
+              <a:t>WED–THU</a:t>
+            </a:r>
+          </a:p>
+        </p:txBody>
+      </p:sp>
+      <p:sp>
+        <p:nvSpPr>
+          <p:cNvPr id="6" name="TextBox 5"/>
+          <p:cNvSpPr txBox="1"/>
+          <p:nvPr/>
+        </p:nvSpPr>
+        <p:spPr>
+          <a:xfrm>
+            <a:off x="822960" y="978408"/>
+            <a:ext cx="10545775" cy="658368"/>
+          </a:xfrm>
+          <a:prstGeom prst="rect">
+            <a:avLst/>
+          </a:prstGeom>
+          <a:noFill/>
+        </p:spPr>
+        <p:txBody>
+          <a:bodyPr wrap="square">
+            <a:spAutoFit/>
+          </a:bodyPr>
+          <a:lstStyle/>
+          <a:p>
+            <a:pPr>
+              <a:defRPr sz="3100" b="1">
+                <a:solidFill>
+                  <a:srgbClr val="0F2A44"/>
+                </a:solidFill>
+                <a:latin typeface="Segoe UI"/>
+              </a:defRPr>
+            </a:pPr>
+            <a:r>
+              <a:t>Why chunking needs care: a fact that vanished</a:t>
+            </a:r>
+          </a:p>
+        </p:txBody>
+      </p:sp>
+      <p:sp>
+        <p:nvSpPr>
+          <p:cNvPr id="7" name="Rectangle 6"/>
+          <p:cNvSpPr/>
+          <p:nvPr/>
+        </p:nvSpPr>
+        <p:spPr>
+          <a:xfrm>
+            <a:off x="822960" y="1673352"/>
+            <a:ext cx="1371600" cy="38100"/>
+          </a:xfrm>
+          <a:prstGeom prst="rect">
+            <a:avLst/>
+          </a:prstGeom>
+          <a:solidFill>
+            <a:srgbClr val="1C4E7A"/>
+          </a:solidFill>
+          <a:ln>
+            <a:noFill/>
+          </a:ln>
+          <a:effectLst/>
+        </p:spPr>
+        <p:style>
+          <a:lnRef idx="1">
+            <a:schemeClr val="accent1"/>
+          </a:lnRef>
+          <a:fillRef idx="3">
+            <a:schemeClr val="accent1"/>
+          </a:fillRef>
+          <a:effectRef idx="2">
+            <a:schemeClr val="accent1"/>
+          </a:effectRef>
+          <a:fontRef idx="minor">
+            <a:schemeClr val="lt1"/>
+          </a:fontRef>
+        </p:style>
+        <p:txBody>
+          <a:bodyPr rtlCol="0" anchor="ctr"/>
+          <a:lstStyle/>
+          <a:p>
+            <a:pPr algn="ctr"/>
+          </a:p>
+        </p:txBody>
+      </p:sp>
+      <p:sp>
+        <p:nvSpPr>
+          <p:cNvPr id="8" name="Rectangle 7"/>
+          <p:cNvSpPr/>
+          <p:nvPr/>
+        </p:nvSpPr>
+        <p:spPr>
+          <a:xfrm>
+            <a:off x="2194560" y="1686052"/>
+            <a:ext cx="9174175" cy="12700"/>
+          </a:xfrm>
+          <a:prstGeom prst="rect">
+            <a:avLst/>
+          </a:prstGeom>
+          <a:solidFill>
+            <a:srgbClr val="DDE3E8"/>
+          </a:solidFill>
+          <a:ln>
+            <a:noFill/>
+          </a:ln>
+          <a:effectLst/>
+        </p:spPr>
+        <p:style>
+          <a:lnRef idx="1">
+            <a:schemeClr val="accent1"/>
+          </a:lnRef>
+          <a:fillRef idx="3">
+            <a:schemeClr val="accent1"/>
+          </a:fillRef>
+          <a:effectRef idx="2">
+            <a:schemeClr val="accent1"/>
+          </a:effectRef>
+          <a:fontRef idx="minor">
+            <a:schemeClr val="lt1"/>
+          </a:fontRef>
+        </p:style>
+        <p:txBody>
+          <a:bodyPr rtlCol="0" anchor="ctr"/>
+          <a:lstStyle/>
+          <a:p>
+            <a:pPr algn="ctr"/>
+          </a:p>
+        </p:txBody>
+      </p:sp>
+      <p:sp>
+        <p:nvSpPr>
+          <p:cNvPr id="9" name="TextBox 8"/>
+          <p:cNvSpPr txBox="1"/>
+          <p:nvPr/>
+        </p:nvSpPr>
+        <p:spPr>
+          <a:xfrm>
+            <a:off x="822960" y="2601468"/>
+            <a:ext cx="10545775" cy="365760"/>
+          </a:xfrm>
+          <a:prstGeom prst="rect">
+            <a:avLst/>
+          </a:prstGeom>
+          <a:noFill/>
+        </p:spPr>
+        <p:txBody>
+          <a:bodyPr wrap="square">
+            <a:spAutoFit/>
+          </a:bodyPr>
+          <a:lstStyle/>
+          <a:p>
+            <a:pPr>
+              <a:defRPr sz="1600">
+                <a:solidFill>
+                  <a:srgbClr val="6B7280"/>
+                </a:solidFill>
+                <a:latin typeface="Segoe UI"/>
+              </a:defRPr>
+            </a:pPr>
+            <a:r>
               <a:t>I hid one sentence so that a 500-character cut would land in the middle of it.</a:t>
             </a:r>
           </a:p>
@@ -6738,15 +8030,15 @@
       </p:sp>
       <p:graphicFrame>
         <p:nvGraphicFramePr>
-          <p:cNvPr id="6" name="Table 5"/>
+          <p:cNvPr id="10" name="Table 9"/>
           <p:cNvGraphicFramePr>
             <a:graphicFrameLocks noGrp="1"/>
           </p:cNvGraphicFramePr>
           <p:nvPr/>
         </p:nvGraphicFramePr>
         <p:xfrm>
-          <a:off x="777240" y="2313432"/>
-          <a:ext cx="10637215" cy="1682496"/>
+          <a:off x="822960" y="3131820"/>
+          <a:ext cx="10545775" cy="1901952"/>
         </p:xfrm>
         <a:graphic>
           <a:graphicData uri="http://schemas.openxmlformats.org/drawingml/2006/table">
@@ -6755,17 +8047,17 @@
                 <a:tableStyleId>{5C22544A-7EE6-4342-B048-85BDC9FD1C3A}</a:tableStyleId>
               </a:tblPr>
               <a:tblGrid>
-                <a:gridCol w="6382329"/>
-                <a:gridCol w="4254886"/>
+                <a:gridCol w="6327465"/>
+                <a:gridCol w="4218310"/>
               </a:tblGrid>
-              <a:tr h="420624">
+              <a:tr h="475488">
                 <a:tc>
                   <a:txBody>
                     <a:bodyPr/>
                     <a:lstStyle/>
                     <a:p>
                       <a:pPr>
-                        <a:defRPr sz="1500" b="1">
+                        <a:defRPr sz="1400" b="1">
                           <a:solidFill>
                             <a:srgbClr val="FFFFFF"/>
                           </a:solidFill>
@@ -6777,9 +8069,95 @@
                       </a:r>
                     </a:p>
                   </a:txBody>
-                  <a:tcPr>
+                  <a:tcPr anchor="ctr" marL="146304" marR="146304">
+                    <a:lnL w="0" cap="flat" cmpd="sng" algn="ctr">
+                      <a:noFill/>
+                    </a:lnL>
+                    <a:lnR w="0" cap="flat" cmpd="sng" algn="ctr">
+                      <a:noFill/>
+                    </a:lnR>
+                    <a:lnT w="0" cap="flat" cmpd="sng" algn="ctr">
+                      <a:noFill/>
+                    </a:lnT>
+                    <a:lnB w="0" cap="flat" cmpd="sng" algn="ctr">
+                      <a:noFill/>
+                    </a:lnB>
                     <a:solidFill>
-                      <a:srgbClr val="1F4E79"/>
+                      <a:srgbClr val="0F2A44"/>
+                    </a:solidFill>
+                  </a:tcPr>
+                </a:tc>
+                <a:tc>
+                  <a:txBody>
+                    <a:bodyPr/>
+                    <a:lstStyle/>
+                    <a:p>
+                      <a:pPr>
+                        <a:defRPr sz="1400" b="1">
+                          <a:solidFill>
+                            <a:srgbClr val="FFFFFF"/>
+                          </a:solidFill>
+                          <a:latin typeface="Segoe UI"/>
+                        </a:defRPr>
+                      </a:pPr>
+                      <a:r>
+                        <a:t>can the fact be found?</a:t>
+                      </a:r>
+                    </a:p>
+                  </a:txBody>
+                  <a:tcPr anchor="ctr" marL="146304" marR="146304">
+                    <a:lnL w="0" cap="flat" cmpd="sng" algn="ctr">
+                      <a:noFill/>
+                    </a:lnL>
+                    <a:lnR w="0" cap="flat" cmpd="sng" algn="ctr">
+                      <a:noFill/>
+                    </a:lnR>
+                    <a:lnT w="0" cap="flat" cmpd="sng" algn="ctr">
+                      <a:noFill/>
+                    </a:lnT>
+                    <a:lnB w="0" cap="flat" cmpd="sng" algn="ctr">
+                      <a:noFill/>
+                    </a:lnB>
+                    <a:solidFill>
+                      <a:srgbClr val="0F2A44"/>
+                    </a:solidFill>
+                  </a:tcPr>
+                </a:tc>
+              </a:tr>
+              <a:tr h="475488">
+                <a:tc>
+                  <a:txBody>
+                    <a:bodyPr/>
+                    <a:lstStyle/>
+                    <a:p>
+                      <a:pPr>
+                        <a:defRPr sz="1500" b="1">
+                          <a:solidFill>
+                            <a:srgbClr val="B56E0C"/>
+                          </a:solidFill>
+                          <a:latin typeface="Segoe UI"/>
+                        </a:defRPr>
+                      </a:pPr>
+                      <a:r>
+                        <a:t>500 characters, no overlap</a:t>
+                      </a:r>
+                    </a:p>
+                  </a:txBody>
+                  <a:tcPr anchor="ctr" marL="146304" marR="146304">
+                    <a:lnL w="0" cap="flat" cmpd="sng" algn="ctr">
+                      <a:noFill/>
+                    </a:lnL>
+                    <a:lnR w="0" cap="flat" cmpd="sng" algn="ctr">
+                      <a:noFill/>
+                    </a:lnR>
+                    <a:lnT w="0" cap="flat" cmpd="sng" algn="ctr">
+                      <a:noFill/>
+                    </a:lnT>
+                    <a:lnB w="0" cap="flat" cmpd="sng" algn="ctr">
+                      <a:noFill/>
+                    </a:lnB>
+                    <a:solidFill>
+                      <a:srgbClr val="FDF4E6"/>
                     </a:solidFill>
                   </a:tcPr>
                 </a:tc>
@@ -6791,45 +8169,69 @@
                       <a:pPr>
                         <a:defRPr sz="1500" b="1">
                           <a:solidFill>
-                            <a:srgbClr val="FFFFFF"/>
+                            <a:srgbClr val="B56E0C"/>
                           </a:solidFill>
-                          <a:latin typeface="Segoe UI"/>
+                          <a:latin typeface="Consolas"/>
                         </a:defRPr>
                       </a:pPr>
                       <a:r>
-                        <a:t>can the fact be found?</a:t>
+                        <a:t>NO — it is in no chunk</a:t>
                       </a:r>
                     </a:p>
                   </a:txBody>
-                  <a:tcPr>
+                  <a:tcPr anchor="ctr" marL="146304" marR="146304">
+                    <a:lnL w="0" cap="flat" cmpd="sng" algn="ctr">
+                      <a:noFill/>
+                    </a:lnL>
+                    <a:lnR w="0" cap="flat" cmpd="sng" algn="ctr">
+                      <a:noFill/>
+                    </a:lnR>
+                    <a:lnT w="0" cap="flat" cmpd="sng" algn="ctr">
+                      <a:noFill/>
+                    </a:lnT>
+                    <a:lnB w="0" cap="flat" cmpd="sng" algn="ctr">
+                      <a:noFill/>
+                    </a:lnB>
                     <a:solidFill>
-                      <a:srgbClr val="1F4E79"/>
+                      <a:srgbClr val="FDF4E6"/>
                     </a:solidFill>
                   </a:tcPr>
                 </a:tc>
               </a:tr>
-              <a:tr h="420624">
+              <a:tr h="475488">
                 <a:tc>
                   <a:txBody>
                     <a:bodyPr/>
                     <a:lstStyle/>
                     <a:p>
                       <a:pPr>
-                        <a:defRPr sz="1500" b="1">
+                        <a:defRPr sz="1500" b="0">
                           <a:solidFill>
-                            <a:srgbClr val="B32D2D"/>
+                            <a:srgbClr val="1B1B1B"/>
                           </a:solidFill>
                           <a:latin typeface="Segoe UI"/>
                         </a:defRPr>
                       </a:pPr>
                       <a:r>
-                        <a:t>500 characters, no overlap</a:t>
+                        <a:t>500 characters, cut at sentence ends</a:t>
                       </a:r>
                     </a:p>
                   </a:txBody>
-                  <a:tcPr>
+                  <a:tcPr anchor="ctr" marL="146304" marR="146304">
+                    <a:lnL w="0" cap="flat" cmpd="sng" algn="ctr">
+                      <a:noFill/>
+                    </a:lnL>
+                    <a:lnR w="0" cap="flat" cmpd="sng" algn="ctr">
+                      <a:noFill/>
+                    </a:lnR>
+                    <a:lnT w="0" cap="flat" cmpd="sng" algn="ctr">
+                      <a:noFill/>
+                    </a:lnT>
+                    <a:lnB w="0" cap="flat" cmpd="sng" algn="ctr">
+                      <a:noFill/>
+                    </a:lnB>
                     <a:solidFill>
-                      <a:srgbClr val="F2F5F8"/>
+                      <a:srgbClr val="F7F9FB"/>
                     </a:solidFill>
                   </a:tcPr>
                 </a:tc>
@@ -6839,26 +8241,38 @@
                     <a:lstStyle/>
                     <a:p>
                       <a:pPr>
-                        <a:defRPr sz="1500" b="1">
+                        <a:defRPr sz="1500" b="0">
                           <a:solidFill>
-                            <a:srgbClr val="B32D2D"/>
+                            <a:srgbClr val="1B1B1B"/>
                           </a:solidFill>
                           <a:latin typeface="Consolas"/>
                         </a:defRPr>
                       </a:pPr>
                       <a:r>
-                        <a:t>NO — it is in no chunk</a:t>
+                        <a:t>yes</a:t>
                       </a:r>
                     </a:p>
                   </a:txBody>
-                  <a:tcPr>
+                  <a:tcPr anchor="ctr" marL="146304" marR="146304">
+                    <a:lnL w="0" cap="flat" cmpd="sng" algn="ctr">
+                      <a:noFill/>
+                    </a:lnL>
+                    <a:lnR w="0" cap="flat" cmpd="sng" algn="ctr">
+                      <a:noFill/>
+                    </a:lnR>
+                    <a:lnT w="0" cap="flat" cmpd="sng" algn="ctr">
+                      <a:noFill/>
+                    </a:lnT>
+                    <a:lnB w="0" cap="flat" cmpd="sng" algn="ctr">
+                      <a:noFill/>
+                    </a:lnB>
                     <a:solidFill>
-                      <a:srgbClr val="F2F5F8"/>
+                      <a:srgbClr val="F7F9FB"/>
                     </a:solidFill>
                   </a:tcPr>
                 </a:tc>
               </a:tr>
-              <a:tr h="420624">
+              <a:tr h="475488">
                 <a:tc>
                   <a:txBody>
                     <a:bodyPr/>
@@ -6867,17 +8281,29 @@
                       <a:pPr>
                         <a:defRPr sz="1500" b="0">
                           <a:solidFill>
-                            <a:srgbClr val="1A1A1A"/>
+                            <a:srgbClr val="1B1B1B"/>
                           </a:solidFill>
                           <a:latin typeface="Segoe UI"/>
                         </a:defRPr>
                       </a:pPr>
                       <a:r>
-                        <a:t>500 characters, cut at sentence ends</a:t>
+                        <a:t>500 characters, with 100 overlapping</a:t>
                       </a:r>
                     </a:p>
                   </a:txBody>
-                  <a:tcPr>
+                  <a:tcPr anchor="ctr" marL="146304" marR="146304">
+                    <a:lnL w="0" cap="flat" cmpd="sng" algn="ctr">
+                      <a:noFill/>
+                    </a:lnL>
+                    <a:lnR w="0" cap="flat" cmpd="sng" algn="ctr">
+                      <a:noFill/>
+                    </a:lnR>
+                    <a:lnT w="0" cap="flat" cmpd="sng" algn="ctr">
+                      <a:noFill/>
+                    </a:lnT>
+                    <a:lnB w="0" cap="flat" cmpd="sng" algn="ctr">
+                      <a:noFill/>
+                    </a:lnB>
                     <a:solidFill>
                       <a:srgbClr val="FFFFFF"/>
                     </a:solidFill>
@@ -6891,7 +8317,7 @@
                       <a:pPr>
                         <a:defRPr sz="1500" b="0">
                           <a:solidFill>
-                            <a:srgbClr val="1A1A1A"/>
+                            <a:srgbClr val="1B1B1B"/>
                           </a:solidFill>
                           <a:latin typeface="Consolas"/>
                         </a:defRPr>
@@ -6901,57 +8327,19 @@
                       </a:r>
                     </a:p>
                   </a:txBody>
-                  <a:tcPr>
-                    <a:solidFill>
-                      <a:srgbClr val="FFFFFF"/>
-                    </a:solidFill>
-                  </a:tcPr>
-                </a:tc>
-              </a:tr>
-              <a:tr h="420624">
-                <a:tc>
-                  <a:txBody>
-                    <a:bodyPr/>
-                    <a:lstStyle/>
-                    <a:p>
-                      <a:pPr>
-                        <a:defRPr sz="1500" b="0">
-                          <a:solidFill>
-                            <a:srgbClr val="1A1A1A"/>
-                          </a:solidFill>
-                          <a:latin typeface="Segoe UI"/>
-                        </a:defRPr>
-                      </a:pPr>
-                      <a:r>
-                        <a:t>500 characters, with 100 overlapping</a:t>
-                      </a:r>
-                    </a:p>
-                  </a:txBody>
-                  <a:tcPr>
-                    <a:solidFill>
-                      <a:srgbClr val="FFFFFF"/>
-                    </a:solidFill>
-                  </a:tcPr>
-                </a:tc>
-                <a:tc>
-                  <a:txBody>
-                    <a:bodyPr/>
-                    <a:lstStyle/>
-                    <a:p>
-                      <a:pPr>
-                        <a:defRPr sz="1500" b="0">
-                          <a:solidFill>
-                            <a:srgbClr val="1A1A1A"/>
-                          </a:solidFill>
-                          <a:latin typeface="Consolas"/>
-                        </a:defRPr>
-                      </a:pPr>
-                      <a:r>
-                        <a:t>yes</a:t>
-                      </a:r>
-                    </a:p>
-                  </a:txBody>
-                  <a:tcPr>
+                  <a:tcPr anchor="ctr" marL="146304" marR="146304">
+                    <a:lnL w="0" cap="flat" cmpd="sng" algn="ctr">
+                      <a:noFill/>
+                    </a:lnL>
+                    <a:lnR w="0" cap="flat" cmpd="sng" algn="ctr">
+                      <a:noFill/>
+                    </a:lnR>
+                    <a:lnT w="0" cap="flat" cmpd="sng" algn="ctr">
+                      <a:noFill/>
+                    </a:lnT>
+                    <a:lnB w="0" cap="flat" cmpd="sng" algn="ctr">
+                      <a:noFill/>
+                    </a:lnB>
                     <a:solidFill>
                       <a:srgbClr val="FFFFFF"/>
                     </a:solidFill>
@@ -6964,14 +8352,14 @@
       </p:graphicFrame>
       <p:sp>
         <p:nvSpPr>
-          <p:cNvPr id="7" name="TextBox 6"/>
+          <p:cNvPr id="11" name="TextBox 10"/>
           <p:cNvSpPr txBox="1"/>
           <p:nvPr/>
         </p:nvSpPr>
         <p:spPr>
           <a:xfrm>
-            <a:off x="777240" y="6035040"/>
-            <a:ext cx="10637215" cy="457200"/>
+            <a:off x="822960" y="5989320"/>
+            <a:ext cx="8168335" cy="548640"/>
           </a:xfrm>
           <a:prstGeom prst="rect">
             <a:avLst/>
@@ -6987,7 +8375,7 @@
             <a:pPr>
               <a:defRPr sz="1200" i="1">
                 <a:solidFill>
-                  <a:srgbClr val="666666"/>
+                  <a:srgbClr val="6B7280"/>
                 </a:solidFill>
                 <a:latin typeface="Segoe UI"/>
               </a:defRPr>
@@ -7018,92 +8406,20 @@
       <p:grpSpPr/>
       <p:sp>
         <p:nvSpPr>
-          <p:cNvPr id="2" name="TextBox 1"/>
-          <p:cNvSpPr txBox="1"/>
-          <p:nvPr/>
-        </p:nvSpPr>
-        <p:spPr>
-          <a:xfrm>
-            <a:off x="777240" y="457200"/>
-            <a:ext cx="10637215" cy="274320"/>
-          </a:xfrm>
-          <a:prstGeom prst="rect">
-            <a:avLst/>
-          </a:prstGeom>
-          <a:noFill/>
-        </p:spPr>
-        <p:txBody>
-          <a:bodyPr wrap="square">
-            <a:spAutoFit/>
-          </a:bodyPr>
-          <a:lstStyle/>
-          <a:p>
-            <a:pPr>
-              <a:defRPr sz="1200" b="1">
-                <a:solidFill>
-                  <a:srgbClr val="1F4E79"/>
-                </a:solidFill>
-                <a:latin typeface="Segoe UI"/>
-              </a:defRPr>
-            </a:pPr>
-            <a:r>
-              <a:t>WED–THU</a:t>
-            </a:r>
-          </a:p>
-        </p:txBody>
-      </p:sp>
-      <p:sp>
-        <p:nvSpPr>
-          <p:cNvPr id="3" name="TextBox 2"/>
-          <p:cNvSpPr txBox="1"/>
-          <p:nvPr/>
-        </p:nvSpPr>
-        <p:spPr>
-          <a:xfrm>
-            <a:off x="777240" y="786384"/>
-            <a:ext cx="10637215" cy="731520"/>
-          </a:xfrm>
-          <a:prstGeom prst="rect">
-            <a:avLst/>
-          </a:prstGeom>
-          <a:noFill/>
-        </p:spPr>
-        <p:txBody>
-          <a:bodyPr wrap="square">
-            <a:spAutoFit/>
-          </a:bodyPr>
-          <a:lstStyle/>
-          <a:p>
-            <a:pPr>
-              <a:defRPr sz="3000" b="1">
-                <a:solidFill>
-                  <a:srgbClr val="1A1A1A"/>
-                </a:solidFill>
-                <a:latin typeface="Segoe UI"/>
-              </a:defRPr>
-            </a:pPr>
-            <a:r>
-              <a:t>Picking a chunk size</a:t>
-            </a:r>
-          </a:p>
-        </p:txBody>
-      </p:sp>
-      <p:sp>
-        <p:nvSpPr>
-          <p:cNvPr id="4" name="Rectangle 3"/>
+          <p:cNvPr id="2" name="Rectangle 1"/>
           <p:cNvSpPr/>
           <p:nvPr/>
         </p:nvSpPr>
         <p:spPr>
           <a:xfrm>
-            <a:off x="777240" y="1499616"/>
-            <a:ext cx="10637215" cy="19050"/>
+            <a:off x="0" y="0"/>
+            <a:ext cx="155448" cy="6858000"/>
           </a:xfrm>
           <a:prstGeom prst="rect">
             <a:avLst/>
           </a:prstGeom>
           <a:solidFill>
-            <a:srgbClr val="D8D8D8"/>
+            <a:srgbClr val="0F2A44"/>
           </a:solidFill>
           <a:ln>
             <a:noFill/>
@@ -7134,14 +8450,14 @@
       </p:sp>
       <p:sp>
         <p:nvSpPr>
-          <p:cNvPr id="5" name="TextBox 4"/>
+          <p:cNvPr id="3" name="TextBox 2"/>
           <p:cNvSpPr txBox="1"/>
           <p:nvPr/>
         </p:nvSpPr>
         <p:spPr>
           <a:xfrm>
-            <a:off x="777240" y="1810512"/>
-            <a:ext cx="10637215" cy="365760"/>
+            <a:off x="9082735" y="6263640"/>
+            <a:ext cx="2286000" cy="320040"/>
           </a:xfrm>
           <a:prstGeom prst="rect">
             <a:avLst/>
@@ -7154,15 +8470,255 @@
           </a:bodyPr>
           <a:lstStyle/>
           <a:p>
-            <a:pPr>
-              <a:defRPr sz="1600">
+            <a:pPr algn="r">
+              <a:defRPr sz="1000">
                 <a:solidFill>
-                  <a:srgbClr val="666666"/>
+                  <a:srgbClr val="6B7280"/>
                 </a:solidFill>
                 <a:latin typeface="Segoe UI"/>
               </a:defRPr>
             </a:pPr>
             <a:r>
+              <a:t>Ask My Docs  ·  Week 1   ·   6</a:t>
+            </a:r>
+          </a:p>
+        </p:txBody>
+      </p:sp>
+      <p:sp>
+        <p:nvSpPr>
+          <p:cNvPr id="4" name="Rectangle 3"/>
+          <p:cNvSpPr/>
+          <p:nvPr/>
+        </p:nvSpPr>
+        <p:spPr>
+          <a:xfrm>
+            <a:off x="822960" y="566928"/>
+            <a:ext cx="1088136" cy="256032"/>
+          </a:xfrm>
+          <a:prstGeom prst="rect">
+            <a:avLst/>
+          </a:prstGeom>
+          <a:solidFill>
+            <a:srgbClr val="1C4E7A"/>
+          </a:solidFill>
+          <a:ln>
+            <a:noFill/>
+          </a:ln>
+          <a:effectLst/>
+        </p:spPr>
+        <p:style>
+          <a:lnRef idx="1">
+            <a:schemeClr val="accent1"/>
+          </a:lnRef>
+          <a:fillRef idx="3">
+            <a:schemeClr val="accent1"/>
+          </a:fillRef>
+          <a:effectRef idx="2">
+            <a:schemeClr val="accent1"/>
+          </a:effectRef>
+          <a:fontRef idx="minor">
+            <a:schemeClr val="lt1"/>
+          </a:fontRef>
+        </p:style>
+        <p:txBody>
+          <a:bodyPr rtlCol="0" anchor="ctr"/>
+          <a:lstStyle/>
+          <a:p>
+            <a:pPr algn="ctr"/>
+          </a:p>
+        </p:txBody>
+      </p:sp>
+      <p:sp>
+        <p:nvSpPr>
+          <p:cNvPr id="5" name="TextBox 4"/>
+          <p:cNvSpPr txBox="1"/>
+          <p:nvPr/>
+        </p:nvSpPr>
+        <p:spPr>
+          <a:xfrm>
+            <a:off x="822960" y="548640"/>
+            <a:ext cx="1088136" cy="292608"/>
+          </a:xfrm>
+          <a:prstGeom prst="rect">
+            <a:avLst/>
+          </a:prstGeom>
+          <a:noFill/>
+        </p:spPr>
+        <p:txBody>
+          <a:bodyPr wrap="square" lIns="0" rIns="0">
+            <a:spAutoFit/>
+          </a:bodyPr>
+          <a:lstStyle/>
+          <a:p>
+            <a:pPr algn="ctr">
+              <a:defRPr sz="1100" b="1">
+                <a:solidFill>
+                  <a:srgbClr val="FFFFFF"/>
+                </a:solidFill>
+                <a:latin typeface="Segoe UI"/>
+              </a:defRPr>
+            </a:pPr>
+            <a:r>
+              <a:t>WED–THU</a:t>
+            </a:r>
+          </a:p>
+        </p:txBody>
+      </p:sp>
+      <p:sp>
+        <p:nvSpPr>
+          <p:cNvPr id="6" name="TextBox 5"/>
+          <p:cNvSpPr txBox="1"/>
+          <p:nvPr/>
+        </p:nvSpPr>
+        <p:spPr>
+          <a:xfrm>
+            <a:off x="822960" y="978408"/>
+            <a:ext cx="10545775" cy="658368"/>
+          </a:xfrm>
+          <a:prstGeom prst="rect">
+            <a:avLst/>
+          </a:prstGeom>
+          <a:noFill/>
+        </p:spPr>
+        <p:txBody>
+          <a:bodyPr wrap="square">
+            <a:spAutoFit/>
+          </a:bodyPr>
+          <a:lstStyle/>
+          <a:p>
+            <a:pPr>
+              <a:defRPr sz="3100" b="1">
+                <a:solidFill>
+                  <a:srgbClr val="0F2A44"/>
+                </a:solidFill>
+                <a:latin typeface="Segoe UI"/>
+              </a:defRPr>
+            </a:pPr>
+            <a:r>
+              <a:t>Picking a chunk size</a:t>
+            </a:r>
+          </a:p>
+        </p:txBody>
+      </p:sp>
+      <p:sp>
+        <p:nvSpPr>
+          <p:cNvPr id="7" name="Rectangle 6"/>
+          <p:cNvSpPr/>
+          <p:nvPr/>
+        </p:nvSpPr>
+        <p:spPr>
+          <a:xfrm>
+            <a:off x="822960" y="1673352"/>
+            <a:ext cx="1371600" cy="38100"/>
+          </a:xfrm>
+          <a:prstGeom prst="rect">
+            <a:avLst/>
+          </a:prstGeom>
+          <a:solidFill>
+            <a:srgbClr val="1C4E7A"/>
+          </a:solidFill>
+          <a:ln>
+            <a:noFill/>
+          </a:ln>
+          <a:effectLst/>
+        </p:spPr>
+        <p:style>
+          <a:lnRef idx="1">
+            <a:schemeClr val="accent1"/>
+          </a:lnRef>
+          <a:fillRef idx="3">
+            <a:schemeClr val="accent1"/>
+          </a:fillRef>
+          <a:effectRef idx="2">
+            <a:schemeClr val="accent1"/>
+          </a:effectRef>
+          <a:fontRef idx="minor">
+            <a:schemeClr val="lt1"/>
+          </a:fontRef>
+        </p:style>
+        <p:txBody>
+          <a:bodyPr rtlCol="0" anchor="ctr"/>
+          <a:lstStyle/>
+          <a:p>
+            <a:pPr algn="ctr"/>
+          </a:p>
+        </p:txBody>
+      </p:sp>
+      <p:sp>
+        <p:nvSpPr>
+          <p:cNvPr id="8" name="Rectangle 7"/>
+          <p:cNvSpPr/>
+          <p:nvPr/>
+        </p:nvSpPr>
+        <p:spPr>
+          <a:xfrm>
+            <a:off x="2194560" y="1686052"/>
+            <a:ext cx="9174175" cy="12700"/>
+          </a:xfrm>
+          <a:prstGeom prst="rect">
+            <a:avLst/>
+          </a:prstGeom>
+          <a:solidFill>
+            <a:srgbClr val="DDE3E8"/>
+          </a:solidFill>
+          <a:ln>
+            <a:noFill/>
+          </a:ln>
+          <a:effectLst/>
+        </p:spPr>
+        <p:style>
+          <a:lnRef idx="1">
+            <a:schemeClr val="accent1"/>
+          </a:lnRef>
+          <a:fillRef idx="3">
+            <a:schemeClr val="accent1"/>
+          </a:fillRef>
+          <a:effectRef idx="2">
+            <a:schemeClr val="accent1"/>
+          </a:effectRef>
+          <a:fontRef idx="minor">
+            <a:schemeClr val="lt1"/>
+          </a:fontRef>
+        </p:style>
+        <p:txBody>
+          <a:bodyPr rtlCol="0" anchor="ctr"/>
+          <a:lstStyle/>
+          <a:p>
+            <a:pPr algn="ctr"/>
+          </a:p>
+        </p:txBody>
+      </p:sp>
+      <p:sp>
+        <p:nvSpPr>
+          <p:cNvPr id="9" name="TextBox 8"/>
+          <p:cNvSpPr txBox="1"/>
+          <p:nvPr/>
+        </p:nvSpPr>
+        <p:spPr>
+          <a:xfrm>
+            <a:off x="822960" y="2601468"/>
+            <a:ext cx="10545775" cy="365760"/>
+          </a:xfrm>
+          <a:prstGeom prst="rect">
+            <a:avLst/>
+          </a:prstGeom>
+          <a:noFill/>
+        </p:spPr>
+        <p:txBody>
+          <a:bodyPr wrap="square">
+            <a:spAutoFit/>
+          </a:bodyPr>
+          <a:lstStyle/>
+          <a:p>
+            <a:pPr>
+              <a:defRPr sz="1600">
+                <a:solidFill>
+                  <a:srgbClr val="6B7280"/>
+                </a:solidFill>
+                <a:latin typeface="Segoe UI"/>
+              </a:defRPr>
+            </a:pPr>
+            <a:r>
               <a:t>Same document, cut three ways. Small chunks are precise; big chunks drag in clutter.</a:t>
             </a:r>
           </a:p>
@@ -7170,15 +8726,15 @@
       </p:sp>
       <p:graphicFrame>
         <p:nvGraphicFramePr>
-          <p:cNvPr id="6" name="Table 5"/>
+          <p:cNvPr id="10" name="Table 9"/>
           <p:cNvGraphicFramePr>
             <a:graphicFrameLocks noGrp="1"/>
           </p:cNvGraphicFramePr>
           <p:nvPr/>
         </p:nvGraphicFramePr>
         <p:xfrm>
-          <a:off x="777240" y="2313432"/>
-          <a:ext cx="10637213" cy="1682496"/>
+          <a:off x="822960" y="3131820"/>
+          <a:ext cx="10545773" cy="1901952"/>
         </p:xfrm>
         <a:graphic>
           <a:graphicData uri="http://schemas.openxmlformats.org/drawingml/2006/table">
@@ -7187,18 +8743,18 @@
                 <a:tableStyleId>{5C22544A-7EE6-4342-B048-85BDC9FD1C3A}</a:tableStyleId>
               </a:tblPr>
               <a:tblGrid>
-                <a:gridCol w="2774925"/>
-                <a:gridCol w="1849950"/>
-                <a:gridCol w="6012338"/>
+                <a:gridCol w="2751071"/>
+                <a:gridCol w="1834047"/>
+                <a:gridCol w="5960655"/>
               </a:tblGrid>
-              <a:tr h="420624">
+              <a:tr h="475488">
                 <a:tc>
                   <a:txBody>
                     <a:bodyPr/>
                     <a:lstStyle/>
                     <a:p>
                       <a:pPr>
-                        <a:defRPr sz="1500" b="1">
+                        <a:defRPr sz="1400" b="1">
                           <a:solidFill>
                             <a:srgbClr val="FFFFFF"/>
                           </a:solidFill>
@@ -7210,9 +8766,21 @@
                       </a:r>
                     </a:p>
                   </a:txBody>
-                  <a:tcPr>
+                  <a:tcPr anchor="ctr" marL="146304" marR="146304">
+                    <a:lnL w="0" cap="flat" cmpd="sng" algn="ctr">
+                      <a:noFill/>
+                    </a:lnL>
+                    <a:lnR w="0" cap="flat" cmpd="sng" algn="ctr">
+                      <a:noFill/>
+                    </a:lnR>
+                    <a:lnT w="0" cap="flat" cmpd="sng" algn="ctr">
+                      <a:noFill/>
+                    </a:lnT>
+                    <a:lnB w="0" cap="flat" cmpd="sng" algn="ctr">
+                      <a:noFill/>
+                    </a:lnB>
                     <a:solidFill>
-                      <a:srgbClr val="1F4E79"/>
+                      <a:srgbClr val="0F2A44"/>
                     </a:solidFill>
                   </a:tcPr>
                 </a:tc>
@@ -7222,7 +8790,7 @@
                     <a:lstStyle/>
                     <a:p>
                       <a:pPr>
-                        <a:defRPr sz="1500" b="1">
+                        <a:defRPr sz="1400" b="1">
                           <a:solidFill>
                             <a:srgbClr val="FFFFFF"/>
                           </a:solidFill>
@@ -7234,9 +8802,21 @@
                       </a:r>
                     </a:p>
                   </a:txBody>
-                  <a:tcPr>
+                  <a:tcPr anchor="ctr" marL="146304" marR="146304">
+                    <a:lnL w="0" cap="flat" cmpd="sng" algn="ctr">
+                      <a:noFill/>
+                    </a:lnL>
+                    <a:lnR w="0" cap="flat" cmpd="sng" algn="ctr">
+                      <a:noFill/>
+                    </a:lnR>
+                    <a:lnT w="0" cap="flat" cmpd="sng" algn="ctr">
+                      <a:noFill/>
+                    </a:lnT>
+                    <a:lnB w="0" cap="flat" cmpd="sng" algn="ctr">
+                      <a:noFill/>
+                    </a:lnB>
                     <a:solidFill>
-                      <a:srgbClr val="1F4E79"/>
+                      <a:srgbClr val="0F2A44"/>
                     </a:solidFill>
                   </a:tcPr>
                 </a:tc>
@@ -7246,7 +8826,7 @@
                     <a:lstStyle/>
                     <a:p>
                       <a:pPr>
-                        <a:defRPr sz="1500" b="1">
+                        <a:defRPr sz="1400" b="1">
                           <a:solidFill>
                             <a:srgbClr val="FFFFFF"/>
                           </a:solidFill>
@@ -7258,14 +8838,26 @@
                       </a:r>
                     </a:p>
                   </a:txBody>
-                  <a:tcPr>
+                  <a:tcPr anchor="ctr" marL="146304" marR="146304">
+                    <a:lnL w="0" cap="flat" cmpd="sng" algn="ctr">
+                      <a:noFill/>
+                    </a:lnL>
+                    <a:lnR w="0" cap="flat" cmpd="sng" algn="ctr">
+                      <a:noFill/>
+                    </a:lnR>
+                    <a:lnT w="0" cap="flat" cmpd="sng" algn="ctr">
+                      <a:noFill/>
+                    </a:lnT>
+                    <a:lnB w="0" cap="flat" cmpd="sng" algn="ctr">
+                      <a:noFill/>
+                    </a:lnB>
                     <a:solidFill>
-                      <a:srgbClr val="1F4E79"/>
+                      <a:srgbClr val="0F2A44"/>
                     </a:solidFill>
                   </a:tcPr>
                 </a:tc>
               </a:tr>
-              <a:tr h="420624">
+              <a:tr h="475488">
                 <a:tc>
                   <a:txBody>
                     <a:bodyPr/>
@@ -7274,7 +8866,7 @@
                       <a:pPr>
                         <a:defRPr sz="1500" b="0">
                           <a:solidFill>
-                            <a:srgbClr val="1A1A1A"/>
+                            <a:srgbClr val="1B1B1B"/>
                           </a:solidFill>
                           <a:latin typeface="Segoe UI"/>
                         </a:defRPr>
@@ -7284,7 +8876,19 @@
                       </a:r>
                     </a:p>
                   </a:txBody>
-                  <a:tcPr>
+                  <a:tcPr anchor="ctr" marL="146304" marR="146304">
+                    <a:lnL w="0" cap="flat" cmpd="sng" algn="ctr">
+                      <a:noFill/>
+                    </a:lnL>
+                    <a:lnR w="0" cap="flat" cmpd="sng" algn="ctr">
+                      <a:noFill/>
+                    </a:lnR>
+                    <a:lnT w="0" cap="flat" cmpd="sng" algn="ctr">
+                      <a:noFill/>
+                    </a:lnT>
+                    <a:lnB w="0" cap="flat" cmpd="sng" algn="ctr">
+                      <a:noFill/>
+                    </a:lnB>
                     <a:solidFill>
                       <a:srgbClr val="FFFFFF"/>
                     </a:solidFill>
@@ -7298,7 +8902,7 @@
                       <a:pPr>
                         <a:defRPr sz="1500" b="0">
                           <a:solidFill>
-                            <a:srgbClr val="1A1A1A"/>
+                            <a:srgbClr val="1B1B1B"/>
                           </a:solidFill>
                           <a:latin typeface="Consolas"/>
                         </a:defRPr>
@@ -7308,7 +8912,19 @@
                       </a:r>
                     </a:p>
                   </a:txBody>
-                  <a:tcPr>
+                  <a:tcPr anchor="ctr" marL="146304" marR="146304">
+                    <a:lnL w="0" cap="flat" cmpd="sng" algn="ctr">
+                      <a:noFill/>
+                    </a:lnL>
+                    <a:lnR w="0" cap="flat" cmpd="sng" algn="ctr">
+                      <a:noFill/>
+                    </a:lnR>
+                    <a:lnT w="0" cap="flat" cmpd="sng" algn="ctr">
+                      <a:noFill/>
+                    </a:lnT>
+                    <a:lnB w="0" cap="flat" cmpd="sng" algn="ctr">
+                      <a:noFill/>
+                    </a:lnB>
                     <a:solidFill>
                       <a:srgbClr val="FFFFFF"/>
                     </a:solidFill>
@@ -7322,7 +8938,7 @@
                       <a:pPr>
                         <a:defRPr sz="1500" b="0">
                           <a:solidFill>
-                            <a:srgbClr val="1A1A1A"/>
+                            <a:srgbClr val="1B1B1B"/>
                           </a:solidFill>
                           <a:latin typeface="Consolas"/>
                         </a:defRPr>
@@ -7332,14 +8948,26 @@
                       </a:r>
                     </a:p>
                   </a:txBody>
-                  <a:tcPr>
+                  <a:tcPr anchor="ctr" marL="146304" marR="146304">
+                    <a:lnL w="0" cap="flat" cmpd="sng" algn="ctr">
+                      <a:noFill/>
+                    </a:lnL>
+                    <a:lnR w="0" cap="flat" cmpd="sng" algn="ctr">
+                      <a:noFill/>
+                    </a:lnR>
+                    <a:lnT w="0" cap="flat" cmpd="sng" algn="ctr">
+                      <a:noFill/>
+                    </a:lnT>
+                    <a:lnB w="0" cap="flat" cmpd="sng" algn="ctr">
+                      <a:noFill/>
+                    </a:lnB>
                     <a:solidFill>
                       <a:srgbClr val="FFFFFF"/>
                     </a:solidFill>
                   </a:tcPr>
                 </a:tc>
               </a:tr>
-              <a:tr h="420624">
+              <a:tr h="475488">
                 <a:tc>
                   <a:txBody>
                     <a:bodyPr/>
@@ -7348,7 +8976,7 @@
                       <a:pPr>
                         <a:defRPr sz="1500" b="1">
                           <a:solidFill>
-                            <a:srgbClr val="B32D2D"/>
+                            <a:srgbClr val="B56E0C"/>
                           </a:solidFill>
                           <a:latin typeface="Segoe UI"/>
                         </a:defRPr>
@@ -7358,9 +8986,21 @@
                       </a:r>
                     </a:p>
                   </a:txBody>
-                  <a:tcPr>
+                  <a:tcPr anchor="ctr" marL="146304" marR="146304">
+                    <a:lnL w="0" cap="flat" cmpd="sng" algn="ctr">
+                      <a:noFill/>
+                    </a:lnL>
+                    <a:lnR w="0" cap="flat" cmpd="sng" algn="ctr">
+                      <a:noFill/>
+                    </a:lnR>
+                    <a:lnT w="0" cap="flat" cmpd="sng" algn="ctr">
+                      <a:noFill/>
+                    </a:lnT>
+                    <a:lnB w="0" cap="flat" cmpd="sng" algn="ctr">
+                      <a:noFill/>
+                    </a:lnB>
                     <a:solidFill>
-                      <a:srgbClr val="F2F5F8"/>
+                      <a:srgbClr val="FDF4E6"/>
                     </a:solidFill>
                   </a:tcPr>
                 </a:tc>
@@ -7372,7 +9012,7 @@
                       <a:pPr>
                         <a:defRPr sz="1500" b="1">
                           <a:solidFill>
-                            <a:srgbClr val="B32D2D"/>
+                            <a:srgbClr val="B56E0C"/>
                           </a:solidFill>
                           <a:latin typeface="Consolas"/>
                         </a:defRPr>
@@ -7382,9 +9022,21 @@
                       </a:r>
                     </a:p>
                   </a:txBody>
-                  <a:tcPr>
+                  <a:tcPr anchor="ctr" marL="146304" marR="146304">
+                    <a:lnL w="0" cap="flat" cmpd="sng" algn="ctr">
+                      <a:noFill/>
+                    </a:lnL>
+                    <a:lnR w="0" cap="flat" cmpd="sng" algn="ctr">
+                      <a:noFill/>
+                    </a:lnR>
+                    <a:lnT w="0" cap="flat" cmpd="sng" algn="ctr">
+                      <a:noFill/>
+                    </a:lnT>
+                    <a:lnB w="0" cap="flat" cmpd="sng" algn="ctr">
+                      <a:noFill/>
+                    </a:lnB>
                     <a:solidFill>
-                      <a:srgbClr val="F2F5F8"/>
+                      <a:srgbClr val="FDF4E6"/>
                     </a:solidFill>
                   </a:tcPr>
                 </a:tc>
@@ -7396,7 +9048,7 @@
                       <a:pPr>
                         <a:defRPr sz="1500" b="1">
                           <a:solidFill>
-                            <a:srgbClr val="B32D2D"/>
+                            <a:srgbClr val="B56E0C"/>
                           </a:solidFill>
                           <a:latin typeface="Consolas"/>
                         </a:defRPr>
@@ -7406,14 +9058,26 @@
                       </a:r>
                     </a:p>
                   </a:txBody>
-                  <a:tcPr>
+                  <a:tcPr anchor="ctr" marL="146304" marR="146304">
+                    <a:lnL w="0" cap="flat" cmpd="sng" algn="ctr">
+                      <a:noFill/>
+                    </a:lnL>
+                    <a:lnR w="0" cap="flat" cmpd="sng" algn="ctr">
+                      <a:noFill/>
+                    </a:lnR>
+                    <a:lnT w="0" cap="flat" cmpd="sng" algn="ctr">
+                      <a:noFill/>
+                    </a:lnT>
+                    <a:lnB w="0" cap="flat" cmpd="sng" algn="ctr">
+                      <a:noFill/>
+                    </a:lnB>
                     <a:solidFill>
-                      <a:srgbClr val="F2F5F8"/>
+                      <a:srgbClr val="FDF4E6"/>
                     </a:solidFill>
                   </a:tcPr>
                 </a:tc>
               </a:tr>
-              <a:tr h="420624">
+              <a:tr h="475488">
                 <a:tc>
                   <a:txBody>
                     <a:bodyPr/>
@@ -7422,7 +9086,7 @@
                       <a:pPr>
                         <a:defRPr sz="1500" b="0">
                           <a:solidFill>
-                            <a:srgbClr val="1A1A1A"/>
+                            <a:srgbClr val="1B1B1B"/>
                           </a:solidFill>
                           <a:latin typeface="Segoe UI"/>
                         </a:defRPr>
@@ -7432,7 +9096,19 @@
                       </a:r>
                     </a:p>
                   </a:txBody>
-                  <a:tcPr>
+                  <a:tcPr anchor="ctr" marL="146304" marR="146304">
+                    <a:lnL w="0" cap="flat" cmpd="sng" algn="ctr">
+                      <a:noFill/>
+                    </a:lnL>
+                    <a:lnR w="0" cap="flat" cmpd="sng" algn="ctr">
+                      <a:noFill/>
+                    </a:lnR>
+                    <a:lnT w="0" cap="flat" cmpd="sng" algn="ctr">
+                      <a:noFill/>
+                    </a:lnT>
+                    <a:lnB w="0" cap="flat" cmpd="sng" algn="ctr">
+                      <a:noFill/>
+                    </a:lnB>
                     <a:solidFill>
                       <a:srgbClr val="FFFFFF"/>
                     </a:solidFill>
@@ -7446,7 +9122,7 @@
                       <a:pPr>
                         <a:defRPr sz="1500" b="0">
                           <a:solidFill>
-                            <a:srgbClr val="1A1A1A"/>
+                            <a:srgbClr val="1B1B1B"/>
                           </a:solidFill>
                           <a:latin typeface="Consolas"/>
                         </a:defRPr>
@@ -7456,7 +9132,19 @@
                       </a:r>
                     </a:p>
                   </a:txBody>
-                  <a:tcPr>
+                  <a:tcPr anchor="ctr" marL="146304" marR="146304">
+                    <a:lnL w="0" cap="flat" cmpd="sng" algn="ctr">
+                      <a:noFill/>
+                    </a:lnL>
+                    <a:lnR w="0" cap="flat" cmpd="sng" algn="ctr">
+                      <a:noFill/>
+                    </a:lnR>
+                    <a:lnT w="0" cap="flat" cmpd="sng" algn="ctr">
+                      <a:noFill/>
+                    </a:lnT>
+                    <a:lnB w="0" cap="flat" cmpd="sng" algn="ctr">
+                      <a:noFill/>
+                    </a:lnB>
                     <a:solidFill>
                       <a:srgbClr val="FFFFFF"/>
                     </a:solidFill>
@@ -7470,7 +9158,7 @@
                       <a:pPr>
                         <a:defRPr sz="1500" b="0">
                           <a:solidFill>
-                            <a:srgbClr val="1A1A1A"/>
+                            <a:srgbClr val="1B1B1B"/>
                           </a:solidFill>
                           <a:latin typeface="Consolas"/>
                         </a:defRPr>
@@ -7480,7 +9168,19 @@
                       </a:r>
                     </a:p>
                   </a:txBody>
-                  <a:tcPr>
+                  <a:tcPr anchor="ctr" marL="146304" marR="146304">
+                    <a:lnL w="0" cap="flat" cmpd="sng" algn="ctr">
+                      <a:noFill/>
+                    </a:lnL>
+                    <a:lnR w="0" cap="flat" cmpd="sng" algn="ctr">
+                      <a:noFill/>
+                    </a:lnR>
+                    <a:lnT w="0" cap="flat" cmpd="sng" algn="ctr">
+                      <a:noFill/>
+                    </a:lnT>
+                    <a:lnB w="0" cap="flat" cmpd="sng" algn="ctr">
+                      <a:noFill/>
+                    </a:lnB>
                     <a:solidFill>
                       <a:srgbClr val="FFFFFF"/>
                     </a:solidFill>
@@ -7493,14 +9193,14 @@
       </p:graphicFrame>
       <p:sp>
         <p:nvSpPr>
-          <p:cNvPr id="7" name="TextBox 6"/>
+          <p:cNvPr id="11" name="TextBox 10"/>
           <p:cNvSpPr txBox="1"/>
           <p:nvPr/>
         </p:nvSpPr>
         <p:spPr>
           <a:xfrm>
-            <a:off x="777240" y="6035040"/>
-            <a:ext cx="10637215" cy="457200"/>
+            <a:off x="822960" y="5989320"/>
+            <a:ext cx="8168335" cy="548640"/>
           </a:xfrm>
           <a:prstGeom prst="rect">
             <a:avLst/>
@@ -7516,7 +9216,7 @@
             <a:pPr>
               <a:defRPr sz="1200" i="1">
                 <a:solidFill>
-                  <a:srgbClr val="666666"/>
+                  <a:srgbClr val="6B7280"/>
                 </a:solidFill>
                 <a:latin typeface="Segoe UI"/>
               </a:defRPr>
@@ -7547,92 +9247,20 @@
       <p:grpSpPr/>
       <p:sp>
         <p:nvSpPr>
-          <p:cNvPr id="2" name="TextBox 1"/>
-          <p:cNvSpPr txBox="1"/>
-          <p:nvPr/>
-        </p:nvSpPr>
-        <p:spPr>
-          <a:xfrm>
-            <a:off x="777240" y="457200"/>
-            <a:ext cx="10637215" cy="274320"/>
-          </a:xfrm>
-          <a:prstGeom prst="rect">
-            <a:avLst/>
-          </a:prstGeom>
-          <a:noFill/>
-        </p:spPr>
-        <p:txBody>
-          <a:bodyPr wrap="square">
-            <a:spAutoFit/>
-          </a:bodyPr>
-          <a:lstStyle/>
-          <a:p>
-            <a:pPr>
-              <a:defRPr sz="1200" b="1">
-                <a:solidFill>
-                  <a:srgbClr val="1F4E79"/>
-                </a:solidFill>
-                <a:latin typeface="Segoe UI"/>
-              </a:defRPr>
-            </a:pPr>
-            <a:r>
-              <a:t>FRI</a:t>
-            </a:r>
-          </a:p>
-        </p:txBody>
-      </p:sp>
-      <p:sp>
-        <p:nvSpPr>
-          <p:cNvPr id="3" name="TextBox 2"/>
-          <p:cNvSpPr txBox="1"/>
-          <p:nvPr/>
-        </p:nvSpPr>
-        <p:spPr>
-          <a:xfrm>
-            <a:off x="777240" y="786384"/>
-            <a:ext cx="10637215" cy="731520"/>
-          </a:xfrm>
-          <a:prstGeom prst="rect">
-            <a:avLst/>
-          </a:prstGeom>
-          <a:noFill/>
-        </p:spPr>
-        <p:txBody>
-          <a:bodyPr wrap="square">
-            <a:spAutoFit/>
-          </a:bodyPr>
-          <a:lstStyle/>
-          <a:p>
-            <a:pPr>
-              <a:defRPr sz="3000" b="1">
-                <a:solidFill>
-                  <a:srgbClr val="1A1A1A"/>
-                </a:solidFill>
-                <a:latin typeface="Segoe UI"/>
-              </a:defRPr>
-            </a:pPr>
-            <a:r>
-              <a:t>Friday: I built search with no database at all</a:t>
-            </a:r>
-          </a:p>
-        </p:txBody>
-      </p:sp>
-      <p:sp>
-        <p:nvSpPr>
-          <p:cNvPr id="4" name="Rectangle 3"/>
+          <p:cNvPr id="2" name="Rectangle 1"/>
           <p:cNvSpPr/>
           <p:nvPr/>
         </p:nvSpPr>
         <p:spPr>
           <a:xfrm>
-            <a:off x="777240" y="1499616"/>
-            <a:ext cx="10637215" cy="19050"/>
+            <a:off x="0" y="0"/>
+            <a:ext cx="155448" cy="6858000"/>
           </a:xfrm>
           <a:prstGeom prst="rect">
             <a:avLst/>
           </a:prstGeom>
           <a:solidFill>
-            <a:srgbClr val="D8D8D8"/>
+            <a:srgbClr val="0F2A44"/>
           </a:solidFill>
           <a:ln>
             <a:noFill/>
@@ -7663,14 +9291,14 @@
       </p:sp>
       <p:sp>
         <p:nvSpPr>
-          <p:cNvPr id="5" name="TextBox 4"/>
+          <p:cNvPr id="3" name="TextBox 2"/>
           <p:cNvSpPr txBox="1"/>
           <p:nvPr/>
         </p:nvSpPr>
         <p:spPr>
           <a:xfrm>
-            <a:off x="777240" y="1993392"/>
-            <a:ext cx="10637215" cy="822960"/>
+            <a:off x="9082735" y="6263640"/>
+            <a:ext cx="2286000" cy="320040"/>
           </a:xfrm>
           <a:prstGeom prst="rect">
             <a:avLst/>
@@ -7683,30 +9311,74 @@
           </a:bodyPr>
           <a:lstStyle/>
           <a:p>
-            <a:pPr>
-              <a:defRPr sz="3600" b="1">
+            <a:pPr algn="r">
+              <a:defRPr sz="1000">
                 <a:solidFill>
-                  <a:srgbClr val="1E7B3C"/>
+                  <a:srgbClr val="6B7280"/>
                 </a:solidFill>
                 <a:latin typeface="Segoe UI"/>
               </a:defRPr>
             </a:pPr>
             <a:r>
-              <a:t>The database is less accurate than my version</a:t>
-            </a:r>
-          </a:p>
-        </p:txBody>
-      </p:sp>
-      <p:sp>
-        <p:nvSpPr>
-          <p:cNvPr id="6" name="TextBox 5"/>
+              <a:t>Ask My Docs  ·  Week 1   ·   7</a:t>
+            </a:r>
+          </a:p>
+        </p:txBody>
+      </p:sp>
+      <p:sp>
+        <p:nvSpPr>
+          <p:cNvPr id="4" name="Rectangle 3"/>
+          <p:cNvSpPr/>
+          <p:nvPr/>
+        </p:nvSpPr>
+        <p:spPr>
+          <a:xfrm>
+            <a:off x="822960" y="566928"/>
+            <a:ext cx="685800" cy="256032"/>
+          </a:xfrm>
+          <a:prstGeom prst="rect">
+            <a:avLst/>
+          </a:prstGeom>
+          <a:solidFill>
+            <a:srgbClr val="1C4E7A"/>
+          </a:solidFill>
+          <a:ln>
+            <a:noFill/>
+          </a:ln>
+          <a:effectLst/>
+        </p:spPr>
+        <p:style>
+          <a:lnRef idx="1">
+            <a:schemeClr val="accent1"/>
+          </a:lnRef>
+          <a:fillRef idx="3">
+            <a:schemeClr val="accent1"/>
+          </a:fillRef>
+          <a:effectRef idx="2">
+            <a:schemeClr val="accent1"/>
+          </a:effectRef>
+          <a:fontRef idx="minor">
+            <a:schemeClr val="lt1"/>
+          </a:fontRef>
+        </p:style>
+        <p:txBody>
+          <a:bodyPr rtlCol="0" anchor="ctr"/>
+          <a:lstStyle/>
+          <a:p>
+            <a:pPr algn="ctr"/>
+          </a:p>
+        </p:txBody>
+      </p:sp>
+      <p:sp>
+        <p:nvSpPr>
+          <p:cNvPr id="5" name="TextBox 4"/>
           <p:cNvSpPr txBox="1"/>
           <p:nvPr/>
         </p:nvSpPr>
         <p:spPr>
           <a:xfrm>
-            <a:off x="777240" y="3090672"/>
-            <a:ext cx="10637215" cy="3017520"/>
+            <a:off x="822960" y="548640"/>
+            <a:ext cx="685800" cy="292608"/>
           </a:xfrm>
           <a:prstGeom prst="rect">
             <a:avLst/>
@@ -7714,82 +9386,366 @@
           <a:noFill/>
         </p:spPr>
         <p:txBody>
-          <a:bodyPr wrap="square">
+          <a:bodyPr wrap="square" lIns="0" rIns="0">
             <a:spAutoFit/>
           </a:bodyPr>
           <a:lstStyle/>
           <a:p>
-            <a:pPr>
-              <a:spcAft>
-                <a:spcPts val="1500"/>
-              </a:spcAft>
-              <a:defRPr sz="1900">
+            <a:pPr algn="ctr">
+              <a:defRPr sz="1100" b="1">
                 <a:solidFill>
-                  <a:srgbClr val="1A1A1A"/>
+                  <a:srgbClr val="FFFFFF"/>
                 </a:solidFill>
                 <a:latin typeface="Segoe UI"/>
               </a:defRPr>
             </a:pPr>
             <a:r>
-              <a:t>I embedded all 155 chunks into a plain Python list and searched it with a loop.</a:t>
-            </a:r>
-          </a:p>
+              <a:t>FRI</a:t>
+            </a:r>
+          </a:p>
+        </p:txBody>
+      </p:sp>
+      <p:sp>
+        <p:nvSpPr>
+          <p:cNvPr id="6" name="TextBox 5"/>
+          <p:cNvSpPr txBox="1"/>
+          <p:nvPr/>
+        </p:nvSpPr>
+        <p:spPr>
+          <a:xfrm>
+            <a:off x="822960" y="978408"/>
+            <a:ext cx="10545775" cy="658368"/>
+          </a:xfrm>
+          <a:prstGeom prst="rect">
+            <a:avLst/>
+          </a:prstGeom>
+          <a:noFill/>
+        </p:spPr>
+        <p:txBody>
+          <a:bodyPr wrap="square">
+            <a:spAutoFit/>
+          </a:bodyPr>
+          <a:lstStyle/>
           <a:p>
             <a:pPr>
-              <a:spcAft>
-                <a:spcPts val="1500"/>
-              </a:spcAft>
-              <a:defRPr sz="1900">
+              <a:defRPr sz="3100" b="1">
                 <a:solidFill>
-                  <a:srgbClr val="1A1A1A"/>
+                  <a:srgbClr val="0F2A44"/>
                 </a:solidFill>
                 <a:latin typeface="Segoe UI"/>
               </a:defRPr>
             </a:pPr>
             <a:r>
-              <a:t>My loop compares every chunk, so it cannot miss a match. It is exact.</a:t>
-            </a:r>
-          </a:p>
+              <a:t>Friday: I built search with no database at all</a:t>
+            </a:r>
+          </a:p>
+        </p:txBody>
+      </p:sp>
+      <p:sp>
+        <p:nvSpPr>
+          <p:cNvPr id="7" name="Rectangle 6"/>
+          <p:cNvSpPr/>
+          <p:nvPr/>
+        </p:nvSpPr>
+        <p:spPr>
+          <a:xfrm>
+            <a:off x="822960" y="1673352"/>
+            <a:ext cx="1371600" cy="38100"/>
+          </a:xfrm>
+          <a:prstGeom prst="rect">
+            <a:avLst/>
+          </a:prstGeom>
+          <a:solidFill>
+            <a:srgbClr val="1C4E7A"/>
+          </a:solidFill>
+          <a:ln>
+            <a:noFill/>
+          </a:ln>
+          <a:effectLst/>
+        </p:spPr>
+        <p:style>
+          <a:lnRef idx="1">
+            <a:schemeClr val="accent1"/>
+          </a:lnRef>
+          <a:fillRef idx="3">
+            <a:schemeClr val="accent1"/>
+          </a:fillRef>
+          <a:effectRef idx="2">
+            <a:schemeClr val="accent1"/>
+          </a:effectRef>
+          <a:fontRef idx="minor">
+            <a:schemeClr val="lt1"/>
+          </a:fontRef>
+        </p:style>
+        <p:txBody>
+          <a:bodyPr rtlCol="0" anchor="ctr"/>
+          <a:lstStyle/>
+          <a:p>
+            <a:pPr algn="ctr"/>
+          </a:p>
+        </p:txBody>
+      </p:sp>
+      <p:sp>
+        <p:nvSpPr>
+          <p:cNvPr id="8" name="Rectangle 7"/>
+          <p:cNvSpPr/>
+          <p:nvPr/>
+        </p:nvSpPr>
+        <p:spPr>
+          <a:xfrm>
+            <a:off x="2194560" y="1686052"/>
+            <a:ext cx="9174175" cy="12700"/>
+          </a:xfrm>
+          <a:prstGeom prst="rect">
+            <a:avLst/>
+          </a:prstGeom>
+          <a:solidFill>
+            <a:srgbClr val="DDE3E8"/>
+          </a:solidFill>
+          <a:ln>
+            <a:noFill/>
+          </a:ln>
+          <a:effectLst/>
+        </p:spPr>
+        <p:style>
+          <a:lnRef idx="1">
+            <a:schemeClr val="accent1"/>
+          </a:lnRef>
+          <a:fillRef idx="3">
+            <a:schemeClr val="accent1"/>
+          </a:fillRef>
+          <a:effectRef idx="2">
+            <a:schemeClr val="accent1"/>
+          </a:effectRef>
+          <a:fontRef idx="minor">
+            <a:schemeClr val="lt1"/>
+          </a:fontRef>
+        </p:style>
+        <p:txBody>
+          <a:bodyPr rtlCol="0" anchor="ctr"/>
+          <a:lstStyle/>
+          <a:p>
+            <a:pPr algn="ctr"/>
+          </a:p>
+        </p:txBody>
+      </p:sp>
+      <p:sp>
+        <p:nvSpPr>
+          <p:cNvPr id="9" name="Rectangle 8"/>
+          <p:cNvSpPr/>
+          <p:nvPr/>
+        </p:nvSpPr>
+        <p:spPr>
+          <a:xfrm>
+            <a:off x="822960" y="1828800"/>
+            <a:ext cx="10545775" cy="960120"/>
+          </a:xfrm>
+          <a:prstGeom prst="rect">
+            <a:avLst/>
+          </a:prstGeom>
+          <a:solidFill>
+            <a:srgbClr val="F7F9FB"/>
+          </a:solidFill>
+          <a:ln>
+            <a:noFill/>
+          </a:ln>
+          <a:effectLst/>
+        </p:spPr>
+        <p:style>
+          <a:lnRef idx="1">
+            <a:schemeClr val="accent1"/>
+          </a:lnRef>
+          <a:fillRef idx="3">
+            <a:schemeClr val="accent1"/>
+          </a:fillRef>
+          <a:effectRef idx="2">
+            <a:schemeClr val="accent1"/>
+          </a:effectRef>
+          <a:fontRef idx="minor">
+            <a:schemeClr val="lt1"/>
+          </a:fontRef>
+        </p:style>
+        <p:txBody>
+          <a:bodyPr rtlCol="0" anchor="ctr"/>
+          <a:lstStyle/>
+          <a:p>
+            <a:pPr algn="ctr"/>
+          </a:p>
+        </p:txBody>
+      </p:sp>
+      <p:sp>
+        <p:nvSpPr>
+          <p:cNvPr id="10" name="Rectangle 9"/>
+          <p:cNvSpPr/>
+          <p:nvPr/>
+        </p:nvSpPr>
+        <p:spPr>
+          <a:xfrm>
+            <a:off x="822960" y="1828800"/>
+            <a:ext cx="63500" cy="960120"/>
+          </a:xfrm>
+          <a:prstGeom prst="rect">
+            <a:avLst/>
+          </a:prstGeom>
+          <a:solidFill>
+            <a:srgbClr val="2E8B84"/>
+          </a:solidFill>
+          <a:ln>
+            <a:noFill/>
+          </a:ln>
+          <a:effectLst/>
+        </p:spPr>
+        <p:style>
+          <a:lnRef idx="1">
+            <a:schemeClr val="accent1"/>
+          </a:lnRef>
+          <a:fillRef idx="3">
+            <a:schemeClr val="accent1"/>
+          </a:fillRef>
+          <a:effectRef idx="2">
+            <a:schemeClr val="accent1"/>
+          </a:effectRef>
+          <a:fontRef idx="minor">
+            <a:schemeClr val="lt1"/>
+          </a:fontRef>
+        </p:style>
+        <p:txBody>
+          <a:bodyPr rtlCol="0" anchor="ctr"/>
+          <a:lstStyle/>
+          <a:p>
+            <a:pPr algn="ctr"/>
+          </a:p>
+        </p:txBody>
+      </p:sp>
+      <p:sp>
+        <p:nvSpPr>
+          <p:cNvPr id="11" name="TextBox 10"/>
+          <p:cNvSpPr txBox="1"/>
+          <p:nvPr/>
+        </p:nvSpPr>
+        <p:spPr>
+          <a:xfrm>
+            <a:off x="1078992" y="1975104"/>
+            <a:ext cx="10088575" cy="731520"/>
+          </a:xfrm>
+          <a:prstGeom prst="rect">
+            <a:avLst/>
+          </a:prstGeom>
+          <a:noFill/>
+        </p:spPr>
+        <p:txBody>
+          <a:bodyPr wrap="square">
+            <a:spAutoFit/>
+          </a:bodyPr>
+          <a:lstStyle/>
           <a:p>
             <a:pPr>
-              <a:spcAft>
-                <a:spcPts val="1500"/>
-              </a:spcAft>
-              <a:defRPr sz="1900">
+              <a:defRPr sz="3200" b="1">
                 <a:solidFill>
-                  <a:srgbClr val="1A1A1A"/>
+                  <a:srgbClr val="2E8B84"/>
                 </a:solidFill>
                 <a:latin typeface="Segoe UI"/>
               </a:defRPr>
             </a:pPr>
             <a:r>
-              <a:t>Chroma, which I add next week, deliberately skips most comparisons.</a:t>
-            </a:r>
-          </a:p>
+              <a:t>The database is less accurate than my version</a:t>
+            </a:r>
+          </a:p>
+        </p:txBody>
+      </p:sp>
+      <p:sp>
+        <p:nvSpPr>
+          <p:cNvPr id="12" name="TextBox 11"/>
+          <p:cNvSpPr txBox="1"/>
+          <p:nvPr/>
+        </p:nvSpPr>
+        <p:spPr>
+          <a:xfrm>
+            <a:off x="822960" y="3108960"/>
+            <a:ext cx="10545775" cy="2560320"/>
+          </a:xfrm>
+          <a:prstGeom prst="rect">
+            <a:avLst/>
+          </a:prstGeom>
+          <a:noFill/>
+        </p:spPr>
+        <p:txBody>
+          <a:bodyPr wrap="square">
+            <a:spAutoFit/>
+          </a:bodyPr>
+          <a:lstStyle/>
           <a:p>
             <a:pPr>
               <a:spcAft>
-                <a:spcPts val="1500"/>
+                <a:spcPts val="1400"/>
               </a:spcAft>
-              <a:defRPr sz="1900">
+              <a:defRPr sz="1800">
                 <a:solidFill>
-                  <a:srgbClr val="1A1A1A"/>
+                  <a:srgbClr val="1B1B1B"/>
                 </a:solidFill>
                 <a:latin typeface="Segoe UI"/>
               </a:defRPr>
             </a:pPr>
             <a:r>
-              <a:t>It trades a small chance of missing a match for speed that holds up as notes grow.</a:t>
+              <a:t>I embedded all 155 chunks into a plain Python list and searched it with a loop.</a:t>
             </a:r>
           </a:p>
           <a:p>
             <a:pPr>
               <a:spcAft>
-                <a:spcPts val="1500"/>
+                <a:spcPts val="1400"/>
               </a:spcAft>
-              <a:defRPr sz="1900">
+              <a:defRPr sz="1800">
                 <a:solidFill>
-                  <a:srgbClr val="1A1A1A"/>
+                  <a:srgbClr val="1B1B1B"/>
+                </a:solidFill>
+                <a:latin typeface="Segoe UI"/>
+              </a:defRPr>
+            </a:pPr>
+            <a:r>
+              <a:t>My loop compares every chunk, so it cannot miss a match. It is exact.</a:t>
+            </a:r>
+          </a:p>
+          <a:p>
+            <a:pPr>
+              <a:spcAft>
+                <a:spcPts val="1400"/>
+              </a:spcAft>
+              <a:defRPr sz="1800">
+                <a:solidFill>
+                  <a:srgbClr val="1B1B1B"/>
+                </a:solidFill>
+                <a:latin typeface="Segoe UI"/>
+              </a:defRPr>
+            </a:pPr>
+            <a:r>
+              <a:t>Chroma, which I add next week, deliberately skips most comparisons.</a:t>
+            </a:r>
+          </a:p>
+          <a:p>
+            <a:pPr>
+              <a:spcAft>
+                <a:spcPts val="1400"/>
+              </a:spcAft>
+              <a:defRPr sz="1800">
+                <a:solidFill>
+                  <a:srgbClr val="1B1B1B"/>
+                </a:solidFill>
+                <a:latin typeface="Segoe UI"/>
+              </a:defRPr>
+            </a:pPr>
+            <a:r>
+              <a:t>It trades a small chance of missing a match for speed that holds up as notes grow.</a:t>
+            </a:r>
+          </a:p>
+          <a:p>
+            <a:pPr>
+              <a:spcAft>
+                <a:spcPts val="1400"/>
+              </a:spcAft>
+              <a:defRPr sz="1800">
+                <a:solidFill>
+                  <a:srgbClr val="1B1B1B"/>
                 </a:solidFill>
                 <a:latin typeface="Segoe UI"/>
               </a:defRPr>
@@ -7820,92 +9776,20 @@
       <p:grpSpPr/>
       <p:sp>
         <p:nvSpPr>
-          <p:cNvPr id="2" name="TextBox 1"/>
-          <p:cNvSpPr txBox="1"/>
-          <p:nvPr/>
-        </p:nvSpPr>
-        <p:spPr>
-          <a:xfrm>
-            <a:off x="777240" y="457200"/>
-            <a:ext cx="10637215" cy="274320"/>
-          </a:xfrm>
-          <a:prstGeom prst="rect">
-            <a:avLst/>
-          </a:prstGeom>
-          <a:noFill/>
-        </p:spPr>
-        <p:txBody>
-          <a:bodyPr wrap="square">
-            <a:spAutoFit/>
-          </a:bodyPr>
-          <a:lstStyle/>
-          <a:p>
-            <a:pPr>
-              <a:defRPr sz="1200" b="1">
-                <a:solidFill>
-                  <a:srgbClr val="1F4E79"/>
-                </a:solidFill>
-                <a:latin typeface="Segoe UI"/>
-              </a:defRPr>
-            </a:pPr>
-            <a:r>
-              <a:t>FRI</a:t>
-            </a:r>
-          </a:p>
-        </p:txBody>
-      </p:sp>
-      <p:sp>
-        <p:nvSpPr>
-          <p:cNvPr id="3" name="TextBox 2"/>
-          <p:cNvSpPr txBox="1"/>
-          <p:nvPr/>
-        </p:nvSpPr>
-        <p:spPr>
-          <a:xfrm>
-            <a:off x="777240" y="786384"/>
-            <a:ext cx="10637215" cy="731520"/>
-          </a:xfrm>
-          <a:prstGeom prst="rect">
-            <a:avLst/>
-          </a:prstGeom>
-          <a:noFill/>
-        </p:spPr>
-        <p:txBody>
-          <a:bodyPr wrap="square">
-            <a:spAutoFit/>
-          </a:bodyPr>
-          <a:lstStyle/>
-          <a:p>
-            <a:pPr>
-              <a:defRPr sz="3000" b="1">
-                <a:solidFill>
-                  <a:srgbClr val="1A1A1A"/>
-                </a:solidFill>
-                <a:latin typeface="Segoe UI"/>
-              </a:defRPr>
-            </a:pPr>
-            <a:r>
-              <a:t>Asking a question my notes cannot answer</a:t>
-            </a:r>
-          </a:p>
-        </p:txBody>
-      </p:sp>
-      <p:sp>
-        <p:nvSpPr>
-          <p:cNvPr id="4" name="Rectangle 3"/>
+          <p:cNvPr id="2" name="Rectangle 1"/>
           <p:cNvSpPr/>
           <p:nvPr/>
         </p:nvSpPr>
         <p:spPr>
           <a:xfrm>
-            <a:off x="777240" y="1499616"/>
-            <a:ext cx="10637215" cy="19050"/>
+            <a:off x="0" y="0"/>
+            <a:ext cx="155448" cy="6858000"/>
           </a:xfrm>
           <a:prstGeom prst="rect">
             <a:avLst/>
           </a:prstGeom>
           <a:solidFill>
-            <a:srgbClr val="D8D8D8"/>
+            <a:srgbClr val="0F2A44"/>
           </a:solidFill>
           <a:ln>
             <a:noFill/>
@@ -7936,14 +9820,14 @@
       </p:sp>
       <p:sp>
         <p:nvSpPr>
-          <p:cNvPr id="5" name="TextBox 4"/>
+          <p:cNvPr id="3" name="TextBox 2"/>
           <p:cNvSpPr txBox="1"/>
           <p:nvPr/>
         </p:nvSpPr>
         <p:spPr>
           <a:xfrm>
-            <a:off x="777240" y="1810512"/>
-            <a:ext cx="10637215" cy="365760"/>
+            <a:off x="9082735" y="6263640"/>
+            <a:ext cx="2286000" cy="320040"/>
           </a:xfrm>
           <a:prstGeom prst="rect">
             <a:avLst/>
@@ -7956,15 +9840,255 @@
           </a:bodyPr>
           <a:lstStyle/>
           <a:p>
-            <a:pPr>
-              <a:defRPr sz="1600">
+            <a:pPr algn="r">
+              <a:defRPr sz="1000">
                 <a:solidFill>
-                  <a:srgbClr val="666666"/>
+                  <a:srgbClr val="6B7280"/>
                 </a:solidFill>
                 <a:latin typeface="Segoe UI"/>
               </a:defRPr>
             </a:pPr>
             <a:r>
+              <a:t>Ask My Docs  ·  Week 1   ·   8</a:t>
+            </a:r>
+          </a:p>
+        </p:txBody>
+      </p:sp>
+      <p:sp>
+        <p:nvSpPr>
+          <p:cNvPr id="4" name="Rectangle 3"/>
+          <p:cNvSpPr/>
+          <p:nvPr/>
+        </p:nvSpPr>
+        <p:spPr>
+          <a:xfrm>
+            <a:off x="822960" y="566928"/>
+            <a:ext cx="685800" cy="256032"/>
+          </a:xfrm>
+          <a:prstGeom prst="rect">
+            <a:avLst/>
+          </a:prstGeom>
+          <a:solidFill>
+            <a:srgbClr val="1C4E7A"/>
+          </a:solidFill>
+          <a:ln>
+            <a:noFill/>
+          </a:ln>
+          <a:effectLst/>
+        </p:spPr>
+        <p:style>
+          <a:lnRef idx="1">
+            <a:schemeClr val="accent1"/>
+          </a:lnRef>
+          <a:fillRef idx="3">
+            <a:schemeClr val="accent1"/>
+          </a:fillRef>
+          <a:effectRef idx="2">
+            <a:schemeClr val="accent1"/>
+          </a:effectRef>
+          <a:fontRef idx="minor">
+            <a:schemeClr val="lt1"/>
+          </a:fontRef>
+        </p:style>
+        <p:txBody>
+          <a:bodyPr rtlCol="0" anchor="ctr"/>
+          <a:lstStyle/>
+          <a:p>
+            <a:pPr algn="ctr"/>
+          </a:p>
+        </p:txBody>
+      </p:sp>
+      <p:sp>
+        <p:nvSpPr>
+          <p:cNvPr id="5" name="TextBox 4"/>
+          <p:cNvSpPr txBox="1"/>
+          <p:nvPr/>
+        </p:nvSpPr>
+        <p:spPr>
+          <a:xfrm>
+            <a:off x="822960" y="548640"/>
+            <a:ext cx="685800" cy="292608"/>
+          </a:xfrm>
+          <a:prstGeom prst="rect">
+            <a:avLst/>
+          </a:prstGeom>
+          <a:noFill/>
+        </p:spPr>
+        <p:txBody>
+          <a:bodyPr wrap="square" lIns="0" rIns="0">
+            <a:spAutoFit/>
+          </a:bodyPr>
+          <a:lstStyle/>
+          <a:p>
+            <a:pPr algn="ctr">
+              <a:defRPr sz="1100" b="1">
+                <a:solidFill>
+                  <a:srgbClr val="FFFFFF"/>
+                </a:solidFill>
+                <a:latin typeface="Segoe UI"/>
+              </a:defRPr>
+            </a:pPr>
+            <a:r>
+              <a:t>FRI</a:t>
+            </a:r>
+          </a:p>
+        </p:txBody>
+      </p:sp>
+      <p:sp>
+        <p:nvSpPr>
+          <p:cNvPr id="6" name="TextBox 5"/>
+          <p:cNvSpPr txBox="1"/>
+          <p:nvPr/>
+        </p:nvSpPr>
+        <p:spPr>
+          <a:xfrm>
+            <a:off x="822960" y="978408"/>
+            <a:ext cx="10545775" cy="658368"/>
+          </a:xfrm>
+          <a:prstGeom prst="rect">
+            <a:avLst/>
+          </a:prstGeom>
+          <a:noFill/>
+        </p:spPr>
+        <p:txBody>
+          <a:bodyPr wrap="square">
+            <a:spAutoFit/>
+          </a:bodyPr>
+          <a:lstStyle/>
+          <a:p>
+            <a:pPr>
+              <a:defRPr sz="3100" b="1">
+                <a:solidFill>
+                  <a:srgbClr val="0F2A44"/>
+                </a:solidFill>
+                <a:latin typeface="Segoe UI"/>
+              </a:defRPr>
+            </a:pPr>
+            <a:r>
+              <a:t>Asking a question my notes cannot answer</a:t>
+            </a:r>
+          </a:p>
+        </p:txBody>
+      </p:sp>
+      <p:sp>
+        <p:nvSpPr>
+          <p:cNvPr id="7" name="Rectangle 6"/>
+          <p:cNvSpPr/>
+          <p:nvPr/>
+        </p:nvSpPr>
+        <p:spPr>
+          <a:xfrm>
+            <a:off x="822960" y="1673352"/>
+            <a:ext cx="1371600" cy="38100"/>
+          </a:xfrm>
+          <a:prstGeom prst="rect">
+            <a:avLst/>
+          </a:prstGeom>
+          <a:solidFill>
+            <a:srgbClr val="1C4E7A"/>
+          </a:solidFill>
+          <a:ln>
+            <a:noFill/>
+          </a:ln>
+          <a:effectLst/>
+        </p:spPr>
+        <p:style>
+          <a:lnRef idx="1">
+            <a:schemeClr val="accent1"/>
+          </a:lnRef>
+          <a:fillRef idx="3">
+            <a:schemeClr val="accent1"/>
+          </a:fillRef>
+          <a:effectRef idx="2">
+            <a:schemeClr val="accent1"/>
+          </a:effectRef>
+          <a:fontRef idx="minor">
+            <a:schemeClr val="lt1"/>
+          </a:fontRef>
+        </p:style>
+        <p:txBody>
+          <a:bodyPr rtlCol="0" anchor="ctr"/>
+          <a:lstStyle/>
+          <a:p>
+            <a:pPr algn="ctr"/>
+          </a:p>
+        </p:txBody>
+      </p:sp>
+      <p:sp>
+        <p:nvSpPr>
+          <p:cNvPr id="8" name="Rectangle 7"/>
+          <p:cNvSpPr/>
+          <p:nvPr/>
+        </p:nvSpPr>
+        <p:spPr>
+          <a:xfrm>
+            <a:off x="2194560" y="1686052"/>
+            <a:ext cx="9174175" cy="12700"/>
+          </a:xfrm>
+          <a:prstGeom prst="rect">
+            <a:avLst/>
+          </a:prstGeom>
+          <a:solidFill>
+            <a:srgbClr val="DDE3E8"/>
+          </a:solidFill>
+          <a:ln>
+            <a:noFill/>
+          </a:ln>
+          <a:effectLst/>
+        </p:spPr>
+        <p:style>
+          <a:lnRef idx="1">
+            <a:schemeClr val="accent1"/>
+          </a:lnRef>
+          <a:fillRef idx="3">
+            <a:schemeClr val="accent1"/>
+          </a:fillRef>
+          <a:effectRef idx="2">
+            <a:schemeClr val="accent1"/>
+          </a:effectRef>
+          <a:fontRef idx="minor">
+            <a:schemeClr val="lt1"/>
+          </a:fontRef>
+        </p:style>
+        <p:txBody>
+          <a:bodyPr rtlCol="0" anchor="ctr"/>
+          <a:lstStyle/>
+          <a:p>
+            <a:pPr algn="ctr"/>
+          </a:p>
+        </p:txBody>
+      </p:sp>
+      <p:sp>
+        <p:nvSpPr>
+          <p:cNvPr id="9" name="TextBox 8"/>
+          <p:cNvSpPr txBox="1"/>
+          <p:nvPr/>
+        </p:nvSpPr>
+        <p:spPr>
+          <a:xfrm>
+            <a:off x="822960" y="2601468"/>
+            <a:ext cx="10545775" cy="365760"/>
+          </a:xfrm>
+          <a:prstGeom prst="rect">
+            <a:avLst/>
+          </a:prstGeom>
+          <a:noFill/>
+        </p:spPr>
+        <p:txBody>
+          <a:bodyPr wrap="square">
+            <a:spAutoFit/>
+          </a:bodyPr>
+          <a:lstStyle/>
+          <a:p>
+            <a:pPr>
+              <a:defRPr sz="1600">
+                <a:solidFill>
+                  <a:srgbClr val="6B7280"/>
+                </a:solidFill>
+                <a:latin typeface="Segoe UI"/>
+              </a:defRPr>
+            </a:pPr>
+            <a:r>
               <a:t>The search still returned five chunks. It always returns something.</a:t>
             </a:r>
           </a:p>
@@ -7972,15 +10096,15 @@
       </p:sp>
       <p:graphicFrame>
         <p:nvGraphicFramePr>
-          <p:cNvPr id="6" name="Table 5"/>
+          <p:cNvPr id="10" name="Table 9"/>
           <p:cNvGraphicFramePr>
             <a:graphicFrameLocks noGrp="1"/>
           </p:cNvGraphicFramePr>
           <p:nvPr/>
         </p:nvGraphicFramePr>
         <p:xfrm>
-          <a:off x="777240" y="2313432"/>
-          <a:ext cx="10637214" cy="1682496"/>
+          <a:off x="822960" y="3131820"/>
+          <a:ext cx="10545774" cy="1901952"/>
         </p:xfrm>
         <a:graphic>
           <a:graphicData uri="http://schemas.openxmlformats.org/drawingml/2006/table">
@@ -7989,17 +10113,17 @@
                 <a:tableStyleId>{5C22544A-7EE6-4342-B048-85BDC9FD1C3A}</a:tableStyleId>
               </a:tblPr>
               <a:tblGrid>
-                <a:gridCol w="8104544"/>
-                <a:gridCol w="2532670"/>
+                <a:gridCol w="8034876"/>
+                <a:gridCol w="2510898"/>
               </a:tblGrid>
-              <a:tr h="420624">
+              <a:tr h="475488">
                 <a:tc>
                   <a:txBody>
                     <a:bodyPr/>
                     <a:lstStyle/>
                     <a:p>
                       <a:pPr>
-                        <a:defRPr sz="1500" b="1">
+                        <a:defRPr sz="1400" b="1">
                           <a:solidFill>
                             <a:srgbClr val="FFFFFF"/>
                           </a:solidFill>
@@ -8011,9 +10135,21 @@
                       </a:r>
                     </a:p>
                   </a:txBody>
-                  <a:tcPr>
+                  <a:tcPr anchor="ctr" marL="146304" marR="146304">
+                    <a:lnL w="0" cap="flat" cmpd="sng" algn="ctr">
+                      <a:noFill/>
+                    </a:lnL>
+                    <a:lnR w="0" cap="flat" cmpd="sng" algn="ctr">
+                      <a:noFill/>
+                    </a:lnR>
+                    <a:lnT w="0" cap="flat" cmpd="sng" algn="ctr">
+                      <a:noFill/>
+                    </a:lnT>
+                    <a:lnB w="0" cap="flat" cmpd="sng" algn="ctr">
+                      <a:noFill/>
+                    </a:lnB>
                     <a:solidFill>
-                      <a:srgbClr val="1F4E79"/>
+                      <a:srgbClr val="0F2A44"/>
                     </a:solidFill>
                   </a:tcPr>
                 </a:tc>
@@ -8023,7 +10159,7 @@
                     <a:lstStyle/>
                     <a:p>
                       <a:pPr>
-                        <a:defRPr sz="1500" b="1">
+                        <a:defRPr sz="1400" b="1">
                           <a:solidFill>
                             <a:srgbClr val="FFFFFF"/>
                           </a:solidFill>
@@ -8035,14 +10171,26 @@
                       </a:r>
                     </a:p>
                   </a:txBody>
-                  <a:tcPr>
+                  <a:tcPr anchor="ctr" marL="146304" marR="146304">
+                    <a:lnL w="0" cap="flat" cmpd="sng" algn="ctr">
+                      <a:noFill/>
+                    </a:lnL>
+                    <a:lnR w="0" cap="flat" cmpd="sng" algn="ctr">
+                      <a:noFill/>
+                    </a:lnR>
+                    <a:lnT w="0" cap="flat" cmpd="sng" algn="ctr">
+                      <a:noFill/>
+                    </a:lnT>
+                    <a:lnB w="0" cap="flat" cmpd="sng" algn="ctr">
+                      <a:noFill/>
+                    </a:lnB>
                     <a:solidFill>
-                      <a:srgbClr val="1F4E79"/>
+                      <a:srgbClr val="0F2A44"/>
                     </a:solidFill>
                   </a:tcPr>
                 </a:tc>
               </a:tr>
-              <a:tr h="420624">
+              <a:tr h="475488">
                 <a:tc>
                   <a:txBody>
                     <a:bodyPr/>
@@ -8051,7 +10199,7 @@
                       <a:pPr>
                         <a:defRPr sz="1500" b="0">
                           <a:solidFill>
-                            <a:srgbClr val="1A1A1A"/>
+                            <a:srgbClr val="1B1B1B"/>
                           </a:solidFill>
                           <a:latin typeface="Segoe UI"/>
                         </a:defRPr>
@@ -8061,7 +10209,19 @@
                       </a:r>
                     </a:p>
                   </a:txBody>
-                  <a:tcPr>
+                  <a:tcPr anchor="ctr" marL="146304" marR="146304">
+                    <a:lnL w="0" cap="flat" cmpd="sng" algn="ctr">
+                      <a:noFill/>
+                    </a:lnL>
+                    <a:lnR w="0" cap="flat" cmpd="sng" algn="ctr">
+                      <a:noFill/>
+                    </a:lnR>
+                    <a:lnT w="0" cap="flat" cmpd="sng" algn="ctr">
+                      <a:noFill/>
+                    </a:lnT>
+                    <a:lnB w="0" cap="flat" cmpd="sng" algn="ctr">
+                      <a:noFill/>
+                    </a:lnB>
                     <a:solidFill>
                       <a:srgbClr val="FFFFFF"/>
                     </a:solidFill>
@@ -8075,7 +10235,7 @@
                       <a:pPr>
                         <a:defRPr sz="1500" b="0">
                           <a:solidFill>
-                            <a:srgbClr val="1A1A1A"/>
+                            <a:srgbClr val="1B1B1B"/>
                           </a:solidFill>
                           <a:latin typeface="Consolas"/>
                         </a:defRPr>
@@ -8085,14 +10245,26 @@
                       </a:r>
                     </a:p>
                   </a:txBody>
-                  <a:tcPr>
+                  <a:tcPr anchor="ctr" marL="146304" marR="146304">
+                    <a:lnL w="0" cap="flat" cmpd="sng" algn="ctr">
+                      <a:noFill/>
+                    </a:lnL>
+                    <a:lnR w="0" cap="flat" cmpd="sng" algn="ctr">
+                      <a:noFill/>
+                    </a:lnR>
+                    <a:lnT w="0" cap="flat" cmpd="sng" algn="ctr">
+                      <a:noFill/>
+                    </a:lnT>
+                    <a:lnB w="0" cap="flat" cmpd="sng" algn="ctr">
+                      <a:noFill/>
+                    </a:lnB>
                     <a:solidFill>
                       <a:srgbClr val="FFFFFF"/>
                     </a:solidFill>
                   </a:tcPr>
                 </a:tc>
               </a:tr>
-              <a:tr h="420624">
+              <a:tr h="475488">
                 <a:tc>
                   <a:txBody>
                     <a:bodyPr/>
@@ -8101,7 +10273,7 @@
                       <a:pPr>
                         <a:defRPr sz="1500" b="0">
                           <a:solidFill>
-                            <a:srgbClr val="1A1A1A"/>
+                            <a:srgbClr val="1B1B1B"/>
                           </a:solidFill>
                           <a:latin typeface="Segoe UI"/>
                         </a:defRPr>
@@ -8111,9 +10283,21 @@
                       </a:r>
                     </a:p>
                   </a:txBody>
-                  <a:tcPr>
+                  <a:tcPr anchor="ctr" marL="146304" marR="146304">
+                    <a:lnL w="0" cap="flat" cmpd="sng" algn="ctr">
+                      <a:noFill/>
+                    </a:lnL>
+                    <a:lnR w="0" cap="flat" cmpd="sng" algn="ctr">
+                      <a:noFill/>
+                    </a:lnR>
+                    <a:lnT w="0" cap="flat" cmpd="sng" algn="ctr">
+                      <a:noFill/>
+                    </a:lnT>
+                    <a:lnB w="0" cap="flat" cmpd="sng" algn="ctr">
+                      <a:noFill/>
+                    </a:lnB>
                     <a:solidFill>
-                      <a:srgbClr val="FFFFFF"/>
+                      <a:srgbClr val="F7F9FB"/>
                     </a:solidFill>
                   </a:tcPr>
                 </a:tc>
@@ -8125,7 +10309,7 @@
                       <a:pPr>
                         <a:defRPr sz="1500" b="0">
                           <a:solidFill>
-                            <a:srgbClr val="1A1A1A"/>
+                            <a:srgbClr val="1B1B1B"/>
                           </a:solidFill>
                           <a:latin typeface="Consolas"/>
                         </a:defRPr>
@@ -8135,14 +10319,26 @@
                       </a:r>
                     </a:p>
                   </a:txBody>
-                  <a:tcPr>
+                  <a:tcPr anchor="ctr" marL="146304" marR="146304">
+                    <a:lnL w="0" cap="flat" cmpd="sng" algn="ctr">
+                      <a:noFill/>
+                    </a:lnL>
+                    <a:lnR w="0" cap="flat" cmpd="sng" algn="ctr">
+                      <a:noFill/>
+                    </a:lnR>
+                    <a:lnT w="0" cap="flat" cmpd="sng" algn="ctr">
+                      <a:noFill/>
+                    </a:lnT>
+                    <a:lnB w="0" cap="flat" cmpd="sng" algn="ctr">
+                      <a:noFill/>
+                    </a:lnB>
                     <a:solidFill>
-                      <a:srgbClr val="FFFFFF"/>
+                      <a:srgbClr val="F7F9FB"/>
                     </a:solidFill>
                   </a:tcPr>
                 </a:tc>
               </a:tr>
-              <a:tr h="420624">
+              <a:tr h="475488">
                 <a:tc>
                   <a:txBody>
                     <a:bodyPr/>
@@ -8151,7 +10347,7 @@
                       <a:pPr>
                         <a:defRPr sz="1500" b="1">
                           <a:solidFill>
-                            <a:srgbClr val="B32D2D"/>
+                            <a:srgbClr val="B56E0C"/>
                           </a:solidFill>
                           <a:latin typeface="Segoe UI"/>
                         </a:defRPr>
@@ -8161,9 +10357,21 @@
                       </a:r>
                     </a:p>
                   </a:txBody>
-                  <a:tcPr>
+                  <a:tcPr anchor="ctr" marL="146304" marR="146304">
+                    <a:lnL w="0" cap="flat" cmpd="sng" algn="ctr">
+                      <a:noFill/>
+                    </a:lnL>
+                    <a:lnR w="0" cap="flat" cmpd="sng" algn="ctr">
+                      <a:noFill/>
+                    </a:lnR>
+                    <a:lnT w="0" cap="flat" cmpd="sng" algn="ctr">
+                      <a:noFill/>
+                    </a:lnT>
+                    <a:lnB w="0" cap="flat" cmpd="sng" algn="ctr">
+                      <a:noFill/>
+                    </a:lnB>
                     <a:solidFill>
-                      <a:srgbClr val="F2F5F8"/>
+                      <a:srgbClr val="FDF4E6"/>
                     </a:solidFill>
                   </a:tcPr>
                 </a:tc>
@@ -8175,7 +10383,7 @@
                       <a:pPr>
                         <a:defRPr sz="1500" b="1">
                           <a:solidFill>
-                            <a:srgbClr val="B32D2D"/>
+                            <a:srgbClr val="B56E0C"/>
                           </a:solidFill>
                           <a:latin typeface="Consolas"/>
                         </a:defRPr>
@@ -8185,9 +10393,21 @@
                       </a:r>
                     </a:p>
                   </a:txBody>
-                  <a:tcPr>
+                  <a:tcPr anchor="ctr" marL="146304" marR="146304">
+                    <a:lnL w="0" cap="flat" cmpd="sng" algn="ctr">
+                      <a:noFill/>
+                    </a:lnL>
+                    <a:lnR w="0" cap="flat" cmpd="sng" algn="ctr">
+                      <a:noFill/>
+                    </a:lnR>
+                    <a:lnT w="0" cap="flat" cmpd="sng" algn="ctr">
+                      <a:noFill/>
+                    </a:lnT>
+                    <a:lnB w="0" cap="flat" cmpd="sng" algn="ctr">
+                      <a:noFill/>
+                    </a:lnB>
                     <a:solidFill>
-                      <a:srgbClr val="F2F5F8"/>
+                      <a:srgbClr val="FDF4E6"/>
                     </a:solidFill>
                   </a:tcPr>
                 </a:tc>
@@ -8198,14 +10418,14 @@
       </p:graphicFrame>
       <p:sp>
         <p:nvSpPr>
-          <p:cNvPr id="7" name="TextBox 6"/>
+          <p:cNvPr id="11" name="TextBox 10"/>
           <p:cNvSpPr txBox="1"/>
           <p:nvPr/>
         </p:nvSpPr>
         <p:spPr>
           <a:xfrm>
-            <a:off x="777240" y="6035040"/>
-            <a:ext cx="10637215" cy="457200"/>
+            <a:off x="822960" y="5989320"/>
+            <a:ext cx="8168335" cy="548640"/>
           </a:xfrm>
           <a:prstGeom prst="rect">
             <a:avLst/>
@@ -8221,7 +10441,7 @@
             <a:pPr>
               <a:defRPr sz="1200" i="1">
                 <a:solidFill>
-                  <a:srgbClr val="666666"/>
+                  <a:srgbClr val="6B7280"/>
                 </a:solidFill>
                 <a:latin typeface="Segoe UI"/>
               </a:defRPr>

--- a/presentation/week1-review.pptx
+++ b/presentation/week1-review.pptx
@@ -1042,50 +1042,95 @@
           <a:lstStyle/>
           <a:p>
             <a:r>
-              <a:t>WRITE THIS YOURSELF BEFORE THE MEETING. Three or four sentences, in your voice,</a:t>
-            </a:r>
-          </a:p>
-          <a:p>
-            <a:r>
-              <a:t>replacing the placeholder line.</a:t>
+              <a:t>THIS IS A DRAFT, NOT YOUR ANSWER. Read it, then say the same idea your way and</a:t>
+            </a:r>
+          </a:p>
+          <a:p>
+            <a:r>
+              <a:t>replace the text. Ten minutes with it will do.</a:t>
             </a:r>
           </a:p>
           <a:p/>
           <a:p>
             <a:r>
-              <a:t>The bullets are your raw material, not the answer.</a:t>
+              <a:t>Why it must be yours: your mentor's self-check asks you to explain an embedding</a:t>
+            </a:r>
+          </a:p>
+          <a:p>
+            <a:r>
+              <a:t>without falling back on the word "vector", and he will ask a follow-up. The usual</a:t>
+            </a:r>
+          </a:p>
+          <a:p>
+            <a:r>
+              <a:t>ones are "so what makes two things land near each other?" and "why 384 numbers?"</a:t>
+            </a:r>
+          </a:p>
+          <a:p>
+            <a:r>
+              <a:t>Wording you did not write is exactly where those questions land badly.</a:t>
             </a:r>
           </a:p>
           <a:p/>
           <a:p>
             <a:r>
-              <a:t>A shape to react to and then discard: an embedding model reads text and hands</a:t>
-            </a:r>
-          </a:p>
-          <a:p>
-            <a:r>
-              <a:t>back coordinates on a map of meaning, where things that mean similar things sit</a:t>
-            </a:r>
-          </a:p>
-          <a:p>
-            <a:r>
-              <a:t>close together. Say it your own way. He will ask a follow-up question, and that</a:t>
-            </a:r>
-          </a:p>
-          <a:p>
-            <a:r>
-              <a:t>is exactly where borrowed wording collapses.</a:t>
+              <a:t>Answers worth having ready:</a:t>
+            </a:r>
+          </a:p>
+          <a:p>
+            <a:r>
+              <a:t>- What makes them land near each other? The model was trained on huge amounts of</a:t>
+            </a:r>
+          </a:p>
+          <a:p>
+            <a:r>
+              <a:t>  text and learned which words and phrases turn up in similar situations. Nobody</a:t>
+            </a:r>
+          </a:p>
+          <a:p>
+            <a:r>
+              <a:t>  programmed the positions.</a:t>
+            </a:r>
+          </a:p>
+          <a:p>
+            <a:r>
+              <a:t>- Why 384? That is just the size this particular model outputs. A bigger model</a:t>
+            </a:r>
+          </a:p>
+          <a:p>
+            <a:r>
+              <a:t>  uses more numbers and captures finer distinctions, at more cost. What matters is</a:t>
+            </a:r>
+          </a:p>
+          <a:p>
+            <a:r>
+              <a:t>  that the count never changes with the length of the input.</a:t>
+            </a:r>
+          </a:p>
+          <a:p>
+            <a:r>
+              <a:t>- Is it like a search index? No. A search index stores words. This stores a</a:t>
+            </a:r>
+          </a:p>
+          <a:p>
+            <a:r>
+              <a:t>  position, so two passages can be close together with no words in common.</a:t>
             </a:r>
           </a:p>
           <a:p/>
           <a:p>
             <a:r>
-              <a:t>If you genuinely run out of time, present the slide as unfinished and say so.</a:t>
-            </a:r>
-          </a:p>
-          <a:p>
-            <a:r>
-              <a:t>That is far better than reciting a sentence you cannot defend.</a:t>
+              <a:t>If you have not rewritten it by the morning, say so honestly - "this is my</a:t>
+            </a:r>
+          </a:p>
+          <a:p>
+            <a:r>
+              <a:t>current phrasing, I'm still tightening it" - and then demo the script. Showing</a:t>
+            </a:r>
+          </a:p>
+          <a:p>
+            <a:r>
+              <a:t>the 0.618 score live proves the understanding better than a polished sentence.</a:t>
             </a:r>
           </a:p>
         </p:txBody>
@@ -6639,7 +6684,7 @@
         <p:spPr>
           <a:xfrm>
             <a:off x="822960" y="566928"/>
-            <a:ext cx="1088136" cy="256032"/>
+            <a:ext cx="1389888" cy="256032"/>
           </a:xfrm>
           <a:prstGeom prst="rect">
             <a:avLst/>
@@ -6683,7 +6728,7 @@
         <p:spPr>
           <a:xfrm>
             <a:off x="822960" y="548640"/>
-            <a:ext cx="1088136" cy="292608"/>
+            <a:ext cx="1389888" cy="292608"/>
           </a:xfrm>
           <a:prstGeom prst="rect">
             <a:avLst/>
@@ -6705,7 +6750,7 @@
               </a:defRPr>
             </a:pPr>
             <a:r>
-              <a:t>MON–TUE</a:t>
+              <a:t>EMBEDDINGS</a:t>
             </a:r>
           </a:p>
         </p:txBody>
@@ -7335,7 +7380,7 @@
         <p:spPr>
           <a:xfrm>
             <a:off x="822960" y="566928"/>
-            <a:ext cx="1088136" cy="256032"/>
+            <a:ext cx="1389888" cy="256032"/>
           </a:xfrm>
           <a:prstGeom prst="rect">
             <a:avLst/>
@@ -7379,7 +7424,7 @@
         <p:spPr>
           <a:xfrm>
             <a:off x="822960" y="548640"/>
-            <a:ext cx="1088136" cy="292608"/>
+            <a:ext cx="1389888" cy="292608"/>
           </a:xfrm>
           <a:prstGeom prst="rect">
             <a:avLst/>
@@ -7401,7 +7446,7 @@
               </a:defRPr>
             </a:pPr>
             <a:r>
-              <a:t>MON–TUE</a:t>
+              <a:t>EMBEDDINGS</a:t>
             </a:r>
           </a:p>
         </p:txBody>
@@ -7437,7 +7482,7 @@
               </a:defRPr>
             </a:pPr>
             <a:r>
-              <a:t>What an embedding is — in my own words</a:t>
+              <a:t>What an embedding is</a:t>
             </a:r>
           </a:p>
         </p:txBody>
@@ -7532,14 +7577,102 @@
       </p:sp>
       <p:sp>
         <p:nvSpPr>
-          <p:cNvPr id="9" name="TextBox 8"/>
+          <p:cNvPr id="9" name="Rectangle 8"/>
+          <p:cNvSpPr/>
+          <p:nvPr/>
+        </p:nvSpPr>
+        <p:spPr>
+          <a:xfrm>
+            <a:off x="822960" y="1828800"/>
+            <a:ext cx="10545775" cy="384048"/>
+          </a:xfrm>
+          <a:prstGeom prst="rect">
+            <a:avLst/>
+          </a:prstGeom>
+          <a:solidFill>
+            <a:srgbClr val="FDF4E6"/>
+          </a:solidFill>
+          <a:ln>
+            <a:noFill/>
+          </a:ln>
+          <a:effectLst/>
+        </p:spPr>
+        <p:style>
+          <a:lnRef idx="1">
+            <a:schemeClr val="accent1"/>
+          </a:lnRef>
+          <a:fillRef idx="3">
+            <a:schemeClr val="accent1"/>
+          </a:fillRef>
+          <a:effectRef idx="2">
+            <a:schemeClr val="accent1"/>
+          </a:effectRef>
+          <a:fontRef idx="minor">
+            <a:schemeClr val="lt1"/>
+          </a:fontRef>
+        </p:style>
+        <p:txBody>
+          <a:bodyPr rtlCol="0" anchor="ctr"/>
+          <a:lstStyle/>
+          <a:p>
+            <a:pPr algn="ctr"/>
+          </a:p>
+        </p:txBody>
+      </p:sp>
+      <p:sp>
+        <p:nvSpPr>
+          <p:cNvPr id="10" name="Rectangle 9"/>
+          <p:cNvSpPr/>
+          <p:nvPr/>
+        </p:nvSpPr>
+        <p:spPr>
+          <a:xfrm>
+            <a:off x="822960" y="1828800"/>
+            <a:ext cx="63500" cy="384048"/>
+          </a:xfrm>
+          <a:prstGeom prst="rect">
+            <a:avLst/>
+          </a:prstGeom>
+          <a:solidFill>
+            <a:srgbClr val="B56E0C"/>
+          </a:solidFill>
+          <a:ln>
+            <a:noFill/>
+          </a:ln>
+          <a:effectLst/>
+        </p:spPr>
+        <p:style>
+          <a:lnRef idx="1">
+            <a:schemeClr val="accent1"/>
+          </a:lnRef>
+          <a:fillRef idx="3">
+            <a:schemeClr val="accent1"/>
+          </a:fillRef>
+          <a:effectRef idx="2">
+            <a:schemeClr val="accent1"/>
+          </a:effectRef>
+          <a:fontRef idx="minor">
+            <a:schemeClr val="lt1"/>
+          </a:fontRef>
+        </p:style>
+        <p:txBody>
+          <a:bodyPr rtlCol="0" anchor="ctr"/>
+          <a:lstStyle/>
+          <a:p>
+            <a:pPr algn="ctr"/>
+          </a:p>
+        </p:txBody>
+      </p:sp>
+      <p:sp>
+        <p:nvSpPr>
+          <p:cNvPr id="11" name="TextBox 10"/>
           <p:cNvSpPr txBox="1"/>
           <p:nvPr/>
         </p:nvSpPr>
         <p:spPr>
           <a:xfrm>
-            <a:off x="822960" y="1828800"/>
-            <a:ext cx="10545775" cy="3977640"/>
+            <a:off x="1024128" y="1865376"/>
+            <a:ext cx="10180015" cy="310896"/>
           </a:xfrm>
           <a:prstGeom prst="rect">
             <a:avLst/>
@@ -7547,37 +7680,52 @@
           <a:noFill/>
         </p:spPr>
         <p:txBody>
-          <a:bodyPr wrap="square" anchor="t">
+          <a:bodyPr wrap="square">
             <a:spAutoFit/>
           </a:bodyPr>
           <a:lstStyle/>
           <a:p>
             <a:pPr>
-              <a:spcAft>
-                <a:spcPts val="1500"/>
-              </a:spcAft>
-              <a:defRPr sz="2000" b="1">
+              <a:defRPr sz="1400" b="1">
                 <a:solidFill>
-                  <a:srgbClr val="0F2A44"/>
+                  <a:srgbClr val="B56E0C"/>
                 </a:solidFill>
                 <a:latin typeface="Segoe UI"/>
               </a:defRPr>
             </a:pPr>
             <a:r>
-              <a:t>[ I fill this in before presenting ]</a:t>
-            </a:r>
-          </a:p>
-          <a:p>
-            <a:pPr>
-              <a:defRPr sz="900"/>
-            </a:pPr>
-          </a:p>
+              <a:t>DRAFT — rewrite this in my own voice before presenting, then delete this strip</a:t>
+            </a:r>
+          </a:p>
+        </p:txBody>
+      </p:sp>
+      <p:sp>
+        <p:nvSpPr>
+          <p:cNvPr id="12" name="TextBox 11"/>
+          <p:cNvSpPr txBox="1"/>
+          <p:nvPr/>
+        </p:nvSpPr>
+        <p:spPr>
+          <a:xfrm>
+            <a:off x="822960" y="2487168"/>
+            <a:ext cx="10545775" cy="3319272"/>
+          </a:xfrm>
+          <a:prstGeom prst="rect">
+            <a:avLst/>
+          </a:prstGeom>
+          <a:noFill/>
+        </p:spPr>
+        <p:txBody>
+          <a:bodyPr wrap="square">
+            <a:spAutoFit/>
+          </a:bodyPr>
+          <a:lstStyle/>
           <a:p>
             <a:pPr>
               <a:spcAft>
-                <a:spcPts val="1500"/>
+                <a:spcPts val="1600"/>
               </a:spcAft>
-              <a:defRPr sz="2000" b="0">
+              <a:defRPr sz="2000">
                 <a:solidFill>
                   <a:srgbClr val="1B1B1B"/>
                 </a:solidFill>
@@ -7585,78 +7733,62 @@
               </a:defRPr>
             </a:pPr>
             <a:r>
-              <a:t>•   Your self-check: explain it without using "vector" as a cop-out</a:t>
+              <a:t>An embedding is what you get when a model reads text and turns it into a position on a map of meaning.</a:t>
             </a:r>
           </a:p>
           <a:p>
             <a:pPr>
               <a:spcAft>
-                <a:spcPts val="1500"/>
+                <a:spcPts val="1600"/>
               </a:spcAft>
-              <a:defRPr sz="2000" b="1">
+              <a:defRPr sz="2000">
                 <a:solidFill>
-                  <a:srgbClr val="0F2A44"/>
+                  <a:srgbClr val="1B1B1B"/>
                 </a:solidFill>
                 <a:latin typeface="Segoe UI"/>
               </a:defRPr>
             </a:pPr>
             <a:r>
-              <a:t>What I have to work with:</a:t>
-            </a:r>
-          </a:p>
-          <a:p>
-            <a:pPr lvl="1">
+              <a:t>Text that means similar things lands in nearby positions, even when the actual words are completely different.</a:t>
+            </a:r>
+          </a:p>
+          <a:p>
+            <a:pPr>
               <a:spcAft>
-                <a:spcPts val="1500"/>
+                <a:spcPts val="1600"/>
               </a:spcAft>
-              <a:defRPr sz="1700" b="0">
+              <a:defRPr sz="2000">
                 <a:solidFill>
-                  <a:srgbClr val="6B7280"/>
+                  <a:srgbClr val="1B1B1B"/>
                 </a:solidFill>
                 <a:latin typeface="Segoe UI"/>
               </a:defRPr>
             </a:pPr>
             <a:r>
-              <a:t>–   7 characters in and 196 characters in both give exactly 384 numbers out</a:t>
-            </a:r>
-          </a:p>
-          <a:p>
-            <a:pPr lvl="1">
+              <a:t>The model worked out the layout of that map during training, so nobody chose what each number stands for — and one number on its own tells you nothing.</a:t>
+            </a:r>
+          </a:p>
+          <a:p>
+            <a:pPr>
               <a:spcAft>
-                <a:spcPts val="1500"/>
+                <a:spcPts val="1600"/>
               </a:spcAft>
-              <a:defRPr sz="1700" b="0">
+              <a:defRPr sz="2000">
                 <a:solidFill>
-                  <a:srgbClr val="6B7280"/>
+                  <a:srgbClr val="1B1B1B"/>
                 </a:solidFill>
                 <a:latin typeface="Segoe UI"/>
               </a:defRPr>
             </a:pPr>
             <a:r>
-              <a:t>–   Two sentences with no shared words scored 0.618</a:t>
-            </a:r>
-          </a:p>
-          <a:p>
-            <a:pPr lvl="1">
-              <a:spcAft>
-                <a:spcPts val="1500"/>
-              </a:spcAft>
-              <a:defRPr sz="1700" b="0">
-                <a:solidFill>
-                  <a:srgbClr val="6B7280"/>
-                </a:solidFill>
-                <a:latin typeface="Segoe UI"/>
-              </a:defRPr>
-            </a:pPr>
-            <a:r>
-              <a:t>–   The numbers mean nothing alone — only their positions relative to each other</a:t>
-            </a:r>
-          </a:p>
-        </p:txBody>
-      </p:sp>
-      <p:sp>
-        <p:nvSpPr>
-          <p:cNvPr id="10" name="TextBox 9"/>
+              <a:t>What carries the information is how close two pieces of text end up to each other.</a:t>
+            </a:r>
+          </a:p>
+        </p:txBody>
+      </p:sp>
+      <p:sp>
+        <p:nvSpPr>
+          <p:cNvPr id="13" name="TextBox 12"/>
           <p:cNvSpPr txBox="1"/>
           <p:nvPr/>
         </p:nvSpPr>
@@ -7685,7 +7817,7 @@
               </a:defRPr>
             </a:pPr>
             <a:r>
-              <a:t>Left blank on purpose — this one has to be mine, or it falls apart when you ask a follow-up</a:t>
+              <a:t>Evidence: 7 characters and 196 characters both produce exactly 384 numbers; two sentences with no shared words scored 0.618</a:t>
             </a:r>
           </a:p>
         </p:txBody>
@@ -7797,7 +7929,7 @@
         <p:spPr>
           <a:xfrm>
             <a:off x="822960" y="566928"/>
-            <a:ext cx="1088136" cy="256032"/>
+            <a:ext cx="1188720" cy="256032"/>
           </a:xfrm>
           <a:prstGeom prst="rect">
             <a:avLst/>
@@ -7841,7 +7973,7 @@
         <p:spPr>
           <a:xfrm>
             <a:off x="822960" y="548640"/>
-            <a:ext cx="1088136" cy="292608"/>
+            <a:ext cx="1188720" cy="292608"/>
           </a:xfrm>
           <a:prstGeom prst="rect">
             <a:avLst/>
@@ -7863,7 +7995,7 @@
               </a:defRPr>
             </a:pPr>
             <a:r>
-              <a:t>WED–THU</a:t>
+              <a:t>CHUNKING</a:t>
             </a:r>
           </a:p>
         </p:txBody>
@@ -8493,7 +8625,7 @@
         <p:spPr>
           <a:xfrm>
             <a:off x="822960" y="566928"/>
-            <a:ext cx="1088136" cy="256032"/>
+            <a:ext cx="1188720" cy="256032"/>
           </a:xfrm>
           <a:prstGeom prst="rect">
             <a:avLst/>
@@ -8537,7 +8669,7 @@
         <p:spPr>
           <a:xfrm>
             <a:off x="822960" y="548640"/>
-            <a:ext cx="1088136" cy="292608"/>
+            <a:ext cx="1188720" cy="292608"/>
           </a:xfrm>
           <a:prstGeom prst="rect">
             <a:avLst/>
@@ -8559,7 +8691,7 @@
               </a:defRPr>
             </a:pPr>
             <a:r>
-              <a:t>WED–THU</a:t>
+              <a:t>CHUNKING</a:t>
             </a:r>
           </a:p>
         </p:txBody>
@@ -9334,7 +9466,7 @@
         <p:spPr>
           <a:xfrm>
             <a:off x="822960" y="566928"/>
-            <a:ext cx="685800" cy="256032"/>
+            <a:ext cx="987552" cy="256032"/>
           </a:xfrm>
           <a:prstGeom prst="rect">
             <a:avLst/>
@@ -9378,7 +9510,7 @@
         <p:spPr>
           <a:xfrm>
             <a:off x="822960" y="548640"/>
-            <a:ext cx="685800" cy="292608"/>
+            <a:ext cx="987552" cy="292608"/>
           </a:xfrm>
           <a:prstGeom prst="rect">
             <a:avLst/>
@@ -9400,7 +9532,7 @@
               </a:defRPr>
             </a:pPr>
             <a:r>
-              <a:t>FRI</a:t>
+              <a:t>SEARCH</a:t>
             </a:r>
           </a:p>
         </p:txBody>
@@ -9863,7 +9995,7 @@
         <p:spPr>
           <a:xfrm>
             <a:off x="822960" y="566928"/>
-            <a:ext cx="685800" cy="256032"/>
+            <a:ext cx="1289304" cy="256032"/>
           </a:xfrm>
           <a:prstGeom prst="rect">
             <a:avLst/>
@@ -9907,7 +10039,7 @@
         <p:spPr>
           <a:xfrm>
             <a:off x="822960" y="548640"/>
-            <a:ext cx="685800" cy="292608"/>
+            <a:ext cx="1289304" cy="292608"/>
           </a:xfrm>
           <a:prstGeom prst="rect">
             <a:avLst/>
@@ -9929,7 +10061,7 @@
               </a:defRPr>
             </a:pPr>
             <a:r>
-              <a:t>FRI</a:t>
+              <a:t>EDGE CASE</a:t>
             </a:r>
           </a:p>
         </p:txBody>
